--- a/library/lectures/lec-13/rendered/lec-13.pptx
+++ b/library/lectures/lec-13/rendered/lec-13.pptx
@@ -1732,7 +1732,7 @@
           <a:lstStyle/>
           <a:p>
             <a:r>
-              <a:t>См. slides/s28-last-mile-deliveries.md speaker notes.</a:t>
+              <a:t>См. slides/s28-последняя миля-deliveries.md speaker notes.</a:t>
             </a:r>
           </a:p>
         </p:txBody>
@@ -2012,7 +2012,7 @@
           <a:lstStyle/>
           <a:p>
             <a:r>
-              <a:t>См. slides/s32-urban-failure-matrix.md speaker notes.</a:t>
+              <a:t>См. slides/s32-городской-провал-matrix.md speaker notes.</a:t>
             </a:r>
           </a:p>
         </p:txBody>
@@ -6965,7 +6965,7 @@
                 <a:latin typeface="Arial"/>
               </a:rPr>
               <a:t>KONUX + Deutsche Bahn: PdM стрелок зрело.
-Humanoid и безлюдный склад — пока миф.</a:t>
+Гумано-робот и безлюдный склад — пока миф.</a:t>
             </a:r>
           </a:p>
         </p:txBody>
@@ -7178,7 +7178,7 @@
                 </a:solidFill>
                 <a:latin typeface="Arial"/>
               </a:rPr>
-              <a:t>Humanoid хайп</a:t>
+              <a:t>Гумано-робот ажиотажа</a:t>
             </a:r>
           </a:p>
         </p:txBody>
@@ -7217,7 +7217,7 @@
                 </a:solidFill>
                 <a:latin typeface="Arial"/>
               </a:rPr>
-              <a:t>Tesla Optimus / Figure 02 / UBTech — на 2026 в research/pilot. Контрфактив: Amazon Sparrow $50-150K vs гуманоид $100-300K.</a:t>
+              <a:t>Tesla Optimus / Figure 02 / UBTech — на 2026 в фазе исследования / пилот. Контрфактив: Amazon Sparrow $50-150K vs гуманоид $100-300K.</a:t>
             </a:r>
           </a:p>
         </p:txBody>
@@ -7430,7 +7430,7 @@
                 </a:solidFill>
                 <a:latin typeface="Arial"/>
               </a:rPr>
-              <a:t>Lights-out склад миф</a:t>
+              <a:t>Без-света склад миф</a:t>
             </a:r>
           </a:p>
         </p:txBody>
@@ -7469,7 +7469,7 @@
                 </a:solidFill>
                 <a:latin typeface="Arial"/>
               </a:rPr>
-              <a:t>Работает только в узких категориях (автозапчасти, банковский архив). Broad SKU с миллионами артикулов — пока нет.</a:t>
+              <a:t>Работает только в узких категориях (автозапчасти, банковский архив). Широкий SKU с миллионами артикулов — пока нет.</a:t>
             </a:r>
           </a:p>
         </p:txBody>
@@ -7574,7 +7574,7 @@
                 <a:latin typeface="Arial"/>
               </a:rPr>
               <a:t>Четыре границы уровня 1: капитал интенсивность, OEM привязка к вендору,
-lights-out миф, сезонный распределение сдвиг.</a:t>
+без-света миф, сезонный распределение сдвиг.</a:t>
             </a:r>
           </a:p>
         </p:txBody>
@@ -8258,7 +8258,7 @@
                 </a:solidFill>
                 <a:latin typeface="Arial"/>
               </a:rPr>
-              <a:t>Walmart инвестирует миллиарды в Symbotic — стрелка на Knapp/Vanderlande/KION займёт годы и major re-investment.</a:t>
+              <a:t>Walmart инвестирует миллиарды в Symbotic — стрелка на Knapp/Vanderlande/KION займёт годы и major re-инвестиции.</a:t>
             </a:r>
           </a:p>
         </p:txBody>
@@ -8345,7 +8345,7 @@
                 </a:solidFill>
                 <a:latin typeface="Arial"/>
               </a:rPr>
-              <a:t>При long-term contract: выход strategy? proprietary vs стандартизированные компоненты? стоимость migration через 10 лет?</a:t>
+              <a:t>При long-term контракт: выход strategy? proprietary vs стандартизированные компоненты? стоимость migration через 10 лет?</a:t>
             </a:r>
           </a:p>
         </p:txBody>
@@ -8432,7 +8432,7 @@
                 </a:solidFill>
                 <a:latin typeface="Arial"/>
               </a:rPr>
-              <a:t>Lights-out склад миф</a:t>
+              <a:t>Без-света склад миф</a:t>
             </a:r>
           </a:p>
         </p:txBody>
@@ -8519,7 +8519,7 @@
                 </a:solidFill>
                 <a:latin typeface="Arial"/>
               </a:rPr>
-              <a:t>Работает только в узких категориях. Broad SKU с миллионами артикулов — долгий хвост краевые случаи (текстиль, returns).</a:t>
+              <a:t>Работает только в узких категориях. Широкий SKU с миллионами артикулов — долгий хвост краевые случаи (текстиль, returns).</a:t>
             </a:r>
           </a:p>
         </p:txBody>
@@ -8780,7 +8780,7 @@
                 </a:solidFill>
                 <a:latin typeface="Arial"/>
               </a:rPr>
-              <a:t>Black Friday / Christmas / Halloween — каталог наполняется новыми категориями. Sparrow vision-классификатор ошибается чаще.</a:t>
+              <a:t>Чёрная пятница / Рождество / Halloween — каталог наполняется новыми категориями. Sparrow зрение-классификатор ошибается чаще.</a:t>
             </a:r>
           </a:p>
         </p:txBody>
@@ -8867,7 +8867,7 @@
                 </a:solidFill>
                 <a:latin typeface="Arial"/>
               </a:rPr>
-              <a:t>Спросить: error rate на пиках vs обычное время? как часто переобучается? кто оплачивает retraining cost?</a:t>
+              <a:t>Спросить: частота ошибок на пиках vs обычное время? как часто переобучается? кто оплачивает retдождьing cost?</a:t>
             </a:r>
           </a:p>
         </p:txBody>
@@ -9480,7 +9480,7 @@
                 </a:solidFill>
                 <a:latin typeface="Arial"/>
               </a:rPr>
-              <a:t>·  Aurora Innovation: первая беспилотный коммерческий US (май 2025)</a:t>
+              <a:t>·  Aurora Инновации: первая беспилотный коммерческий US (май 2025)</a:t>
             </a:r>
           </a:p>
           <a:p>
@@ -9496,7 +9496,7 @@
                 </a:solidFill>
                 <a:latin typeface="Arial"/>
               </a:rPr>
-              <a:t>·  Mobileye Chauffeur L3 + КамАЗ-54901 М-11 «Нева»</a:t>
+              <a:t>·  Mobileye Шофёр L3 + КамАЗ-54901 М-11 «Нева»</a:t>
             </a:r>
           </a:p>
           <a:p>
@@ -9512,7 +9512,7 @@
                 </a:solidFill>
                 <a:latin typeface="Arial"/>
               </a:rPr>
-              <a:t>·  UPS ORION: операционные исследования, не RL (canonical anti-hype)</a:t>
+              <a:t>·  UPS ORION: операционные исследования, не RL (канонический анти-хайп)</a:t>
             </a:r>
           </a:p>
           <a:p>
@@ -9528,7 +9528,7 @@
                 </a:solidFill>
                 <a:latin typeface="Arial"/>
               </a:rPr>
-              <a:t>·  AV-bankruptcy хронология: Argo / Embark / TuSimple / Waymo Via / Starsky</a:t>
+              <a:t>·  AV-хронология банкротств: Argo / Embark / TuSimple / Waymo Via / Starsky</a:t>
             </a:r>
           </a:p>
           <a:p>
@@ -9544,7 +9544,7 @@
                 </a:solidFill>
                 <a:latin typeface="Arial"/>
               </a:rPr>
-              <a:t>·  Cumulative &gt;$20 миллиардов сожжено на невыжившие</a:t>
+              <a:t>·  Совокупно &gt;$20 миллиардов сожжено на невыжившие</a:t>
             </a:r>
           </a:p>
           <a:p>
@@ -9625,7 +9625,7 @@
                 </a:solidFill>
                 <a:latin typeface="Arial"/>
               </a:rPr>
-              <a:t>Aurora Innovation: 1 мая 2025 — первая в США
+              <a:t>Aurora Инновации: 1 мая 2025 — первая в США
 коммерческая беспилотная грузоперевозка.</a:t>
             </a:r>
           </a:p>
@@ -9689,7 +9689,7 @@
                 </a:solidFill>
                 <a:latin typeface="Arial"/>
               </a:rPr>
-              <a:t>Aurora Driver Class-8 грузовик · Aurora press, май 2025</a:t>
+              <a:t>Aurora водитель Class-8 грузовик · Aurora press, май 2025</a:t>
             </a:r>
           </a:p>
         </p:txBody>
@@ -9840,7 +9840,7 @@
                 </a:solidFill>
                 <a:latin typeface="Arial"/>
               </a:rPr>
-              <a:t>Платформа PACCAR Peterbilt + Aurora Driver</a:t>
+              <a:t>Платформа PACCAR Peterbilt + Aurora водитель</a:t>
             </a:r>
           </a:p>
           <a:p>
@@ -9872,7 +9872,7 @@
                 </a:solidFill>
                 <a:latin typeface="Arial"/>
               </a:rPr>
-              <a:t>Crawl-walk-run подход</a:t>
+              <a:t>Поэтапный ввод подход</a:t>
             </a:r>
           </a:p>
           <a:p>
@@ -9888,7 +9888,7 @@
                 </a:solidFill>
                 <a:latin typeface="Arial"/>
               </a:rPr>
-              <a:t>Crawl 2018-2024: безопасность operator, многолетние тесты</a:t>
+              <a:t>Crawl 2018-2024: безопасность оператор, многолетние тесты</a:t>
             </a:r>
           </a:p>
           <a:p>
@@ -9904,7 +9904,7 @@
                 </a:solidFill>
                 <a:latin typeface="Arial"/>
               </a:rPr>
-              <a:t>Walk 2023-2024: Dallas-Houston с operator на отдельных рейсах</a:t>
+              <a:t>Walk 2023-2024: Dallas-Houston с оператор на отдельных рейсах</a:t>
             </a:r>
           </a:p>
           <a:p>
@@ -10007,7 +10007,7 @@
                 </a:solidFill>
                 <a:latin typeface="Arial"/>
               </a:rPr>
-              <a:t>Паттерн выживания: crawl-walk-run · узкий ODD · не переобещание</a:t>
+              <a:t>Паттерн выживания: поэтапный ввод (ползком-шагом-бегом) · узкий ODD · не переобещают</a:t>
             </a:r>
           </a:p>
         </p:txBody>
@@ -10072,7 +10072,7 @@
                 </a:solidFill>
                 <a:latin typeface="Arial"/>
               </a:rPr>
-              <a:t>Mobileye Chauffeur L3 eyes-off + КамАЗ-54901 М-11:
+              <a:t>Mobileye Шофёр L3 eyes-off + КамАЗ-54901 М-11:
 две модели на полуструктурированной магистрали.</a:t>
             </a:r>
           </a:p>
@@ -10160,7 +10160,7 @@
                 </a:solidFill>
                 <a:latin typeface="Arial"/>
               </a:rPr>
-              <a:t>Mobileye Chauffeur</a:t>
+              <a:t>Mobileye Шофёр</a:t>
             </a:r>
           </a:p>
         </p:txBody>
@@ -10262,7 +10262,7 @@
                 </a:solidFill>
                 <a:latin typeface="Arial"/>
               </a:rPr>
-              <a:t>~300K SuperVision к 2025, цель 1,2M к 2026</a:t>
+              <a:t>~300K SuperЗрение к 2025, цель 1,2M к 2026</a:t>
             </a:r>
           </a:p>
           <a:p>
@@ -10278,7 +10278,7 @@
                 </a:solidFill>
                 <a:latin typeface="Arial"/>
               </a:rPr>
-              <a:t>Camera-first ADAS без дорогого LiDAR</a:t>
+              <a:t>Сначала-камера ADAS без дорогого LiDAR</a:t>
             </a:r>
           </a:p>
           <a:p>
@@ -10554,7 +10554,7 @@
                 </a:solidFill>
                 <a:latin typeface="Arial"/>
               </a:rPr>
-              <a:t>Разные бизнес-модели · потребительская L3 vs коммерческий L4 на dedicated магистрали</a:t>
+              <a:t>Разные бизнес-модели · потребительская L3 vs коммерческий L4 на выделенный магистрали</a:t>
             </a:r>
           </a:p>
         </p:txBody>
@@ -10619,7 +10619,7 @@
                 </a:solidFill>
                 <a:latin typeface="Arial"/>
               </a:rPr>
-              <a:t>UPS ORION: 100M миль/год, $300-400M savings/год.
+              <a:t>UPS ORION: 100M миль/год, $300-400M экономия/год.
 Это операционные исследования, не глубокое обучение, не RL.</a:t>
             </a:r>
           </a:p>
@@ -10905,7 +10905,7 @@
                 </a:solidFill>
                 <a:latin typeface="Arial"/>
               </a:rPr>
-              <a:t>Operations Research</a:t>
+              <a:t>Исследование операций</a:t>
             </a:r>
           </a:p>
           <a:p>
@@ -10921,7 +10921,7 @@
                 </a:solidFill>
                 <a:latin typeface="Arial"/>
               </a:rPr>
-              <a:t>ILP + эвристики + Vehicle Routing Problem (VRP)</a:t>
+              <a:t>ILP + эвристики + Автомобиль задача маршрутизации (VRP)</a:t>
             </a:r>
           </a:p>
           <a:p>
@@ -11017,7 +11017,7 @@
                 </a:solidFill>
                 <a:latin typeface="Arial"/>
               </a:rPr>
-              <a:t>Какие сравнения с OR-baseline (Gurobi / OR-Tools)?</a:t>
+              <a:t>Какие сравнения с базовая линия OR (Gurobi / OR-Tools)?</a:t>
             </a:r>
           </a:p>
           <a:p>
@@ -11033,7 +11033,7 @@
                 </a:solidFill>
                 <a:latin typeface="Arial"/>
               </a:rPr>
-              <a:t>Если нет — red флаг.</a:t>
+              <a:t>Если нет — красный флаг.</a:t>
             </a:r>
           </a:p>
           <a:p>
@@ -11049,7 +11049,7 @@
                 </a:solidFill>
                 <a:latin typeface="Arial"/>
               </a:rPr>
-              <a:t>Какой VRP-solver? «end-to-end deep learning» → объяснимость?</a:t>
+              <a:t>Какой VRP-solver? «сквозной deep обучение» → объяснимость?</a:t>
             </a:r>
           </a:p>
           <a:p>
@@ -11113,7 +11113,7 @@
                 </a:solidFill>
                 <a:latin typeface="Arial"/>
               </a:rPr>
-              <a:t>UPS ORION = canonical anti-hype example. Простая задача — OR лучше ML.</a:t>
+              <a:t>UPS ORION = канонический анти-хайп example. Простая задача — OR лучше ML.</a:t>
             </a:r>
           </a:p>
         </p:txBody>
@@ -11217,7 +11217,7 @@
                 </a:solidFill>
                 <a:latin typeface="Arial"/>
               </a:rPr>
-              <a:t>AV-грузоперевозки bankruptcy хронология 2020-2024:
+              <a:t>AV-грузоперевозки хронология банкротств 2020-2024:
 пять компаний на одной линии, серия катастроф.</a:t>
             </a:r>
           </a:p>
@@ -11433,7 +11433,7 @@
                 <a:latin typeface="Arial"/>
               </a:rPr>
               <a:t>Starsky
-Robotics</a:t>
+Роботics</a:t>
             </a:r>
           </a:p>
         </p:txBody>
@@ -11513,7 +11513,7 @@
                 <a:latin typeface="Arial"/>
               </a:rPr>
               <a:t>Первая волна
-sim-to-real эссе</a:t>
+симуляция-к-реальности эссе</a:t>
             </a:r>
           </a:p>
         </p:txBody>
@@ -11762,7 +11762,7 @@
                 </a:solidFill>
                 <a:latin typeface="Arial"/>
               </a:rPr>
-              <a:t>Ford+VW pull funding
+              <a:t>Ford+VW тянуть финансирование
 $2,7B impairment</a:t>
             </a:r>
           </a:p>
@@ -11973,7 +11973,7 @@
                 </a:solidFill>
                 <a:latin typeface="Arial"/>
               </a:rPr>
-              <a:t>$5,16B target
+              <a:t>$5,16B цель
 cap, 16 мес.</a:t>
             </a:r>
           </a:p>
@@ -12263,8 +12263,8 @@
                 </a:solidFill>
                 <a:latin typeface="Arial"/>
               </a:rPr>
-              <a:t>Бесконечный capital
-не нашёл profitable</a:t>
+              <a:t>Бесконечный капитал
+не нашёл прибыльный</a:t>
             </a:r>
           </a:p>
         </p:txBody>
@@ -12680,7 +12680,7 @@
                 </a:solidFill>
                 <a:latin typeface="Arial"/>
               </a:rPr>
-              <a:t>• Capital интенсивность без выручка ($1-7B сожжено до коммерции)</a:t>
+              <a:t>• Капитал интенсивность без выручка ($1-7B сожжено до коммерции)</a:t>
             </a:r>
           </a:p>
           <a:p>
@@ -12712,7 +12712,7 @@
                 </a:solidFill>
                 <a:latin typeface="Arial"/>
               </a:rPr>
-              <a:t>• Sim-to-real разрыв (ML в demo ≠ ML на публичный дороги)</a:t>
+              <a:t>• симуляция-к-реальности разрыв (ML в demo ≠ ML на публичный дороги)</a:t>
             </a:r>
           </a:p>
           <a:p>
@@ -12728,7 +12728,7 @@
                 </a:solidFill>
                 <a:latin typeface="Arial"/>
               </a:rPr>
-              <a:t>• Регуляторная неопределённость (NHTSA SGO, state patchwork)</a:t>
+              <a:t>• Регуляторная неопределённость (NHTSA SGO, состояние мозаичный)</a:t>
             </a:r>
           </a:p>
           <a:p>
@@ -12744,7 +12744,7 @@
                 </a:solidFill>
                 <a:latin typeface="Arial"/>
               </a:rPr>
-              <a:t>• Misaligned customer спрос (перевозчики хотели dedicated lanes)</a:t>
+              <a:t>• Misaligned customer спрос (перевозчики хотели выделенный полосаs)</a:t>
             </a:r>
           </a:p>
           <a:p>
@@ -12799,7 +12799,7 @@
                 </a:solidFill>
                 <a:latin typeface="Arial"/>
               </a:rPr>
-              <a:t>См. также s22 Stefan Seltz-Axmacher post-mortem</a:t>
+              <a:t>См. также s22 Stefan Seltz-Axmacher разбор полётов</a:t>
             </a:r>
           </a:p>
         </p:txBody>
@@ -12864,22 +12864,61 @@
                 </a:solidFill>
                 <a:latin typeface="Arial"/>
               </a:rPr>
-              <a:t>Cumulative: &gt;$20 миллиардов сожжено на невыжившие
-autonomous trucking + robotaxi 2017-2024.</a:t>
-            </a:r>
-          </a:p>
-        </p:txBody>
-      </p:sp>
-      <p:sp>
-        <p:nvSpPr>
-          <p:cNvPr id="3" name="Rectangle 2"/>
+              <a:t>Совокупно: &gt;$20 миллиардов сожжено на невыжившие
+автономный грузоперевозки + robotaxi 2017-2024.</a:t>
+            </a:r>
+          </a:p>
+        </p:txBody>
+      </p:sp>
+      <p:sp>
+        <p:nvSpPr>
+          <p:cNvPr id="3" name="TextBox 2"/>
+          <p:cNvSpPr txBox="1"/>
+          <p:nvPr/>
+        </p:nvSpPr>
+        <p:spPr>
+          <a:xfrm>
+            <a:off x="457200" y="1691640"/>
+            <a:ext cx="1645920" cy="365760"/>
+          </a:xfrm>
+          <a:prstGeom prst="rect">
+            <a:avLst/>
+          </a:prstGeom>
+          <a:noFill/>
+        </p:spPr>
+        <p:txBody>
+          <a:bodyPr wrap="square" lIns="0" rIns="0" tIns="0" bIns="0" anchor="ctr">
+            <a:spAutoFit/>
+          </a:bodyPr>
+          <a:lstStyle/>
+          <a:p>
+            <a:pPr algn="l">
+              <a:lnSpc>
+                <a:spcPct val="115000"/>
+              </a:lnSpc>
+            </a:pPr>
+            <a:r>
+              <a:rPr sz="1200" b="1" i="0">
+                <a:solidFill>
+                  <a:srgbClr val="21295C"/>
+                </a:solidFill>
+                <a:latin typeface="Arial"/>
+              </a:rPr>
+              <a:t>Cruise (GM)</a:t>
+            </a:r>
+          </a:p>
+        </p:txBody>
+      </p:sp>
+      <p:sp>
+        <p:nvSpPr>
+          <p:cNvPr id="4" name="Rectangle 3"/>
           <p:cNvSpPr/>
           <p:nvPr/>
         </p:nvSpPr>
         <p:spPr>
           <a:xfrm>
-            <a:off x="914400" y="1737360"/>
-            <a:ext cx="5238750" cy="548640"/>
+            <a:off x="2194560" y="1737360"/>
+            <a:ext cx="7315200" cy="274320"/>
           </a:xfrm>
           <a:prstGeom prst="rect">
             <a:avLst/>
@@ -12916,14 +12955,14 @@
       </p:sp>
       <p:sp>
         <p:nvSpPr>
-          <p:cNvPr id="4" name="TextBox 3"/>
-          <p:cNvSpPr txBox="1"/>
-          <p:nvPr/>
-        </p:nvSpPr>
-        <p:spPr>
-          <a:xfrm>
-            <a:off x="6244590" y="1783080"/>
-            <a:ext cx="2743200" cy="457200"/>
+          <p:cNvPr id="5" name="TextBox 4"/>
+          <p:cNvSpPr txBox="1"/>
+          <p:nvPr/>
+        </p:nvSpPr>
+        <p:spPr>
+          <a:xfrm>
+            <a:off x="9601200" y="1691640"/>
+            <a:ext cx="1371600" cy="365760"/>
           </a:xfrm>
           <a:prstGeom prst="rect">
             <a:avLst/>
@@ -12955,14 +12994,53 @@
       </p:sp>
       <p:sp>
         <p:nvSpPr>
-          <p:cNvPr id="5" name="TextBox 4"/>
-          <p:cNvSpPr txBox="1"/>
-          <p:nvPr/>
-        </p:nvSpPr>
-        <p:spPr>
-          <a:xfrm>
-            <a:off x="1051560" y="1783080"/>
-            <a:ext cx="4964430" cy="457200"/>
+          <p:cNvPr id="6" name="TextBox 5"/>
+          <p:cNvSpPr txBox="1"/>
+          <p:nvPr/>
+        </p:nvSpPr>
+        <p:spPr>
+          <a:xfrm>
+            <a:off x="2194560" y="2084831"/>
+            <a:ext cx="9144000" cy="201168"/>
+          </a:xfrm>
+          <a:prstGeom prst="rect">
+            <a:avLst/>
+          </a:prstGeom>
+          <a:noFill/>
+        </p:spPr>
+        <p:txBody>
+          <a:bodyPr wrap="square" lIns="0" rIns="0" tIns="0" bIns="0" anchor="t">
+            <a:spAutoFit/>
+          </a:bodyPr>
+          <a:lstStyle/>
+          <a:p>
+            <a:pPr algn="l">
+              <a:lnSpc>
+                <a:spcPct val="115000"/>
+              </a:lnSpc>
+            </a:pPr>
+            <a:r>
+              <a:rPr sz="1000" b="0" i="1">
+                <a:solidFill>
+                  <a:srgbClr val="6B7685"/>
+                </a:solidFill>
+                <a:latin typeface="Arial"/>
+              </a:rPr>
+              <a:t>$10B операционный убыток · &lt;$500M выручка · 2016-2024</a:t>
+            </a:r>
+          </a:p>
+        </p:txBody>
+      </p:sp>
+      <p:sp>
+        <p:nvSpPr>
+          <p:cNvPr id="7" name="TextBox 6"/>
+          <p:cNvSpPr txBox="1"/>
+          <p:nvPr/>
+        </p:nvSpPr>
+        <p:spPr>
+          <a:xfrm>
+            <a:off x="457200" y="2331720"/>
+            <a:ext cx="1645920" cy="365760"/>
           </a:xfrm>
           <a:prstGeom prst="rect">
             <a:avLst/>
@@ -12983,89 +13061,11 @@
             <a:r>
               <a:rPr sz="1200" b="1" i="0">
                 <a:solidFill>
-                  <a:srgbClr val="FFFFFF"/>
-                </a:solidFill>
-                <a:latin typeface="Arial"/>
-              </a:rPr>
-              <a:t>Cruise (GM)</a:t>
-            </a:r>
-          </a:p>
-        </p:txBody>
-      </p:sp>
-      <p:sp>
-        <p:nvSpPr>
-          <p:cNvPr id="6" name="TextBox 5"/>
-          <p:cNvSpPr txBox="1"/>
-          <p:nvPr/>
-        </p:nvSpPr>
-        <p:spPr>
-          <a:xfrm>
-            <a:off x="457200" y="1783080"/>
-            <a:ext cx="457200" cy="457200"/>
-          </a:xfrm>
-          <a:prstGeom prst="rect">
-            <a:avLst/>
-          </a:prstGeom>
-          <a:noFill/>
-        </p:spPr>
-        <p:txBody>
-          <a:bodyPr wrap="square" lIns="0" rIns="0" tIns="0" bIns="0" anchor="t">
-            <a:spAutoFit/>
-          </a:bodyPr>
-          <a:lstStyle/>
-          <a:p>
-            <a:pPr algn="l">
-              <a:lnSpc>
-                <a:spcPct val="115000"/>
-              </a:lnSpc>
-            </a:pPr>
-            <a:r>
-              <a:rPr sz="1000" b="0" i="0">
-                <a:solidFill>
-                  <a:srgbClr val="21295C"/>
-                </a:solidFill>
-                <a:latin typeface="Arial"/>
-              </a:rPr>
-              <a:t/>
-            </a:r>
-          </a:p>
-        </p:txBody>
-      </p:sp>
-      <p:sp>
-        <p:nvSpPr>
-          <p:cNvPr id="7" name="TextBox 6"/>
-          <p:cNvSpPr txBox="1"/>
-          <p:nvPr/>
-        </p:nvSpPr>
-        <p:spPr>
-          <a:xfrm>
-            <a:off x="1051560" y="2304288"/>
-            <a:ext cx="10058400" cy="274320"/>
-          </a:xfrm>
-          <a:prstGeom prst="rect">
-            <a:avLst/>
-          </a:prstGeom>
-          <a:noFill/>
-        </p:spPr>
-        <p:txBody>
-          <a:bodyPr wrap="square" lIns="0" rIns="0" tIns="0" bIns="0" anchor="t">
-            <a:spAutoFit/>
-          </a:bodyPr>
-          <a:lstStyle/>
-          <a:p>
-            <a:pPr algn="l">
-              <a:lnSpc>
-                <a:spcPct val="115000"/>
-              </a:lnSpc>
-            </a:pPr>
-            <a:r>
-              <a:rPr sz="1000" b="0" i="1">
-                <a:solidFill>
-                  <a:srgbClr val="6B7685"/>
-                </a:solidFill>
-                <a:latin typeface="Arial"/>
-              </a:rPr>
-              <a:t>$10B операционный loss · &lt;$500M выручка · 2016-2024</a:t>
+                  <a:srgbClr val="21295C"/>
+                </a:solidFill>
+                <a:latin typeface="Arial"/>
+              </a:rPr>
+              <a:t>Argo AI</a:t>
             </a:r>
           </a:p>
         </p:txBody>
@@ -13078,8 +13078,8 @@
         </p:nvSpPr>
         <p:spPr>
           <a:xfrm>
-            <a:off x="914400" y="2651760"/>
-            <a:ext cx="3667125" cy="548640"/>
+            <a:off x="2194560" y="2377440"/>
+            <a:ext cx="5120640" cy="274320"/>
           </a:xfrm>
           <a:prstGeom prst="rect">
             <a:avLst/>
@@ -13122,8 +13122,8 @@
         </p:nvSpPr>
         <p:spPr>
           <a:xfrm>
-            <a:off x="4672965" y="2697479"/>
-            <a:ext cx="2743200" cy="457200"/>
+            <a:off x="9601200" y="2331720"/>
+            <a:ext cx="1371600" cy="365760"/>
           </a:xfrm>
           <a:prstGeom prst="rect">
             <a:avLst/>
@@ -13161,8 +13161,47 @@
         </p:nvSpPr>
         <p:spPr>
           <a:xfrm>
-            <a:off x="1051560" y="2697479"/>
-            <a:ext cx="3392805" cy="457200"/>
+            <a:off x="2194560" y="2724912"/>
+            <a:ext cx="9144000" cy="201168"/>
+          </a:xfrm>
+          <a:prstGeom prst="rect">
+            <a:avLst/>
+          </a:prstGeom>
+          <a:noFill/>
+        </p:spPr>
+        <p:txBody>
+          <a:bodyPr wrap="square" lIns="0" rIns="0" tIns="0" bIns="0" anchor="t">
+            <a:spAutoFit/>
+          </a:bodyPr>
+          <a:lstStyle/>
+          <a:p>
+            <a:pPr algn="l">
+              <a:lnSpc>
+                <a:spcPct val="115000"/>
+              </a:lnSpc>
+            </a:pPr>
+            <a:r>
+              <a:rPr sz="1000" b="0" i="1">
+                <a:solidFill>
+                  <a:srgbClr val="6B7685"/>
+                </a:solidFill>
+                <a:latin typeface="Arial"/>
+              </a:rPr>
+              <a:t>Ford $5B+ + VW $2,6B · 2017-2022</a:t>
+            </a:r>
+          </a:p>
+        </p:txBody>
+      </p:sp>
+      <p:sp>
+        <p:nvSpPr>
+          <p:cNvPr id="11" name="TextBox 10"/>
+          <p:cNvSpPr txBox="1"/>
+          <p:nvPr/>
+        </p:nvSpPr>
+        <p:spPr>
+          <a:xfrm>
+            <a:off x="457200" y="2971800"/>
+            <a:ext cx="1645920" cy="365760"/>
           </a:xfrm>
           <a:prstGeom prst="rect">
             <a:avLst/>
@@ -13183,103 +13222,25 @@
             <a:r>
               <a:rPr sz="1200" b="1" i="0">
                 <a:solidFill>
-                  <a:srgbClr val="FFFFFF"/>
-                </a:solidFill>
-                <a:latin typeface="Arial"/>
-              </a:rPr>
-              <a:t>Argo AI</a:t>
-            </a:r>
-          </a:p>
-        </p:txBody>
-      </p:sp>
-      <p:sp>
-        <p:nvSpPr>
-          <p:cNvPr id="11" name="TextBox 10"/>
-          <p:cNvSpPr txBox="1"/>
-          <p:nvPr/>
-        </p:nvSpPr>
-        <p:spPr>
-          <a:xfrm>
-            <a:off x="457200" y="2697479"/>
-            <a:ext cx="457200" cy="457200"/>
-          </a:xfrm>
-          <a:prstGeom prst="rect">
-            <a:avLst/>
-          </a:prstGeom>
-          <a:noFill/>
-        </p:spPr>
-        <p:txBody>
-          <a:bodyPr wrap="square" lIns="0" rIns="0" tIns="0" bIns="0" anchor="t">
-            <a:spAutoFit/>
-          </a:bodyPr>
-          <a:lstStyle/>
-          <a:p>
-            <a:pPr algn="l">
-              <a:lnSpc>
-                <a:spcPct val="115000"/>
-              </a:lnSpc>
-            </a:pPr>
-            <a:r>
-              <a:rPr sz="1000" b="0" i="0">
-                <a:solidFill>
-                  <a:srgbClr val="21295C"/>
-                </a:solidFill>
-                <a:latin typeface="Arial"/>
-              </a:rPr>
-              <a:t/>
-            </a:r>
-          </a:p>
-        </p:txBody>
-      </p:sp>
-      <p:sp>
-        <p:nvSpPr>
-          <p:cNvPr id="12" name="TextBox 11"/>
-          <p:cNvSpPr txBox="1"/>
-          <p:nvPr/>
-        </p:nvSpPr>
-        <p:spPr>
-          <a:xfrm>
-            <a:off x="1051560" y="3218688"/>
-            <a:ext cx="10058400" cy="274320"/>
-          </a:xfrm>
-          <a:prstGeom prst="rect">
-            <a:avLst/>
-          </a:prstGeom>
-          <a:noFill/>
-        </p:spPr>
-        <p:txBody>
-          <a:bodyPr wrap="square" lIns="0" rIns="0" tIns="0" bIns="0" anchor="t">
-            <a:spAutoFit/>
-          </a:bodyPr>
-          <a:lstStyle/>
-          <a:p>
-            <a:pPr algn="l">
-              <a:lnSpc>
-                <a:spcPct val="115000"/>
-              </a:lnSpc>
-            </a:pPr>
-            <a:r>
-              <a:rPr sz="1000" b="0" i="1">
-                <a:solidFill>
-                  <a:srgbClr val="6B7685"/>
-                </a:solidFill>
-                <a:latin typeface="Arial"/>
-              </a:rPr>
-              <a:t>Ford $5B+ + VW $2,6B · 2017-2022</a:t>
-            </a:r>
-          </a:p>
-        </p:txBody>
-      </p:sp>
-      <p:sp>
-        <p:nvSpPr>
-          <p:cNvPr id="13" name="Rectangle 12"/>
+                  <a:srgbClr val="21295C"/>
+                </a:solidFill>
+                <a:latin typeface="Arial"/>
+              </a:rPr>
+              <a:t>TuSimple</a:t>
+            </a:r>
+          </a:p>
+        </p:txBody>
+      </p:sp>
+      <p:sp>
+        <p:nvSpPr>
+          <p:cNvPr id="12" name="Rectangle 11"/>
           <p:cNvSpPr/>
           <p:nvPr/>
         </p:nvSpPr>
         <p:spPr>
           <a:xfrm>
-            <a:off x="914400" y="3566160"/>
-            <a:ext cx="523875" cy="548640"/>
+            <a:off x="2194560" y="3017520"/>
+            <a:ext cx="731520" cy="274320"/>
           </a:xfrm>
           <a:prstGeom prst="rect">
             <a:avLst/>
@@ -13316,14 +13277,92 @@
       </p:sp>
       <p:sp>
         <p:nvSpPr>
+          <p:cNvPr id="13" name="TextBox 12"/>
+          <p:cNvSpPr txBox="1"/>
+          <p:nvPr/>
+        </p:nvSpPr>
+        <p:spPr>
+          <a:xfrm>
+            <a:off x="9601200" y="2971800"/>
+            <a:ext cx="1371600" cy="365760"/>
+          </a:xfrm>
+          <a:prstGeom prst="rect">
+            <a:avLst/>
+          </a:prstGeom>
+          <a:noFill/>
+        </p:spPr>
+        <p:txBody>
+          <a:bodyPr wrap="square" lIns="0" rIns="0" tIns="0" bIns="0" anchor="ctr">
+            <a:spAutoFit/>
+          </a:bodyPr>
+          <a:lstStyle/>
+          <a:p>
+            <a:pPr algn="l">
+              <a:lnSpc>
+                <a:spcPct val="115000"/>
+              </a:lnSpc>
+            </a:pPr>
+            <a:r>
+              <a:rPr sz="1400" b="1" i="0">
+                <a:solidFill>
+                  <a:srgbClr val="21295C"/>
+                </a:solidFill>
+                <a:latin typeface="Arial"/>
+              </a:rPr>
+              <a:t>$1.0B</a:t>
+            </a:r>
+          </a:p>
+        </p:txBody>
+      </p:sp>
+      <p:sp>
+        <p:nvSpPr>
           <p:cNvPr id="14" name="TextBox 13"/>
           <p:cNvSpPr txBox="1"/>
           <p:nvPr/>
         </p:nvSpPr>
         <p:spPr>
           <a:xfrm>
-            <a:off x="1529715" y="3611879"/>
-            <a:ext cx="2743200" cy="457200"/>
+            <a:off x="2194560" y="3364992"/>
+            <a:ext cx="9144000" cy="201168"/>
+          </a:xfrm>
+          <a:prstGeom prst="rect">
+            <a:avLst/>
+          </a:prstGeom>
+          <a:noFill/>
+        </p:spPr>
+        <p:txBody>
+          <a:bodyPr wrap="square" lIns="0" rIns="0" tIns="0" bIns="0" anchor="t">
+            <a:spAutoFit/>
+          </a:bodyPr>
+          <a:lstStyle/>
+          <a:p>
+            <a:pPr algn="l">
+              <a:lnSpc>
+                <a:spcPct val="115000"/>
+              </a:lnSpc>
+            </a:pPr>
+            <a:r>
+              <a:rPr sz="1000" b="0" i="1">
+                <a:solidFill>
+                  <a:srgbClr val="6B7685"/>
+                </a:solidFill>
+                <a:latin typeface="Arial"/>
+              </a:rPr>
+              <a:t>IPO proceeds + private · 91% loss · 2017-2024</a:t>
+            </a:r>
+          </a:p>
+        </p:txBody>
+      </p:sp>
+      <p:sp>
+        <p:nvSpPr>
+          <p:cNvPr id="15" name="TextBox 14"/>
+          <p:cNvSpPr txBox="1"/>
+          <p:nvPr/>
+        </p:nvSpPr>
+        <p:spPr>
+          <a:xfrm>
+            <a:off x="457200" y="3611880"/>
+            <a:ext cx="1645920" cy="365760"/>
           </a:xfrm>
           <a:prstGeom prst="rect">
             <a:avLst/>
@@ -13342,144 +13381,27 @@
               </a:lnSpc>
             </a:pPr>
             <a:r>
-              <a:rPr sz="1400" b="1" i="0">
-                <a:solidFill>
-                  <a:srgbClr val="21295C"/>
-                </a:solidFill>
-                <a:latin typeface="Arial"/>
-              </a:rPr>
-              <a:t>$1.0B</a:t>
-            </a:r>
-          </a:p>
-        </p:txBody>
-      </p:sp>
-      <p:sp>
-        <p:nvSpPr>
-          <p:cNvPr id="15" name="TextBox 14"/>
-          <p:cNvSpPr txBox="1"/>
-          <p:nvPr/>
-        </p:nvSpPr>
-        <p:spPr>
-          <a:xfrm>
-            <a:off x="1051560" y="3611879"/>
-            <a:ext cx="249555" cy="457200"/>
-          </a:xfrm>
-          <a:prstGeom prst="rect">
-            <a:avLst/>
-          </a:prstGeom>
-          <a:noFill/>
-        </p:spPr>
-        <p:txBody>
-          <a:bodyPr wrap="square" lIns="0" rIns="0" tIns="0" bIns="0" anchor="ctr">
-            <a:spAutoFit/>
-          </a:bodyPr>
-          <a:lstStyle/>
-          <a:p>
-            <a:pPr algn="l">
-              <a:lnSpc>
-                <a:spcPct val="115000"/>
-              </a:lnSpc>
-            </a:pPr>
-            <a:r>
               <a:rPr sz="1200" b="1" i="0">
                 <a:solidFill>
-                  <a:srgbClr val="FFFFFF"/>
-                </a:solidFill>
-                <a:latin typeface="Arial"/>
-              </a:rPr>
-              <a:t>TuSimple</a:t>
-            </a:r>
-          </a:p>
-        </p:txBody>
-      </p:sp>
-      <p:sp>
-        <p:nvSpPr>
-          <p:cNvPr id="16" name="TextBox 15"/>
-          <p:cNvSpPr txBox="1"/>
-          <p:nvPr/>
-        </p:nvSpPr>
-        <p:spPr>
-          <a:xfrm>
-            <a:off x="457200" y="3611879"/>
-            <a:ext cx="457200" cy="457200"/>
-          </a:xfrm>
-          <a:prstGeom prst="rect">
-            <a:avLst/>
-          </a:prstGeom>
-          <a:noFill/>
-        </p:spPr>
-        <p:txBody>
-          <a:bodyPr wrap="square" lIns="0" rIns="0" tIns="0" bIns="0" anchor="t">
-            <a:spAutoFit/>
-          </a:bodyPr>
-          <a:lstStyle/>
-          <a:p>
-            <a:pPr algn="l">
-              <a:lnSpc>
-                <a:spcPct val="115000"/>
-              </a:lnSpc>
-            </a:pPr>
-            <a:r>
-              <a:rPr sz="1000" b="0" i="0">
-                <a:solidFill>
-                  <a:srgbClr val="21295C"/>
-                </a:solidFill>
-                <a:latin typeface="Arial"/>
-              </a:rPr>
-              <a:t/>
-            </a:r>
-          </a:p>
-        </p:txBody>
-      </p:sp>
-      <p:sp>
-        <p:nvSpPr>
-          <p:cNvPr id="17" name="TextBox 16"/>
-          <p:cNvSpPr txBox="1"/>
-          <p:nvPr/>
-        </p:nvSpPr>
-        <p:spPr>
-          <a:xfrm>
-            <a:off x="1051560" y="4133087"/>
-            <a:ext cx="10058400" cy="274320"/>
-          </a:xfrm>
-          <a:prstGeom prst="rect">
-            <a:avLst/>
-          </a:prstGeom>
-          <a:noFill/>
-        </p:spPr>
-        <p:txBody>
-          <a:bodyPr wrap="square" lIns="0" rIns="0" tIns="0" bIns="0" anchor="t">
-            <a:spAutoFit/>
-          </a:bodyPr>
-          <a:lstStyle/>
-          <a:p>
-            <a:pPr algn="l">
-              <a:lnSpc>
-                <a:spcPct val="115000"/>
-              </a:lnSpc>
-            </a:pPr>
-            <a:r>
-              <a:rPr sz="1000" b="0" i="1">
-                <a:solidFill>
-                  <a:srgbClr val="6B7685"/>
-                </a:solidFill>
-                <a:latin typeface="Arial"/>
-              </a:rPr>
-              <a:t>IPO proceeds + private · 91% loss · 2017-2024</a:t>
-            </a:r>
-          </a:p>
-        </p:txBody>
-      </p:sp>
-      <p:sp>
-        <p:nvSpPr>
-          <p:cNvPr id="18" name="Rectangle 17"/>
+                  <a:srgbClr val="21295C"/>
+                </a:solidFill>
+                <a:latin typeface="Arial"/>
+              </a:rPr>
+              <a:t>Embark</a:t>
+            </a:r>
+          </a:p>
+        </p:txBody>
+      </p:sp>
+      <p:sp>
+        <p:nvSpPr>
+          <p:cNvPr id="16" name="Rectangle 15"/>
           <p:cNvSpPr/>
           <p:nvPr/>
         </p:nvSpPr>
         <p:spPr>
           <a:xfrm>
-            <a:off x="914400" y="4480560"/>
-            <a:ext cx="261937" cy="548640"/>
+            <a:off x="2194560" y="3657600"/>
+            <a:ext cx="365760" cy="274320"/>
           </a:xfrm>
           <a:prstGeom prst="rect">
             <a:avLst/>
@@ -13516,14 +13438,92 @@
       </p:sp>
       <p:sp>
         <p:nvSpPr>
+          <p:cNvPr id="17" name="TextBox 16"/>
+          <p:cNvSpPr txBox="1"/>
+          <p:nvPr/>
+        </p:nvSpPr>
+        <p:spPr>
+          <a:xfrm>
+            <a:off x="9601200" y="3611880"/>
+            <a:ext cx="1371600" cy="365760"/>
+          </a:xfrm>
+          <a:prstGeom prst="rect">
+            <a:avLst/>
+          </a:prstGeom>
+          <a:noFill/>
+        </p:spPr>
+        <p:txBody>
+          <a:bodyPr wrap="square" lIns="0" rIns="0" tIns="0" bIns="0" anchor="ctr">
+            <a:spAutoFit/>
+          </a:bodyPr>
+          <a:lstStyle/>
+          <a:p>
+            <a:pPr algn="l">
+              <a:lnSpc>
+                <a:spcPct val="115000"/>
+              </a:lnSpc>
+            </a:pPr>
+            <a:r>
+              <a:rPr sz="1400" b="1" i="0">
+                <a:solidFill>
+                  <a:srgbClr val="21295C"/>
+                </a:solidFill>
+                <a:latin typeface="Arial"/>
+              </a:rPr>
+              <a:t>$500M</a:t>
+            </a:r>
+          </a:p>
+        </p:txBody>
+      </p:sp>
+      <p:sp>
+        <p:nvSpPr>
+          <p:cNvPr id="18" name="TextBox 17"/>
+          <p:cNvSpPr txBox="1"/>
+          <p:nvPr/>
+        </p:nvSpPr>
+        <p:spPr>
+          <a:xfrm>
+            <a:off x="2194560" y="4005072"/>
+            <a:ext cx="9144000" cy="201168"/>
+          </a:xfrm>
+          <a:prstGeom prst="rect">
+            <a:avLst/>
+          </a:prstGeom>
+          <a:noFill/>
+        </p:spPr>
+        <p:txBody>
+          <a:bodyPr wrap="square" lIns="0" rIns="0" tIns="0" bIns="0" anchor="t">
+            <a:spAutoFit/>
+          </a:bodyPr>
+          <a:lstStyle/>
+          <a:p>
+            <a:pPr algn="l">
+              <a:lnSpc>
+                <a:spcPct val="115000"/>
+              </a:lnSpc>
+            </a:pPr>
+            <a:r>
+              <a:rPr sz="1000" b="0" i="1">
+                <a:solidFill>
+                  <a:srgbClr val="6B7685"/>
+                </a:solidFill>
+                <a:latin typeface="Arial"/>
+              </a:rPr>
+              <a:t>SPAC цель $5,16B · 16 мес. жизни · 2020-2023</a:t>
+            </a:r>
+          </a:p>
+        </p:txBody>
+      </p:sp>
+      <p:sp>
+        <p:nvSpPr>
           <p:cNvPr id="19" name="TextBox 18"/>
           <p:cNvSpPr txBox="1"/>
           <p:nvPr/>
         </p:nvSpPr>
         <p:spPr>
           <a:xfrm>
-            <a:off x="1267777" y="4526280"/>
-            <a:ext cx="2743200" cy="457200"/>
+            <a:off x="457200" y="4251960"/>
+            <a:ext cx="1645920" cy="365760"/>
           </a:xfrm>
           <a:prstGeom prst="rect">
             <a:avLst/>
@@ -13542,144 +13542,27 @@
               </a:lnSpc>
             </a:pPr>
             <a:r>
-              <a:rPr sz="1400" b="1" i="0">
-                <a:solidFill>
-                  <a:srgbClr val="21295C"/>
-                </a:solidFill>
-                <a:latin typeface="Arial"/>
-              </a:rPr>
-              <a:t>$500M</a:t>
-            </a:r>
-          </a:p>
-        </p:txBody>
-      </p:sp>
-      <p:sp>
-        <p:nvSpPr>
-          <p:cNvPr id="20" name="TextBox 19"/>
-          <p:cNvSpPr txBox="1"/>
-          <p:nvPr/>
-        </p:nvSpPr>
-        <p:spPr>
-          <a:xfrm>
-            <a:off x="1051560" y="4526280"/>
-            <a:ext cx="-12382" cy="457200"/>
-          </a:xfrm>
-          <a:prstGeom prst="rect">
-            <a:avLst/>
-          </a:prstGeom>
-          <a:noFill/>
-        </p:spPr>
-        <p:txBody>
-          <a:bodyPr wrap="square" lIns="0" rIns="0" tIns="0" bIns="0" anchor="ctr">
-            <a:spAutoFit/>
-          </a:bodyPr>
-          <a:lstStyle/>
-          <a:p>
-            <a:pPr algn="l">
-              <a:lnSpc>
-                <a:spcPct val="115000"/>
-              </a:lnSpc>
-            </a:pPr>
-            <a:r>
               <a:rPr sz="1200" b="1" i="0">
                 <a:solidFill>
-                  <a:srgbClr val="FFFFFF"/>
-                </a:solidFill>
-                <a:latin typeface="Arial"/>
-              </a:rPr>
-              <a:t>Embark</a:t>
-            </a:r>
-          </a:p>
-        </p:txBody>
-      </p:sp>
-      <p:sp>
-        <p:nvSpPr>
-          <p:cNvPr id="21" name="TextBox 20"/>
-          <p:cNvSpPr txBox="1"/>
-          <p:nvPr/>
-        </p:nvSpPr>
-        <p:spPr>
-          <a:xfrm>
-            <a:off x="457200" y="4526280"/>
-            <a:ext cx="457200" cy="457200"/>
-          </a:xfrm>
-          <a:prstGeom prst="rect">
-            <a:avLst/>
-          </a:prstGeom>
-          <a:noFill/>
-        </p:spPr>
-        <p:txBody>
-          <a:bodyPr wrap="square" lIns="0" rIns="0" tIns="0" bIns="0" anchor="t">
-            <a:spAutoFit/>
-          </a:bodyPr>
-          <a:lstStyle/>
-          <a:p>
-            <a:pPr algn="l">
-              <a:lnSpc>
-                <a:spcPct val="115000"/>
-              </a:lnSpc>
-            </a:pPr>
-            <a:r>
-              <a:rPr sz="1000" b="0" i="0">
-                <a:solidFill>
-                  <a:srgbClr val="21295C"/>
-                </a:solidFill>
-                <a:latin typeface="Arial"/>
-              </a:rPr>
-              <a:t/>
-            </a:r>
-          </a:p>
-        </p:txBody>
-      </p:sp>
-      <p:sp>
-        <p:nvSpPr>
-          <p:cNvPr id="22" name="TextBox 21"/>
-          <p:cNvSpPr txBox="1"/>
-          <p:nvPr/>
-        </p:nvSpPr>
-        <p:spPr>
-          <a:xfrm>
-            <a:off x="1051560" y="5047488"/>
-            <a:ext cx="10058400" cy="274320"/>
-          </a:xfrm>
-          <a:prstGeom prst="rect">
-            <a:avLst/>
-          </a:prstGeom>
-          <a:noFill/>
-        </p:spPr>
-        <p:txBody>
-          <a:bodyPr wrap="square" lIns="0" rIns="0" tIns="0" bIns="0" anchor="t">
-            <a:spAutoFit/>
-          </a:bodyPr>
-          <a:lstStyle/>
-          <a:p>
-            <a:pPr algn="l">
-              <a:lnSpc>
-                <a:spcPct val="115000"/>
-              </a:lnSpc>
-            </a:pPr>
-            <a:r>
-              <a:rPr sz="1000" b="0" i="1">
-                <a:solidFill>
-                  <a:srgbClr val="6B7685"/>
-                </a:solidFill>
-                <a:latin typeface="Arial"/>
-              </a:rPr>
-              <a:t>SPAC target $5,16B · 16 мес. жизни · 2020-2023</a:t>
-            </a:r>
-          </a:p>
-        </p:txBody>
-      </p:sp>
-      <p:sp>
-        <p:nvSpPr>
-          <p:cNvPr id="23" name="Rectangle 22"/>
+                  <a:srgbClr val="21295C"/>
+                </a:solidFill>
+                <a:latin typeface="Arial"/>
+              </a:rPr>
+              <a:t>Starsky</a:t>
+            </a:r>
+          </a:p>
+        </p:txBody>
+      </p:sp>
+      <p:sp>
+        <p:nvSpPr>
+          <p:cNvPr id="20" name="Rectangle 19"/>
           <p:cNvSpPr/>
           <p:nvPr/>
         </p:nvSpPr>
         <p:spPr>
           <a:xfrm>
-            <a:off x="914400" y="5394960"/>
-            <a:ext cx="104775" cy="548640"/>
+            <a:off x="2194560" y="4297680"/>
+            <a:ext cx="146304" cy="274320"/>
           </a:xfrm>
           <a:prstGeom prst="rect">
             <a:avLst/>
@@ -13716,14 +13599,14 @@
       </p:sp>
       <p:sp>
         <p:nvSpPr>
-          <p:cNvPr id="24" name="TextBox 23"/>
-          <p:cNvSpPr txBox="1"/>
-          <p:nvPr/>
-        </p:nvSpPr>
-        <p:spPr>
-          <a:xfrm>
-            <a:off x="1110615" y="5440680"/>
-            <a:ext cx="2743200" cy="457200"/>
+          <p:cNvPr id="21" name="TextBox 20"/>
+          <p:cNvSpPr txBox="1"/>
+          <p:nvPr/>
+        </p:nvSpPr>
+        <p:spPr>
+          <a:xfrm>
+            <a:off x="9601200" y="4251960"/>
+            <a:ext cx="1371600" cy="365760"/>
           </a:xfrm>
           <a:prstGeom prst="rect">
             <a:avLst/>
@@ -13755,14 +13638,53 @@
       </p:sp>
       <p:sp>
         <p:nvSpPr>
-          <p:cNvPr id="25" name="TextBox 24"/>
-          <p:cNvSpPr txBox="1"/>
-          <p:nvPr/>
-        </p:nvSpPr>
-        <p:spPr>
-          <a:xfrm>
-            <a:off x="1051560" y="5440680"/>
-            <a:ext cx="-169544" cy="457200"/>
+          <p:cNvPr id="22" name="TextBox 21"/>
+          <p:cNvSpPr txBox="1"/>
+          <p:nvPr/>
+        </p:nvSpPr>
+        <p:spPr>
+          <a:xfrm>
+            <a:off x="2194560" y="4645152"/>
+            <a:ext cx="9144000" cy="201168"/>
+          </a:xfrm>
+          <a:prstGeom prst="rect">
+            <a:avLst/>
+          </a:prstGeom>
+          <a:noFill/>
+        </p:spPr>
+        <p:txBody>
+          <a:bodyPr wrap="square" lIns="0" rIns="0" tIns="0" bIns="0" anchor="t">
+            <a:spAutoFit/>
+          </a:bodyPr>
+          <a:lstStyle/>
+          <a:p>
+            <a:pPr algn="l">
+              <a:lnSpc>
+                <a:spcPct val="115000"/>
+              </a:lnSpc>
+            </a:pPr>
+            <a:r>
+              <a:rPr sz="1000" b="0" i="1">
+                <a:solidFill>
+                  <a:srgbClr val="6B7685"/>
+                </a:solidFill>
+                <a:latin typeface="Arial"/>
+              </a:rPr>
+              <a:t>Первая волна · 2015-2020</a:t>
+            </a:r>
+          </a:p>
+        </p:txBody>
+      </p:sp>
+      <p:sp>
+        <p:nvSpPr>
+          <p:cNvPr id="23" name="TextBox 22"/>
+          <p:cNvSpPr txBox="1"/>
+          <p:nvPr/>
+        </p:nvSpPr>
+        <p:spPr>
+          <a:xfrm>
+            <a:off x="457200" y="4892040"/>
+            <a:ext cx="1645920" cy="365760"/>
           </a:xfrm>
           <a:prstGeom prst="rect">
             <a:avLst/>
@@ -13783,103 +13705,25 @@
             <a:r>
               <a:rPr sz="1200" b="1" i="0">
                 <a:solidFill>
-                  <a:srgbClr val="FFFFFF"/>
-                </a:solidFill>
-                <a:latin typeface="Arial"/>
-              </a:rPr>
-              <a:t>Starsky</a:t>
-            </a:r>
-          </a:p>
-        </p:txBody>
-      </p:sp>
-      <p:sp>
-        <p:nvSpPr>
-          <p:cNvPr id="26" name="TextBox 25"/>
-          <p:cNvSpPr txBox="1"/>
-          <p:nvPr/>
-        </p:nvSpPr>
-        <p:spPr>
-          <a:xfrm>
-            <a:off x="457200" y="5440680"/>
-            <a:ext cx="457200" cy="457200"/>
-          </a:xfrm>
-          <a:prstGeom prst="rect">
-            <a:avLst/>
-          </a:prstGeom>
-          <a:noFill/>
-        </p:spPr>
-        <p:txBody>
-          <a:bodyPr wrap="square" lIns="0" rIns="0" tIns="0" bIns="0" anchor="t">
-            <a:spAutoFit/>
-          </a:bodyPr>
-          <a:lstStyle/>
-          <a:p>
-            <a:pPr algn="l">
-              <a:lnSpc>
-                <a:spcPct val="115000"/>
-              </a:lnSpc>
-            </a:pPr>
-            <a:r>
-              <a:rPr sz="1000" b="0" i="0">
-                <a:solidFill>
-                  <a:srgbClr val="21295C"/>
-                </a:solidFill>
-                <a:latin typeface="Arial"/>
-              </a:rPr>
-              <a:t/>
-            </a:r>
-          </a:p>
-        </p:txBody>
-      </p:sp>
-      <p:sp>
-        <p:nvSpPr>
-          <p:cNvPr id="27" name="TextBox 26"/>
-          <p:cNvSpPr txBox="1"/>
-          <p:nvPr/>
-        </p:nvSpPr>
-        <p:spPr>
-          <a:xfrm>
-            <a:off x="1051560" y="5961888"/>
-            <a:ext cx="10058400" cy="274320"/>
-          </a:xfrm>
-          <a:prstGeom prst="rect">
-            <a:avLst/>
-          </a:prstGeom>
-          <a:noFill/>
-        </p:spPr>
-        <p:txBody>
-          <a:bodyPr wrap="square" lIns="0" rIns="0" tIns="0" bIns="0" anchor="t">
-            <a:spAutoFit/>
-          </a:bodyPr>
-          <a:lstStyle/>
-          <a:p>
-            <a:pPr algn="l">
-              <a:lnSpc>
-                <a:spcPct val="115000"/>
-              </a:lnSpc>
-            </a:pPr>
-            <a:r>
-              <a:rPr sz="1000" b="0" i="1">
-                <a:solidFill>
-                  <a:srgbClr val="6B7685"/>
-                </a:solidFill>
-                <a:latin typeface="Arial"/>
-              </a:rPr>
-              <a:t>Первая волна · 2015-2020</a:t>
-            </a:r>
-          </a:p>
-        </p:txBody>
-      </p:sp>
-      <p:sp>
-        <p:nvSpPr>
-          <p:cNvPr id="28" name="Rectangle 27"/>
+                  <a:srgbClr val="21295C"/>
+                </a:solidFill>
+                <a:latin typeface="Arial"/>
+              </a:rPr>
+              <a:t>Waymo Via</a:t>
+            </a:r>
+          </a:p>
+        </p:txBody>
+      </p:sp>
+      <p:sp>
+        <p:nvSpPr>
+          <p:cNvPr id="24" name="Rectangle 23"/>
           <p:cNvSpPr/>
           <p:nvPr/>
         </p:nvSpPr>
         <p:spPr>
           <a:xfrm>
-            <a:off x="914400" y="6309360"/>
-            <a:ext cx="261937" cy="548640"/>
+            <a:off x="2194560" y="4937760"/>
+            <a:ext cx="365760" cy="274320"/>
           </a:xfrm>
           <a:prstGeom prst="rect">
             <a:avLst/>
@@ -13916,14 +13760,14 @@
       </p:sp>
       <p:sp>
         <p:nvSpPr>
-          <p:cNvPr id="29" name="TextBox 28"/>
-          <p:cNvSpPr txBox="1"/>
-          <p:nvPr/>
-        </p:nvSpPr>
-        <p:spPr>
-          <a:xfrm>
-            <a:off x="1267777" y="6355080"/>
-            <a:ext cx="2743200" cy="457200"/>
+          <p:cNvPr id="25" name="TextBox 24"/>
+          <p:cNvSpPr txBox="1"/>
+          <p:nvPr/>
+        </p:nvSpPr>
+        <p:spPr>
+          <a:xfrm>
+            <a:off x="9601200" y="4892040"/>
+            <a:ext cx="1371600" cy="365760"/>
           </a:xfrm>
           <a:prstGeom prst="rect">
             <a:avLst/>
@@ -13955,22 +13799,22 @@
       </p:sp>
       <p:sp>
         <p:nvSpPr>
-          <p:cNvPr id="30" name="TextBox 29"/>
-          <p:cNvSpPr txBox="1"/>
-          <p:nvPr/>
-        </p:nvSpPr>
-        <p:spPr>
-          <a:xfrm>
-            <a:off x="1051560" y="6355080"/>
-            <a:ext cx="-12382" cy="457200"/>
-          </a:xfrm>
-          <a:prstGeom prst="rect">
-            <a:avLst/>
-          </a:prstGeom>
-          <a:noFill/>
-        </p:spPr>
-        <p:txBody>
-          <a:bodyPr wrap="square" lIns="0" rIns="0" tIns="0" bIns="0" anchor="ctr">
+          <p:cNvPr id="26" name="TextBox 25"/>
+          <p:cNvSpPr txBox="1"/>
+          <p:nvPr/>
+        </p:nvSpPr>
+        <p:spPr>
+          <a:xfrm>
+            <a:off x="2194560" y="5285232"/>
+            <a:ext cx="9144000" cy="201168"/>
+          </a:xfrm>
+          <a:prstGeom prst="rect">
+            <a:avLst/>
+          </a:prstGeom>
+          <a:noFill/>
+        </p:spPr>
+        <p:txBody>
+          <a:bodyPr wrap="square" lIns="0" rIns="0" tIns="0" bIns="0" anchor="t">
             <a:spAutoFit/>
           </a:bodyPr>
           <a:lstStyle/>
@@ -13981,105 +13825,27 @@
               </a:lnSpc>
             </a:pPr>
             <a:r>
-              <a:rPr sz="1200" b="1" i="0">
-                <a:solidFill>
-                  <a:srgbClr val="FFFFFF"/>
-                </a:solidFill>
-                <a:latin typeface="Arial"/>
-              </a:rPr>
-              <a:t>Waymo Via</a:t>
-            </a:r>
-          </a:p>
-        </p:txBody>
-      </p:sp>
-      <p:sp>
-        <p:nvSpPr>
-          <p:cNvPr id="31" name="TextBox 30"/>
-          <p:cNvSpPr txBox="1"/>
-          <p:nvPr/>
-        </p:nvSpPr>
-        <p:spPr>
-          <a:xfrm>
-            <a:off x="457200" y="6355080"/>
-            <a:ext cx="457200" cy="457200"/>
-          </a:xfrm>
-          <a:prstGeom prst="rect">
-            <a:avLst/>
-          </a:prstGeom>
-          <a:noFill/>
-        </p:spPr>
-        <p:txBody>
-          <a:bodyPr wrap="square" lIns="0" rIns="0" tIns="0" bIns="0" anchor="t">
-            <a:spAutoFit/>
-          </a:bodyPr>
-          <a:lstStyle/>
-          <a:p>
-            <a:pPr algn="l">
-              <a:lnSpc>
-                <a:spcPct val="115000"/>
-              </a:lnSpc>
-            </a:pPr>
-            <a:r>
-              <a:rPr sz="1000" b="0" i="0">
-                <a:solidFill>
-                  <a:srgbClr val="21295C"/>
-                </a:solidFill>
-                <a:latin typeface="Arial"/>
-              </a:rPr>
-              <a:t/>
-            </a:r>
-          </a:p>
-        </p:txBody>
-      </p:sp>
-      <p:sp>
-        <p:nvSpPr>
-          <p:cNvPr id="32" name="TextBox 31"/>
-          <p:cNvSpPr txBox="1"/>
-          <p:nvPr/>
-        </p:nvSpPr>
-        <p:spPr>
-          <a:xfrm>
-            <a:off x="1051560" y="6876288"/>
-            <a:ext cx="10058400" cy="274320"/>
-          </a:xfrm>
-          <a:prstGeom prst="rect">
-            <a:avLst/>
-          </a:prstGeom>
-          <a:noFill/>
-        </p:spPr>
-        <p:txBody>
-          <a:bodyPr wrap="square" lIns="0" rIns="0" tIns="0" bIns="0" anchor="t">
-            <a:spAutoFit/>
-          </a:bodyPr>
-          <a:lstStyle/>
-          <a:p>
-            <a:pPr algn="l">
-              <a:lnSpc>
-                <a:spcPct val="115000"/>
-              </a:lnSpc>
-            </a:pPr>
-            <a:r>
               <a:rPr sz="1000" b="0" i="1">
                 <a:solidFill>
                   <a:srgbClr val="6B7685"/>
                 </a:solidFill>
                 <a:latin typeface="Arial"/>
               </a:rPr>
-              <a:t>Alphabet investment · сегмент закрыт 2023</a:t>
-            </a:r>
-          </a:p>
-        </p:txBody>
-      </p:sp>
-      <p:sp>
-        <p:nvSpPr>
-          <p:cNvPr id="33" name="Rounded Rectangle 32"/>
+              <a:t>Alphabet инвестиции · сегмент закрыт 2023</a:t>
+            </a:r>
+          </a:p>
+        </p:txBody>
+      </p:sp>
+      <p:sp>
+        <p:nvSpPr>
+          <p:cNvPr id="27" name="Rounded Rectangle 26"/>
           <p:cNvSpPr/>
           <p:nvPr/>
         </p:nvSpPr>
         <p:spPr>
           <a:xfrm>
-            <a:off x="457200" y="5486400"/>
-            <a:ext cx="11274552" cy="914400"/>
+            <a:off x="457200" y="5623560"/>
+            <a:ext cx="11274552" cy="777240"/>
           </a:xfrm>
           <a:prstGeom prst="roundRect">
             <a:avLst>
@@ -14120,14 +13886,14 @@
       </p:sp>
       <p:sp>
         <p:nvSpPr>
-          <p:cNvPr id="34" name="TextBox 33"/>
-          <p:cNvSpPr txBox="1"/>
-          <p:nvPr/>
-        </p:nvSpPr>
-        <p:spPr>
-          <a:xfrm>
-            <a:off x="640080" y="5577840"/>
-            <a:ext cx="10881360" cy="822960"/>
+          <p:cNvPr id="28" name="TextBox 27"/>
+          <p:cNvSpPr txBox="1"/>
+          <p:nvPr/>
+        </p:nvSpPr>
+        <p:spPr>
+          <a:xfrm>
+            <a:off x="640080" y="5669280"/>
+            <a:ext cx="10881360" cy="685800"/>
           </a:xfrm>
           <a:prstGeom prst="rect">
             <a:avLst/>
@@ -14168,14 +13934,14 @@
                 </a:solidFill>
                 <a:latin typeface="Arial"/>
               </a:rPr>
-              <a:t>До $50 миллиардов с early-stage investments в Cruise, Zoox, Aurora ранние раунды</a:t>
-            </a:r>
-          </a:p>
-        </p:txBody>
-      </p:sp>
-      <p:sp>
-        <p:nvSpPr>
-          <p:cNvPr id="35" name="TextBox 34"/>
+              <a:t>До $50 миллиардов с early-stage инвестицииs в Cruise, Zoox, Aurora ранние раунды</a:t>
+            </a:r>
+          </a:p>
+        </p:txBody>
+      </p:sp>
+      <p:sp>
+        <p:nvSpPr>
+          <p:cNvPr id="29" name="TextBox 28"/>
           <p:cNvSpPr txBox="1"/>
           <p:nvPr/>
         </p:nvSpPr>
@@ -14273,7 +14039,7 @@
                 <a:latin typeface="Arial"/>
               </a:rPr>
               <a:t>Выжившие vs выбывшие: 10:1 консолидация.
-Waymo, Aurora, Mobileye, Apollo Go — survivors из 30+.</a:t>
+Waymo, Aurora, Mobileye, Apollo Go — выжившие из 30+.</a:t>
             </a:r>
           </a:p>
         </p:txBody>
@@ -14438,7 +14204,7 @@
                 </a:solidFill>
                 <a:latin typeface="Arial"/>
               </a:rPr>
-              <a:t>Crawl-walk-run · HD-карта + LiDAR + удалённый ops · 500K rides/неделю</a:t>
+              <a:t>Поэтапный ввод · HD-карта + LiDAR + удалённый опс · 500K rides/неделю</a:t>
             </a:r>
           </a:p>
         </p:txBody>
@@ -14477,7 +14243,7 @@
                 </a:solidFill>
                 <a:latin typeface="Arial"/>
               </a:rPr>
-              <a:t>Aurora Innovation</a:t>
+              <a:t>Aurora Инновации</a:t>
             </a:r>
           </a:p>
         </p:txBody>
@@ -14594,7 +14360,7 @@
                 </a:solidFill>
                 <a:latin typeface="Arial"/>
               </a:rPr>
-              <a:t>Camera-first ADAS · ~300K consumer L2/L3 · spin-off Intel</a:t>
+              <a:t>Сначала-камера ADAS · ~300K потребитель L2/L3 · spin-off Intel</a:t>
             </a:r>
           </a:p>
         </p:txBody>
@@ -15149,7 +14915,7 @@
                 </a:solidFill>
                 <a:latin typeface="Arial"/>
               </a:rPr>
-              <a:t>Alphabet закрыла собственное trucking</a:t>
+              <a:t>Alphabet закрыла собственное грузоперевозки</a:t>
             </a:r>
           </a:p>
         </p:txBody>
@@ -15227,7 +14993,7 @@
                 </a:solidFill>
                 <a:latin typeface="Arial"/>
               </a:rPr>
-              <a:t>Первая волна 2020 · sim-to-real гэп</a:t>
+              <a:t>Первая волна 2020 · разрыв симуляция-к-реальности</a:t>
             </a:r>
           </a:p>
         </p:txBody>
@@ -15314,7 +15080,7 @@
                 </a:solidFill>
                 <a:latin typeface="Arial"/>
               </a:rPr>
-              <a:t>Паттерн выживания: crawl-walk-run · узкий ODD · не переобещание · patient капитал · уважение к среде.</a:t>
+              <a:t>Паттерн выживания: поэтапный ввод (ползком-шагом-бегом) · узкий ODD · не переобещают · терпеливый капитал · уважение к среде.</a:t>
             </a:r>
           </a:p>
         </p:txBody>
@@ -15904,7 +15670,7 @@
                 </a:solidFill>
                 <a:latin typeface="Arial"/>
               </a:rPr>
-              <a:t>Модуль 3 · 75 минут + Q&amp;A</a:t>
+              <a:t>Модуль 3</a:t>
             </a:r>
           </a:p>
           <a:p>
@@ -15934,7 +15700,7 @@
         <p:spPr>
           <a:xfrm>
             <a:off x="4114800" y="5029200"/>
-            <a:ext cx="7589520" cy="1280160"/>
+            <a:ext cx="7589520" cy="1463040"/>
           </a:xfrm>
           <a:prstGeom prst="roundRect">
             <a:avLst>
@@ -15982,7 +15748,7 @@
         <p:spPr>
           <a:xfrm>
             <a:off x="4297680" y="5166360"/>
-            <a:ext cx="7315200" cy="1097280"/>
+            <a:ext cx="7315200" cy="1280160"/>
           </a:xfrm>
           <a:prstGeom prst="rect">
             <a:avLst/>
@@ -16007,7 +15773,7 @@
                 </a:solidFill>
                 <a:latin typeface="Arial"/>
               </a:rPr>
-              <a:t>Цели лекции:</a:t>
+              <a:t>Вы научитесь:</a:t>
             </a:r>
           </a:p>
           <a:p>
@@ -16023,7 +15789,7 @@
                 </a:solidFill>
                 <a:latin typeface="Arial"/>
               </a:rPr>
-              <a:t>LO1 — пять уровней лестницы среды · LO2 — критически оценить вендора AV/AI</a:t>
+              <a:t>· Различать пять уровней автономии в логистике и транспорте.</a:t>
             </a:r>
           </a:p>
           <a:p>
@@ -16039,7 +15805,23 @@
                 </a:solidFill>
                 <a:latin typeface="Arial"/>
               </a:rPr>
-              <a:t>LO7 — регуляторный ландшафт + критерии «AI не работает» + альтернативы</a:t>
+              <a:t>· Критически оценивать вендорские заявления об AV/AI-системах.</a:t>
+            </a:r>
+          </a:p>
+          <a:p>
+            <a:pPr algn="l">
+              <a:lnSpc>
+                <a:spcPct val="120000"/>
+              </a:lnSpc>
+            </a:pPr>
+            <a:r>
+              <a:rPr sz="1200" b="0" i="0">
+                <a:solidFill>
+                  <a:srgbClr val="21295C"/>
+                </a:solidFill>
+                <a:latin typeface="Arial"/>
+              </a:rPr>
+              <a:t>· Применять регуляторные критерии «когда AI не работает» + альтернативы.</a:t>
             </a:r>
           </a:p>
         </p:txBody>
@@ -16144,7 +15926,7 @@
                 <a:latin typeface="Arial"/>
               </a:rPr>
               <a:t>«AV решит дефицит водителей» — false framing.
-Math не работает на горизонте 2030.</a:t>
+Арифметика не сходится на горизонте 2030.</a:t>
             </a:r>
           </a:p>
         </p:txBody>
@@ -16506,7 +16288,7 @@
                 </a:solidFill>
                 <a:latin typeface="Arial"/>
               </a:rPr>
-              <a:t>·  Visa программы</a:t>
+              <a:t>·  Программы виз</a:t>
             </a:r>
           </a:p>
         </p:txBody>
@@ -16584,7 +16366,7 @@
                 </a:solidFill>
                 <a:latin typeface="Arial"/>
               </a:rPr>
-              <a:t>·  CDL обучение subsidies</a:t>
+              <a:t>·  субсидии на обучение CDL</a:t>
             </a:r>
           </a:p>
         </p:txBody>
@@ -16662,7 +16444,7 @@
                 </a:solidFill>
                 <a:latin typeface="Arial"/>
               </a:rPr>
-              <a:t>·  Pay restructuring</a:t>
+              <a:t>·  Реструктуризация зарплат</a:t>
             </a:r>
           </a:p>
         </p:txBody>
@@ -16701,7 +16483,7 @@
                 </a:solidFill>
                 <a:latin typeface="Arial"/>
               </a:rPr>
-              <a:t>Hourly (включая loading) вместо per-mile</a:t>
+              <a:t>Почасовая (включая погрузку) вместо за-милю</a:t>
             </a:r>
           </a:p>
         </p:txBody>
@@ -16740,7 +16522,7 @@
                 </a:solidFill>
                 <a:latin typeface="Arial"/>
               </a:rPr>
-              <a:t>·  Equipment quality</a:t>
+              <a:t>·  Качество оборудования</a:t>
             </a:r>
           </a:p>
         </p:txBody>
@@ -16818,7 +16600,7 @@
                 </a:solidFill>
                 <a:latin typeface="Arial"/>
               </a:rPr>
-              <a:t>·  Job design</a:t>
+              <a:t>·  Проектирование рабочих мест</a:t>
             </a:r>
           </a:p>
         </p:txBody>
@@ -16896,7 +16678,7 @@
                 </a:solidFill>
                 <a:latin typeface="Arial"/>
               </a:rPr>
-              <a:t>Bob Costello (ATA chief economist): «для всех  неправильных reasons» — не AI снизил, downturn</a:t>
+              <a:t>Bob Costello (ATA главный экономист): «для всех  неправильных причин» — не AI снизил, спад</a:t>
             </a:r>
           </a:p>
         </p:txBody>
@@ -16961,8 +16743,8 @@
                 </a:solidFill>
                 <a:latin typeface="Arial"/>
               </a:rPr>
-              <a:t>Четыре причины провала AV-грузоперевозки startup'ов:
-capital / регуляторный / SPAC-bust / sim-to-real.</a:t>
+              <a:t>Четыре причины провала AV-грузоперевозки стартап'ов:
+капитал / регуляторный / SPAC-bust / симуляция-к-реальности.</a:t>
             </a:r>
           </a:p>
         </p:txBody>
@@ -17737,7 +17519,7 @@
                 </a:solidFill>
                 <a:latin typeface="Arial"/>
               </a:rPr>
-              <a:t>Запрашивать legal team опыт. NHTSA SGO crash reports? Pipeline EA-investigations?</a:t>
+              <a:t>Запрашивать legal team опыт. NHTSA SGO авария reports? Pipeline EA-расследованиеs?</a:t>
             </a:r>
           </a:p>
         </p:txBody>
@@ -18000,7 +17782,7 @@
                 </a:solidFill>
                 <a:latin typeface="Arial"/>
               </a:rPr>
-              <a:t>Не вкладывать в до выручки SPAC merger без 5+ лет коммерческий history. Public scrutiny убьёт хайп.</a:t>
+              <a:t>Не вкладывать в до получения выручки SPAC-слияния без 5+ лет коммерческой истории. Публичный надзор убьёт ажиотаж.</a:t>
             </a:r>
           </a:p>
         </p:txBody>
@@ -18087,7 +17869,7 @@
                 </a:solidFill>
                 <a:latin typeface="Arial"/>
               </a:rPr>
-              <a:t>Sim-to-real разрыв</a:t>
+              <a:t>симуляция-к-реальности разрыв</a:t>
             </a:r>
           </a:p>
         </p:txBody>
@@ -18262,7 +18044,7 @@
                 </a:solidFill>
                 <a:latin typeface="Arial"/>
               </a:rPr>
-              <a:t>Запрашивать ratio км в симуляции / км на публичный дороги. Если только sim — серьёзный red флаг.</a:t>
+              <a:t>Запрашивать ratio км в симуляции / км на публичный дороги. Если только sim — серьёзный красный флаг.</a:t>
             </a:r>
           </a:p>
         </p:txBody>
@@ -18301,7 +18083,7 @@
                 </a:solidFill>
                 <a:latin typeface="Arial"/>
               </a:rPr>
-              <a:t>Выжившие применяют crawl-walk-run против всех 4 причин (см. s19)</a:t>
+              <a:t>Выжившие применяют поэтапный ввод (ползком-шагом-бегом) против всех 4 причин (см. s19)</a:t>
             </a:r>
           </a:p>
         </p:txBody>
@@ -18443,23 +18225,87 @@
           <a:p>
             <a:pPr algn="ctr">
               <a:lnSpc>
-                <a:spcPct val="140000"/>
-              </a:lnSpc>
-            </a:pPr>
-            <a:r>
-              <a:rPr sz="2200" b="1" i="1">
-                <a:solidFill>
-                  <a:srgbClr val="21295C"/>
-                </a:solidFill>
-                <a:latin typeface="Arial"/>
-              </a:rPr>
-              <a:t>«Supervised machine learning doesn't live up to  хайп.»</a:t>
+                <a:spcPct val="125000"/>
+              </a:lnSpc>
+            </a:pPr>
+            <a:r>
+              <a:rPr sz="2000" b="1" i="1">
+                <a:solidFill>
+                  <a:srgbClr val="21295C"/>
+                </a:solidFill>
+                <a:latin typeface="Arial"/>
+              </a:rPr>
+              <a:t>«Supervised machine обучение doesn't live up to the hype.»</a:t>
             </a:r>
           </a:p>
           <a:p>
             <a:pPr algn="ctr">
               <a:lnSpc>
-                <a:spcPct val="140000"/>
+                <a:spcPct val="125000"/>
+              </a:lnSpc>
+            </a:pPr>
+            <a:r>
+              <a:rPr sz="1400" b="0" i="1">
+                <a:solidFill>
+                  <a:srgbClr val="065A82"/>
+                </a:solidFill>
+                <a:latin typeface="Arial"/>
+              </a:rPr>
+              <a:t>«Контролируемое машинное обучение не оправдывает ажиотажа.»</a:t>
+            </a:r>
+          </a:p>
+          <a:p>
+            <a:pPr algn="ctr">
+              <a:lnSpc>
+                <a:spcPct val="125000"/>
+              </a:lnSpc>
+            </a:pPr>
+            <a:r>
+              <a:rPr sz="600" b="0" i="0">
+                <a:solidFill>
+                  <a:srgbClr val="21295C"/>
+                </a:solidFill>
+                <a:latin typeface="Arial"/>
+              </a:rPr>
+              <a:t/>
+            </a:r>
+          </a:p>
+          <a:p>
+            <a:pPr algn="ctr">
+              <a:lnSpc>
+                <a:spcPct val="125000"/>
+              </a:lnSpc>
+            </a:pPr>
+            <a:r>
+              <a:rPr sz="2000" b="1" i="1">
+                <a:solidFill>
+                  <a:srgbClr val="21295C"/>
+                </a:solidFill>
+                <a:latin typeface="Arial"/>
+              </a:rPr>
+              <a:t>«симуляция-к-реальности has very реальный limits.»</a:t>
+            </a:r>
+          </a:p>
+          <a:p>
+            <a:pPr algn="ctr">
+              <a:lnSpc>
+                <a:spcPct val="125000"/>
+              </a:lnSpc>
+            </a:pPr>
+            <a:r>
+              <a:rPr sz="1400" b="0" i="1">
+                <a:solidFill>
+                  <a:srgbClr val="065A82"/>
+                </a:solidFill>
+                <a:latin typeface="Arial"/>
+              </a:rPr>
+              <a:t>«У разрыва симуляция-к-реальности есть очень реальные пределы.»</a:t>
+            </a:r>
+          </a:p>
+          <a:p>
+            <a:pPr algn="ctr">
+              <a:lnSpc>
+                <a:spcPct val="125000"/>
               </a:lnSpc>
             </a:pPr>
             <a:r>
@@ -18475,65 +18321,33 @@
           <a:p>
             <a:pPr algn="ctr">
               <a:lnSpc>
-                <a:spcPct val="140000"/>
-              </a:lnSpc>
-            </a:pPr>
-            <a:r>
-              <a:rPr sz="2200" b="1" i="1">
-                <a:solidFill>
-                  <a:srgbClr val="21295C"/>
-                </a:solidFill>
-                <a:latin typeface="Arial"/>
-              </a:rPr>
-              <a:t>«Sim-to-real has very real limits.»</a:t>
+                <a:spcPct val="125000"/>
+              </a:lnSpc>
+            </a:pPr>
+            <a:r>
+              <a:rPr sz="1200" b="0" i="1">
+                <a:solidFill>
+                  <a:srgbClr val="6B7685"/>
+                </a:solidFill>
+                <a:latin typeface="Arial"/>
+              </a:rPr>
+              <a:t>— Стефан Зельц-Аксмахер, основатель и CEO Starsky Роботics,</a:t>
             </a:r>
           </a:p>
           <a:p>
             <a:pPr algn="ctr">
               <a:lnSpc>
-                <a:spcPct val="140000"/>
-              </a:lnSpc>
-            </a:pPr>
-            <a:r>
-              <a:rPr sz="1000" b="0" i="0">
-                <a:solidFill>
-                  <a:srgbClr val="21295C"/>
-                </a:solidFill>
-                <a:latin typeface="Arial"/>
-              </a:rPr>
-              <a:t/>
-            </a:r>
-          </a:p>
-          <a:p>
-            <a:pPr algn="ctr">
-              <a:lnSpc>
-                <a:spcPct val="140000"/>
-              </a:lnSpc>
-            </a:pPr>
-            <a:r>
-              <a:rPr sz="1300" b="0" i="1">
+                <a:spcPct val="125000"/>
+              </a:lnSpc>
+            </a:pPr>
+            <a:r>
+              <a:rPr sz="1200" b="0" i="1">
                 <a:solidFill>
                   <a:srgbClr val="6B7685"/>
                 </a:solidFill>
                 <a:latin typeface="Arial"/>
               </a:rPr>
-              <a:t>— Стефан Зельц-Аксмахер, основатель и CEO Starsky Robotics,</a:t>
-            </a:r>
-          </a:p>
-          <a:p>
-            <a:pPr algn="ctr">
-              <a:lnSpc>
-                <a:spcPct val="140000"/>
-              </a:lnSpc>
-            </a:pPr>
-            <a:r>
-              <a:rPr sz="1300" b="0" i="1">
-                <a:solidFill>
-                  <a:srgbClr val="6B7685"/>
-                </a:solidFill>
-                <a:latin typeface="Arial"/>
-              </a:rPr>
-              <a:t>Medium эссе «The end of Starsky Robotics», март 2020</a:t>
+              <a:t>Medium-эссе «The конец of Starsky Роботics», март 2020</a:t>
             </a:r>
           </a:p>
         </p:txBody>
@@ -18659,7 +18473,7 @@
                 </a:solidFill>
                 <a:latin typeface="Arial"/>
               </a:rPr>
-              <a:t>Каждый новый edge-case требует labeled данных. На до выручки масштаб денег не хватает.</a:t>
+              <a:t>Каждый новый краевой случай требует размеченных данных. На до получения выручки масштаб денег не хватает.</a:t>
             </a:r>
           </a:p>
         </p:txBody>
@@ -18746,7 +18560,7 @@
                 </a:solidFill>
                 <a:latin typeface="Arial"/>
               </a:rPr>
-              <a:t>Sim-to-real имеет реальные пределы</a:t>
+              <a:t>симуляция-к-реальности имеет реальные пределы</a:t>
             </a:r>
           </a:p>
         </p:txBody>
@@ -18785,7 +18599,7 @@
                 </a:solidFill>
                 <a:latin typeface="Arial"/>
               </a:rPr>
-              <a:t>Симуляция не покрывает long-tail. ML, обученная только на sim, не обобщается на публичный дороги.</a:t>
+              <a:t>Симуляция не покрывает длинный хвост. ML, обученная только на sim, не обобщается на публичный дороги.</a:t>
             </a:r>
           </a:p>
         </p:txBody>
@@ -18872,7 +18686,7 @@
                 </a:solidFill>
                 <a:latin typeface="Arial"/>
               </a:rPr>
-              <a:t>Большие deal'ы не материализуются</a:t>
+              <a:t>Большие контракт'ы не материализуются</a:t>
             </a:r>
           </a:p>
         </p:txBody>
@@ -18911,7 +18725,7 @@
                 </a:solidFill>
                 <a:latin typeface="Arial"/>
               </a:rPr>
-              <a:t>Грузоперевозчики — консервативные customers. Untested стек не покупают.</a:t>
+              <a:t>Грузоперевозчики — консервативные клиенты. Неиспытанный стек не покупают.</a:t>
             </a:r>
           </a:p>
         </p:txBody>
@@ -19037,7 +18851,7 @@
                 </a:solidFill>
                 <a:latin typeface="Arial"/>
               </a:rPr>
-              <a:t>Каждый новый edge-case требует labeled данных. На до выручки масштаб денег не хватает.</a:t>
+              <a:t>Каждый новый краевой случай требует размеченных данных. На до получения выручки масштаб денег не хватает.</a:t>
             </a:r>
           </a:p>
         </p:txBody>
@@ -19124,7 +18938,7 @@
                 </a:solidFill>
                 <a:latin typeface="Arial"/>
               </a:rPr>
-              <a:t>Sim-to-real имеет реальные пределы</a:t>
+              <a:t>симуляция-к-реальности имеет реальные пределы</a:t>
             </a:r>
           </a:p>
         </p:txBody>
@@ -19163,7 +18977,7 @@
                 </a:solidFill>
                 <a:latin typeface="Arial"/>
               </a:rPr>
-              <a:t>Симуляция не покрывает long-tail. ML, обученная только на sim, не обобщается на публичный дороги.</a:t>
+              <a:t>Симуляция не покрывает длинный хвост. ML, обученная только на sim, не обобщается на публичный дороги.</a:t>
             </a:r>
           </a:p>
         </p:txBody>
@@ -19250,7 +19064,7 @@
                 </a:solidFill>
                 <a:latin typeface="Arial"/>
               </a:rPr>
-              <a:t>Большие deal'ы не материализуются</a:t>
+              <a:t>Большие контракт'ы не материализуются</a:t>
             </a:r>
           </a:p>
         </p:txBody>
@@ -19289,7 +19103,7 @@
                 </a:solidFill>
                 <a:latin typeface="Arial"/>
               </a:rPr>
-              <a:t>Грузоперевозчики — консервативные customers. Untested стек не покупают.</a:t>
+              <a:t>Грузоперевозчики — консервативные клиенты. Неиспытанный стек не покупают.</a:t>
             </a:r>
           </a:p>
         </p:txBody>
@@ -19328,7 +19142,7 @@
                 </a:solidFill>
                 <a:latin typeface="Arial"/>
               </a:rPr>
-              <a:t>First-wave casualty с honest first-person post-mortem · читать эссе полностью</a:t>
+              <a:t>First-wave casualty с honest first-person разбор полётов · читать эссе полностью</a:t>
             </a:r>
           </a:p>
         </p:txBody>
@@ -19902,7 +19716,7 @@
                 </a:solidFill>
                 <a:latin typeface="Arial"/>
               </a:rPr>
-              <a:t>·  Robotaxi survivors: Waymo · Apollo Go · Pony.ai · WeRide</a:t>
+              <a:t>·  Robotaxi выжившие: Waymo · Apollo Go · Pony.ai · WeRide</a:t>
             </a:r>
           </a:p>
           <a:p>
@@ -19934,7 +19748,7 @@
                 </a:solidFill>
                 <a:latin typeface="Arial"/>
               </a:rPr>
-              <a:t>·  Tesla Robotaxi Austin: vision-only без HD-map, 14 ДТП за 8 мес.</a:t>
+              <a:t>·  Tesla Robotaxi Austin: только-зрение без HD-map, 14 ДТП за 8 мес.</a:t>
             </a:r>
           </a:p>
           <a:p>
@@ -19950,7 +19764,7 @@
                 </a:solidFill>
                 <a:latin typeface="Arial"/>
               </a:rPr>
-              <a:t>·  Last-mile: Starship · Coco · Zipline · Nuro разворот</a:t>
+              <a:t>·  Последняя миля: Starship · Coco · Zipline · Nuro разворот</a:t>
             </a:r>
           </a:p>
           <a:p>
@@ -19966,7 +19780,7 @@
                 </a:solidFill>
                 <a:latin typeface="Arial"/>
               </a:rPr>
-              <a:t>·  Cruise GM выход — centerpiece ($10B → 0)</a:t>
+              <a:t>·  Cruise GM выход — центральный кейс ($10B → 0)</a:t>
             </a:r>
           </a:p>
           <a:p>
@@ -20048,7 +19862,7 @@
                 <a:latin typeface="Arial"/>
               </a:rPr>
               <a:t>Waymo март 2026: 500 000 поездок/неделю, 3 067 машин 5-го поколения.
-HD-карта + LiDAR + удалённый ops + formal безопасность кейс.</a:t>
+HD-карта + LiDAR + удалённый опс + формальный безопасность кейс.</a:t>
             </a:r>
           </a:p>
         </p:txBody>
@@ -20111,7 +19925,7 @@
                 </a:solidFill>
                 <a:latin typeface="Arial"/>
               </a:rPr>
-              <a:t>Waymo self-driving car · Wikimedia · CC-BY-SA</a:t>
+              <a:t>Waymo самоуправление car · Wikimedia · CC-BY-SA</a:t>
             </a:r>
           </a:p>
         </p:txBody>
@@ -20262,7 +20076,7 @@
                 </a:solidFill>
                 <a:latin typeface="Arial"/>
               </a:rPr>
-              <a:t>14M cumulative поездок за 2025</a:t>
+              <a:t>14M совокупно поездок за 2025</a:t>
             </a:r>
           </a:p>
           <a:p>
@@ -20310,7 +20124,7 @@
                 </a:solidFill>
                 <a:latin typeface="Arial"/>
               </a:rPr>
-              <a:t>Стек full-sensor approach</a:t>
+              <a:t>Стек подход «полный набор сенсоров»</a:t>
             </a:r>
           </a:p>
           <a:p>
@@ -20358,7 +20172,7 @@
                 </a:solidFill>
                 <a:latin typeface="Arial"/>
               </a:rPr>
-              <a:t>Formal безопасность кейс (регуляторный document)</a:t>
+              <a:t>Формальный безопасность кейс (регуляторный document)</a:t>
             </a:r>
           </a:p>
           <a:p>
@@ -20445,7 +20259,7 @@
                 </a:solidFill>
                 <a:latin typeface="Arial"/>
               </a:rPr>
-              <a:t>Паттерн выживания: crawl-walk-run · узкий ODD · не переобещание · patient капитал Alphabet</a:t>
+              <a:t>Паттерн выживания: поэтапный ввод (ползком-шагом-бегом) · узкий ODD · не переобещают · терпеливый капитал Alphabet</a:t>
             </a:r>
           </a:p>
         </p:txBody>
@@ -21359,7 +21173,7 @@
                 </a:solidFill>
                 <a:latin typeface="Arial"/>
               </a:rPr>
-              <a:t>Государственная координация + единая регуляторика на национальном уровне (vs US state patchwork)</a:t>
+              <a:t>Государственная координация + единая регуляторика на национальном уровне (vs US состояние мозаичный)</a:t>
             </a:r>
           </a:p>
         </p:txBody>
@@ -21575,7 +21389,7 @@
                 </a:solidFill>
                 <a:latin typeface="Arial"/>
               </a:rPr>
-              <a:t>Timeline</a:t>
+              <a:t>Хронология</a:t>
             </a:r>
           </a:p>
           <a:p>
@@ -21655,7 +21469,7 @@
                 </a:solidFill>
                 <a:latin typeface="Arial"/>
               </a:rPr>
-              <a:t>(SEC 6-K: ~338 юаней daily net income/vehicle · ~23 заказа/день)</a:t>
+              <a:t>(SEC 6-K: ~338 юаней daily net income/автомобиль · ~23 заказа/день)</a:t>
             </a:r>
           </a:p>
           <a:p>
@@ -21822,7 +21636,7 @@
                 </a:solidFill>
                 <a:latin typeface="Arial"/>
               </a:rPr>
-              <a:t>Контраст с Waymo: не публикует per-trip economics · большая чёрная коробка на 2026</a:t>
+              <a:t>Контраст с Waymo: не публикует за-поездку экономика · большой чёрный ящик на 2026</a:t>
             </a:r>
           </a:p>
         </p:txBody>
@@ -21888,7 +21702,7 @@
                 <a:latin typeface="Arial"/>
               </a:rPr>
               <a:t>Tesla Robotaxi Austin: 22 июня 2025 — старт.
-~800 000 миль · 14 ДТП за 8 месяцев · vision-only без HD-карты.</a:t>
+~800 000 миль · 14 ДТП за 8 месяцев · только-зрение без HD-карты.</a:t>
             </a:r>
           </a:p>
         </p:txBody>
@@ -22038,7 +21852,7 @@
                 </a:solidFill>
                 <a:latin typeface="Arial"/>
               </a:rPr>
-              <a:t>Timeline 2025-2026</a:t>
+              <a:t>Хронология 2025-2026</a:t>
             </a:r>
           </a:p>
           <a:p>
@@ -22070,7 +21884,7 @@
                 </a:solidFill>
                 <a:latin typeface="Arial"/>
               </a:rPr>
-              <a:t>Декабрь 2025 · тесты без operators (employees)</a:t>
+              <a:t>Декабрь 2025 · тесты без операторs (employees)</a:t>
             </a:r>
           </a:p>
           <a:p>
@@ -22269,7 +22083,7 @@
                 </a:solidFill>
                 <a:latin typeface="Arial"/>
               </a:rPr>
-              <a:t>Нужны 3 года данных + сравнение mileage</a:t>
+              <a:t>Нужны 3 года данных + сравнение пробег</a:t>
             </a:r>
           </a:p>
           <a:p>
@@ -22301,7 +22115,7 @@
                 </a:solidFill>
                 <a:latin typeface="Arial"/>
               </a:rPr>
-              <a:t>Vision-only без HD-карты</a:t>
+              <a:t>Только-зрение без HD-карты</a:t>
             </a:r>
           </a:p>
           <a:p>
@@ -22317,7 +22131,7 @@
                 </a:solidFill>
                 <a:latin typeface="Arial"/>
               </a:rPr>
-              <a:t>Tesla верит: end-to-end vision-only стек достаточен для L4</a:t>
+              <a:t>Tesla верит: сквозной только-зрение стек достаточен для L4</a:t>
             </a:r>
           </a:p>
           <a:p>
@@ -22333,7 +22147,7 @@
                 </a:solidFill>
                 <a:latin typeface="Arial"/>
               </a:rPr>
-              <a:t>Waymo: multi-modal сенсор stack + HD-map (proven паттерн)</a:t>
+              <a:t>Waymo: multi-modal сенсор стек + HD-map (проверенный паттерн)</a:t>
             </a:r>
           </a:p>
           <a:p>
@@ -22397,7 +22211,7 @@
                 </a:solidFill>
                 <a:latin typeface="Arial"/>
               </a:rPr>
-              <a:t>Human базовая линия: ~1 смертельный на 100M миль</a:t>
+              <a:t>Человеческая базовая линия: ~1 смертельный на 100M миль</a:t>
             </a:r>
           </a:p>
           <a:p>
@@ -22468,7 +22282,7 @@
                 </a:solidFill>
                 <a:latin typeface="Arial"/>
               </a:rPr>
-              <a:t>«We Robotaxi everywhere by end of 2026» — Musk Oct 2024. На середину 2026: Austin+Houston+Dallas.</a:t>
+              <a:t>«We Robotaxi everywhere by конец of 2026» — Musk Oct 2024. На середину 2026: Austin+Houston+Dallas.</a:t>
             </a:r>
           </a:p>
         </p:txBody>
@@ -22533,7 +22347,7 @@
                 </a:solidFill>
                 <a:latin typeface="Arial"/>
               </a:rPr>
-              <a:t>Last-mile: Starship 9M+ доставок · Coco 1000+ роботов LA.
+              <a:t>Последняя миля: Starship 9M+ доставок · Coco 1000+ роботов LA.
 Zipline 100M миль Africa · Nuro разворот 2024 — выход B2C.</a:t>
             </a:r>
           </a:p>
@@ -22702,7 +22516,7 @@
                 <a:latin typeface="Arial"/>
               </a:rPr>
               <a:t>Где работает: кампусы, узкий controlled
-Где не: dense городской (snow, vandalism)</a:t>
+Где не: плотный городской (снег, вандализм)</a:t>
             </a:r>
           </a:p>
         </p:txBody>
@@ -22852,7 +22666,7 @@
                 </a:solidFill>
                 <a:latin typeface="Arial"/>
               </a:rPr>
-              <a:t>Coco Robotics</a:t>
+              <a:t>Coco Роботics</a:t>
             </a:r>
           </a:p>
         </p:txBody>
@@ -23019,7 +22833,7 @@
                 </a:solidFill>
                 <a:latin typeface="Arial"/>
               </a:rPr>
-              <a:t>Zipline (drones Africa)</a:t>
+              <a:t>Zipline (дроны Africa)</a:t>
             </a:r>
           </a:p>
         </p:txBody>
@@ -23099,8 +22913,8 @@
                 </a:solidFill>
                 <a:latin typeface="Arial"/>
               </a:rPr>
-              <a:t>$7,6B valuation · $150M State Dept Nov 2025
-Proven mass-deployment medical Africa</a:t>
+              <a:t>$7,6B оценка · $150M State Dept Nov 2025
+Proven массовый-развёртывание медицинский Africa</a:t>
             </a:r>
           </a:p>
         </p:txBody>
@@ -23163,7 +22977,7 @@
                 </a:solidFill>
                 <a:latin typeface="Arial"/>
               </a:rPr>
-              <a:t>Zipline Drone Launch · Wikimedia</a:t>
+              <a:t>Zipline Дрон Launch · Wikimedia</a:t>
             </a:r>
           </a:p>
         </p:txBody>
@@ -23291,7 +23105,7 @@
               </a:rPr>
               <a:t>Exit B2C доставка 2024
 Pivot к лицензированию
-autonomous-стека OEM</a:t>
+автономный-стека OEM</a:t>
             </a:r>
           </a:p>
         </p:txBody>
@@ -23331,7 +23145,7 @@
                 <a:latin typeface="Arial"/>
               </a:rPr>
               <a:t>Урок: B2C доставка не оказался
-profitable в American городской context</a:t>
+прибыльный в American городской context</a:t>
             </a:r>
           </a:p>
         </p:txBody>
@@ -23370,7 +23184,7 @@
                 </a:solidFill>
                 <a:latin typeface="Arial"/>
               </a:rPr>
-              <a:t>Sidewalk robots — узкие ниши · drone городской US — FAA заблокировано · medical Africa — единственный proven mass-deployment</a:t>
+              <a:t>Тротуарный роботs — узкие ниши · дрон городской US — FAA заблокировано · медицинский Africa — единственный проверенный массовый-развёртывание</a:t>
             </a:r>
           </a:p>
         </p:txBody>
@@ -23586,7 +23400,7 @@
                 </a:solidFill>
                 <a:latin typeface="Arial"/>
               </a:rPr>
-              <a:t>Timeline 2016 → дек 2024</a:t>
+              <a:t>Хронология 2016 → дек 2024</a:t>
             </a:r>
           </a:p>
           <a:p>
@@ -23618,7 +23432,7 @@
                 </a:solidFill>
                 <a:latin typeface="Arial"/>
               </a:rPr>
-              <a:t>2018-2022 — extensive funding, быстрое ODD расширение</a:t>
+              <a:t>2018-2022 — обширный финансирование, быстрое ODD расширение</a:t>
             </a:r>
           </a:p>
           <a:p>
@@ -23682,7 +23496,7 @@
                 </a:solidFill>
                 <a:latin typeface="Arial"/>
               </a:rPr>
-              <a:t>11 дек 2024 — GM полный выход · $10B+ losses · &lt;$500M выручка</a:t>
+              <a:t>11 дек 2024 — GM полный выход · $10B+ убытки · &lt;$500M выручка</a:t>
             </a:r>
           </a:p>
         </p:txBody>
@@ -23769,7 +23583,7 @@
                 </a:solidFill>
                 <a:latin typeface="Arial"/>
               </a:rPr>
-              <a:t>4 уровня failure паттерн</a:t>
+              <a:t>4 уровня провал паттерн</a:t>
             </a:r>
           </a:p>
           <a:p>
@@ -23817,7 +23631,7 @@
                 </a:solidFill>
                 <a:latin typeface="Arial"/>
               </a:rPr>
-              <a:t>Observe сработал · Decide failed (pull over → катастрофа). Provал 2-й стадии OODA.</a:t>
+              <a:t>Observe сработал · Decide провалился (тянуть over → катастрофа). Provал 2-й стадии OODA.</a:t>
             </a:r>
           </a:p>
           <a:p>
@@ -23849,7 +23663,7 @@
                 </a:solidFill>
                 <a:latin typeface="Arial"/>
               </a:rPr>
-              <a:t>2. Business model</a:t>
+              <a:t>2. Бизнес режимl</a:t>
             </a:r>
           </a:p>
           <a:p>
@@ -23865,7 +23679,7 @@
                 </a:solidFill>
                 <a:latin typeface="Arial"/>
               </a:rPr>
-              <a:t>Capital интенсивность без выручка. $10B vs &lt;$500M = 20:1.</a:t>
+              <a:t>Капитал интенсивность без выручка. $10B vs &lt;$500M = 20:1.</a:t>
             </a:r>
           </a:p>
           <a:p>
@@ -23897,7 +23711,7 @@
                 </a:solidFill>
                 <a:latin typeface="Arial"/>
               </a:rPr>
-              <a:t>3. Regulatory / trust</a:t>
+              <a:t>3. Регуляторy / доверие</a:t>
             </a:r>
           </a:p>
           <a:p>
@@ -23913,7 +23727,7 @@
                 </a:solidFill>
                 <a:latin typeface="Arial"/>
               </a:rPr>
-              <a:t>Cruise представила инцидент менее severely чем был. DMV отозвал не за инцидент, за coverup.</a:t>
+              <a:t>Cruise представила инцидент менее severely чем был. DMV отозвал не за инцидент, за сокрытие.</a:t>
             </a:r>
           </a:p>
           <a:p>
@@ -23961,7 +23775,7 @@
                 </a:solidFill>
                 <a:latin typeface="Arial"/>
               </a:rPr>
-              <a:t>GM-Cruise hybrid culture · misalignment затрудняло crawl-walk-run discipline.</a:t>
+              <a:t>GM-Cruise hybrid культура · misalignment затрудняло поэтапный ввод (ползком-шагом-бегом) discipline.</a:t>
             </a:r>
           </a:p>
           <a:p>
@@ -24009,7 +23823,7 @@
                 </a:solidFill>
                 <a:latin typeface="Arial"/>
               </a:rPr>
-              <a:t>Один волочения инцидент + DMV trust violation = killing program.</a:t>
+              <a:t>Один волочения инцидент + DMV доверие нарушение = убийство program.</a:t>
             </a:r>
           </a:p>
         </p:txBody>
@@ -24048,7 +23862,7 @@
                 </a:solidFill>
                 <a:latin typeface="Arial"/>
               </a:rPr>
-              <a:t>Паттерн выживания Waymo: crawl-walk-run, conservative ODD, formal безопасность кейс · Cruise: быстрое ODD ради IPO хронология</a:t>
+              <a:t>Паттерн выживания Waymo: поэтапный ввод (ползком-шагом-бегом), conservative ODD, формальный безопасность кейс · Cruise: быстрое ODD ради IPO хронология</a:t>
             </a:r>
           </a:p>
         </p:txBody>
@@ -24174,8 +23988,8 @@
         </p:nvSpPr>
         <p:spPr>
           <a:xfrm>
-            <a:off x="640080" y="1508760"/>
-            <a:ext cx="640080" cy="640080"/>
+            <a:off x="594360" y="1463039"/>
+            <a:ext cx="502920" cy="502920"/>
           </a:xfrm>
           <a:prstGeom prst="ellipse">
             <a:avLst/>
@@ -24218,8 +24032,8 @@
         </p:nvSpPr>
         <p:spPr>
           <a:xfrm>
-            <a:off x="640080" y="1508760"/>
-            <a:ext cx="640080" cy="640080"/>
+            <a:off x="594360" y="1463039"/>
+            <a:ext cx="502920" cy="502920"/>
           </a:xfrm>
           <a:prstGeom prst="rect">
             <a:avLst/>
@@ -24238,7 +24052,7 @@
               </a:lnSpc>
             </a:pPr>
             <a:r>
-              <a:rPr sz="2200" b="1" i="0">
+              <a:rPr sz="1800" b="1" i="0">
                 <a:solidFill>
                   <a:srgbClr val="FFFFFF"/>
                 </a:solidFill>
@@ -24257,8 +24071,8 @@
         </p:nvSpPr>
         <p:spPr>
           <a:xfrm>
-            <a:off x="1371600" y="1508760"/>
-            <a:ext cx="1207007" cy="640080"/>
+            <a:off x="594360" y="2057400"/>
+            <a:ext cx="1938528" cy="457200"/>
           </a:xfrm>
           <a:prstGeom prst="rect">
             <a:avLst/>
@@ -24277,13 +24091,13 @@
               </a:lnSpc>
             </a:pPr>
             <a:r>
-              <a:rPr sz="1800" b="1" i="0">
-                <a:solidFill>
-                  <a:srgbClr val="21295C"/>
-                </a:solidFill>
-                <a:latin typeface="Arial"/>
-              </a:rPr>
-              <a:t>Контролируемое</a:t>
+              <a:rPr sz="1400" b="1" i="0">
+                <a:solidFill>
+                  <a:srgbClr val="21295C"/>
+                </a:solidFill>
+                <a:latin typeface="Arial"/>
+              </a:rPr>
+              <a:t>Склад / порт</a:t>
             </a:r>
           </a:p>
         </p:txBody>
@@ -24296,8 +24110,8 @@
         </p:nvSpPr>
         <p:spPr>
           <a:xfrm>
-            <a:off x="640080" y="2286000"/>
-            <a:ext cx="1938528" cy="365760"/>
+            <a:off x="594360" y="2560320"/>
+            <a:ext cx="1938528" cy="320040"/>
           </a:xfrm>
           <a:prstGeom prst="rect">
             <a:avLst/>
@@ -24335,8 +24149,8 @@
         </p:nvSpPr>
         <p:spPr>
           <a:xfrm>
-            <a:off x="640080" y="2697480"/>
-            <a:ext cx="1938528" cy="3200400"/>
+            <a:off x="594360" y="2971800"/>
+            <a:ext cx="1938528" cy="2926080"/>
           </a:xfrm>
           <a:prstGeom prst="rect">
             <a:avLst/>
@@ -24422,8 +24236,8 @@
         </p:nvSpPr>
         <p:spPr>
           <a:xfrm>
-            <a:off x="2898648" y="1508760"/>
-            <a:ext cx="640080" cy="640080"/>
+            <a:off x="2852927" y="1463039"/>
+            <a:ext cx="502920" cy="502920"/>
           </a:xfrm>
           <a:prstGeom prst="ellipse">
             <a:avLst/>
@@ -24466,8 +24280,8 @@
         </p:nvSpPr>
         <p:spPr>
           <a:xfrm>
-            <a:off x="2898648" y="1508760"/>
-            <a:ext cx="640080" cy="640080"/>
+            <a:off x="2852927" y="1463039"/>
+            <a:ext cx="502920" cy="502920"/>
           </a:xfrm>
           <a:prstGeom prst="rect">
             <a:avLst/>
@@ -24486,7 +24300,7 @@
               </a:lnSpc>
             </a:pPr>
             <a:r>
-              <a:rPr sz="2200" b="1" i="0">
+              <a:rPr sz="1800" b="1" i="0">
                 <a:solidFill>
                   <a:srgbClr val="FFFFFF"/>
                 </a:solidFill>
@@ -24505,8 +24319,8 @@
         </p:nvSpPr>
         <p:spPr>
           <a:xfrm>
-            <a:off x="3630168" y="1508760"/>
-            <a:ext cx="1207007" cy="640080"/>
+            <a:off x="2852927" y="2057400"/>
+            <a:ext cx="1938528" cy="457200"/>
           </a:xfrm>
           <a:prstGeom prst="rect">
             <a:avLst/>
@@ -24525,7 +24339,7 @@
               </a:lnSpc>
             </a:pPr>
             <a:r>
-              <a:rPr sz="1800" b="1" i="0">
+              <a:rPr sz="1400" b="1" i="0">
                 <a:solidFill>
                   <a:srgbClr val="21295C"/>
                 </a:solidFill>
@@ -24544,8 +24358,8 @@
         </p:nvSpPr>
         <p:spPr>
           <a:xfrm>
-            <a:off x="2898648" y="2286000"/>
-            <a:ext cx="1938528" cy="365760"/>
+            <a:off x="2852927" y="2560320"/>
+            <a:ext cx="1938528" cy="320040"/>
           </a:xfrm>
           <a:prstGeom prst="rect">
             <a:avLst/>
@@ -24583,8 +24397,8 @@
         </p:nvSpPr>
         <p:spPr>
           <a:xfrm>
-            <a:off x="2898648" y="2697480"/>
-            <a:ext cx="1938528" cy="3200400"/>
+            <a:off x="2852927" y="2971800"/>
+            <a:ext cx="1938528" cy="2926080"/>
           </a:xfrm>
           <a:prstGeom prst="rect">
             <a:avLst/>
@@ -24670,8 +24484,8 @@
         </p:nvSpPr>
         <p:spPr>
           <a:xfrm>
-            <a:off x="5157216" y="1508760"/>
-            <a:ext cx="640080" cy="640080"/>
+            <a:off x="5111496" y="1463039"/>
+            <a:ext cx="502920" cy="502920"/>
           </a:xfrm>
           <a:prstGeom prst="ellipse">
             <a:avLst/>
@@ -24714,8 +24528,8 @@
         </p:nvSpPr>
         <p:spPr>
           <a:xfrm>
-            <a:off x="5157216" y="1508760"/>
-            <a:ext cx="640080" cy="640080"/>
+            <a:off x="5111496" y="1463039"/>
+            <a:ext cx="502920" cy="502920"/>
           </a:xfrm>
           <a:prstGeom prst="rect">
             <a:avLst/>
@@ -24734,7 +24548,7 @@
               </a:lnSpc>
             </a:pPr>
             <a:r>
-              <a:rPr sz="2200" b="1" i="0">
+              <a:rPr sz="1800" b="1" i="0">
                 <a:solidFill>
                   <a:srgbClr val="FFFFFF"/>
                 </a:solidFill>
@@ -24753,8 +24567,8 @@
         </p:nvSpPr>
         <p:spPr>
           <a:xfrm>
-            <a:off x="5888736" y="1508760"/>
-            <a:ext cx="1207007" cy="640080"/>
+            <a:off x="5111496" y="2057400"/>
+            <a:ext cx="1938528" cy="457200"/>
           </a:xfrm>
           <a:prstGeom prst="rect">
             <a:avLst/>
@@ -24773,13 +24587,13 @@
               </a:lnSpc>
             </a:pPr>
             <a:r>
-              <a:rPr sz="1800" b="1" i="0">
-                <a:solidFill>
-                  <a:srgbClr val="21295C"/>
-                </a:solidFill>
-                <a:latin typeface="Arial"/>
-              </a:rPr>
-              <a:t>Город+миля</a:t>
+              <a:rPr sz="1400" b="1" i="0">
+                <a:solidFill>
+                  <a:srgbClr val="21295C"/>
+                </a:solidFill>
+                <a:latin typeface="Arial"/>
+              </a:rPr>
+              <a:t>Город + миля</a:t>
             </a:r>
           </a:p>
         </p:txBody>
@@ -24792,8 +24606,8 @@
         </p:nvSpPr>
         <p:spPr>
           <a:xfrm>
-            <a:off x="5157216" y="2286000"/>
-            <a:ext cx="1938528" cy="365760"/>
+            <a:off x="5111496" y="2560320"/>
+            <a:ext cx="1938528" cy="320040"/>
           </a:xfrm>
           <a:prstGeom prst="rect">
             <a:avLst/>
@@ -24831,8 +24645,8 @@
         </p:nvSpPr>
         <p:spPr>
           <a:xfrm>
-            <a:off x="5157216" y="2697480"/>
-            <a:ext cx="1938528" cy="3200400"/>
+            <a:off x="5111496" y="2971800"/>
+            <a:ext cx="1938528" cy="2926080"/>
           </a:xfrm>
           <a:prstGeom prst="rect">
             <a:avLst/>
@@ -24918,8 +24732,8 @@
         </p:nvSpPr>
         <p:spPr>
           <a:xfrm>
-            <a:off x="7415783" y="1508760"/>
-            <a:ext cx="640080" cy="640080"/>
+            <a:off x="7370063" y="1463039"/>
+            <a:ext cx="502920" cy="502920"/>
           </a:xfrm>
           <a:prstGeom prst="ellipse">
             <a:avLst/>
@@ -24962,8 +24776,8 @@
         </p:nvSpPr>
         <p:spPr>
           <a:xfrm>
-            <a:off x="7415783" y="1508760"/>
-            <a:ext cx="640080" cy="640080"/>
+            <a:off x="7370063" y="1463039"/>
+            <a:ext cx="502920" cy="502920"/>
           </a:xfrm>
           <a:prstGeom prst="rect">
             <a:avLst/>
@@ -24982,7 +24796,7 @@
               </a:lnSpc>
             </a:pPr>
             <a:r>
-              <a:rPr sz="2200" b="1" i="0">
+              <a:rPr sz="1800" b="1" i="0">
                 <a:solidFill>
                   <a:srgbClr val="FFFFFF"/>
                 </a:solidFill>
@@ -25001,8 +24815,8 @@
         </p:nvSpPr>
         <p:spPr>
           <a:xfrm>
-            <a:off x="8147304" y="1508760"/>
-            <a:ext cx="1207007" cy="640080"/>
+            <a:off x="7370063" y="2057400"/>
+            <a:ext cx="1938528" cy="457200"/>
           </a:xfrm>
           <a:prstGeom prst="rect">
             <a:avLst/>
@@ -25021,13 +24835,13 @@
               </a:lnSpc>
             </a:pPr>
             <a:r>
-              <a:rPr sz="1800" b="1" i="0">
-                <a:solidFill>
-                  <a:srgbClr val="21295C"/>
-                </a:solidFill>
-                <a:latin typeface="Arial"/>
-              </a:rPr>
-              <a:t>Чрезвыч.</a:t>
+              <a:rPr sz="1400" b="1" i="0">
+                <a:solidFill>
+                  <a:srgbClr val="21295C"/>
+                </a:solidFill>
+                <a:latin typeface="Arial"/>
+              </a:rPr>
+              <a:t>Чёрный лебедь</a:t>
             </a:r>
           </a:p>
         </p:txBody>
@@ -25040,8 +24854,8 @@
         </p:nvSpPr>
         <p:spPr>
           <a:xfrm>
-            <a:off x="7415783" y="2286000"/>
-            <a:ext cx="1938528" cy="365760"/>
+            <a:off x="7370063" y="2560320"/>
+            <a:ext cx="1938528" cy="320040"/>
           </a:xfrm>
           <a:prstGeom prst="rect">
             <a:avLst/>
@@ -25079,8 +24893,8 @@
         </p:nvSpPr>
         <p:spPr>
           <a:xfrm>
-            <a:off x="7415783" y="2697480"/>
-            <a:ext cx="1938528" cy="3200400"/>
+            <a:off x="7370063" y="2971800"/>
+            <a:ext cx="1938528" cy="2926080"/>
           </a:xfrm>
           <a:prstGeom prst="rect">
             <a:avLst/>
@@ -25105,7 +24919,7 @@
                 </a:solidFill>
                 <a:latin typeface="Arial"/>
               </a:rPr>
-              <a:t>Хуситы · Suez · COVID · trucker дефицит · 5 критериев · альтернативы</a:t>
+              <a:t>Хуситы · Suez · COVID · дефицит дальнобойщиков · 5 критериев · альтернативы</a:t>
             </a:r>
           </a:p>
         </p:txBody>
@@ -25166,8 +24980,8 @@
         </p:nvSpPr>
         <p:spPr>
           <a:xfrm>
-            <a:off x="9674351" y="1508760"/>
-            <a:ext cx="640080" cy="640080"/>
+            <a:off x="9628632" y="1463039"/>
+            <a:ext cx="502920" cy="502920"/>
           </a:xfrm>
           <a:prstGeom prst="ellipse">
             <a:avLst/>
@@ -25210,8 +25024,8 @@
         </p:nvSpPr>
         <p:spPr>
           <a:xfrm>
-            <a:off x="9674351" y="1508760"/>
-            <a:ext cx="640080" cy="640080"/>
+            <a:off x="9628632" y="1463039"/>
+            <a:ext cx="502920" cy="502920"/>
           </a:xfrm>
           <a:prstGeom prst="rect">
             <a:avLst/>
@@ -25230,7 +25044,7 @@
               </a:lnSpc>
             </a:pPr>
             <a:r>
-              <a:rPr sz="2200" b="1" i="0">
+              <a:rPr sz="1800" b="1" i="0">
                 <a:solidFill>
                   <a:srgbClr val="FFFFFF"/>
                 </a:solidFill>
@@ -25249,8 +25063,8 @@
         </p:nvSpPr>
         <p:spPr>
           <a:xfrm>
-            <a:off x="10405872" y="1508760"/>
-            <a:ext cx="1207007" cy="640080"/>
+            <a:off x="9628632" y="2057400"/>
+            <a:ext cx="1938528" cy="457200"/>
           </a:xfrm>
           <a:prstGeom prst="rect">
             <a:avLst/>
@@ -25269,7 +25083,7 @@
               </a:lnSpc>
             </a:pPr>
             <a:r>
-              <a:rPr sz="1800" b="1" i="0">
+              <a:rPr sz="1400" b="1" i="0">
                 <a:solidFill>
                   <a:srgbClr val="21295C"/>
                 </a:solidFill>
@@ -25288,8 +25102,8 @@
         </p:nvSpPr>
         <p:spPr>
           <a:xfrm>
-            <a:off x="9674351" y="2286000"/>
-            <a:ext cx="1938528" cy="365760"/>
+            <a:off x="9628632" y="2560320"/>
+            <a:ext cx="1938528" cy="320040"/>
           </a:xfrm>
           <a:prstGeom prst="rect">
             <a:avLst/>
@@ -25327,8 +25141,8 @@
         </p:nvSpPr>
         <p:spPr>
           <a:xfrm>
-            <a:off x="9674351" y="2697480"/>
-            <a:ext cx="1938528" cy="3200400"/>
+            <a:off x="9628632" y="2971800"/>
+            <a:ext cx="1938528" cy="2926080"/>
           </a:xfrm>
           <a:prstGeom prst="rect">
             <a:avLst/>
@@ -25457,7 +25271,7 @@
                 </a:solidFill>
                 <a:latin typeface="Arial"/>
               </a:rPr>
-              <a:t>18 марта 2018, Tempe, Arizona. Элейн Хёрцберг — first AV-pedestrian смертельный случай.
+              <a:t>18 марта 2018, Tempe, Arizona. Элейн Хёрцберг — first AV-пешеход смертельный случай.
 Uber отключил заводское AEB, водитель смотрел телевизор.</a:t>
             </a:r>
           </a:p>
@@ -25624,7 +25438,7 @@
                 </a:solidFill>
                 <a:latin typeface="Arial"/>
               </a:rPr>
-              <a:t>Camera detected pedestrian 5,6 сек до удара</a:t>
+              <a:t>Камера обнаружила пешехода 5,6 сек до удара</a:t>
             </a:r>
           </a:p>
           <a:p>
@@ -25640,7 +25454,7 @@
                 </a:solidFill>
                 <a:latin typeface="Arial"/>
               </a:rPr>
-              <a:t>Perception classifier failed: не классифицировал как pedestrian</a:t>
+              <a:t>Классификатор восприятия провалился: не классифицировал как пешеход</a:t>
             </a:r>
           </a:p>
           <a:p>
@@ -25656,7 +25470,7 @@
                 </a:solidFill>
                 <a:latin typeface="Arial"/>
               </a:rPr>
-              <a:t>(Hertzberg была вне crosswalk + с велосипедом → distribution-edge)</a:t>
+              <a:t>(Hertzberg была вне пешеходный переход + с велосипедом → вне-распределения)</a:t>
             </a:r>
           </a:p>
           <a:p>
@@ -25672,7 +25486,7 @@
                 </a:solidFill>
                 <a:latin typeface="Arial"/>
               </a:rPr>
-              <a:t>Uber отключил заводское automatic экстренное braking (AEB) на Volvo XC90</a:t>
+              <a:t>Uber отключил заводское автоматический экстренное торможение (AEB) на Volvo XC90</a:t>
             </a:r>
           </a:p>
           <a:p>
@@ -25688,7 +25502,7 @@
                 </a:solidFill>
                 <a:latin typeface="Arial"/>
               </a:rPr>
-              <a:t>Backup водитель: watching TV (Hulu) во время инцидента</a:t>
+              <a:t>Резерв водитель: watching TV (Hulu (стриминг)) во время инцидента</a:t>
             </a:r>
           </a:p>
         </p:txBody>
@@ -25791,7 +25605,7 @@
                 </a:solidFill>
                 <a:latin typeface="Arial"/>
               </a:rPr>
-              <a:t>«Uber ATG's deactivation of its automatic экстренное braking system increased  risks associated with testing автоматизированный vehicles on публичный дороги.»</a:t>
+              <a:t>«Uber ATG's deactivation of its автоматический экстренное торможение система increased  risks associated with testing автоматизированный автомобильs on публичный дороги.»</a:t>
             </a:r>
           </a:p>
           <a:p>
@@ -25823,7 +25637,7 @@
                 </a:solidFill>
                 <a:latin typeface="Arial"/>
               </a:rPr>
-              <a:t>«Uber's inadequate безопасность culture and inadequate безопасность risk assessment procedures were cited as factors.»</a:t>
+              <a:t>«Uber's недостаточный безопасность культура and недостаточный безопасность risk assessment procedures were cited as factors.»</a:t>
             </a:r>
           </a:p>
           <a:p>
@@ -25871,7 +25685,7 @@
                 </a:solidFill>
                 <a:latin typeface="Arial"/>
               </a:rPr>
-              <a:t>• ODD critical: обучение data bias на pedestrians вне crosswalk</a:t>
+              <a:t>• ODD критический: обучение данные смещение на пешеходы вне пешеходный переход</a:t>
             </a:r>
           </a:p>
           <a:p>
@@ -25903,7 +25717,7 @@
                 </a:solidFill>
                 <a:latin typeface="Arial"/>
               </a:rPr>
-              <a:t>• Safety внимание водителя не reliable (10-15 мин)</a:t>
+              <a:t>• Безопасность внимание водителя не reliable (10-15 мин)</a:t>
             </a:r>
           </a:p>
           <a:p>
@@ -25951,7 +25765,7 @@
                 </a:solidFill>
                 <a:latin typeface="Arial"/>
               </a:rPr>
-              <a:t>Backup водитель: pleaded guilty endangerment 2023, 3 года supervised probation</a:t>
+              <a:t>Резерв водитель: pleaded guilty endangerment 2023, 3 года supervised испытательный срок</a:t>
             </a:r>
           </a:p>
         </p:txBody>
@@ -25990,7 +25804,7 @@
                 </a:solidFill>
                 <a:latin typeface="Arial"/>
               </a:rPr>
-              <a:t>Foundation для NHTSA Standing General Order on Crash Reporting · институциональный legacy</a:t>
+              <a:t>Foundation для NHTSA постановление NHTSA on отчётность об авариях · институциональный legacy</a:t>
             </a:r>
           </a:p>
         </p:txBody>
@@ -26055,7 +25869,7 @@
                 </a:solidFill>
                 <a:latin typeface="Arial"/>
               </a:rPr>
-              <a:t>NHTSA SGO Oct 2025: 65 сообщений, 54 verified смертельных случаев Tesla Autopilot.
+              <a:t>NHTSA SGO Oct 2025: 65 сообщений, 54 проверенный смертельных случаев Tesla Autopilot.
 EA22002: 13 смертельный ДТП с предвидимое неправильное использование.</a:t>
             </a:r>
           </a:p>
@@ -26221,7 +26035,7 @@
                 </a:solidFill>
                 <a:latin typeface="Arial"/>
               </a:rPr>
-              <a:t>verified смертельных случаев</a:t>
+              <a:t>проверенный смертельных случаев</a:t>
             </a:r>
           </a:p>
         </p:txBody>
@@ -26402,7 +26216,7 @@
                 </a:solidFill>
                 <a:latin typeface="Arial"/>
               </a:rPr>
-              <a:t>EA22002 investigation</a:t>
+              <a:t>EA22002 расследование</a:t>
             </a:r>
           </a:p>
           <a:p>
@@ -26434,7 +26248,7 @@
                 </a:solidFill>
                 <a:latin typeface="Arial"/>
               </a:rPr>
-              <a:t>Главный вопрос: достаточно ли driver-monitoring? warning system?</a:t>
+              <a:t>Главный вопрос: достаточно ли мониторинг водителя? warning system?</a:t>
             </a:r>
           </a:p>
           <a:p>
@@ -26514,7 +26328,7 @@
                 </a:solidFill>
                 <a:latin typeface="Arial"/>
               </a:rPr>
-              <a:t>• Naming имеет значение — «Autopilot» / «Full Self-Driving» invite over-reliance</a:t>
+              <a:t>• Наименование имеет значение — «Autopilot» / «FSD («полное» самовождение)» приглашение избыточное доверие</a:t>
             </a:r>
           </a:p>
           <a:p>
@@ -26530,7 +26344,7 @@
                 </a:solidFill>
                 <a:latin typeface="Arial"/>
               </a:rPr>
-              <a:t>• Driver-monitoring обязателен (real engagement check, не camera-looking-at-face)</a:t>
+              <a:t>• Мониторинг водителя обязателен (real вовлечённость проверка, не камера-смотрит-на-лицо)</a:t>
             </a:r>
           </a:p>
           <a:p>
@@ -26546,7 +26360,7 @@
                 </a:solidFill>
                 <a:latin typeface="Arial"/>
               </a:rPr>
-              <a:t>• Edge cases в perception (sun glare, parked экстренное vehicles)</a:t>
+              <a:t>• Краевой случайs в perception (sun засветка, припаркованный экстренное автомобильs)</a:t>
             </a:r>
           </a:p>
           <a:p>
@@ -26562,7 +26376,7 @@
                 </a:solidFill>
                 <a:latin typeface="Arial"/>
               </a:rPr>
-              <a:t>• Vision-only без HD-map — research-stage для L4</a:t>
+              <a:t>• Только-зрение без HD-map — исследование-stage для L4</a:t>
             </a:r>
           </a:p>
           <a:p>
@@ -26594,7 +26408,7 @@
                 </a:solidFill>
                 <a:latin typeface="Arial"/>
               </a:rPr>
-              <a:t>Statistical comparison</a:t>
+              <a:t>Статистический comparison</a:t>
             </a:r>
           </a:p>
           <a:p>
@@ -26610,7 +26424,7 @@
                 </a:solidFill>
                 <a:latin typeface="Arial"/>
               </a:rPr>
-              <a:t>Human базовая линия: ~1 смертельный на 100M миль</a:t>
+              <a:t>Человеческая базовая линия: ~1 смертельный на 100M миль</a:t>
             </a:r>
           </a:p>
           <a:p>
@@ -26642,7 +26456,7 @@
                 </a:solidFill>
                 <a:latin typeface="Arial"/>
               </a:rPr>
-              <a:t>Vendor PR утверждает обратное · NHTSA disclosure показывает structural паттерн</a:t>
+              <a:t>Вендор PR утверждает обратное · NHTSA раскрытие показывает структурный паттерн</a:t>
             </a:r>
           </a:p>
         </p:txBody>
@@ -26681,7 +26495,7 @@
                 </a:solidFill>
                 <a:latin typeface="Arial"/>
               </a:rPr>
-              <a:t>Tesla Vehicle Safety Report использует Tesla's own definition vs human-driver ALL miles · apples-to-oranges</a:t>
+              <a:t>Tesla Автомобиль Безопасность Report использует Tesla's own определение vs human-driver ALL мили · apples-to-oranges</a:t>
             </a:r>
           </a:p>
         </p:txBody>
@@ -26747,7 +26561,7 @@
                 <a:latin typeface="Arial"/>
               </a:rPr>
               <a:t>Четыре урока городского AV: ODD дисциплина / мониторинг водителя /
-naming имеет значение / hardware ≠ платформа.</a:t>
+наименование имеет значение / аппаратура ≠ платформа.</a:t>
             </a:r>
           </a:p>
         </p:txBody>
@@ -27171,7 +26985,7 @@
                 <a:latin typeface="Arial"/>
               </a:rPr>
               <a:t>Cruise (волочения + быстрое расширение)
-Uber Tempe (обучение bias)</a:t>
+Uber Tempe (обучение смещение)</a:t>
             </a:r>
           </a:p>
         </p:txBody>
@@ -27258,7 +27072,7 @@
                 </a:solidFill>
                 <a:latin typeface="Arial"/>
               </a:rPr>
-              <a:t>При оценке AV-программы: какой ODD? условия за пределами ODD? процесс validation для new expansion?</a:t>
+              <a:t>При оценке AV-программы: какой ODD? условия за пределами ODD? процесс validation для новый расширение?</a:t>
             </a:r>
           </a:p>
         </p:txBody>
@@ -27345,7 +27159,7 @@
                 </a:solidFill>
                 <a:latin typeface="Arial"/>
               </a:rPr>
-              <a:t>Driver-monitoring обязателен</a:t>
+              <a:t>Мониторинг водителя обязателен</a:t>
             </a:r>
           </a:p>
         </p:txBody>
@@ -27520,7 +27334,7 @@
                 </a:solidFill>
                 <a:latin typeface="Arial"/>
               </a:rPr>
-              <a:t>При L2/L3: реальный engagement check, не camera-looking-at-face. Что система делает при distracted driver?</a:t>
+              <a:t>При L2/L3: реальный вовлечённость проверка, не камера-смотрит-на-лицо. Что система делает при distracted driver?</a:t>
             </a:r>
           </a:p>
         </p:txBody>
@@ -27607,7 +27421,7 @@
                 </a:solidFill>
                 <a:latin typeface="Arial"/>
               </a:rPr>
-              <a:t>Naming имеет значение</a:t>
+              <a:t>Наименование имеет значение</a:t>
             </a:r>
           </a:p>
         </p:txBody>
@@ -27694,7 +27508,7 @@
                 </a:solidFill>
                 <a:latin typeface="Arial"/>
               </a:rPr>
-              <a:t>Tesla «Autopilot» / «Full Self-Driving» — invite over-reliance</a:t>
+              <a:t>Tesla «Autopilot» / «FSD («полное» самовождение)» — приглашение избыточное доверие</a:t>
             </a:r>
           </a:p>
         </p:txBody>
@@ -27781,7 +27595,7 @@
                 </a:solidFill>
                 <a:latin typeface="Arial"/>
               </a:rPr>
-              <a:t>Никогда не называть L2 ADAS «pilot» / «autonomous» / «self-driving». Use SAE level terminology.</a:t>
+              <a:t>Никогда не называть L2 ADAS «пилот» / «автономный» / «самоуправление». Использовать терминологию уровней SAE.</a:t>
             </a:r>
           </a:p>
         </p:txBody>
@@ -27868,7 +27682,7 @@
                 </a:solidFill>
                 <a:latin typeface="Arial"/>
               </a:rPr>
-              <a:t>Hardware ≠ платформа</a:t>
+              <a:t>Аппаратура ≠ платформа</a:t>
             </a:r>
           </a:p>
         </p:txBody>
@@ -27955,7 +27769,7 @@
                 </a:solidFill>
                 <a:latin typeface="Arial"/>
               </a:rPr>
-              <a:t>Cruise (GM hardware-OEM культура vs software-platform требования)</a:t>
+              <a:t>Cruise (GM аппаратура-OEM культура vs программная платформа требования)</a:t>
             </a:r>
           </a:p>
         </p:txBody>
@@ -28042,7 +27856,7 @@
                 </a:solidFill>
                 <a:latin typeface="Arial"/>
               </a:rPr>
-              <a:t>Когда OEM покупает software startup — cultural integration plan? GE Predix lesson повторяется.</a:t>
+              <a:t>Когда OEM покупает software стартап — cultural интеграция plan? GE Predix (GE) lesson повторяется.</a:t>
             </a:r>
           </a:p>
         </p:txBody>
@@ -28081,7 +27895,7 @@
                 </a:solidFill>
                 <a:latin typeface="Arial"/>
               </a:rPr>
-              <a:t>Связи: ODD + мониторинг водителя · naming + ODD · hardware ≠ платформа (GE Predix → Cruise GM)</a:t>
+              <a:t>Связи: ODD + мониторинг водителя · наименование + ODD · аппаратура ≠ платформа (GE Predix (GE) → Cruise GM)</a:t>
             </a:r>
           </a:p>
         </p:txBody>
@@ -28703,7 +28517,7 @@
                 </a:solidFill>
                 <a:latin typeface="Arial"/>
               </a:rPr>
-              <a:t>·  Trucker дефицит 78K — структурная, не AI</a:t>
+              <a:t>·  Дефицит дальнобойщиков 78K — структурная, не AI</a:t>
             </a:r>
           </a:p>
           <a:p>
@@ -28735,7 +28549,7 @@
                 </a:solidFill>
                 <a:latin typeface="Arial"/>
               </a:rPr>
-              <a:t>·  Alternative toolkit: OR / EOQ / сценарный / на правилах / HITL</a:t>
+              <a:t>·  Alternative инструментарий: OR / EOQ / сценарный / на правилах / HITL</a:t>
             </a:r>
           </a:p>
         </p:txBody>
@@ -28806,92 +28620,33 @@
           </a:p>
         </p:txBody>
       </p:sp>
-      <p:sp>
-        <p:nvSpPr>
-          <p:cNvPr id="3" name="Rectangle 2"/>
-          <p:cNvSpPr/>
-          <p:nvPr/>
-        </p:nvSpPr>
-        <p:spPr>
-          <a:xfrm>
-            <a:off x="457200" y="1737360"/>
-            <a:ext cx="5943600" cy="3657600"/>
-          </a:xfrm>
-          <a:prstGeom prst="rect">
-            <a:avLst/>
-          </a:prstGeom>
-          <a:solidFill>
-            <a:srgbClr val="E5EAF0"/>
-          </a:solidFill>
-          <a:ln>
-            <a:noFill/>
-          </a:ln>
-          <a:effectLst/>
-        </p:spPr>
-        <p:style>
-          <a:lnRef idx="1">
-            <a:schemeClr val="accent1"/>
-          </a:lnRef>
-          <a:fillRef idx="3">
-            <a:schemeClr val="accent1"/>
-          </a:fillRef>
-          <a:effectRef idx="2">
-            <a:schemeClr val="accent1"/>
-          </a:effectRef>
-          <a:fontRef idx="minor">
-            <a:schemeClr val="lt1"/>
-          </a:fontRef>
-        </p:style>
-        <p:txBody>
-          <a:bodyPr rtlCol="0" anchor="ctr"/>
-          <a:lstStyle/>
-          <a:p>
-            <a:pPr algn="ctr"/>
-          </a:p>
-        </p:txBody>
-      </p:sp>
+      <p:pic>
+        <p:nvPicPr>
+          <p:cNvPr id="3" name="Picture 2" descr="s34b-prosperity-guardian-map.jpg"/>
+          <p:cNvPicPr>
+            <a:picLocks noChangeAspect="1"/>
+          </p:cNvPicPr>
+          <p:nvPr/>
+        </p:nvPicPr>
+        <p:blipFill>
+          <a:blip r:embed="rId2"/>
+          <a:stretch>
+            <a:fillRect/>
+          </a:stretch>
+        </p:blipFill>
+        <p:spPr>
+          <a:xfrm>
+            <a:off x="1238820" y="1737360"/>
+            <a:ext cx="4380359" cy="3657600"/>
+          </a:xfrm>
+          <a:prstGeom prst="rect">
+            <a:avLst/>
+          </a:prstGeom>
+        </p:spPr>
+      </p:pic>
       <p:sp>
         <p:nvSpPr>
           <p:cNvPr id="4" name="TextBox 3"/>
-          <p:cNvSpPr txBox="1"/>
-          <p:nvPr/>
-        </p:nvSpPr>
-        <p:spPr>
-          <a:xfrm>
-            <a:off x="457200" y="3291840"/>
-            <a:ext cx="5943600" cy="548640"/>
-          </a:xfrm>
-          <a:prstGeom prst="rect">
-            <a:avLst/>
-          </a:prstGeom>
-          <a:noFill/>
-        </p:spPr>
-        <p:txBody>
-          <a:bodyPr wrap="square" lIns="0" rIns="0" tIns="0" bIns="0" anchor="t">
-            <a:spAutoFit/>
-          </a:bodyPr>
-          <a:lstStyle/>
-          <a:p>
-            <a:pPr algn="ctr">
-              <a:lnSpc>
-                <a:spcPct val="115000"/>
-              </a:lnSpc>
-            </a:pPr>
-            <a:r>
-              <a:rPr sz="1100" b="0" i="0">
-                <a:solidFill>
-                  <a:srgbClr val="6B7685"/>
-                </a:solidFill>
-                <a:latin typeface="Arial"/>
-              </a:rPr>
-              <a:t>[missing: s34b-prosperity-guardian-map.png]</a:t>
-            </a:r>
-          </a:p>
-        </p:txBody>
-      </p:sp>
-      <p:sp>
-        <p:nvSpPr>
-          <p:cNvPr id="5" name="TextBox 4"/>
           <p:cNvSpPr txBox="1"/>
           <p:nvPr/>
         </p:nvSpPr>
@@ -28930,7 +28685,7 @@
       </p:sp>
       <p:sp>
         <p:nvSpPr>
-          <p:cNvPr id="6" name="Rounded Rectangle 5"/>
+          <p:cNvPr id="5" name="Rounded Rectangle 4"/>
           <p:cNvSpPr/>
           <p:nvPr/>
         </p:nvSpPr>
@@ -28978,7 +28733,7 @@
       </p:sp>
       <p:sp>
         <p:nvSpPr>
-          <p:cNvPr id="7" name="TextBox 6"/>
+          <p:cNvPr id="6" name="TextBox 5"/>
           <p:cNvSpPr txBox="1"/>
           <p:nvPr/>
         </p:nvSpPr>
@@ -29058,7 +28813,7 @@
                 </a:solidFill>
                 <a:latin typeface="Arial"/>
               </a:rPr>
-              <a:t>Daily volume: 4M т → 1,7M т (−57,5%)</a:t>
+              <a:t>Daily объём: 4M т → 1,7M т (−57,5%)</a:t>
             </a:r>
           </a:p>
           <a:p>
@@ -29074,7 +28829,7 @@
                 </a:solidFill>
                 <a:latin typeface="Arial"/>
               </a:rPr>
-              <a:t>Прежде через Red Sea: ~15% морской торговли + ~30% global контейнер</a:t>
+              <a:t>Прежде через Red Sea: ~15% морской торговли + ~30% глобальный контейнер</a:t>
             </a:r>
           </a:p>
           <a:p>
@@ -29090,7 +28845,7 @@
                 </a:solidFill>
                 <a:latin typeface="Arial"/>
               </a:rPr>
-              <a:t>+30% transit время через Cape of Good Hope (Asia-Europe)</a:t>
+              <a:t>+30% транзит время через Cape of Good Hope (Asia-Europe)</a:t>
             </a:r>
           </a:p>
           <a:p>
@@ -29106,7 +28861,7 @@
                 </a:solidFill>
                 <a:latin typeface="Arial"/>
               </a:rPr>
-              <a:t>−9% effective global контейнер пропускная способность (J.P. Morgan)</a:t>
+              <a:t>−9% эффективный глобальный контейнер пропускная способность (J.P. Morgan)</a:t>
             </a:r>
           </a:p>
           <a:p>
@@ -29154,7 +28909,7 @@
                 </a:solidFill>
                 <a:latin typeface="Arial"/>
               </a:rPr>
-              <a:t>ML спрос forecast полностью вне распределения</a:t>
+              <a:t>ML спрос прогноз полностью вне распределения</a:t>
             </a:r>
           </a:p>
           <a:p>
@@ -29170,7 +28925,7 @@
                 </a:solidFill>
                 <a:latin typeface="Arial"/>
               </a:rPr>
-              <a:t>Optimization solvers — нет данных о новых transit times</a:t>
+              <a:t>Оптимизационные решатели — нет данных о новых транзит times</a:t>
             </a:r>
           </a:p>
           <a:p>
@@ -29218,7 +28973,7 @@
                 </a:solidFill>
                 <a:latin typeface="Arial"/>
               </a:rPr>
-              <a:t>Human dispatchers в exception-teams (Maersk, MSC, CMA CGM, Hapag-Lloyd)</a:t>
+              <a:t>Диспетчеры-люди в исключение-teams (Maersk, MSC, CMA CGM, Hapag-Lloyd)</a:t>
             </a:r>
           </a:p>
           <a:p>
@@ -29234,7 +28989,7 @@
                 </a:solidFill>
                 <a:latin typeface="Arial"/>
               </a:rPr>
-              <a:t>Scenario планирование (компании с pre-built сценариями)</a:t>
+              <a:t>Сценарное планирование (компании с готовыми сценариями)</a:t>
             </a:r>
           </a:p>
           <a:p>
@@ -29250,14 +29005,14 @@
                 </a:solidFill>
                 <a:latin typeface="Arial"/>
               </a:rPr>
-              <a:t>OR с manual override (Gurobi/OR-Tools recalibrated)</a:t>
-            </a:r>
-          </a:p>
-        </p:txBody>
-      </p:sp>
-      <p:sp>
-        <p:nvSpPr>
-          <p:cNvPr id="8" name="TextBox 7"/>
+              <a:t>OR с ручное переопределение (Gurobi/OR-Tools перекалибровано)</a:t>
+            </a:r>
+          </a:p>
+        </p:txBody>
+      </p:sp>
+      <p:sp>
+        <p:nvSpPr>
+          <p:cNvPr id="7" name="TextBox 6"/>
           <p:cNvSpPr txBox="1"/>
           <p:nvPr/>
         </p:nvSpPr>
@@ -29537,7 +29292,7 @@
                 </a:solidFill>
                 <a:latin typeface="Arial"/>
               </a:rPr>
-              <a:t>Ever Given — 400-метровый ULCV (Ultra Large Container Vessel)</a:t>
+              <a:t>Ever Given — 400-метровый ULCV (Ultra Large Контейнер Vessel)</a:t>
             </a:r>
           </a:p>
           <a:p>
@@ -29569,7 +29324,7 @@
                 </a:solidFill>
                 <a:latin typeface="Arial"/>
               </a:rPr>
-              <a:t>$9,6 миллиарда goods held up (Bloomberg)</a:t>
+              <a:t>$9,6 миллиарда товары застряло (Bloomberg)</a:t>
             </a:r>
           </a:p>
           <a:p>
@@ -29633,7 +29388,7 @@
                 </a:solidFill>
                 <a:latin typeface="Arial"/>
               </a:rPr>
-              <a:t>Sand storm + strong winds + пилот decisions</a:t>
+              <a:t>Sand storm + strong winds + пилот решениеs</a:t>
             </a:r>
           </a:p>
           <a:p>
@@ -29745,7 +29500,7 @@
                 </a:solidFill>
                 <a:latin typeface="Arial"/>
               </a:rPr>
-              <a:t>Cumulative effort 5,5 дней — инженерное teams 24/7</a:t>
+              <a:t>Совокупно effort 5,5 дней — инженерное teams 24/7</a:t>
             </a:r>
           </a:p>
         </p:txBody>
@@ -29850,7 +29605,7 @@
                 <a:latin typeface="Arial"/>
               </a:rPr>
               <a:t>COVID 2020: точно-в-срок не работает на black-swan.
-Человеческое exception-управление спасло.</a:t>
+Человеческое исключение-управление спасло.</a:t>
             </a:r>
           </a:p>
         </p:txBody>
@@ -30060,8 +29815,8 @@
                 <a:latin typeface="Arial"/>
               </a:rPr>
               <a:t>Lockdowns Wuhan → Italy → Spain → US за 6 недель.
-Demand для consumer goods spike (toilet paper, electronics, home).
-Demand для travel collapse.</a:t>
+Спрос на потребитель товары всплеск (туалетная бумага, электроника, товары для дома).
+Спрос на travel collapse.</a:t>
             </a:r>
           </a:p>
         </p:txBody>
@@ -30271,8 +30026,8 @@
                 <a:latin typeface="Arial"/>
               </a:rPr>
               <a:t>Ports congested (Long Beach 109 ships waiting Oct 2021).
-Container rates spike 5-10×.
-Just-in-time broke. PPE дефицит. Microchip дефицит.</a:t>
+Контейнер rates всплеск 5-10×.
+точно-в-срок сломалось. дефицит СИЗ. дефицит чипов.</a:t>
             </a:r>
           </a:p>
         </p:txBody>
@@ -30482,7 +30237,7 @@
                 <a:latin typeface="Arial"/>
               </a:rPr>
               <a:t>Buffer запасы · многоисточниковый снабжение · nearshoring (Mexico для US, Turkey/Vietnam для Europe).
-«Just-in-case» вместо «just-in-time».</a:t>
+«запас «на случай»» вместо «точно-в-срок».</a:t>
             </a:r>
           </a:p>
         </p:txBody>
@@ -30585,7 +30340,7 @@
                 </a:solidFill>
                 <a:latin typeface="Arial"/>
               </a:rPr>
-              <a:t>ML спрос forecasting — pre-COVID распределение, точность упала на порядок</a:t>
+              <a:t>ML спрос прогнозing — pre-COVID распределение, точность упала на порядок</a:t>
             </a:r>
           </a:p>
           <a:p>
@@ -30601,7 +30356,7 @@
                 </a:solidFill>
                 <a:latin typeface="Arial"/>
               </a:rPr>
-              <a:t>Optimization solvers для запасы — стационарный спрос assumption broke</a:t>
+              <a:t>Оптимизационные решатели для запасы — стационарный спрос допущение сломалось</a:t>
             </a:r>
           </a:p>
           <a:p>
@@ -30617,7 +30372,7 @@
                 </a:solidFill>
                 <a:latin typeface="Arial"/>
               </a:rPr>
-              <a:t>Real-time analytics — данные есть, decisions от человек judgment</a:t>
+              <a:t>Real-time analytics — данные есть, решениеs от человек суждение</a:t>
             </a:r>
           </a:p>
         </p:txBody>
@@ -30720,7 +30475,7 @@
                 </a:solidFill>
                 <a:latin typeface="Arial"/>
               </a:rPr>
-              <a:t>Human исключение management — manual rebuild снабжение chains</a:t>
+              <a:t>Управление исключениями человеком — ручное восстановление цепочки поставок</a:t>
             </a:r>
           </a:p>
           <a:p>
@@ -30736,7 +30491,7 @@
                 </a:solidFill>
                 <a:latin typeface="Arial"/>
               </a:rPr>
-              <a:t>Scenario планирование — pre-built sceнarios (post-SARS планы 2003)</a:t>
+              <a:t>Сценарное планирование — готовых сценариев (post-SARS планы 2003)</a:t>
             </a:r>
           </a:p>
           <a:p>
@@ -30752,7 +30507,7 @@
                 </a:solidFill>
                 <a:latin typeface="Arial"/>
               </a:rPr>
-              <a:t>Diversified снабжение base (многоисточниковый = resilience)</a:t>
+              <a:t>Диверсифицированные снабжение base (многоисточниковый = resilience)</a:t>
             </a:r>
           </a:p>
           <a:p>
@@ -30872,7 +30627,7 @@
                 </a:solidFill>
                 <a:latin typeface="Arial"/>
               </a:rPr>
-              <a:t>Trucker дефицит — структурная трудовой политика проблема, не AI.
+              <a:t>Дефицит дальнобойщиков — структурная проблема трудовой политики, не AI.
 Решается политикой, переподготовкой, условиями труда.</a:t>
             </a:r>
           </a:p>
@@ -30992,7 +30747,7 @@
                 </a:solidFill>
                 <a:latin typeface="Arial"/>
               </a:rPr>
-              <a:t>~60 000 в 2023 («для всех  неправильных reasons» — Bob Costello)</a:t>
+              <a:t>~60 000 в 2023 («для всех  неправильных причин» — Bob Costello)</a:t>
             </a:r>
           </a:p>
           <a:p>
@@ -31040,7 +30795,7 @@
                 </a:solidFill>
                 <a:latin typeface="Arial"/>
               </a:rPr>
-              <a:t>~16% female водители (vs ~50% overall workforce)</a:t>
+              <a:t>~16% female водители (vs ~50% overall рабочая сила)</a:t>
             </a:r>
           </a:p>
           <a:p>
@@ -31072,7 +30827,7 @@
                 </a:solidFill>
                 <a:latin typeface="Arial"/>
               </a:rPr>
-              <a:t>Root causes (структурные)</a:t>
+              <a:t>Корневые причины (структурные)</a:t>
             </a:r>
           </a:p>
           <a:p>
@@ -31088,7 +30843,7 @@
                 </a:solidFill>
                 <a:latin typeface="Arial"/>
               </a:rPr>
-              <a:t>· Старение workforce (mean age 52, retirement wave)</a:t>
+              <a:t>· Старение рабочая сила (mean age 52, retirement wave)</a:t>
             </a:r>
           </a:p>
           <a:p>
@@ -31104,7 +30859,7 @@
                 </a:solidFill>
                 <a:latin typeface="Arial"/>
               </a:rPr>
-              <a:t>· Pay per mile (not hourly) — effective wage под minimum</a:t>
+              <a:t>· Оплата за милю (not почасовая) — эффективный wage под minimum</a:t>
             </a:r>
           </a:p>
           <a:p>
@@ -31239,7 +30994,7 @@
                 </a:solidFill>
                 <a:latin typeface="Arial"/>
               </a:rPr>
-              <a:t>· Visa программы (H-2B расширение для грузовик водители)</a:t>
+              <a:t>· Программы виз (H-2B расширение для грузовик водители)</a:t>
             </a:r>
           </a:p>
           <a:p>
@@ -31255,7 +31010,7 @@
                 </a:solidFill>
                 <a:latin typeface="Arial"/>
               </a:rPr>
-              <a:t>· CDL обучение subsidies (government программы)</a:t>
+              <a:t>· субсидии на обучение CDL (government программы)</a:t>
             </a:r>
           </a:p>
           <a:p>
@@ -31271,7 +31026,7 @@
                 </a:solidFill>
                 <a:latin typeface="Arial"/>
               </a:rPr>
-              <a:t>· Pay restructuring (hourly включая loading время)</a:t>
+              <a:t>· Реструктуризация зарплат (почасовая включая погрузку время)</a:t>
             </a:r>
           </a:p>
           <a:p>
@@ -31287,7 +31042,7 @@
                 </a:solidFill>
                 <a:latin typeface="Arial"/>
               </a:rPr>
-              <a:t>· Equipment quality (newer грузовиков, lower mileage)</a:t>
+              <a:t>· Качество оборудования (newer грузовиков, lower пробег)</a:t>
             </a:r>
           </a:p>
           <a:p>
@@ -31303,7 +31058,7 @@
                 </a:solidFill>
                 <a:latin typeface="Arial"/>
               </a:rPr>
-              <a:t>· Job design (local локальный vs дальнобойный)</a:t>
+              <a:t>· Проектирование рабочих мест (local локальный vs дальнобойный)</a:t>
             </a:r>
           </a:p>
           <a:p>
@@ -31335,7 +31090,7 @@
                 </a:solidFill>
                 <a:latin typeface="Arial"/>
               </a:rPr>
-              <a:t>Почему AV не решит (recall s20)</a:t>
+              <a:t>Почему AV не решит (отзыв s20)</a:t>
             </a:r>
           </a:p>
           <a:p>
@@ -31431,7 +31186,7 @@
                 </a:solidFill>
                 <a:latin typeface="Arial"/>
               </a:rPr>
-              <a:t>Структурные проблемы требуют structural решений.</a:t>
+              <a:t>Структурные проблемы требуют структурный решений.</a:t>
             </a:r>
           </a:p>
           <a:p>
@@ -31486,7 +31241,7 @@
                 </a:solidFill>
                 <a:latin typeface="Arial"/>
               </a:rPr>
-              <a:t>Bob Costello (ATA chief economist): «для всех  неправильных reasons» — downturn, не AV</a:t>
+              <a:t>Bob Costello (ATA главный экономист): «для всех  неправильных причин» — спад, не AV</a:t>
             </a:r>
           </a:p>
         </p:txBody>
@@ -32020,7 +31775,7 @@
                 <a:latin typeface="Arial"/>
               </a:rPr>
               <a:t>Чётко определённая оптимизация
-(TSP, VRP, scheduling)?</a:t>
+(TSP, VRP, планирование расписаний)?</a:t>
             </a:r>
           </a:p>
         </p:txBody>
@@ -32356,7 +32111,7 @@
                 </a:solidFill>
                 <a:latin typeface="Arial"/>
               </a:rPr>
-              <a:t>Да → EOQ + безопасность stock
+              <a:t>Да → EOQ + безопасность запас
 + ABC &gt; ML</a:t>
             </a:r>
           </a:p>
@@ -32655,7 +32410,7 @@
                 <a:latin typeface="Arial"/>
               </a:rPr>
               <a:t>Да → на правилах + HITL
-(FDA, FAA, IMO)</a:t>
+(FDA (рег.), FAA, IMO)</a:t>
             </a:r>
           </a:p>
         </p:txBody>
@@ -33127,7 +32882,46 @@
                 </a:solidFill>
                 <a:latin typeface="Arial"/>
               </a:rPr>
-              <a:t>Это не «всегда AI» или «никогда AI». Рамка решения разбивает нагрузка на категории + правильный инструмент на категорию.</a:t>
+              <a:t>Это не «всегда AI» или «никогда AI». Рамка разбивает нагрузку на категории + правильный инструмент на каждую.</a:t>
+            </a:r>
+          </a:p>
+        </p:txBody>
+      </p:sp>
+      <p:sp>
+        <p:nvSpPr>
+          <p:cNvPr id="40" name="TextBox 39"/>
+          <p:cNvSpPr txBox="1"/>
+          <p:nvPr/>
+        </p:nvSpPr>
+        <p:spPr>
+          <a:xfrm>
+            <a:off x="457200" y="6446520"/>
+            <a:ext cx="11274552" cy="320040"/>
+          </a:xfrm>
+          <a:prstGeom prst="rect">
+            <a:avLst/>
+          </a:prstGeom>
+          <a:noFill/>
+        </p:spPr>
+        <p:txBody>
+          <a:bodyPr wrap="square" lIns="0" rIns="0" tIns="0" bIns="0" anchor="t">
+            <a:spAutoFit/>
+          </a:bodyPr>
+          <a:lstStyle/>
+          <a:p>
+            <a:pPr algn="l">
+              <a:lnSpc>
+                <a:spcPct val="115000"/>
+              </a:lnSpc>
+            </a:pPr>
+            <a:r>
+              <a:rPr sz="1100" b="0" i="1">
+                <a:solidFill>
+                  <a:srgbClr val="1C7293"/>
+                </a:solidFill>
+                <a:latin typeface="Arial"/>
+              </a:rPr>
+              <a:t>+ дополняется 7 вопросами вендору (слайд s40)</a:t>
             </a:r>
           </a:p>
         </p:txBody>
@@ -33192,7 +32986,7 @@
                 </a:solidFill>
                 <a:latin typeface="Arial"/>
               </a:rPr>
-              <a:t>Альтернативный toolkit инженера-логиста: 6 классов инструментов.
+              <a:t>Альтернативный инструментарий инженера-логиста: 6 классов инструментов.
 AI — один из шести, не «универсальное решение».</a:t>
             </a:r>
           </a:p>
@@ -33442,7 +33236,7 @@
                 </a:solidFill>
                 <a:latin typeface="Arial"/>
               </a:rPr>
-              <a:t>Вендор / open source</a:t>
+              <a:t>Вендор / открытый исходный код</a:t>
             </a:r>
           </a:p>
         </p:txBody>
@@ -33612,7 +33406,7 @@
                 </a:solidFill>
                 <a:latin typeface="Arial"/>
               </a:rPr>
-              <a:t>OR (Operations Research)</a:t>
+              <a:t>OR (Исследование операций)</a:t>
             </a:r>
           </a:p>
         </p:txBody>
@@ -33699,7 +33493,7 @@
                 </a:solidFill>
                 <a:latin typeface="Arial"/>
               </a:rPr>
-              <a:t>Маршрутизация (TSP, VRP), scheduling</a:t>
+              <a:t>Маршрутизация (TSP, VRP), планирование расписаний</a:t>
             </a:r>
           </a:p>
         </p:txBody>
@@ -34047,7 +33841,7 @@
                 </a:solidFill>
                 <a:latin typeface="Arial"/>
               </a:rPr>
-              <a:t>Inventory management при стационарный спрос</a:t>
+              <a:t>Управление запасами при стационарный спрос</a:t>
             </a:r>
           </a:p>
         </p:txBody>
@@ -34221,7 +34015,7 @@
                 </a:solidFill>
                 <a:latin typeface="Arial"/>
               </a:rPr>
-              <a:t>EOQ · безопасность stock · ABC analysis для большинства SKU</a:t>
+              <a:t>EOQ · безопасность запас · ABC-анализ для большинства SKU</a:t>
             </a:r>
           </a:p>
         </p:txBody>
@@ -34395,7 +34189,7 @@
                 </a:solidFill>
                 <a:latin typeface="Arial"/>
               </a:rPr>
-              <a:t>Black-swan resilience</a:t>
+              <a:t>устойчивость к чёрному лебедю</a:t>
             </a:r>
           </a:p>
         </p:txBody>
@@ -34569,7 +34363,7 @@
                 </a:solidFill>
                 <a:latin typeface="Arial"/>
               </a:rPr>
-              <a:t>Maersk post-COVID redundancy планирование</a:t>
+              <a:t>Maersk post-COVID резервирование планирование</a:t>
             </a:r>
           </a:p>
         </p:txBody>
@@ -34656,7 +34450,7 @@
                 </a:solidFill>
                 <a:latin typeface="Arial"/>
               </a:rPr>
-              <a:t>Rule-based vision</a:t>
+              <a:t>правиловое зрение</a:t>
             </a:r>
           </a:p>
         </p:txBody>
@@ -34830,7 +34624,7 @@
                 </a:solidFill>
                 <a:latin typeface="Arial"/>
               </a:rPr>
-              <a:t>OpenCV · HALCON · Cognex</a:t>
+              <a:t>OpenCV · HALCON · Cognex (визуальный осмотр)</a:t>
             </a:r>
           </a:p>
         </p:txBody>
@@ -35004,7 +34798,7 @@
                 </a:solidFill>
                 <a:latin typeface="Arial"/>
               </a:rPr>
-              <a:t>Hybrid CV + signal processing</a:t>
+              <a:t>гибрид CV + обработка сигналов</a:t>
             </a:r>
           </a:p>
         </p:txBody>
@@ -35091,7 +34885,7 @@
                 </a:solidFill>
                 <a:latin typeface="Arial"/>
               </a:rPr>
-              <a:t>Multi-sensor инспекция</a:t>
+              <a:t>многосенсорный осмотр</a:t>
             </a:r>
           </a:p>
         </p:txBody>
@@ -35178,7 +34972,7 @@
                 </a:solidFill>
                 <a:latin typeface="Arial"/>
               </a:rPr>
-              <a:t>Cognex VisionPro + radar/ultrasonic</a:t>
+              <a:t>Cognex (визуальный осмотр) ЗрениеPro + radar/ультразвук</a:t>
             </a:r>
           </a:p>
         </p:txBody>
@@ -35265,7 +35059,7 @@
                 </a:solidFill>
                 <a:latin typeface="Arial"/>
               </a:rPr>
-              <a:t>Container damage инспекция в портах</a:t>
+              <a:t>Контейнер ущерб инспекция в портах</a:t>
             </a:r>
           </a:p>
         </p:txBody>
@@ -35526,7 +35320,7 @@
                 </a:solidFill>
                 <a:latin typeface="Arial"/>
               </a:rPr>
-              <a:t>Workflow tools — Jira, ServiceNow</a:t>
+              <a:t>Инструменты управления процессами — Jira, ServiceNow</a:t>
             </a:r>
           </a:p>
         </p:txBody>
@@ -35804,7 +35598,7 @@
                 </a:solidFill>
                 <a:latin typeface="Arial"/>
               </a:rPr>
-              <a:t>Глоссарий must-know — расшифровка + роль в лекции</a:t>
+              <a:t>Глоссарий обязательных терминов — расшифровка + роль в лекции</a:t>
             </a:r>
           </a:p>
         </p:txBody>
@@ -35930,7 +35724,7 @@
                 </a:solidFill>
                 <a:latin typeface="Arial"/>
               </a:rPr>
-              <a:t>Society of Automotive Engineers. Стандарт уровней автомобильной автономии L0-L5.</a:t>
+              <a:t>Общество автомобильных инженеров. Стандарт уровней автомобильной автономии L0-L5.</a:t>
             </a:r>
           </a:p>
         </p:txBody>
@@ -36056,7 +35850,7 @@
                 </a:solidFill>
                 <a:latin typeface="Arial"/>
               </a:rPr>
-              <a:t>Operational Design Domain — область штатной эксплуатации. Главная инженерная дисциплина.</a:t>
+              <a:t>Операционный Design Domain — область штатной эксплуатации. Главная инженерная дисциплина.</a:t>
             </a:r>
           </a:p>
         </p:txBody>
@@ -36182,7 +35976,7 @@
                 </a:solidFill>
                 <a:latin typeface="Arial"/>
               </a:rPr>
-              <a:t>Autonomous Vehicle — автономный автомобиль. Зонтичный термин.</a:t>
+              <a:t>Автономный Автомобиль — автономный автомобиль. Зонтичный термин.</a:t>
             </a:r>
           </a:p>
         </p:txBody>
@@ -36308,7 +36102,7 @@
                 </a:solidFill>
                 <a:latin typeface="Arial"/>
               </a:rPr>
-              <a:t>Autonomous Mobile Robot — автономный мобильный робот, чаще всего складской.</a:t>
+              <a:t>Автономный мобильный робот — автономный мобильный робот, чаще всего складской.</a:t>
             </a:r>
           </a:p>
         </p:txBody>
@@ -36434,7 +36228,7 @@
                 </a:solidFill>
                 <a:latin typeface="Arial"/>
               </a:rPr>
-              <a:t>High-Definition map — детальная карта с точностью ~10 см.</a:t>
+              <a:t>карта высокой точности — детальная карта с точностью ~10 см.</a:t>
             </a:r>
           </a:p>
         </p:txBody>
@@ -36560,7 +36354,7 @@
                 </a:solidFill>
                 <a:latin typeface="Arial"/>
               </a:rPr>
-              <a:t>Operations Research — операционные исследования. НЕ AI. Канонические инструменты — Gurobi, CPLEX, OR-Tools.</a:t>
+              <a:t>Исследование операций — операционные исследования. НЕ AI. Канонические инструменты — Gurobi, CPLEX, OR-Tools.</a:t>
             </a:r>
           </a:p>
         </p:txBody>
@@ -36686,7 +36480,7 @@
                 </a:solidFill>
                 <a:latin typeface="Arial"/>
               </a:rPr>
-              <a:t>Travelling Salesman / Vehicle Routing Problem. UPS ORION экономит ~$300M/год через OR.</a:t>
+              <a:t>задача коммивояжёра / Автомобиль задача маршрутизации. UPS ORION экономит ~$300M/год через OR.</a:t>
             </a:r>
           </a:p>
         </p:txBody>
@@ -36812,7 +36606,7 @@
                 </a:solidFill>
                 <a:latin typeface="Arial"/>
               </a:rPr>
-              <a:t>Economic Order Quantity (Harris 1913). Формула трёх параметров; для большой доли SKU не хуже ML.</a:t>
+              <a:t>Economic размер заказа (Харрис 1913). Формула трёх параметров; для большой доли SKU не хуже ML.</a:t>
             </a:r>
           </a:p>
         </p:txBody>
@@ -36938,7 +36732,7 @@
                 </a:solidFill>
                 <a:latin typeface="Arial"/>
               </a:rPr>
-              <a:t>NHTSA Standing General Order on Crash Reporting. База Tesla/Waymo/Cruise смертельный случай numbers.</a:t>
+              <a:t>NHTSA постановление NHTSA on отчётность об авариях. База Tesla/Waymo/Cruise смертельный случай цифры.</a:t>
             </a:r>
           </a:p>
         </p:txBody>
@@ -37064,7 +36858,7 @@
                 </a:solidFill>
                 <a:latin typeface="Arial"/>
               </a:rPr>
-              <a:t>Human In/On/Off-The-Loop. Три уровня участия человека (Лекция 9).</a:t>
+              <a:t>Human In/On/вне-цикла. Три уровня участия человека (Лекция 9).</a:t>
             </a:r>
           </a:p>
         </p:txBody>
@@ -37339,7 +37133,7 @@
                 </a:solidFill>
                 <a:latin typeface="Arial"/>
               </a:rPr>
-              <a:t>Какое сравнение с OR-baseline
+              <a:t>Какое сравнение с базовой линией OR
 (Google OR-Tools, Gurobi, CPLEX)?</a:t>
             </a:r>
           </a:p>
@@ -37379,8 +37173,8 @@
                 </a:solidFill>
                 <a:latin typeface="Arial"/>
               </a:rPr>
-              <a:t>Почему: UPS ORION: OR &gt; ML для well-defined optimization.
-Если поставщик не делал сравнения — red флаг.</a:t>
+              <a:t>Почему: UPS ORION: OR &gt; ML для чётко поставленной оптимизации.
+Если поставщик не делал сравнения — красный флаг.</a:t>
             </a:r>
           </a:p>
         </p:txBody>
@@ -37551,7 +37345,7 @@
                 <a:latin typeface="Arial"/>
               </a:rPr>
               <a:t>Какой ваш ODD,
-и как валидируется new expansion?</a:t>
+и как валидируется новое расширение?</a:t>
             </a:r>
           </a:p>
         </p:txBody>
@@ -37590,8 +37384,8 @@
                 </a:solidFill>
                 <a:latin typeface="Arial"/>
               </a:rPr>
-              <a:t>Почему: Cruise волочения инцидент Oct 2023 — провал именно ODD-дисциплины.
-Расширение без extensive валидации — anti-pattern.</a:t>
+              <a:t>Почему: Cruise dragging инцидент Oct 2023 — провал именно ODD-дисциплины.
+Расширение без обширной валидации — анти-паттерн.</a:t>
             </a:r>
           </a:p>
         </p:txBody>
@@ -37761,7 +37555,7 @@
                 </a:solidFill>
                 <a:latin typeface="Arial"/>
               </a:rPr>
-              <a:t>Какой ваш мониторинг водителя stack
+              <a:t>Какой ваш стек мониторинга водителя
 (для L2/L3)?</a:t>
             </a:r>
           </a:p>
@@ -37801,7 +37595,7 @@
                 </a:solidFill>
                 <a:latin typeface="Arial"/>
               </a:rPr>
-              <a:t>Почему: Tesla EA22002: 13 смертельный ДТП с предвидимое неправильное использование.
+              <a:t>Почему: Tesla EA22002: 13 смертельных ДТП с предсказуемым неправильным использованием.
 Структурная проблема дизайна, не вина водителей.</a:t>
             </a:r>
           </a:p>
@@ -37972,7 +37766,7 @@
                 </a:solidFill>
                 <a:latin typeface="Arial"/>
               </a:rPr>
-              <a:t>Ratio км в симуляции / км на публичный roads?</a:t>
+              <a:t>Отношение км в симуляции / км на дорогах общего пользования?</a:t>
             </a:r>
           </a:p>
         </p:txBody>
@@ -38011,8 +37805,8 @@
                 </a:solidFill>
                 <a:latin typeface="Arial"/>
               </a:rPr>
-              <a:t>Почему: Starsky sim-to-real разрыв.
-Если только simulation — серьёзный red флаг.</a:t>
+              <a:t>Почему: Starsky разрыв симуляция-к-реальности.
+Если только симуляция — серьёзный красный флаг.</a:t>
             </a:r>
           </a:p>
         </p:txBody>
@@ -38182,8 +37976,8 @@
                 </a:solidFill>
                 <a:latin typeface="Arial"/>
               </a:rPr>
-              <a:t>Error rate на сезонных распределение shifts
-(Black Friday, Christmas)?</a:t>
+              <a:t>Частота ошибок на сезонных сдвигах распределения
+(Чёрная пятница, Рождество)?</a:t>
             </a:r>
           </a:p>
         </p:txBody>
@@ -38222,8 +38016,8 @@
                 </a:solidFill>
                 <a:latin typeface="Arial"/>
               </a:rPr>
-              <a:t>Почему: Distribution сдвиг на сезонных пиках убивает ML-модели,
-обученные на off-peak data.</a:t>
+              <a:t>Почему: Сдвиг распределения на сезонных пиках убивает ML-модели,
+обученные на данных вне пиков.</a:t>
             </a:r>
           </a:p>
         </p:txBody>
@@ -38433,8 +38227,8 @@
                 </a:solidFill>
                 <a:latin typeface="Arial"/>
               </a:rPr>
-              <a:t>Почему: Regulatory аудит обязателен в safety-critical категориях.
-Black-box ML не проходит аудит.</a:t>
+              <a:t>Почему: Регуляторный аудит обязателен в категориях, критичных для безопасности.
+Чёрный ящик ML не проходит аудит.</a:t>
             </a:r>
           </a:p>
         </p:txBody>
@@ -38604,7 +38398,7 @@
                 </a:solidFill>
                 <a:latin typeface="Arial"/>
               </a:rPr>
-              <a:t>Какова единица economics
+              <a:t>Какова удельная экономика
 (на машину / маршрут / тонну)?</a:t>
             </a:r>
           </a:p>
@@ -38644,8 +38438,8 @@
                 </a:solidFill>
                 <a:latin typeface="Arial"/>
               </a:rPr>
-              <a:t>Почему: Pony.ai первый robotaxi с positive операционный прибыль per vehicle
-(Гуанчжоу Nov 2025, Шэньчжэнь Feb 2026).</a:t>
+              <a:t>Почему: Pony.ai первая robotaxi с положительной операционной прибылью на автомобиль
+(Гуанчжоу ноябрь 2025, Шэньчжэнь февраль 2026).</a:t>
             </a:r>
           </a:p>
         </p:txBody>
@@ -38684,7 +38478,7 @@
                 </a:solidFill>
                 <a:latin typeface="Arial"/>
               </a:rPr>
-              <a:t>Чек-лист для оценки vendor proposals · payoff лекции 13</a:t>
+              <a:t>Дополняет 5-критерийную рамку слайда s38 · окупаемость лекции 13</a:t>
             </a:r>
           </a:p>
         </p:txBody>
@@ -38731,8 +38525,8 @@
         </p:blipFill>
         <p:spPr>
           <a:xfrm>
-            <a:off x="609600" y="457200"/>
-            <a:ext cx="6095999" cy="4572000"/>
+            <a:off x="762000" y="457200"/>
+            <a:ext cx="6705600" cy="5029200"/>
           </a:xfrm>
           <a:prstGeom prst="rect">
             <a:avLst/>
@@ -38747,8 +38541,8 @@
         </p:nvSpPr>
         <p:spPr>
           <a:xfrm>
-            <a:off x="457200" y="5120640"/>
-            <a:ext cx="6400800" cy="274320"/>
+            <a:off x="457200" y="5532120"/>
+            <a:ext cx="7315200" cy="274320"/>
           </a:xfrm>
           <a:prstGeom prst="rect">
             <a:avLst/>
@@ -38773,7 +38567,7 @@
                 </a:solidFill>
                 <a:latin typeface="Arial"/>
               </a:rPr>
-              <a:t>Network Operations Center · IUPUI · Wikimedia · CC-BY-SA</a:t>
+              <a:t>Network Операционные Center · IUPUI · Wikimedia · CC-BY-SA</a:t>
             </a:r>
           </a:p>
         </p:txBody>
@@ -38786,8 +38580,8 @@
         </p:nvSpPr>
         <p:spPr>
           <a:xfrm>
-            <a:off x="7132320" y="548640"/>
-            <a:ext cx="4754880" cy="4572000"/>
+            <a:off x="8046720" y="548640"/>
+            <a:ext cx="3840480" cy="5029200"/>
           </a:xfrm>
           <a:prstGeom prst="rect">
             <a:avLst/>
@@ -38802,7 +38596,7 @@
           <a:p>
             <a:pPr algn="l">
               <a:lnSpc>
-                <a:spcPct val="120000"/>
+                <a:spcPct val="115000"/>
               </a:lnSpc>
             </a:pPr>
             <a:r>
@@ -38818,11 +38612,11 @@
           <a:p>
             <a:pPr algn="l">
               <a:lnSpc>
-                <a:spcPct val="120000"/>
-              </a:lnSpc>
-            </a:pPr>
-            <a:r>
-              <a:rPr sz="2800" b="1" i="0">
+                <a:spcPct val="115000"/>
+              </a:lnSpc>
+            </a:pPr>
+            <a:r>
+              <a:rPr sz="2400" b="1" i="0">
                 <a:solidFill>
                   <a:srgbClr val="21295C"/>
                 </a:solidFill>
@@ -38834,23 +38628,23 @@
           <a:p>
             <a:pPr algn="l">
               <a:lnSpc>
-                <a:spcPct val="120000"/>
-              </a:lnSpc>
-            </a:pPr>
-            <a:r>
-              <a:rPr sz="2800" b="1" i="0">
-                <a:solidFill>
-                  <a:srgbClr val="21295C"/>
-                </a:solidFill>
-                <a:latin typeface="Arial"/>
-              </a:rPr>
-              <a:t>та же логика</a:t>
-            </a:r>
-          </a:p>
-          <a:p>
-            <a:pPr algn="l">
-              <a:lnSpc>
-                <a:spcPct val="120000"/>
+                <a:spcPct val="115000"/>
+              </a:lnSpc>
+            </a:pPr>
+            <a:r>
+              <a:rPr sz="2400" b="1" i="0">
+                <a:solidFill>
+                  <a:srgbClr val="21295C"/>
+                </a:solidFill>
+                <a:latin typeface="Arial"/>
+              </a:rPr>
+              <a:t>те же 5 вопросов</a:t>
+            </a:r>
+          </a:p>
+          <a:p>
+            <a:pPr algn="l">
+              <a:lnSpc>
+                <a:spcPct val="115000"/>
               </a:lnSpc>
             </a:pPr>
             <a:r>
@@ -38866,39 +38660,71 @@
           <a:p>
             <a:pPr algn="l">
               <a:lnSpc>
-                <a:spcPct val="120000"/>
-              </a:lnSpc>
-            </a:pPr>
-            <a:r>
-              <a:rPr sz="1400" b="0" i="0">
+                <a:spcPct val="115000"/>
+              </a:lnSpc>
+            </a:pPr>
+            <a:r>
+              <a:rPr sz="1300" b="0" i="0">
                 <a:solidFill>
                   <a:srgbClr val="065A82"/>
                 </a:solidFill>
                 <a:latin typeface="Arial"/>
               </a:rPr>
-              <a:t>Завтра — телекоммуникации,</a:t>
-            </a:r>
-          </a:p>
-          <a:p>
-            <a:pPr algn="l">
-              <a:lnSpc>
-                <a:spcPct val="120000"/>
-              </a:lnSpc>
-            </a:pPr>
-            <a:r>
-              <a:rPr sz="1400" b="0" i="0">
+              <a:t>Следующая лекция —</a:t>
+            </a:r>
+          </a:p>
+          <a:p>
+            <a:pPr algn="l">
+              <a:lnSpc>
+                <a:spcPct val="115000"/>
+              </a:lnSpc>
+            </a:pPr>
+            <a:r>
+              <a:rPr sz="1300" b="0" i="0">
                 <a:solidFill>
                   <a:srgbClr val="065A82"/>
                 </a:solidFill>
                 <a:latin typeface="Arial"/>
               </a:rPr>
-              <a:t>сетевая инфраструктура, кибербез.</a:t>
-            </a:r>
-          </a:p>
-          <a:p>
-            <a:pPr algn="l">
-              <a:lnSpc>
-                <a:spcPct val="120000"/>
+              <a:t>телекоммуникации,</a:t>
+            </a:r>
+          </a:p>
+          <a:p>
+            <a:pPr algn="l">
+              <a:lnSpc>
+                <a:spcPct val="115000"/>
+              </a:lnSpc>
+            </a:pPr>
+            <a:r>
+              <a:rPr sz="1300" b="0" i="0">
+                <a:solidFill>
+                  <a:srgbClr val="065A82"/>
+                </a:solidFill>
+                <a:latin typeface="Arial"/>
+              </a:rPr>
+              <a:t>сетевая инфраструктура,</a:t>
+            </a:r>
+          </a:p>
+          <a:p>
+            <a:pPr algn="l">
+              <a:lnSpc>
+                <a:spcPct val="115000"/>
+              </a:lnSpc>
+            </a:pPr>
+            <a:r>
+              <a:rPr sz="1300" b="0" i="0">
+                <a:solidFill>
+                  <a:srgbClr val="065A82"/>
+                </a:solidFill>
+                <a:latin typeface="Arial"/>
+              </a:rPr>
+              <a:t>кибербезопасность.</a:t>
+            </a:r>
+          </a:p>
+          <a:p>
+            <a:pPr algn="l">
+              <a:lnSpc>
+                <a:spcPct val="115000"/>
               </a:lnSpc>
             </a:pPr>
             <a:r>
@@ -38914,71 +38740,103 @@
           <a:p>
             <a:pPr algn="l">
               <a:lnSpc>
-                <a:spcPct val="120000"/>
-              </a:lnSpc>
-            </a:pPr>
-            <a:r>
-              <a:rPr sz="1200" b="0" i="0">
-                <a:solidFill>
-                  <a:srgbClr val="21295C"/>
-                </a:solidFill>
-                <a:latin typeface="Arial"/>
-              </a:rPr>
-              <a:t>· AI augments человек SOC analyst</a:t>
-            </a:r>
-          </a:p>
-          <a:p>
-            <a:pPr algn="l">
-              <a:lnSpc>
-                <a:spcPct val="120000"/>
-              </a:lnSpc>
-            </a:pPr>
-            <a:r>
-              <a:rPr sz="1200" b="0" i="0">
-                <a:solidFill>
-                  <a:srgbClr val="21295C"/>
-                </a:solidFill>
-                <a:latin typeface="Arial"/>
-              </a:rPr>
-              <a:t>· OR + на правилах threat detection — mainstream</a:t>
-            </a:r>
-          </a:p>
-          <a:p>
-            <a:pPr algn="l">
-              <a:lnSpc>
-                <a:spcPct val="120000"/>
-              </a:lnSpc>
-            </a:pPr>
-            <a:r>
-              <a:rPr sz="1200" b="0" i="0">
-                <a:solidFill>
-                  <a:srgbClr val="21295C"/>
-                </a:solidFill>
-                <a:latin typeface="Arial"/>
-              </a:rPr>
-              <a:t>· ML helps в-distribution, слепо вне распределения</a:t>
-            </a:r>
-          </a:p>
-          <a:p>
-            <a:pPr algn="l">
-              <a:lnSpc>
-                <a:spcPct val="120000"/>
-              </a:lnSpc>
-            </a:pPr>
-            <a:r>
-              <a:rPr sz="1200" b="0" i="0">
-                <a:solidFill>
-                  <a:srgbClr val="21295C"/>
-                </a:solidFill>
-                <a:latin typeface="Arial"/>
-              </a:rPr>
-              <a:t>· HITL обязателен в исключение events</a:t>
-            </a:r>
-          </a:p>
-          <a:p>
-            <a:pPr algn="l">
-              <a:lnSpc>
-                <a:spcPct val="120000"/>
+                <a:spcPct val="115000"/>
+              </a:lnSpc>
+            </a:pPr>
+            <a:r>
+              <a:rPr sz="1100" b="0" i="0">
+                <a:solidFill>
+                  <a:srgbClr val="21295C"/>
+                </a:solidFill>
+                <a:latin typeface="Arial"/>
+              </a:rPr>
+              <a:t>· AI помогает SOC-аналитику</a:t>
+            </a:r>
+          </a:p>
+          <a:p>
+            <a:pPr algn="l">
+              <a:lnSpc>
+                <a:spcPct val="115000"/>
+              </a:lnSpc>
+            </a:pPr>
+            <a:r>
+              <a:rPr sz="1100" b="0" i="0">
+                <a:solidFill>
+                  <a:srgbClr val="21295C"/>
+                </a:solidFill>
+                <a:latin typeface="Arial"/>
+              </a:rPr>
+              <a:t>· OR + правиловая детекция —</a:t>
+            </a:r>
+          </a:p>
+          <a:p>
+            <a:pPr algn="l">
+              <a:lnSpc>
+                <a:spcPct val="115000"/>
+              </a:lnSpc>
+            </a:pPr>
+            <a:r>
+              <a:rPr sz="1100" b="0" i="0">
+                <a:solidFill>
+                  <a:srgbClr val="21295C"/>
+                </a:solidFill>
+                <a:latin typeface="Arial"/>
+              </a:rPr>
+              <a:t>  mainstream</a:t>
+            </a:r>
+          </a:p>
+          <a:p>
+            <a:pPr algn="l">
+              <a:lnSpc>
+                <a:spcPct val="115000"/>
+              </a:lnSpc>
+            </a:pPr>
+            <a:r>
+              <a:rPr sz="1100" b="0" i="0">
+                <a:solidFill>
+                  <a:srgbClr val="21295C"/>
+                </a:solidFill>
+                <a:latin typeface="Arial"/>
+              </a:rPr>
+              <a:t>· ML — в-распределении силён,</a:t>
+            </a:r>
+          </a:p>
+          <a:p>
+            <a:pPr algn="l">
+              <a:lnSpc>
+                <a:spcPct val="115000"/>
+              </a:lnSpc>
+            </a:pPr>
+            <a:r>
+              <a:rPr sz="1100" b="0" i="0">
+                <a:solidFill>
+                  <a:srgbClr val="21295C"/>
+                </a:solidFill>
+                <a:latin typeface="Arial"/>
+              </a:rPr>
+              <a:t>  вне — слеп</a:t>
+            </a:r>
+          </a:p>
+          <a:p>
+            <a:pPr algn="l">
+              <a:lnSpc>
+                <a:spcPct val="115000"/>
+              </a:lnSpc>
+            </a:pPr>
+            <a:r>
+              <a:rPr sz="1100" b="0" i="0">
+                <a:solidFill>
+                  <a:srgbClr val="21295C"/>
+                </a:solidFill>
+                <a:latin typeface="Arial"/>
+              </a:rPr>
+              <a:t>· HITL обязателен на исключениях</a:t>
+            </a:r>
+          </a:p>
+          <a:p>
+            <a:pPr algn="l">
+              <a:lnSpc>
+                <a:spcPct val="115000"/>
               </a:lnSpc>
             </a:pPr>
             <a:r>
@@ -38994,7 +38852,7 @@
           <a:p>
             <a:pPr algn="l">
               <a:lnSpc>
-                <a:spcPct val="120000"/>
+                <a:spcPct val="115000"/>
               </a:lnSpc>
             </a:pPr>
             <a:r>
@@ -39004,13 +38862,13 @@
                 </a:solidFill>
                 <a:latin typeface="Arial"/>
               </a:rPr>
-              <a:t>Лестница среды переходит</a:t>
-            </a:r>
-          </a:p>
-          <a:p>
-            <a:pPr algn="l">
-              <a:lnSpc>
-                <a:spcPct val="120000"/>
+              <a:t>Среда меняется.</a:t>
+            </a:r>
+          </a:p>
+          <a:p>
+            <a:pPr algn="l">
+              <a:lnSpc>
+                <a:spcPct val="115000"/>
               </a:lnSpc>
             </a:pPr>
             <a:r>
@@ -39020,7 +38878,7 @@
                 </a:solidFill>
                 <a:latin typeface="Arial"/>
               </a:rPr>
-              <a:t>из физического мира в сетевой.</a:t>
+              <a:t>Критическое суждение — нет.</a:t>
             </a:r>
           </a:p>
         </p:txBody>
@@ -39107,7 +38965,7 @@
                 </a:solidFill>
                 <a:latin typeface="Arial"/>
               </a:rPr>
-              <a:t>Выжившие уважают среду + остаются в узкий ODD + не переобещание.</a:t>
+              <a:t>Выжившие уважают среду + остаются в узком ODD + не переобещают.</a:t>
             </a:r>
           </a:p>
           <a:p>
@@ -39985,7 +39843,7 @@
                 </a:solidFill>
                 <a:latin typeface="Arial"/>
               </a:rPr>
-              <a:t>Urban robotaxi</a:t>
+              <a:t>Городской robotaxi</a:t>
             </a:r>
           </a:p>
         </p:txBody>
@@ -40784,7 +40642,7 @@
                 </a:solidFill>
                 <a:latin typeface="Arial"/>
               </a:rPr>
-              <a:t>Среда определяет AI. Выжившие уважают среду + остаются в узкий ODD + не переобещание.</a:t>
+              <a:t>Среда определяет AI. Выжившие уважают среду + остаются в узком ODD + не переобещают.</a:t>
             </a:r>
           </a:p>
         </p:txBody>
@@ -41358,7 +41216,7 @@
                 </a:solidFill>
                 <a:latin typeface="Arial"/>
               </a:rPr>
-              <a:t>·  Склад: Symbotic+Walmart, Amazon Robotics, AMR (Locus / GreyOrange / Geek+)</a:t>
+              <a:t>·  Склад: Symbotic+Walmart, Amazon Роботics, AMR (Locus / GreyOrange / Geek+)</a:t>
             </a:r>
           </a:p>
           <a:p>
@@ -41406,7 +41264,7 @@
                 </a:solidFill>
                 <a:latin typeface="Arial"/>
               </a:rPr>
-              <a:t>·  Границы уровня 1: humanoid хайп, безлюдный миф, капитал интенсивность, распределение сдвиг</a:t>
+              <a:t>·  Границы уровня 1: гумано-робот ажиотажа, безлюдный миф, капитал интенсивность, распределение сдвиг</a:t>
             </a:r>
           </a:p>
         </p:txBody>
@@ -41782,7 +41640,7 @@
                 </a:solidFill>
                 <a:latin typeface="Arial"/>
               </a:rPr>
-              <a:t>Palletization · depalletization · отбор · sorting</a:t>
+              <a:t>Паллетизация · депаллетизация · отбор · сортировка</a:t>
             </a:r>
           </a:p>
           <a:p>
@@ -41814,7 +41672,7 @@
                 </a:solidFill>
                 <a:latin typeface="Arial"/>
               </a:rPr>
-              <a:t>ML для распознавания SKU, core control — детерминированные правила + WMS</a:t>
+              <a:t>ML для распознавания SKU, основное управление — детерминированные правила + WMS</a:t>
             </a:r>
           </a:p>
           <a:p>
@@ -41846,7 +41704,7 @@
                 </a:solidFill>
                 <a:latin typeface="Arial"/>
               </a:rPr>
-              <a:t>Failure mode</a:t>
+              <a:t>Режим провала</a:t>
             </a:r>
           </a:p>
           <a:p>
@@ -41983,97 +41841,38 @@
                 <a:latin typeface="Arial"/>
               </a:rPr>
               <a:t>Amazon: более 1 миллиона роботов в фулфилменте.
-Sparrow → Vulcan: путь от vision-only к тактильному.</a:t>
-            </a:r>
-          </a:p>
-        </p:txBody>
-      </p:sp>
-      <p:sp>
-        <p:nvSpPr>
-          <p:cNvPr id="3" name="Rectangle 2"/>
-          <p:cNvSpPr/>
-          <p:nvPr/>
-        </p:nvSpPr>
-        <p:spPr>
-          <a:xfrm>
-            <a:off x="457200" y="1737360"/>
-            <a:ext cx="5029200" cy="3931920"/>
-          </a:xfrm>
-          <a:prstGeom prst="rect">
-            <a:avLst/>
-          </a:prstGeom>
-          <a:solidFill>
-            <a:srgbClr val="E5EAF0"/>
-          </a:solidFill>
-          <a:ln>
-            <a:noFill/>
-          </a:ln>
-          <a:effectLst/>
-        </p:spPr>
-        <p:style>
-          <a:lnRef idx="1">
-            <a:schemeClr val="accent1"/>
-          </a:lnRef>
-          <a:fillRef idx="3">
-            <a:schemeClr val="accent1"/>
-          </a:fillRef>
-          <a:effectRef idx="2">
-            <a:schemeClr val="accent1"/>
-          </a:effectRef>
-          <a:fontRef idx="minor">
-            <a:schemeClr val="lt1"/>
-          </a:fontRef>
-        </p:style>
-        <p:txBody>
-          <a:bodyPr rtlCol="0" anchor="ctr"/>
-          <a:lstStyle/>
-          <a:p>
-            <a:pPr algn="ctr"/>
-          </a:p>
-        </p:txBody>
-      </p:sp>
+Sparrow → Vulcan: путь от только-зрение к тактильному.</a:t>
+            </a:r>
+          </a:p>
+        </p:txBody>
+      </p:sp>
+      <p:pic>
+        <p:nvPicPr>
+          <p:cNvPr id="3" name="Picture 2" descr="s08-amazon-warehouse-robot-2020.jpg"/>
+          <p:cNvPicPr>
+            <a:picLocks noChangeAspect="1"/>
+          </p:cNvPicPr>
+          <p:nvPr/>
+        </p:nvPicPr>
+        <p:blipFill>
+          <a:blip r:embed="rId2"/>
+          <a:stretch>
+            <a:fillRect/>
+          </a:stretch>
+        </p:blipFill>
+        <p:spPr>
+          <a:xfrm>
+            <a:off x="457200" y="1848802"/>
+            <a:ext cx="5029200" cy="3709035"/>
+          </a:xfrm>
+          <a:prstGeom prst="rect">
+            <a:avLst/>
+          </a:prstGeom>
+        </p:spPr>
+      </p:pic>
       <p:sp>
         <p:nvSpPr>
           <p:cNvPr id="4" name="TextBox 3"/>
-          <p:cNvSpPr txBox="1"/>
-          <p:nvPr/>
-        </p:nvSpPr>
-        <p:spPr>
-          <a:xfrm>
-            <a:off x="457200" y="3429000"/>
-            <a:ext cx="5029200" cy="548640"/>
-          </a:xfrm>
-          <a:prstGeom prst="rect">
-            <a:avLst/>
-          </a:prstGeom>
-          <a:noFill/>
-        </p:spPr>
-        <p:txBody>
-          <a:bodyPr wrap="square" lIns="0" rIns="0" tIns="0" bIns="0" anchor="t">
-            <a:spAutoFit/>
-          </a:bodyPr>
-          <a:lstStyle/>
-          <a:p>
-            <a:pPr algn="ctr">
-              <a:lnSpc>
-                <a:spcPct val="115000"/>
-              </a:lnSpc>
-            </a:pPr>
-            <a:r>
-              <a:rPr sz="1100" b="0" i="0">
-                <a:solidFill>
-                  <a:srgbClr val="6B7685"/>
-                </a:solidFill>
-                <a:latin typeface="Arial"/>
-              </a:rPr>
-              <a:t>[missing: s08-amazon-warehouse-robot-2020.JPG]</a:t>
-            </a:r>
-          </a:p>
-        </p:txBody>
-      </p:sp>
-      <p:sp>
-        <p:nvSpPr>
-          <p:cNvPr id="5" name="TextBox 4"/>
           <p:cNvSpPr txBox="1"/>
           <p:nvPr/>
         </p:nvSpPr>
@@ -42112,7 +41911,7 @@
       </p:sp>
       <p:sp>
         <p:nvSpPr>
-          <p:cNvPr id="6" name="Rounded Rectangle 5"/>
+          <p:cNvPr id="5" name="Rounded Rectangle 4"/>
           <p:cNvSpPr/>
           <p:nvPr/>
         </p:nvSpPr>
@@ -42160,7 +41959,7 @@
       </p:sp>
       <p:sp>
         <p:nvSpPr>
-          <p:cNvPr id="7" name="TextBox 6"/>
+          <p:cNvPr id="6" name="TextBox 5"/>
           <p:cNvSpPr txBox="1"/>
           <p:nvPr/>
         </p:nvSpPr>
@@ -42199,7 +41998,7 @@
       </p:sp>
       <p:sp>
         <p:nvSpPr>
-          <p:cNvPr id="8" name="TextBox 7"/>
+          <p:cNvPr id="7" name="TextBox 6"/>
           <p:cNvSpPr txBox="1"/>
           <p:nvPr/>
         </p:nvSpPr>
@@ -42238,7 +42037,7 @@
       </p:sp>
       <p:sp>
         <p:nvSpPr>
-          <p:cNvPr id="9" name="TextBox 8"/>
+          <p:cNvPr id="8" name="TextBox 7"/>
           <p:cNvSpPr txBox="1"/>
           <p:nvPr/>
         </p:nvSpPr>
@@ -42270,14 +42069,14 @@
                 </a:solidFill>
                 <a:latin typeface="Arial"/>
               </a:rPr>
-              <a:t>Bin-picking манипулятор. Vision + глубина. Ограничения: текстиль, прозрачная упаковка.</a:t>
-            </a:r>
-          </a:p>
-        </p:txBody>
-      </p:sp>
-      <p:sp>
-        <p:nvSpPr>
-          <p:cNvPr id="10" name="Rounded Rectangle 9"/>
+              <a:t>Захват из ячейки манипулятор. Зрение + глубина. Ограничения: текстиль, прозрачная упаковка.</a:t>
+            </a:r>
+          </a:p>
+        </p:txBody>
+      </p:sp>
+      <p:sp>
+        <p:nvSpPr>
+          <p:cNvPr id="9" name="Rounded Rectangle 8"/>
           <p:cNvSpPr/>
           <p:nvPr/>
         </p:nvSpPr>
@@ -42325,7 +42124,7 @@
       </p:sp>
       <p:sp>
         <p:nvSpPr>
-          <p:cNvPr id="11" name="TextBox 10"/>
+          <p:cNvPr id="10" name="TextBox 9"/>
           <p:cNvSpPr txBox="1"/>
           <p:nvPr/>
         </p:nvSpPr>
@@ -42364,7 +42163,7 @@
       </p:sp>
       <p:sp>
         <p:nvSpPr>
-          <p:cNvPr id="12" name="TextBox 11"/>
+          <p:cNvPr id="11" name="TextBox 10"/>
           <p:cNvSpPr txBox="1"/>
           <p:nvPr/>
         </p:nvSpPr>
@@ -42403,7 +42202,7 @@
       </p:sp>
       <p:sp>
         <p:nvSpPr>
-          <p:cNvPr id="13" name="TextBox 12"/>
+          <p:cNvPr id="12" name="TextBox 11"/>
           <p:cNvSpPr txBox="1"/>
           <p:nvPr/>
         </p:nvSpPr>
@@ -42435,14 +42234,14 @@
                 </a:solidFill>
                 <a:latin typeface="Arial"/>
               </a:rPr>
-              <a:t>Контейнерное хранение. Mechatronics + WMS-логика, не «AI» в строгом смысле.</a:t>
-            </a:r>
-          </a:p>
-        </p:txBody>
-      </p:sp>
-      <p:sp>
-        <p:nvSpPr>
-          <p:cNvPr id="14" name="Rounded Rectangle 13"/>
+              <a:t>Контейнерное хранение. Мехатроника + WMS-логика, не «AI» в строгом смысле.</a:t>
+            </a:r>
+          </a:p>
+        </p:txBody>
+      </p:sp>
+      <p:sp>
+        <p:nvSpPr>
+          <p:cNvPr id="13" name="Rounded Rectangle 12"/>
           <p:cNvSpPr/>
           <p:nvPr/>
         </p:nvSpPr>
@@ -42490,7 +42289,7 @@
       </p:sp>
       <p:sp>
         <p:nvSpPr>
-          <p:cNvPr id="15" name="TextBox 14"/>
+          <p:cNvPr id="14" name="TextBox 13"/>
           <p:cNvSpPr txBox="1"/>
           <p:nvPr/>
         </p:nvSpPr>
@@ -42529,7 +42328,7 @@
       </p:sp>
       <p:sp>
         <p:nvSpPr>
-          <p:cNvPr id="16" name="TextBox 15"/>
+          <p:cNvPr id="15" name="TextBox 14"/>
           <p:cNvSpPr txBox="1"/>
           <p:nvPr/>
         </p:nvSpPr>
@@ -42568,7 +42367,7 @@
       </p:sp>
       <p:sp>
         <p:nvSpPr>
-          <p:cNvPr id="17" name="TextBox 16"/>
+          <p:cNvPr id="16" name="TextBox 15"/>
           <p:cNvSpPr txBox="1"/>
           <p:nvPr/>
         </p:nvSpPr>
@@ -42607,7 +42406,7 @@
       </p:sp>
       <p:sp>
         <p:nvSpPr>
-          <p:cNvPr id="18" name="Rounded Rectangle 17"/>
+          <p:cNvPr id="17" name="Rounded Rectangle 16"/>
           <p:cNvSpPr/>
           <p:nvPr/>
         </p:nvSpPr>
@@ -42655,7 +42454,7 @@
       </p:sp>
       <p:sp>
         <p:nvSpPr>
-          <p:cNvPr id="19" name="TextBox 18"/>
+          <p:cNvPr id="18" name="TextBox 17"/>
           <p:cNvSpPr txBox="1"/>
           <p:nvPr/>
         </p:nvSpPr>
@@ -42694,7 +42493,7 @@
       </p:sp>
       <p:sp>
         <p:nvSpPr>
-          <p:cNvPr id="20" name="TextBox 19"/>
+          <p:cNvPr id="19" name="TextBox 18"/>
           <p:cNvSpPr txBox="1"/>
           <p:nvPr/>
         </p:nvSpPr>
@@ -42733,7 +42532,7 @@
       </p:sp>
       <p:sp>
         <p:nvSpPr>
-          <p:cNvPr id="21" name="TextBox 20"/>
+          <p:cNvPr id="20" name="TextBox 19"/>
           <p:cNvSpPr txBox="1"/>
           <p:nvPr/>
         </p:nvSpPr>
@@ -42772,7 +42571,7 @@
       </p:sp>
       <p:sp>
         <p:nvSpPr>
-          <p:cNvPr id="22" name="Rounded Rectangle 21"/>
+          <p:cNvPr id="21" name="Rounded Rectangle 20"/>
           <p:cNvSpPr/>
           <p:nvPr/>
         </p:nvSpPr>
@@ -42820,7 +42619,7 @@
       </p:sp>
       <p:sp>
         <p:nvSpPr>
-          <p:cNvPr id="23" name="TextBox 22"/>
+          <p:cNvPr id="22" name="TextBox 21"/>
           <p:cNvSpPr txBox="1"/>
           <p:nvPr/>
         </p:nvSpPr>
@@ -42852,14 +42651,14 @@
                 </a:solidFill>
                 <a:latin typeface="Arial"/>
               </a:rPr>
-              <a:t>Vision-стек не универсален. Multi-modal сенсор — урок 3 лет.</a:t>
-            </a:r>
-          </a:p>
-        </p:txBody>
-      </p:sp>
-      <p:sp>
-        <p:nvSpPr>
-          <p:cNvPr id="24" name="TextBox 23"/>
+              <a:t>Зрение-стек не универсален. Multi-modal сенсор — урок 3 лет.</a:t>
+            </a:r>
+          </a:p>
+        </p:txBody>
+      </p:sp>
+      <p:sp>
+        <p:nvSpPr>
+          <p:cNvPr id="23" name="TextBox 22"/>
           <p:cNvSpPr txBox="1"/>
           <p:nvPr/>
         </p:nvSpPr>
@@ -42891,7 +42690,7 @@
                 </a:solidFill>
                 <a:latin typeface="Arial"/>
               </a:rPr>
-              <a:t>В 1000 раз больше, чем у Aurora · в 300 раз больше, чем у Waymo</a:t>
+              <a:t>Amazon ~1M роботов 2025 · крупнейший складской автоматизатор в мире</a:t>
             </a:r>
           </a:p>
         </p:txBody>
@@ -42956,98 +42755,39 @@
                 </a:solidFill>
                 <a:latin typeface="Arial"/>
               </a:rPr>
-              <a:t>AMR-стек: Locus 5 миллиардов pick-ов.
-Но AMR — не готовый к работе, и worker нагрузка отпор реален.</a:t>
-            </a:r>
-          </a:p>
-        </p:txBody>
-      </p:sp>
-      <p:sp>
-        <p:nvSpPr>
-          <p:cNvPr id="3" name="Rectangle 2"/>
-          <p:cNvSpPr/>
-          <p:nvPr/>
-        </p:nvSpPr>
-        <p:spPr>
-          <a:xfrm>
-            <a:off x="457200" y="1737360"/>
-            <a:ext cx="5029200" cy="3931920"/>
-          </a:xfrm>
-          <a:prstGeom prst="rect">
-            <a:avLst/>
-          </a:prstGeom>
-          <a:solidFill>
-            <a:srgbClr val="E5EAF0"/>
-          </a:solidFill>
-          <a:ln>
-            <a:noFill/>
-          </a:ln>
-          <a:effectLst/>
-        </p:spPr>
-        <p:style>
-          <a:lnRef idx="1">
-            <a:schemeClr val="accent1"/>
-          </a:lnRef>
-          <a:fillRef idx="3">
-            <a:schemeClr val="accent1"/>
-          </a:fillRef>
-          <a:effectRef idx="2">
-            <a:schemeClr val="accent1"/>
-          </a:effectRef>
-          <a:fontRef idx="minor">
-            <a:schemeClr val="lt1"/>
-          </a:fontRef>
-        </p:style>
-        <p:txBody>
-          <a:bodyPr rtlCol="0" anchor="ctr"/>
-          <a:lstStyle/>
-          <a:p>
-            <a:pPr algn="ctr"/>
-          </a:p>
-        </p:txBody>
-      </p:sp>
+              <a:t>AMR-стек: Locus 5 миллиардов операций отбора.
+Но AMR — не из коробки (требует развёртывания), пушбэк рабочих по нагрузке — реален.</a:t>
+            </a:r>
+          </a:p>
+        </p:txBody>
+      </p:sp>
+      <p:pic>
+        <p:nvPicPr>
+          <p:cNvPr id="3" name="Picture 2" descr="s09-item-picking-robot.jpg"/>
+          <p:cNvPicPr>
+            <a:picLocks noChangeAspect="1"/>
+          </p:cNvPicPr>
+          <p:nvPr/>
+        </p:nvPicPr>
+        <p:blipFill>
+          <a:blip r:embed="rId2"/>
+          <a:stretch>
+            <a:fillRect/>
+          </a:stretch>
+        </p:blipFill>
+        <p:spPr>
+          <a:xfrm>
+            <a:off x="522277" y="1737360"/>
+            <a:ext cx="4899045" cy="3931920"/>
+          </a:xfrm>
+          <a:prstGeom prst="rect">
+            <a:avLst/>
+          </a:prstGeom>
+        </p:spPr>
+      </p:pic>
       <p:sp>
         <p:nvSpPr>
           <p:cNvPr id="4" name="TextBox 3"/>
-          <p:cNvSpPr txBox="1"/>
-          <p:nvPr/>
-        </p:nvSpPr>
-        <p:spPr>
-          <a:xfrm>
-            <a:off x="457200" y="3429000"/>
-            <a:ext cx="5029200" cy="548640"/>
-          </a:xfrm>
-          <a:prstGeom prst="rect">
-            <a:avLst/>
-          </a:prstGeom>
-          <a:noFill/>
-        </p:spPr>
-        <p:txBody>
-          <a:bodyPr wrap="square" lIns="0" rIns="0" tIns="0" bIns="0" anchor="t">
-            <a:spAutoFit/>
-          </a:bodyPr>
-          <a:lstStyle/>
-          <a:p>
-            <a:pPr algn="ctr">
-              <a:lnSpc>
-                <a:spcPct val="115000"/>
-              </a:lnSpc>
-            </a:pPr>
-            <a:r>
-              <a:rPr sz="1100" b="0" i="0">
-                <a:solidFill>
-                  <a:srgbClr val="6B7685"/>
-                </a:solidFill>
-                <a:latin typeface="Arial"/>
-              </a:rPr>
-              <a:t>[missing: s09-item-picking-robot.png]</a:t>
-            </a:r>
-          </a:p>
-        </p:txBody>
-      </p:sp>
-      <p:sp>
-        <p:nvSpPr>
-          <p:cNvPr id="5" name="TextBox 4"/>
           <p:cNvSpPr txBox="1"/>
           <p:nvPr/>
         </p:nvSpPr>
@@ -43079,14 +42819,14 @@
                 </a:solidFill>
                 <a:latin typeface="Arial"/>
               </a:rPr>
-              <a:t>Item Picking Robot · Wikimedia · CC-BY-SA</a:t>
-            </a:r>
-          </a:p>
-        </p:txBody>
-      </p:sp>
-      <p:sp>
-        <p:nvSpPr>
-          <p:cNvPr id="6" name="Rounded Rectangle 5"/>
+              <a:t>Item Picking Робот · Wikimedia · CC-BY-SA</a:t>
+            </a:r>
+          </a:p>
+        </p:txBody>
+      </p:sp>
+      <p:sp>
+        <p:nvSpPr>
+          <p:cNvPr id="5" name="Rounded Rectangle 4"/>
           <p:cNvSpPr/>
           <p:nvPr/>
         </p:nvSpPr>
@@ -43134,7 +42874,7 @@
       </p:sp>
       <p:sp>
         <p:nvSpPr>
-          <p:cNvPr id="7" name="TextBox 6"/>
+          <p:cNvPr id="6" name="TextBox 5"/>
           <p:cNvSpPr txBox="1"/>
           <p:nvPr/>
         </p:nvSpPr>
@@ -43166,14 +42906,14 @@
                 </a:solidFill>
                 <a:latin typeface="Arial"/>
               </a:rPr>
-              <a:t>Locus Robotics</a:t>
-            </a:r>
-          </a:p>
-        </p:txBody>
-      </p:sp>
-      <p:sp>
-        <p:nvSpPr>
-          <p:cNvPr id="8" name="TextBox 7"/>
+              <a:t>Locus Роботics</a:t>
+            </a:r>
+          </a:p>
+        </p:txBody>
+      </p:sp>
+      <p:sp>
+        <p:nvSpPr>
+          <p:cNvPr id="7" name="TextBox 6"/>
           <p:cNvSpPr txBox="1"/>
           <p:nvPr/>
         </p:nvSpPr>
@@ -43205,7 +42945,7 @@
                 </a:solidFill>
                 <a:latin typeface="Arial"/>
               </a:rPr>
-              <a:t>Collaborative отбор. 5+ миллиардов pick-операций, 350+ развёртываний.
+              <a:t>Совместный отбор. 5+ миллиардов операций отбора, 350+ развёртываний.
 FedEx · GXO · DHL.</a:t>
             </a:r>
           </a:p>
@@ -43213,7 +42953,7 @@
       </p:sp>
       <p:sp>
         <p:nvSpPr>
-          <p:cNvPr id="9" name="Rounded Rectangle 8"/>
+          <p:cNvPr id="8" name="Rounded Rectangle 7"/>
           <p:cNvSpPr/>
           <p:nvPr/>
         </p:nvSpPr>
@@ -43261,7 +43001,7 @@
       </p:sp>
       <p:sp>
         <p:nvSpPr>
-          <p:cNvPr id="10" name="TextBox 9"/>
+          <p:cNvPr id="9" name="TextBox 8"/>
           <p:cNvSpPr txBox="1"/>
           <p:nvPr/>
         </p:nvSpPr>
@@ -43300,7 +43040,7 @@
       </p:sp>
       <p:sp>
         <p:nvSpPr>
-          <p:cNvPr id="11" name="TextBox 10"/>
+          <p:cNvPr id="10" name="TextBox 9"/>
           <p:cNvSpPr txBox="1"/>
           <p:nvPr/>
         </p:nvSpPr>
@@ -43332,14 +43072,14 @@
                 </a:solidFill>
                 <a:latin typeface="Arial"/>
               </a:rPr>
-              <a:t>Goods-to-person. Рак-полка движется к человеку. Плотность хранения растёт ×1,5-2.</a:t>
-            </a:r>
-          </a:p>
-        </p:txBody>
-      </p:sp>
-      <p:sp>
-        <p:nvSpPr>
-          <p:cNvPr id="12" name="Rounded Rectangle 11"/>
+              <a:t>Товары-to-person. Рак-полка движется к человеку. Плотность хранения растёт ×1,5-2.</a:t>
+            </a:r>
+          </a:p>
+        </p:txBody>
+      </p:sp>
+      <p:sp>
+        <p:nvSpPr>
+          <p:cNvPr id="11" name="Rounded Rectangle 10"/>
           <p:cNvSpPr/>
           <p:nvPr/>
         </p:nvSpPr>
@@ -43387,7 +43127,7 @@
       </p:sp>
       <p:sp>
         <p:nvSpPr>
-          <p:cNvPr id="13" name="TextBox 12"/>
+          <p:cNvPr id="12" name="TextBox 11"/>
           <p:cNvSpPr txBox="1"/>
           <p:nvPr/>
         </p:nvSpPr>
@@ -43426,7 +43166,7 @@
       </p:sp>
       <p:sp>
         <p:nvSpPr>
-          <p:cNvPr id="14" name="TextBox 13"/>
+          <p:cNvPr id="13" name="TextBox 12"/>
           <p:cNvSpPr txBox="1"/>
           <p:nvPr/>
         </p:nvSpPr>
@@ -43458,14 +43198,14 @@
                 </a:solidFill>
                 <a:latin typeface="Arial"/>
               </a:rPr>
-              <a:t>Лидер по объёмам в Азии. Hybrid collaborative + goods-to-person. Расширение в Европу.</a:t>
-            </a:r>
-          </a:p>
-        </p:txBody>
-      </p:sp>
-      <p:sp>
-        <p:nvSpPr>
-          <p:cNvPr id="15" name="Rounded Rectangle 14"/>
+              <a:t>Лидер по объёмам в Азии. Hybrid совместный + «товар-к-человеку». Расширение в Европу.</a:t>
+            </a:r>
+          </a:p>
+        </p:txBody>
+      </p:sp>
+      <p:sp>
+        <p:nvSpPr>
+          <p:cNvPr id="14" name="Rounded Rectangle 13"/>
           <p:cNvSpPr/>
           <p:nvPr/>
         </p:nvSpPr>
@@ -43513,7 +43253,7 @@
       </p:sp>
       <p:sp>
         <p:nvSpPr>
-          <p:cNvPr id="16" name="TextBox 15"/>
+          <p:cNvPr id="15" name="TextBox 14"/>
           <p:cNvSpPr txBox="1"/>
           <p:nvPr/>
         </p:nvSpPr>
@@ -43552,7 +43292,7 @@
       </p:sp>
       <p:sp>
         <p:nvSpPr>
-          <p:cNvPr id="17" name="TextBox 16"/>
+          <p:cNvPr id="16" name="TextBox 15"/>
           <p:cNvSpPr txBox="1"/>
           <p:nvPr/>
         </p:nvSpPr>

--- a/library/lectures/lec-13/rendered/lec-13.pptx
+++ b/library/lectures/lec-13/rendered/lec-13.pptx
@@ -6092,8 +6092,8 @@
         </p:blipFill>
         <p:spPr>
           <a:xfrm>
-            <a:off x="1295400" y="457200"/>
-            <a:ext cx="6095999" cy="4572000"/>
+            <a:off x="457200" y="400050"/>
+            <a:ext cx="6858000" cy="5143500"/>
           </a:xfrm>
           <a:prstGeom prst="rect">
             <a:avLst/>
@@ -6108,8 +6108,8 @@
         </p:nvSpPr>
         <p:spPr>
           <a:xfrm>
-            <a:off x="457200" y="5074920"/>
-            <a:ext cx="7772400" cy="274320"/>
+            <a:off x="457200" y="5623560"/>
+            <a:ext cx="6858000" cy="274320"/>
           </a:xfrm>
           <a:prstGeom prst="rect">
             <a:avLst/>
@@ -6147,8 +6147,8 @@
         </p:nvSpPr>
         <p:spPr>
           <a:xfrm>
-            <a:off x="8412480" y="548640"/>
-            <a:ext cx="3474720" cy="4572000"/>
+            <a:off x="7589520" y="457200"/>
+            <a:ext cx="4297680" cy="4937760"/>
           </a:xfrm>
           <a:prstGeom prst="rect">
             <a:avLst/>
@@ -10356,7 +10356,7 @@
         <p:spPr>
           <a:xfrm>
             <a:off x="6492240" y="1874519"/>
-            <a:ext cx="5120640" cy="457200"/>
+            <a:ext cx="5120640" cy="365760"/>
           </a:xfrm>
           <a:prstGeom prst="rect">
             <a:avLst/>
@@ -10382,13 +10382,52 @@
                 <a:latin typeface="Arial"/>
               </a:rPr>
               <a:t>КамАЗ-54901 + Cognitive Pilot</a:t>
+            </a:r>
+          </a:p>
+        </p:txBody>
+      </p:sp>
+      <p:sp>
+        <p:nvSpPr>
+          <p:cNvPr id="10" name="TextBox 9"/>
+          <p:cNvSpPr txBox="1"/>
+          <p:nvPr/>
+        </p:nvSpPr>
+        <p:spPr>
+          <a:xfrm>
+            <a:off x="6492240" y="2240280"/>
+            <a:ext cx="5120640" cy="182880"/>
+          </a:xfrm>
+          <a:prstGeom prst="rect">
+            <a:avLst/>
+          </a:prstGeom>
+          <a:noFill/>
+        </p:spPr>
+        <p:txBody>
+          <a:bodyPr wrap="square" lIns="0" rIns="0" tIns="0" bIns="0" anchor="t">
+            <a:spAutoFit/>
+          </a:bodyPr>
+          <a:lstStyle/>
+          <a:p>
+            <a:pPr algn="l">
+              <a:lnSpc>
+                <a:spcPct val="115000"/>
+              </a:lnSpc>
+            </a:pPr>
+            <a:r>
+              <a:rPr sz="900" b="0" i="1">
+                <a:solidFill>
+                  <a:srgbClr val="6B7685"/>
+                </a:solidFill>
+                <a:latin typeface="Arial"/>
+              </a:rPr>
+              <a:t>Cognitive Pilot — российский разработчик стека восприятия для AV</a:t>
             </a:r>
           </a:p>
         </p:txBody>
       </p:sp>
       <p:pic>
         <p:nvPicPr>
-          <p:cNvPr id="10" name="Picture 9" descr="s15b-kamaz-truck.jpg"/>
+          <p:cNvPr id="11" name="Picture 10" descr="s15b-kamaz-truck.jpg"/>
           <p:cNvPicPr>
             <a:picLocks noChangeAspect="1"/>
           </p:cNvPicPr>
@@ -10412,7 +10451,7 @@
       </p:pic>
       <p:sp>
         <p:nvSpPr>
-          <p:cNvPr id="11" name="TextBox 10"/>
+          <p:cNvPr id="12" name="TextBox 11"/>
           <p:cNvSpPr txBox="1"/>
           <p:nvPr/>
         </p:nvSpPr>
@@ -10451,7 +10490,7 @@
       </p:sp>
       <p:sp>
         <p:nvSpPr>
-          <p:cNvPr id="12" name="TextBox 11"/>
+          <p:cNvPr id="13" name="TextBox 12"/>
           <p:cNvSpPr txBox="1"/>
           <p:nvPr/>
         </p:nvSpPr>
@@ -10522,7 +10561,7 @@
       </p:sp>
       <p:sp>
         <p:nvSpPr>
-          <p:cNvPr id="13" name="TextBox 12"/>
+          <p:cNvPr id="14" name="TextBox 13"/>
           <p:cNvSpPr txBox="1"/>
           <p:nvPr/>
         </p:nvSpPr>
@@ -11433,7 +11472,7 @@
                 <a:latin typeface="Arial"/>
               </a:rPr>
               <a:t>Starsky
-Роботics</a:t>
+Robotics</a:t>
             </a:r>
           </a:p>
         </p:txBody>
@@ -18148,7 +18187,7 @@
                 </a:solidFill>
                 <a:latin typeface="Arial"/>
               </a:rPr>
-              <a:t>Старски — первый, кто публично признал гэп.</a:t>
+              <a:t>Старски — первый, кто публично признал разрыв.</a:t>
             </a:r>
           </a:p>
         </p:txBody>
@@ -18235,7 +18274,7 @@
                 </a:solidFill>
                 <a:latin typeface="Arial"/>
               </a:rPr>
-              <a:t>«Supervised machine обучение doesn't live up to the hype.»</a:t>
+              <a:t>«Supervised machine learning doesn't live up to the hype.»</a:t>
             </a:r>
           </a:p>
           <a:p>
@@ -18283,7 +18322,7 @@
                 </a:solidFill>
                 <a:latin typeface="Arial"/>
               </a:rPr>
-              <a:t>«симуляция-к-реальности has very реальный limits.»</a:t>
+              <a:t>«Sim-to-real has very real limits.»</a:t>
             </a:r>
           </a:p>
           <a:p>
@@ -18331,7 +18370,7 @@
                 </a:solidFill>
                 <a:latin typeface="Arial"/>
               </a:rPr>
-              <a:t>— Стефан Зельц-Аксмахер, основатель и CEO Starsky Роботics,</a:t>
+              <a:t>— Стефан Зельц-Аксмахер, основатель и CEO Starsky Robotics,</a:t>
             </a:r>
           </a:p>
           <a:p>
@@ -18347,7 +18386,7 @@
                 </a:solidFill>
                 <a:latin typeface="Arial"/>
               </a:rPr>
-              <a:t>Medium-эссе «The конец of Starsky Роботics», март 2020</a:t>
+              <a:t>Medium-эссе «The end of Starsky Robotics», март 2020</a:t>
             </a:r>
           </a:p>
         </p:txBody>
@@ -18473,7 +18512,7 @@
                 </a:solidFill>
                 <a:latin typeface="Arial"/>
               </a:rPr>
-              <a:t>Каждый новый краевой случай требует размеченных данных. На до получения выручки масштаб денег не хватает.</a:t>
+              <a:t>Каждый новый краевой случай требует размеченных данных. До получения выручки масштаба денег не хватает.</a:t>
             </a:r>
           </a:p>
         </p:txBody>
@@ -18560,7 +18599,7 @@
                 </a:solidFill>
                 <a:latin typeface="Arial"/>
               </a:rPr>
-              <a:t>симуляция-к-реальности имеет реальные пределы</a:t>
+              <a:t>Разрыв симуляция-к-реальности — реальный</a:t>
             </a:r>
           </a:p>
         </p:txBody>
@@ -18599,7 +18638,7 @@
                 </a:solidFill>
                 <a:latin typeface="Arial"/>
               </a:rPr>
-              <a:t>Симуляция не покрывает длинный хвост. ML, обученная только на sim, не обобщается на публичный дороги.</a:t>
+              <a:t>Симуляция не покрывает длинный хвост. ML, обученная только на sim, не обобщается на дороги общего пользования.</a:t>
             </a:r>
           </a:p>
         </p:txBody>
@@ -18686,7 +18725,7 @@
                 </a:solidFill>
                 <a:latin typeface="Arial"/>
               </a:rPr>
-              <a:t>Большие контракт'ы не материализуются</a:t>
+              <a:t>Крупные контракты не материализуются</a:t>
             </a:r>
           </a:p>
         </p:txBody>
@@ -18851,7 +18890,7 @@
                 </a:solidFill>
                 <a:latin typeface="Arial"/>
               </a:rPr>
-              <a:t>Каждый новый краевой случай требует размеченных данных. На до получения выручки масштаб денег не хватает.</a:t>
+              <a:t>Каждый новый краевой случай требует размеченных данных. До получения выручки масштаба денег не хватает.</a:t>
             </a:r>
           </a:p>
         </p:txBody>
@@ -18938,7 +18977,7 @@
                 </a:solidFill>
                 <a:latin typeface="Arial"/>
               </a:rPr>
-              <a:t>симуляция-к-реальности имеет реальные пределы</a:t>
+              <a:t>Разрыв симуляция-к-реальности — реальный</a:t>
             </a:r>
           </a:p>
         </p:txBody>
@@ -18977,7 +19016,7 @@
                 </a:solidFill>
                 <a:latin typeface="Arial"/>
               </a:rPr>
-              <a:t>Симуляция не покрывает длинный хвост. ML, обученная только на sim, не обобщается на публичный дороги.</a:t>
+              <a:t>Симуляция не покрывает длинный хвост. ML, обученная только на sim, не обобщается на дороги общего пользования.</a:t>
             </a:r>
           </a:p>
         </p:txBody>
@@ -19064,7 +19103,7 @@
                 </a:solidFill>
                 <a:latin typeface="Arial"/>
               </a:rPr>
-              <a:t>Большие контракт'ы не материализуются</a:t>
+              <a:t>Крупные контракты не материализуются</a:t>
             </a:r>
           </a:p>
         </p:txBody>
@@ -19142,7 +19181,7 @@
                 </a:solidFill>
                 <a:latin typeface="Arial"/>
               </a:rPr>
-              <a:t>First-wave casualty с honest first-person разбор полётов · читать эссе полностью</a:t>
+              <a:t>Жертва первой волны · откровенный разбор полётов от основателя · читать эссе полностью</a:t>
             </a:r>
           </a:p>
         </p:txBody>
@@ -19925,7 +19964,7 @@
                 </a:solidFill>
                 <a:latin typeface="Arial"/>
               </a:rPr>
-              <a:t>Waymo самоуправление car · Wikimedia · CC-BY-SA</a:t>
+              <a:t>Waymo Jaguar I-Pace · Wikimedia · CC-BY-SA</a:t>
             </a:r>
           </a:p>
         </p:txBody>
@@ -22666,7 +22705,7 @@
                 </a:solidFill>
                 <a:latin typeface="Arial"/>
               </a:rPr>
-              <a:t>Coco Роботics</a:t>
+              <a:t>Coco Robotics</a:t>
             </a:r>
           </a:p>
         </p:txBody>
@@ -39379,7 +39418,7 @@
                 </a:solidFill>
                 <a:latin typeface="Arial"/>
               </a:rPr>
-              <a:t>ROI 2-4 года</a:t>
+              <a:t>Капитальная интенсивность $$$</a:t>
             </a:r>
           </a:p>
         </p:txBody>
@@ -39884,7 +39923,7 @@
               </a:rPr>
               <a:t>Waymo 500K/неделю
 Apollo Go 22 города
-Pony.ai единица прибыль</a:t>
+Pony.ai прибыль на машину</a:t>
             </a:r>
           </a:p>
         </p:txBody>
@@ -40261,7 +40300,7 @@
                 </a:solidFill>
                 <a:latin typeface="Arial"/>
               </a:rPr>
-              <a:t>Дроны городской US заблокировано</a:t>
+              <a:t>Дроны в городе США заблокированы</a:t>
             </a:r>
           </a:p>
         </p:txBody>
@@ -40471,7 +40510,7 @@
                 <a:latin typeface="Arial"/>
               </a:rPr>
               <a:t>Хуситы 2024 (-90%)
-Suez 2021 (12% торговля)
+Suez 2021 (12% торговли)
 COVID 2020 обвал</a:t>
             </a:r>
           </a:p>
@@ -41216,7 +41255,7 @@
                 </a:solidFill>
                 <a:latin typeface="Arial"/>
               </a:rPr>
-              <a:t>·  Склад: Symbotic+Walmart, Amazon Роботics, AMR (Locus / GreyOrange / Geek+)</a:t>
+              <a:t>·  Склад: Symbotic+Walmart, Amazon Robotics, AMR (Locus / GreyOrange / Geek+)</a:t>
             </a:r>
           </a:p>
           <a:p>
@@ -42906,7 +42945,7 @@
                 </a:solidFill>
                 <a:latin typeface="Arial"/>
               </a:rPr>
-              <a:t>Locus Роботics</a:t>
+              <a:t>Locus Robotics</a:t>
             </a:r>
           </a:p>
         </p:txBody>

--- a/library/lectures/lec-13/rendered/lec-13.pptx
+++ b/library/lectures/lec-13/rendered/lec-13.pptx
@@ -542,7 +542,32 @@
           <a:lstStyle/>
           <a:p>
             <a:r>
-              <a:t>См. slides/s01-hook-three-pictures.md speaker notes.</a:t>
+              <a:t>Представим три картинки рядом — три заголовка деловой прессы за последние восемнадцать месяцев, которые изменили наше понимание о том, где автономные транспортные системы работают, а где нет.</a:t>
+            </a:r>
+            <a:br/>
+            <a:br/>
+            <a:r>
+              <a:t>Декабрь 2024 года. General Motors закрывает дочернюю компанию Cruise после восьми лет инвестиций и более десяти миллиардов долларов операционных убытков при выручке менее пятисот миллионов долларов за всю историю существования направления. Сравнение десять-к-одному: на каждый доллар выручки сожжено двадцать долларов капитала. Главная причина — единичный инцидент 2 октября 2023 года в Сан-Франциско, когда автомобиль Cruise после столкновения пешехода с другим автомобилем протянул пострадавшую около двадцати футов вместо немедленной остановки. Калифорнийский DMV отозвал лицензию, GM приняла решение свернуть всё направление.</a:t>
+            </a:r>
+            <a:br/>
+            <a:br/>
+            <a:r>
+              <a:t>Март 2026 года. Waymo, дочерняя компания Alphabet, отчитывается о пятистах тысячах платных поездок в неделю в более чем десяти городах США — Феникс, Сан-Франциско, Лос-Анджелес, Остин, Атланта, Майами и других. Парк составляет 3 067 беспилотных автомобилей пятого поколения на конец декабря 2025 года. Пять лет назад Waymo делала только демонстрационные поездки в Фениксе; сейчас это работающий коммерческий сервис, но при этом — компания не отчитывается о прибыльности на одну поездку публично.</a:t>
+            </a:r>
+            <a:br/>
+            <a:br/>
+            <a:r>
+              <a:t>Февраль 2026 года. Tesla Robotaxi, запущенная в Остине 22 июня 2025 года, накапливает четырнадцать дорожно-транспортных происшествий за восемь месяцев эксплуатации, около восьмисот тысяч платных миль суммарно. Это не сравнимая статистика с Waymo — объём в тысячу раз меньше, — но это первая публичная статистика по vision-only L4-стеку без лидара и без HD-карты, и она требует холодной интерпретации.</a:t>
+            </a:r>
+            <a:br/>
+            <a:br/>
+            <a:r>
+              <a:t>Три картинки рядом ставят один вопрос: почему Waymo выжила, Cruise разорилась, а Tesla только начинает? Если бы дело было только в технологии — все три используют конкурирующие версии похожих сенсорных стеков. Если бы дело было только в капитале — у Cruise было десять миллиардов GM, у Waymo — практически бесконечный capital Alphabet. Если бы дело было только в регулировании — обе работали в одних городах с одним DMV.</a:t>
+            </a:r>
+            <a:br/>
+            <a:br/>
+            <a:r>
+              <a:t>Дело в среде, в которой система разворачивалась, и в дисциплине ODD. Это — главная мысль сегодняшней лекции, и я буду к ней возвращаться весь следующий час с четвертью.</a:t>
             </a:r>
           </a:p>
         </p:txBody>
@@ -612,7 +637,42 @@
           <a:lstStyle/>
           <a:p>
             <a:r>
-              <a:t>См. slides/s11-rail-konux-limits.md speaker notes.</a:t>
+              <a:t>Железная дорога — особый случай. Это высоко контролируемая среда — фиксированная геометрия рельсов, известная топология сети, ограниченное число подвижного состава. Но сложная для автоматизации в силу strict регуляторики, длительного срока службы оборудования и высокой стоимости ошибки.</a:t>
+            </a:r>
+            <a:br/>
+            <a:br/>
+            <a:r>
+              <a:t>Главное приложение AI в железной дороге 2026 года — прогностическое обслуживание стрелочных переводов. Канонический пример — KONUX, мюнхенская компания, разработавшая комплексное решение из сенсоров на стрелочных переводах плюс AI-аналитики. Основной клиент KONUX — Deutsche Bahn. Стрелочные переводы — самая частая причина задержек на немецкой железной дороге. Переключение в неправильное положение или износ конусной части ведут к необходимости отмены маршрута и пересмотра расписания. Базовая линия — стандартное обслуживание каждые шесть месяцев по графику. KONUX заявляет, что переход к condition-based maintenance может растянуть интервал до двенадцати-восемнадцати месяцев на одних стрелочных переводах и сократить до двух-трёх месяцев на других.</a:t>
+            </a:r>
+            <a:br/>
+            <a:br/>
+            <a:r>
+              <a:t>Pedagogical point. Прогностическое обслуживание на железной дороге — зрелая категория, но её зрелость не означает массового внедрения. KONUX как продукт обоснован, но adoption медленный — государственные железные дороги принимают новые технологии с большой инерцией. Это тот же паттерн pilot purgatory из Лекции 11: технология работает, но adoption ограничен бюрократией заказчика.</a:t>
+            </a:r>
+            <a:br/>
+            <a:br/>
+            <a:r>
+              <a:t>Теперь — три значимые границы уровня один.</a:t>
+            </a:r>
+            <a:br/>
+            <a:br/>
+            <a:r>
+              <a:t>Humanoid-хайп. Tesla Optimus, Figure 02, UBTech Walker S1 — категория, которая в 2024-2026 годах привлекает максимальное медиа-внимание. Но на середину 2026 года humanoid-роботы для складских задач остаются в research или pilot stage, не в production развёртывание на масштабе более ста единиц для одной функциональной роли. Figure 02 в BMW Spartanburg — пилотная программа с ограниченной ролью. Tesla Optimus — внутренние демо без публично подтверждённого production-impact.</a:t>
+            </a:r>
+            <a:br/>
+            <a:br/>
+            <a:r>
+              <a:t>Контрфактуальное сравнение: Amazon Sparrow и Vulcan — специализированные манипуляторы — выполняют миллионы pick-операций ежедневно при стоимости 50-150 тысяч за единицу против 100-300 тысяч для гуманоидного робота. Специализированный робот для специализированной задачи даёт лучший ROI.</a:t>
+            </a:r>
+            <a:br/>
+            <a:br/>
+            <a:r>
+              <a:t>Миф об lights-out warehouse. Концепция работает в очень узких категориях, но для broad SKU с миллионами артикулов разной формы — пока не достигается. Долгий хвост edge-cases: текстиль, прозрачная упаковка, мисплейсы, возвраты.</a:t>
+            </a:r>
+            <a:br/>
+            <a:br/>
+            <a:r>
+              <a:t>И четвёртая граница — distribution shift при сезонном flex. Перед Black Friday, Christmas, Halloween каталог наполняется новыми категориями товаров, и Sparrow vision-классификатор часто ошибается чаще.</a:t>
             </a:r>
           </a:p>
         </p:txBody>
@@ -682,7 +742,32 @@
           <a:lstStyle/>
           <a:p>
             <a:r>
-              <a:t>См. slides/s12-discrete-failure-matrix.md speaker notes.</a:t>
+              <a:t>Замыкая раздел один — четыре границы, на которых поставщики или маркетинг могут увлечь инженера в неправильную инвестицию. Это короткий чек-лист «что спросить» при оценке любого решения уровня один.</a:t>
+            </a:r>
+            <a:br/>
+            <a:br/>
+            <a:r>
+              <a:t>Первая граница — капитальная интенсивность. Symbotic-стек на один APD-центр — десятки миллионов. ZPMC-кран — десять+ миллионов. Полная автоматизация порта — миллиарды на терминал. Уровень один доступен только крупным игрокам или 3PL-провайдерам. Малые компании работают с минимальной автоматизацией.</a:t>
+            </a:r>
+            <a:br/>
+            <a:br/>
+            <a:r>
+              <a:t>Вторая граница — OEM lock-in. Когда Walmart инвестирует миллиарды в Symbotic-стек, компромисс — долгосрочная зависимость от одного вендора. Lesson для инженера: при оценке long-term contract задавайте вопросы об exit strategy. Что произошло, если мы хотим switch supplier через десять лет? Какие proprietary компоненты vs стандартизированные? Какая стоимость migration?</a:t>
+            </a:r>
+            <a:br/>
+            <a:br/>
+            <a:r>
+              <a:t>Третья граница — миф об lights-out warehouse для broad SKU. Концепция работает в очень узких категориях, но для дистрибуционного центра с миллионами артикулов разной формы — пока не достигается ни одним поставщиком. Инженерное упражнение: задайте поставщику конкретные вопросы. Какой процент SKU вы обрабатываете без вмешательства человека? Сколько human interventions в смену на вашем production-сайте? Что происходит при нестандартной упаковке возврата?</a:t>
+            </a:r>
+            <a:br/>
+            <a:br/>
+            <a:r>
+              <a:t>Четвёртая граница — distribution shift при сезонном flex. Перед пиковыми сезонами каталог наполняется новыми категориями. Lesson: при оценке складского ML-стека спрашивайте поставщика специфически про сезонную динамику. Какой error rate на пиковых сезонах vs обычное время? Как часто переобучается модель? Кто оплачивает retraining cost?</a:t>
+            </a:r>
+            <a:br/>
+            <a:br/>
+            <a:r>
+              <a:t>Эти четыре вопроса — практический инструмент для кармана, который остаётся с вами после лекции.</a:t>
             </a:r>
           </a:p>
         </p:txBody>
@@ -752,7 +837,37 @@
           <a:lstStyle/>
           <a:p>
             <a:r>
-              <a:t>См. slides/s14-aurora-dallas-houston.md speaker notes.</a:t>
+              <a:t>Aurora Innovation — это первая компания в США, которая запустила полностью беспилотную коммерческую грузоперевозку на магистрали. Дата старта — первое мая 2025 года. Маршрут — Даллас-Хьюстон, около двухсот сорока миль interstate I-45.</a:t>
+            </a:r>
+            <a:br/>
+            <a:br/>
+            <a:r>
+              <a:t>Парк к концу 2025 года — около десяти машин на коммерческих маршрутах. Платформа — PACCAR Peterbilt, грузовой тягач Class-8, плюс Aurora Driver software stack. Расширение в 2026 году планируется на маршрут Fort Worth — El Paso и Phoenix.</a:t>
+            </a:r>
+            <a:br/>
+            <a:br/>
+            <a:r>
+              <a:t>Главное, что отличает Aurora от non-survivors индустрии — это crawl-walk-run подход. Crawl — многолетние тесты с safety operator с 2018 по 2024 год. Walk — Даллас-Хьюстон с safety operator на отдельных рейсах в 2023-2024. Run — driverless commercial в мае 2025 на единичном маршруте, отработанном годами.</a:t>
+            </a:r>
+            <a:br/>
+            <a:br/>
+            <a:r>
+              <a:t>Это важная инженерная дисциплина. Aurora не обещает «replacing X percent drivers». Chris Urmson, CEO, формализует это как «новую эру грузоперевозок» — а не как замену водителей. Aurora не расширяет ODD агрессивно — каждое новое lane требует extensive валидации. И Aurora не зависит от subsidies — это public market funding через SPAC merger 2021 года.</a:t>
+            </a:r>
+            <a:br/>
+            <a:br/>
+            <a:r>
+              <a:t>Цитата Урмсона из press release мая 2025: «Сегодня знаменует рассвет новой эры в транспортировке, поскольку Aurora становится первой компанией, которая управляет коммерческой беспилотной службой с тяжёлыми грузовиками на общественных дорогах в США».</a:t>
+            </a:r>
+            <a:br/>
+            <a:br/>
+            <a:r>
+              <a:t>Pedagogical point. Aurora — survivor pattern. Те же десять-двадцать миллиардов долларов сожжены non-survivors, но Aurora выжила, потому что crawl-walk-run, потому что cautious в ODD expansion, потому что не overpromise. Это lesson инженерного смирения — не arrogance. Cruise vs Waymo — обоим тот же стек, но Waymo выжил по тем же причинам, что и Aurora.</a:t>
+            </a:r>
+            <a:br/>
+            <a:br/>
+            <a:r>
+              <a:t>Сравнение базовой линией. Парк Aurora — около десяти машин. Парк Waymo robotaxi — три тысячи машин. Парк Amazon Robotics — миллион единиц. Соотношение даёт правильную интуицию: автономия на магистрали — пока узкая, не массовая.</a:t>
             </a:r>
           </a:p>
         </p:txBody>
@@ -822,7 +937,42 @@
           <a:lstStyle/>
           <a:p>
             <a:r>
-              <a:t>См. slides/s15-mobileye-kamaz.md speaker notes.</a:t>
+              <a:t>Параллельно с Aurora на американском рынке развиваются ещё две магистральные программы: Mobileye Chauffeur и российский КамАЗ.</a:t>
+            </a:r>
+            <a:br/>
+            <a:br/>
+            <a:r>
+              <a:t>Mobileye — израильская компания, spin-off из Intel в 2022 году, public NASDAQ. Продукт SuperVision — это camera-first ADAS-стек без дорогого лидара, основан на HD-карте, которую Mobileye собирает через REM, Road Experience Management — crowd-sourcing данных от собственных потребительских моделей. Mobileye SuperVision уже в продаже на примерно трёхстах тысячах consumer vehicles к 2025 году, и цель — миллион двести тысяч к 2026 году.</a:t>
+            </a:r>
+            <a:br/>
+            <a:br/>
+            <a:r>
+              <a:t>Chauffeur — следующий уровень, L3 eyes-off. Это означает, что в определённых условиях — например, на магистрали при определённой скорости — водитель может оторвать глаза от дороги. Не «оторваться от управления», а «не следить активно за дорогой». Mobileye Chauffeur запускается на премиум-европейских OEM: Polestar 4, Audi Q6 e-tron, Volkswagen Touareg.</a:t>
+            </a:r>
+            <a:br/>
+            <a:br/>
+            <a:r>
+              <a:t>Это другой бизнес-модель, чем Aurora. Aurora — это коммерческая L4-беспилотная грузоперевозка, десять машин на одном маршруте. Mobileye — это потребительский ADAS-стек, миллион пассажирских машин с L3 eyes-off на магистрали. Разные ставки, разные target customers.</a:t>
+            </a:r>
+            <a:br/>
+            <a:br/>
+            <a:r>
+              <a:t>Российский контекст. КамАЗ-54901 со стеком Cognitive Pilot работает на трассе М-11 «Нева» с июня 2023 года. К концу 2024 года — шестьдесят семь единиц на маршруте, из них около десяти в commercial cargo. План на 2025 год — сто единиц, расширение на М-12 «Восток» и Центральную кольцевую автодорогу.</a:t>
+            </a:r>
+            <a:br/>
+            <a:br/>
+            <a:r>
+              <a:t>Российская модель отличается от американской: это государственный pilot в рамках экспериментального правового режима. ЭПР — это специальный legal framework для тестирования автономных систем без полного соответствия общим правилам дорожного движения. М-11 — специально выделенная магистраль с системой контроля и поддержки.</a:t>
+            </a:r>
+            <a:br/>
+            <a:br/>
+            <a:r>
+              <a:t>Pedagogical point. КамАЗ-Cognitive Pilot — это пример российского survivor pattern в логистике. Не самый передовой технически, но crawl-walk-run, не overpromise, и государственная поддержка в рамках ЭПР. Контраст с Yandex SDG, которая до 2024 года разрабатывала robotaxi для городской среды в России, но была вынуждена сделать спин-аут в нероссийскую компанию Avride под голландской parent Nebius Group из-за санкционных ограничений.</a:t>
+            </a:r>
+            <a:br/>
+            <a:br/>
+            <a:r>
+              <a:t>Cognitive Pilot также имеет отдельный продукт — Cognitive Pilot Agro для автономных комбайнов в сельском хозяйстве. Заявленные показатели — пятьсот девяносто тысяч тонн зерновых, обработанных с более чем ста тридцати тысяч гектаров суммарно (накопленные данные по 242 комбайнам Rusagro и другим клиентам).</a:t>
             </a:r>
           </a:p>
         </p:txBody>
@@ -892,7 +1042,57 @@
           <a:lstStyle/>
           <a:p>
             <a:r>
-              <a:t>См. slides/s16-ups-orion-fundamental.md speaker notes.</a:t>
+              <a:t>UPS ORION — это канонический пример операционных исследований, которые работают лучше глубокого обучения для чётко поставленных задач маршрутизации. Я хочу остановиться на этом слайде на три минуты, потому что это один из главных фундаментальных слайдов лекции.</a:t>
+            </a:r>
+            <a:br/>
+            <a:br/>
+            <a:r>
+              <a:t>**Цифры.** UPS экономит примерно сто миллионов миль пробега в год для всего парка. Десять миллионов галлонов топлива. Триста-четыреста миллионов долларов в год экономии. Если посчитать совокупно — на декабрь 2015 года было триста двадцать миллионов долларов экономии по данным INFORMS. Парк UPS — около ста двадцати пяти тысяч машин.</a:t>
+            </a:r>
+            <a:br/>
+            <a:br/>
+            <a:r>
+              <a:t>**Что под капотом.** Под капотом ORION — это операционные исследования. Целочисленное программирование плюс эвристики плюс задача маршрутизации транспортных средств — VRP. Не глубокое обучение. Не обучение с подкреплением. Не GenAI. Используемые инструменты — это Gurobi, CPLEX, Google OR-Tools. Алгоритмы датируются 1950-60-ми годами — теория графов, branch-and-bound, метаэвристики.</a:t>
+            </a:r>
+            <a:br/>
+            <a:br/>
+            <a:r>
+              <a:t>Современная инфраструктура — Big Data, облако, потоки данных в реальном времени — это всё есть. Но само решение задачи маршрутизации — это классическая математика, не ML.</a:t>
+            </a:r>
+            <a:br/>
+            <a:br/>
+            <a:r>
+              <a:t>**Педагогический смысл.** UPS ORION — это канонический анти-хайп-пример. Простой случай, когда чётко поставленная задача оптимизации решается через классическую математику лучше, чем через ML или RL.</a:t>
+            </a:r>
+            <a:br/>
+            <a:br/>
+            <a:r>
+              <a:t>**Три вопроса вендору.** Когда вы — инженер — слышите от поставщика «наш ML-стек оптимизирует маршруты вашего флота с эффектом плюс двадцать пять процентов» — у вас должны автоматически возникать три вопроса.</a:t>
+            </a:r>
+            <a:br/>
+            <a:br/>
+            <a:r>
+              <a:t>**Вопрос 1.** Какие сравнения с базовой линией OR? Если поставщик не показывает базовую линию Gurobi или OR-Tools — это красный флаг. Это означает, что либо они не делали такое сравнение, либо ML-решение не лучше классического OR, а сравнение просто скрыто.</a:t>
+            </a:r>
+            <a:br/>
+            <a:br/>
+            <a:r>
+              <a:t>**Вопрос 2.** Какой ваш VRP-решатель? Если ответ «сквозное глубокое обучение» — спросите про объяснимость, про краевые случаи, про разрыв оптимальности. Сквозное RL для VRP — это активная область исследований, но это не продакшен-уровень на 2026 год.</a:t>
+            </a:r>
+            <a:br/>
+            <a:br/>
+            <a:r>
+              <a:t>**Вопрос 3.** Какие данные используете? Стационарный спрос или нестационарный? При стационарном — то есть когда спрос предсказуем по сезонам — EOQ плюс страховой запас плюс ABC-анализ работают не хуже ML. Это формулы 1913 года, и они для большой доли SKU дают результаты, сопоставимые с ML.</a:t>
+            </a:r>
+            <a:br/>
+            <a:br/>
+            <a:r>
+              <a:t>**Контекст.** UPS ORION не единственный пример. FedEx использует аналогичные методы OR. Maersk Line, ZIM, CMA CGM используют специализированные OR-решатели для маршрутизации контейнеровозов — это другая задача (LCL/FCL + ETA + ёмкость), но математика та же. Walmart routing внутри сети распределения — OR.</a:t>
+            </a:r>
+            <a:br/>
+            <a:br/>
+            <a:r>
+              <a:t>**Когда ML уместен.** ML-маршрутизация имеет место в одном специфическом случае: когда данных много, спрос нестационарный, и есть внешние сигналы в реальном времени (погода, трафик, события). Тогда ML-надстройка поверх OR-решателя может улучшить результат. Но чистый ML без базовой линии OR — почти всегда хуже.</a:t>
             </a:r>
           </a:p>
         </p:txBody>
@@ -962,7 +1162,42 @@
           <a:lstStyle/>
           <a:p>
             <a:r>
-              <a:t>См. slides/s17-av-bankruptcy-timeline.md speaker notes.</a:t>
+              <a:t>Глубокий разбор провалов раздела два. Я хочу провести по пяти точкам на одной хронологии, чтобы вы видели не отдельные кейсы, а паттерн.</a:t>
+            </a:r>
+            <a:br/>
+            <a:br/>
+            <a:r>
+              <a:t>**Март 2020 — Starsky Robotics.** Первая волна жертв автономных грузоперевозок. Стефан Зельц-Аксмахер, основатель и CEO, написал откровенное Medium-эссе «The end of Starsky Robotics». Главная цитата: «Контролируемое машинное обучение не оправдывает ажиотажа». И второе: «У разрыва симуляция-к-реальности есть очень реальные пределы». Это важно — это признание от первого лица от основателя, что ML не работает на дорогах общего пользования так, как работал в симуляции. Starsky первой попробовала и первой провалилась.</a:t>
+            </a:r>
+            <a:br/>
+            <a:br/>
+            <a:r>
+              <a:t>**Октябрь 2022 — Argo AI.** Этот провал — самый крупный по абсолютным числам. Семь миллиардов долларов сожжено за пять лет. Из них Ford инвестировала более пяти миллиардов, VW — два с шестью десятых. Двадцать шестого октября 2022 года в звонке с инвесторами Ford объявил решение свернуть Argo. Двадцать тысяч человек увольнений. Ford записал два миллиарда семьсот списания и восемьсот двадцать семь миллионов чистого убытка только за этот квартал. **Урок.** Даже когда у вас два OEM-инвестора (Ford и VW) с почти бесконечным капиталом, если они одновременно решат, что L4-robotaxi везде — слишком крупно для масштаба стартапа, проект мгновенно разваливается.</a:t>
+            </a:r>
+            <a:br/>
+            <a:br/>
+            <a:r>
+              <a:t>**Март 2023 — Embark Trucks.** Шестнадцать месяцев от SPAC-IPO в ноябре 2021 до банкротства в марте 2023. SPAC-таргет капитализации был пять и шестнадцать сотых миллиарда долларов — на момент слияния Embark формально стоила больше, чем десятилетние профессиональные операторы. К марту 2023 — двести тридцать сотрудников уволено, активы ликвидированы. Цитата Алекса Родригеса, CEO: «Капитальные рынки повернулись спиной к компаниям до выручки, так как сдвиги в хронологии производителей задержали возможность масштабного коммерческого развёртывания». Это канонический SPAC-крах 2021-2023 в одной компании.</a:t>
+            </a:r>
+            <a:br/>
+            <a:br/>
+            <a:r>
+              <a:t>**2023 — Waymo Via.** Alphabet закрыла собственное направление грузоперевозок. Это уникально, потому что у Alphabet практически бесконечный капитал. Если даже Alphabet не нашёл прибыльную модель для L4-грузоперевозок в отдельной бизнес-единице — это структурный сигнал, что вся индустрия не работает по удельной экономике, по крайней мере на эту дату.</a:t>
+            </a:r>
+            <a:br/>
+            <a:br/>
+            <a:r>
+              <a:t>**Январь 2024 — TuSimple.** Делистинг с Nasdaq; передача активов в китайские AIGC-структуры. Девяносто один процент+ акционерной стоимости утрачено. TuSimple — это была US-China гибридная компания, и её ситуация дополнительно осложнялась геополитическим давлением — США заблокировали технологический трансфер в Китай в 2023 году, а в Китае активы выкупались независимо.</a:t>
+            </a:r>
+            <a:br/>
+            <a:br/>
+            <a:r>
+              <a:t>**Общие паттерны.** Капитальная интенсивность без выручки. Все не-выжившие сжигали один-семь миллиардов прежде, чем заработать первый коммерческий доллар. Пузырь SPAC-IPO 2021-2022. Разрыв симуляция-к-реальности. Регуляторная неопределённость. Несоответствие спросу клиентов — большинство стартапов искали продать «автономный флот» большим перевозчикам, но перевозчики предпочитали выделенные полосы плюс оператора безопасности, не полную автономию.</a:t>
+            </a:r>
+            <a:br/>
+            <a:br/>
+            <a:r>
+              <a:t>**Консолидация 10:1.** Из тридцати+ серьёзных AV-грузоперевозчиков 2015-2020 выжили три-четыре. Это не вопрос технического качества — Argo и Embark имели технически впечатляющие демо. Это вопрос бизнес-модели на капиталоёмком, медленном, жестоком дарвиновском рынке.</a:t>
             </a:r>
           </a:p>
         </p:txBody>
@@ -1032,7 +1267,42 @@
           <a:lstStyle/>
           <a:p>
             <a:r>
-              <a:t>См. slides/s18-cumulative-20b-burned.md speaker notes.</a:t>
+              <a:t>Этот слайд — суммарная картина. Я хочу показать, насколько дорогим оказался autonomous-transport ставка для индустрии.</a:t>
+            </a:r>
+            <a:br/>
+            <a:br/>
+            <a:r>
+              <a:t>Argo AI — семь миллиардов долларов. Ford инвестировала более пяти миллиардов, VW — два с шестью десятых. Cruise — десять миллиардов операционных убытков GM за восемь лет, при выручке менее пятисот миллионов кумулятивно за всю историю. TuSimple — около миллиарда плюс IPO proceeds, и девяносто один процент shareholder value lost. Embark — триста миллионов IPO плюс private rounds, при SPAC target market cap пять с шестнадцати сотых миллиарда. Starsky — около двухсот миллионов private. Waymo Via — Alphabet не disclosed exact инвестиции, но сегмент закрыт без revenue.</a:t>
+            </a:r>
+            <a:br/>
+            <a:br/>
+            <a:r>
+              <a:t>Суммарно — более двадцати миллиардов долларов только на autonomous trucking и robotaxi non-survivors с 2017 по 2024 год. Если расширить определение и включить early-stage investments в Cruise до сделки с GM, Zoox до сделки с Amazon, Aurora ранние раунды — можно дойти до пятидесяти миллиардов.</a:t>
+            </a:r>
+            <a:br/>
+            <a:br/>
+            <a:r>
+              <a:t>Сравнение с Лекцией 11. В производстве 95% GenAI-пилотов не доходят до production, по данным MIT Sloan 2025. Median pilot стоит десятки или сотни тысяч долларов. Это пилот, который начинается, и менеджмент за 14 месяцев решает не вкладываться дальше.</a:t>
+            </a:r>
+            <a:br/>
+            <a:br/>
+            <a:r>
+              <a:t>В автономном транспорте provider — это не пилот за сотню тысяч долларов. Это компания, которая до банкротства сожгла один-десять миллиардов долларов. Соотношение — AV-индустрия в тысячи или десятки тысяч раз дороже на единичный failure.</a:t>
+            </a:r>
+            <a:br/>
+            <a:br/>
+            <a:r>
+              <a:t>Pedagogical point. AV-индустрия исторически — это capital-intensive, slow, brutally Darwinian рынок. Из тридцати+ серьёзных AV-стартапов 2015-2020 выжили три-четыре. Waymo, Aurora, Mobileye в режиме eyes-off L3, Apollo Go в Китае. Это означает survivor consolidation десять-к-одному или хуже.</a:t>
+            </a:r>
+            <a:br/>
+            <a:br/>
+            <a:r>
+              <a:t>Lesson для инженера. Когда вы оцениваете AV-стартап как потенциального работодателя или партнёра — спрашивайте не «технически крутая ли технология», а «business model работает ли через unit economics? сколько capital сожжено к выручке? есть ли survivor pattern (crawl-walk-run, narrow ODD, не overpromise)?»</a:t>
+            </a:r>
+            <a:br/>
+            <a:br/>
+            <a:r>
+              <a:t>И главное — этот слайд не doom-аргумент против AV в целом. Aurora запустила коммерческие операции в мае 2025. Waymo делает полмиллиона поездок в неделю. Apollo Go — двести сорок миллионов километров глобально. Survivors работают, и они доказали свою бизнес-модель. Просто их меньше, чем казалось в 2018-2020 году.</a:t>
             </a:r>
           </a:p>
         </p:txBody>
@@ -1102,7 +1372,57 @@
           <a:lstStyle/>
           <a:p>
             <a:r>
-              <a:t>См. slides/s19-survivor-consolidation.md speaker notes.</a:t>
+              <a:t>Здесь я хочу подытожить два слайда подряд про non-survivors одной мыслью — что отличало выживших от не выживших.</a:t>
+            </a:r>
+            <a:br/>
+            <a:br/>
+            <a:r>
+              <a:t>Survivors. Waymo. Aurora. Mobileye. Apollo Go в Китае. Это три-четыре компании из более чем тридцати серьёзных AV-стартапов 2015-2020 годов.</a:t>
+            </a:r>
+            <a:br/>
+            <a:br/>
+            <a:r>
+              <a:t>Что Waymo делает правильно. Crawl-walk-run. Они начали в Фениксе с одним городом, потом расширили в Сан-Франциско, потом Лос-Анджелес, потом Остин и так далее. Каждое расширение — отдельный отработанный ODD. HD-карта плюс лидар плюс камеры плюс удалённые операторы — full stack без compromises. Patient capital Alphabet — Alphabet не торопит Waymo на квартальный profit.</a:t>
+            </a:r>
+            <a:br/>
+            <a:br/>
+            <a:r>
+              <a:t>Aurora — то же самое. Один маршрут Даллас-Хьюстон, отработанный годами, потом driverless commercial май 2025. Не «replacing all truckers by 2025». Не «1000 trucks deployed». Десять машин на одном маршруте. Crawl-walk-run.</a:t>
+            </a:r>
+            <a:br/>
+            <a:br/>
+            <a:r>
+              <a:t>Mobileye — другая ставка, потребительская модель. Camera-first ADAS-стек на миллион потребительских машин, потом L3 eyes-off на premium-OEM. Аккуратное движение по уровням SAE.</a:t>
+            </a:r>
+            <a:br/>
+            <a:br/>
+            <a:r>
+              <a:t>Apollo Go — это китайская модель с государственной поддержкой. Двести сорок миллионов километров автономного движения глобально, семнадцать миллионов заказов, двадцать два города.</a:t>
+            </a:r>
+            <a:br/>
+            <a:br/>
+            <a:r>
+              <a:t>Dropouts. Argo и Cruise — обе уперлись в одну проблему: capital intensity без revenue. Семь миллиардов и десять миллиардов соответственно. TuSimple — US-China геополитика плюс sim-to-real. Embark — SPAC bust. Waymo Via — даже бесконечный capital Alphabet не нашёл profitable model. Starsky — первая волна.</a:t>
+            </a:r>
+            <a:br/>
+            <a:br/>
+            <a:r>
+              <a:t>Survivor pattern — это пять признаков. Crawl-walk-run. Narrow ODD. Не overpromise. Patient capital. Уважение к среде.</a:t>
+            </a:r>
+            <a:br/>
+            <a:br/>
+            <a:r>
+              <a:t>Это важный инженерный lesson. Survivor pattern — не алгоритмическое превосходство. Все survivors используют похожие сенсорные стеки и похожие ML-подходы. Survivor pattern — это дисциплина ODD plus business model дисциплина plus культурная установка инженерного смирения.</a:t>
+            </a:r>
+            <a:br/>
+            <a:br/>
+            <a:r>
+              <a:t>Cruise vs Waymo. Обоим тот же стек. Но Waymo выжил, потому что cautious в ODD expansion. Cruise разорилась, потому что нарушила собственные правила прозрачности с регулятором и одно нарушение ODD-дисциплины уничтожило восемь лет работы за двенадцать недель.</a:t>
+            </a:r>
+            <a:br/>
+            <a:br/>
+            <a:r>
+              <a:t>Lesson — это lesson инженерного смирения, не arrogance.</a:t>
             </a:r>
           </a:p>
         </p:txBody>
@@ -1172,7 +1492,47 @@
           <a:lstStyle/>
           <a:p>
             <a:r>
-              <a:t>См. slides/s20-trucker-shortage-false-framing.md speaker notes.</a:t>
+              <a:t>Это специфический разбор одного framing'а, который часто звучит от вендоров AV-trucking. «Наш беспилотный грузовик решит дефицит дальнобойщиков».</a:t>
+            </a:r>
+            <a:br/>
+            <a:br/>
+            <a:r>
+              <a:t>Цифры. ATA, American Trucking Associations — главный профессиональный союз отрасли. По их данным, дефицит водителей в США был семьдесят восемь тысяч во второй половине 2022 года. Снизился к 2023 до около шестидесяти тысяч — но Bob Costello, ATA chief economist, прокомментировал это как «for all the wrong reasons». Экономический downturn снизил спрос на грузоперевозки в целом, и часть дефицита исчезла не потому, что больше водителей появилось, а потому, что меньше грузов нужно перевозить. Структурная проблема осталась.</a:t>
+            </a:r>
+            <a:br/>
+            <a:br/>
+            <a:r>
+              <a:t>Aurora коммерчески — около десяти машин на маршрутах к концу 2025. Цель к 2026-2027 году — до ста машин при оптимистичном сценарии.</a:t>
+            </a:r>
+            <a:br/>
+            <a:br/>
+            <a:r>
+              <a:t>Считаем. Чтобы заменить дефицит в семьдесят восемь тысяч водителей, требуется capacity. Средний водитель проезжает примерно сто тысяч миль в год. Семьдесят восемь тысяч × сто тысяч = семь и восемь десятых миллиарда миль capacity нужно.</a:t>
+            </a:r>
+            <a:br/>
+            <a:br/>
+            <a:r>
+              <a:t>Что даёт Aurora. Сто машин × сто тысяч миль в год = десять миллионов миль capacity. Это 0,13% от дефицита.</a:t>
+            </a:r>
+            <a:br/>
+            <a:br/>
+            <a:r>
+              <a:t>Даже если предположить, что Aurora вырастет в тысячу раз — до ста тысяч беспилотных машин к 2030 году — это всё ещё первые тринадцать процентов дефицита. И это очень оптимистичный сценарий, потому что Aurora на середину 2026 имеет десять машин, а не тысячу.</a:t>
+            </a:r>
+            <a:br/>
+            <a:br/>
+            <a:r>
+              <a:t>Math не работает. AV не решит trucker shortage на горизонте 2030 года. Это не критика технологии — Aurora делает что-то реальное, что-то commercially viable. Просто масштаб не такой, какой нужен для решения структурной проблемы.</a:t>
+            </a:r>
+            <a:br/>
+            <a:br/>
+            <a:r>
+              <a:t>Что реально решает trucker shortage? Не AI. Это политика — visa programs, immigration reform, regulatory rest hours. Это переподготовка — CDL programs, government subsidies. Это условия труда — pay rates, schedule flexibility, equipment quality. По данным ATA примерно семьдесят процентов turnover вызвано pay-related или equipment-related причинами. Это job design — local short-haul versus long-haul. У long-haul водителей девяносто+ процентов годовой оборот, у local — гораздо ниже.</a:t>
+            </a:r>
+            <a:br/>
+            <a:br/>
+            <a:r>
+              <a:t>Lesson для инженера. Когда вы слышите от вендора AV-trucking «мы решим дефицит водителей» — это не алгоритмическое предложение, это маркетинговый framing для investor presentation. Реальная решающая mix — это политика, экономика, условия труда, и только в перспективе долгих десятилетий — частичная автономизация магистрального транспорта.</a:t>
             </a:r>
           </a:p>
         </p:txBody>
@@ -1242,7 +1602,37 @@
           <a:lstStyle/>
           <a:p>
             <a:r>
-              <a:t>См. slides/s21-highway-failure-matrix.md speaker notes.</a:t>
+              <a:t>Замыкая failure deep-dive раздела два — четыре причины, на которые рекуррентно ломаются AV-trucking стартапы. Этот чек-лист — практический инструмент для оценки.</a:t>
+            </a:r>
+            <a:br/>
+            <a:br/>
+            <a:r>
+              <a:t>Первая причина — capital intensity без revenue. Argo AI и Cruise сожгли семь и десять миллиардов соответственно прежде, чем заработать значительную коммерческую выручку. Lesson для инженера или оценщика: проверять unit economics. Capital сожжённый к коммерческой выручке. Если revenue менее пяти процентов от capital — это flag.</a:t>
+            </a:r>
+            <a:br/>
+            <a:br/>
+            <a:r>
+              <a:t>Вторая причина — регуляторная неопределённость. TuSimple — US-China геополитическое давление, и компания не смогла навигировать. Tesla — постоянные NHTSA investigations, EA22002, и неясность future regulatory action. Lesson: запрашивать legal team опыт. Какие SA государственно одобренные? Сколько NHTSA SGO crash reports? Что в pipeline EA-investigations?</a:t>
+            </a:r>
+            <a:br/>
+            <a:br/>
+            <a:r>
+              <a:t>Третья причина — SPAC IPO bubble 2021-2022. Embark — шестнадцать месяцев от SPAC merger до банкротства. SPAC target market cap пять с шестнадцати сотых миллиарда долларов — на момент merger Embark формально стоила больше, чем десятилетние профессиональные операторы. TuSimple вышла через IPO, но рано. Lesson: не вкладывать в pre-revenue SPAC merger без пяти+ лет commercial history. Public market scrutiny убьёт hype.</a:t>
+            </a:r>
+            <a:br/>
+            <a:br/>
+            <a:r>
+              <a:t>Четвёртая причина — sim-to-real gap. Starsky первым публично признал эту проблему через essay Стефана Зельц-Аксмахера в марте 2020. Но все non-survivors сталкивались с тем же — ML-стек выглядел хорошо в симуляции, но не масштабировался на public roads с edge-cases. Lesson: запрашивать ratio километров в симуляции к километрам на public roads. Если только sim — серьёзный red flag.</a:t>
+            </a:r>
+            <a:br/>
+            <a:br/>
+            <a:r>
+              <a:t>Эти четыре причины — взаимосвязанные. SPAC-bust 2021-2022 ускорил capital exit. Sim-to-real гэп замедлил commercial deployment. Это снизило revenue, что увеличило capital burn ratio. Что притянуло регуляторное scrutiny. И так замкнулся круг.</a:t>
+            </a:r>
+            <a:br/>
+            <a:br/>
+            <a:r>
+              <a:t>И обратно к survivors — Waymo, Aurora, Mobileye применяют crawl-walk-run против всех четырёх причин. Многолетние safety-operator километры до driverless. Conservative ODD expansion. Не SPAC merger (Aurora через SPAC, но с longer history). Honesty о limitations.</a:t>
             </a:r>
           </a:p>
         </p:txBody>
@@ -1312,7 +1702,22 @@
           <a:lstStyle/>
           <a:p>
             <a:r>
-              <a:t>См. slides/s02-cover.md speaker notes.</a:t>
+              <a:t>Лекция 13 — AI в логистике и транспорте. Третий модуль курса, продолжение разговора об отраслях с критичной безопасностью и о том, где AI работает зрело, а где — провалы стоят миллиардов и человеческих жизней.</a:t>
+            </a:r>
+            <a:br/>
+            <a:br/>
+            <a:r>
+              <a:t>Аудитория — студенты-инженеры третьего курса. Я не предполагаю, что вы специалисты по транспорту, по логистике или по операционным исследованиям. Я предполагаю, что вы знакомы с базовыми понятиями machine learning из предыдущих лекций — лестница автономии и OODA-цикл из Лекции 9 про аэрокосмос, застревание AI-пилотов на пилотной стадии из Лекции 11 про производство, контролируемая среда как предпосылка успеха из Лекции 12 про цифровые двойники.</a:t>
+            </a:r>
+            <a:br/>
+            <a:br/>
+            <a:r>
+              <a:t>Сегодня я хочу, чтобы вы вышли из аудитории с тремя инструментами в кармане. Первое — лестница среды как главный предиктор успеха AI в транспорте. Второе — пять-семь критериев, отделяющих демо вендора от промышленной эксплуатации. Третье — список альтернатив AI: операционные исследования, классические формулы запасов, сценарное планирование, человек в петле.</a:t>
+            </a:r>
+            <a:br/>
+            <a:br/>
+            <a:r>
+              <a:t>Структура лекции — пять разделов по принципу «спуск по лестнице среды». Первый — контролируемая среда, склад и порт, где AI работает наиболее зрело. Второй — магистраль, первая коммерческая беспилотная грузоперевозка Aurora и серия банкротств. Третий — городской robotaxi и последняя миля, Waymo выжил и Cruise разорилась. Четвёртый — чрезвычайная ситуация и рамка решения. Пятый — замыкание и мост к Лекции 14.</a:t>
             </a:r>
           </a:p>
         </p:txBody>
@@ -1382,7 +1787,42 @@
           <a:lstStyle/>
           <a:p>
             <a:r>
-              <a:t>См. slides/s22-starsky-sim-to-real.md speaker notes.</a:t>
+              <a:t>Этот слайд — короткая остановка на одной цитате, которая, на мой взгляд, лучше всего обобщает уроки autonomous-trucking failures 2020-2024 годов.</a:t>
+            </a:r>
+            <a:br/>
+            <a:br/>
+            <a:r>
+              <a:t>Стефан Зельц-Аксмахер был основателем и CEO Starsky Robotics, autonomous-trucking стартапа, основанного в 2015 году. К марту 2020 компания закрылась, сожгла примерно двести миллионов долларов capital. И Зельц-Аксмахер написал откровенное эссе на Medium под названием «The end of Starsky Robotics» как post-mortem.</a:t>
+            </a:r>
+            <a:br/>
+            <a:br/>
+            <a:r>
+              <a:t>Главная цитата. «Supervised machine learning doesn't live up to the hype. Sim-to-real has very real limits». Supervised машинное обучение не оправдывает ожиданий. Sim-to-real имеет реальные пределы.</a:t>
+            </a:r>
+            <a:br/>
+            <a:br/>
+            <a:r>
+              <a:t>Контекст. Старски была первой волной жертв. За два года до Argo, за три года до Embark и TuSimple. И Зельц-Аксмахер был первым, кто публично, на собственном имени, открыто признал технический гэп. До этого индустрия рассказывала, что вот-вот, через год-полтора, всё заработает.</a:t>
+            </a:r>
+            <a:br/>
+            <a:br/>
+            <a:r>
+              <a:t>Три урока из эссе. Первый — supervised ML не оправдывает ожиданий. ML-стеки выглядели хорошо в demo, но edge-cases не масштабировались. Каждый новый edge-case требовал новых labeled данных. А получить эти данные требовало миллионов километров public roads, что требовало денег, которых на pre-revenue scale нет.</a:t>
+            </a:r>
+            <a:br/>
+            <a:br/>
+            <a:r>
+              <a:t>Второй — sim-to-real имеет реальные пределы. Симуляция полезна для определённых классов задач, но она не покрывает long-tail. ML-модель, обученная только на симулированных сценариях, плохо обобщает на public roads.</a:t>
+            </a:r>
+            <a:br/>
+            <a:br/>
+            <a:r>
+              <a:t>Третий — большие deal'ы с большими floтами не материализуются на pre-revenue scale. Грузоперевозчики — это консервативный customer. Они не покупают untested стек прежде, чем увидят production-history.</a:t>
+            </a:r>
+            <a:br/>
+            <a:br/>
+            <a:r>
+              <a:t>Pedagogical point. Зельц-Аксмахер — это first-wave casualty с honest first-person post-mortem. Это редкий тип источника, потому что большинство founder'ов закрывают компании без публичных post-mortems. Когда вы — будущие инженеры — видите такое эссе — читайте внимательно. Это самый ценный тип источника о failure modes индустрии. Я рекомендую вам, после лекции, найти и прочитать «The end of Starsky Robotics» полностью. Это short read — около десяти-пятнадцати минут — и он даст вам интуицию об одной из главных причин, почему вся первая волна autonomous-trucking стартапов провалилась.</a:t>
             </a:r>
           </a:p>
         </p:txBody>
@@ -1452,7 +1892,42 @@
           <a:lstStyle/>
           <a:p>
             <a:r>
-              <a:t>См. slides/s24-waymo-survivor.md speaker notes.</a:t>
+              <a:t>Waymo — это canonical survivor robotaxi на 2026 год. Я хочу остановиться на цифрах и стеке, потому что это компания, которая работает.</a:t>
+            </a:r>
+            <a:br/>
+            <a:br/>
+            <a:r>
+              <a:t>Цифры на март 2026. Пятьсот тысяч платных поездок в неделю. Три тысячи шестьдесят семь машин пятого поколения, по NHTSA disclosure декабря 2025. Десять+ городов: Phoenix, San Francisco, Los Angeles, Austin, Atlanta, Miami, Dallas, Houston, San Antonio, Orlando. Кумулятивно за 2025 год — четырнадцать миллионов поездок.</a:t>
+            </a:r>
+            <a:br/>
+            <a:br/>
+            <a:r>
+              <a:t>И рост — в десять раз за девятнадцать месяцев. Май 2024 года — пятьдесят тысяч поездок в неделю. Декабрь 2025 — четыреста пятьдесят тысяч. Март 2026 — около пятисот тысяч. Это серьёзный коммерческий scale.</a:t>
+            </a:r>
+            <a:br/>
+            <a:br/>
+            <a:r>
+              <a:t>Стек Waymo — full-sensor approach без compromises. HD-карта с точностью около десяти сантиметров — это означает, что Waymo заранее знает геометрию каждой улицы, каждой разметки, каждого светофора. LiDAR — основной 3D-сенсор. Камеры — RGB perception. Радар — secondary sensor для weather robustness. И удалённые операторы — human override в edge-cases. Важно: удалённые операторы не «driving» машину дистанционно, а assistance — даёт advice в сложных ситуациях, машина сама исполняет.</a:t>
+            </a:r>
+            <a:br/>
+            <a:br/>
+            <a:r>
+              <a:t>И ещё — формальное обоснование безопасности, formal safety case. Это регуляторно проверяемый документ, который Waymo публикует периодически. Это часть культуры компании — engineering rigour, не PR.</a:t>
+            </a:r>
+            <a:br/>
+            <a:br/>
+            <a:r>
+              <a:t>Что Waymo не публикует. Прибыльность на одну поездку. Компания не отчитывается публично. Это означает либо «still negative», либо «not disclosed for competitive reasons». Любой sceptic считает первое — что Waymo на 2026 год всё ещё имеет negative unit economics. Это важно держать в голове, потому что operational scale Waymo впечатляющий, но unit economics ещё не доказана.</a:t>
+            </a:r>
+            <a:br/>
+            <a:br/>
+            <a:r>
+              <a:t>Survivor pattern Waymo — это пять признаков. Crawl-walk-run — начали в Phoenix, потом SF, потом LA, потом каждый новый город — отдельный отработанный ODD. Patient capital Alphabet — Alphabet не торопит Waymo на квартальный profit. Narrow ODD expansion — каждое новое lane или новый город требует extensive валидации. Не overpromise — никаких «один миллион robotaxi by 2024», никаких «replacing all taxi drivers». И уважение к среде — городская улица хрупкая, и Waymo это понимает.</a:t>
+            </a:r>
+            <a:br/>
+            <a:br/>
+            <a:r>
+              <a:t>Pedagogical point. Waymo выжил по тем же причинам, по которым Aurora выжила в trucking — crawl-walk-run, narrow ODD, не overpromise, patient capital. Это не алгоритмическое превосходство. Cruise использовал похожий стек, но нарушила ODD-дисциплину и обанкротилась.</a:t>
             </a:r>
           </a:p>
         </p:txBody>
@@ -1522,7 +1997,42 @@
           <a:lstStyle/>
           <a:p>
             <a:r>
-              <a:t>См. slides/s25-china-robotaxi.md speaker notes.</a:t>
+              <a:t>Параллельно с Waymo в Китае развиваются три крупных robotaxi-программ: Apollo Go от Baidu, Pony.ai и WeRide.</a:t>
+            </a:r>
+            <a:br/>
+            <a:br/>
+            <a:r>
+              <a:t>Apollo Go — это сегмент Baidu, одного из главных tech-компаний Китая. На октябрь 2025 года — двести сорок миллионов автономных километров глобально. Семнадцать миллионов+ заказов. Двадцать два города. Wuhan, Beijing, Shenzhen, Shanghai и другие. Это серьёзный коммерческий scale в Китае.</a:t>
+            </a:r>
+            <a:br/>
+            <a:br/>
+            <a:r>
+              <a:t>Goldman Sachs прогнозирует, что China robotaxi market — это в семьсот раз рост от 2025 к 2035, с целью сорок семь миллиардов долларов к 2035. Это volatile prediction, его надо проверять перед каждой лекцией. Но даже скептический взгляд на эти числа — это означает китайский рынок robotaxi будет двух- или трёх-кратно крупнее американского по числу trips.</a:t>
+            </a:r>
+            <a:br/>
+            <a:br/>
+            <a:r>
+              <a:t>Pony.ai. Это другой китайский игрок. Триста машин Gen-7 BAIC к октябрю 2025, цель — тысяча к концу 2025 года.</a:t>
+            </a:r>
+            <a:br/>
+            <a:br/>
+            <a:r>
+              <a:t>И вот тут — важный пункт, который я хочу подчеркнуть особенно. В ноябре 2025 года Pony.ai сообщила о первом городе с положительной operating profit на машину — это Гуанчжоу. В феврале 2026 — второй такой город, Шэньчжэнь. Это не означает, что Pony.ai в целом прибыльная компания — это означает, что в отдельных городах удельная экономика на парк per-vehicle стала положительной. Это первый сигнал, что robotaxi может выйти из режима венчурного жжения и стать sustainable business model. Это важный milestone.</a:t>
+            </a:r>
+            <a:br/>
+            <a:br/>
+            <a:r>
+              <a:t>WeRide — третий из китайской тройки. Q3 2025 robotaxi revenue тридцать пять с тремя десятыми миллиона юаней, рост семьсот шестьдесят один процент год к году.</a:t>
+            </a:r>
+            <a:br/>
+            <a:br/>
+            <a:r>
+              <a:t>Что отличает китайскую модель от американской. Государственная координация в большей мере. Dedicated robotaxi-зон. Унифицированная регуляторика на национальном уровне — не state-by-state patchwork как в США.</a:t>
+            </a:r>
+            <a:br/>
+            <a:br/>
+            <a:r>
+              <a:t>И ещё одно. Goldman Sachs прогнозирует, что Китай может обогнать США по числу robotaxi trips к 2030 году. Это означает, что AV-индустрия глобально не моноцентрична, и у инженера в РФ есть смысл следить и за американскими, и за китайскими развитиями. Российский контекст здесь — это другой сегмент. Yandex SDG до 2024 года был российским robotaxi-игроком, но был вынужден сделать спин-аут в нероссийскую компанию Avride под голландской parent Nebius Group из-за санкций.</a:t>
             </a:r>
           </a:p>
         </p:txBody>
@@ -1592,7 +2102,42 @@
           <a:lstStyle/>
           <a:p>
             <a:r>
-              <a:t>См. slides/s26-pony-ai-unit-economics.md speaker notes.</a:t>
+              <a:t>Я хочу остановиться на одной важной детали, потому что в коммерческой прессе её часто путают.</a:t>
+            </a:r>
+            <a:br/>
+            <a:br/>
+            <a:r>
+              <a:t>В ноябре 2025 года Pony.ai сообщила о первом городе с положительной operating profit на машину. Этот город — Гуанчжоу. Не Шэньчжэнь. В феврале 2026 года Pony.ai сообщила о втором таком городе — Шэньчжэне. Это важная последовательность, и её правильная атрибуция нужна для аккуратного разбора кейса.</a:t>
+            </a:r>
+            <a:br/>
+            <a:br/>
+            <a:r>
+              <a:t>Что эти числа означают. Удельная экономика на парк per-vehicle в отдельных городах стала положительной. В Шэньчжэне Pony.ai отчитывалась о приблизительно тристах тридцати восьми юанях daily net income per vehicle, при двадцати трёх заказах в день per vehicle. Это per SEC 6-K filing Pony.ai. Это означает, что машина приносит больше чем стоит её эксплуатация ежедневно. Operating profit per vehicle — положительная.</a:t>
+            </a:r>
+            <a:br/>
+            <a:br/>
+            <a:r>
+              <a:t>Что эти числа НЕ означают. Они не означают, что Pony.ai как компания прибыльна. R&amp;D investments, маркетинг, общекорпоративные расходы — всё это не покрыто unit-экономикой на двух или трёх городах. Чтобы стать прибыльной компанией в целом, нужен scale 10+ городов одновременно.</a:t>
+            </a:r>
+            <a:br/>
+            <a:br/>
+            <a:r>
+              <a:t>И они не означают, что весь сегмент robotaxi прибылен. Waymo вообще не публикует свой per-trip profit. Apollo Go не выделяет robotaxi-сегмент в отдельную отчётность Baidu. Это означает либо большие internal cross-subsidies, либо negative unit economics, либо «not disclosed».</a:t>
+            </a:r>
+            <a:br/>
+            <a:br/>
+            <a:r>
+              <a:t>Pedagogical point. Это важный milestone — первый сигнал, что robotaxi может выйти из режима венчурного жжения. Но это не magic pill. Чтобы стать прибыльной, Pony.ai нужно повторить pattern в десяти+ городах и масштабировать одновременно с снижением R&amp;D и капитальных вложений.</a:t>
+            </a:r>
+            <a:br/>
+            <a:br/>
+            <a:r>
+              <a:t>Контраст с Waymo. Waymo не публикует per-trip unit economics. На 2026 год — большая чёрная коробка. Pony.ai публикует per-city unit economics через SEC filings, потому что Pony.ai — public company на NYSE. Различие — не алгоритмическое, это разные disclosure режимы public companies.</a:t>
+            </a:r>
+            <a:br/>
+            <a:br/>
+            <a:r>
+              <a:t>Lesson для инженера. Когда вы анализируете robotaxi business model — всегда требуйте per-vehicle и per-trip unit economics. Если поставщик показывает только «total revenue growth» — это red flag. Real success metric — это положительная operating profit per vehicle при scale в десятки городов.</a:t>
             </a:r>
           </a:p>
         </p:txBody>
@@ -1662,7 +2207,37 @@
           <a:lstStyle/>
           <a:p>
             <a:r>
-              <a:t>См. slides/s27-tesla-robotaxi-austin.md speaker notes.</a:t>
+              <a:t>Tesla Robotaxi Austin — это самая текущая (на середину 2026 года) разработка. Я хочу быть аккуратным с этим кейсом, потому что Tesla — компания с большим следом ошибок (Autopilot, задержки Cybertruck и т. д.), но это не означает, что Tesla Robotaxi обречена. Просто на 2026 год есть слишком мало данных для серьёзного вывода о безопасности.</a:t>
+            </a:r>
+            <a:br/>
+            <a:br/>
+            <a:r>
+              <a:t>**Хронология.** Двадцать второго июня 2025 года — старт Robotaxi в Остине с примерно десятью машинами и наблюдателем безопасности в кабине. Декабрь 2025 — тесты без операторов, где сотрудники Tesla выступали в роли водителей. Январь 2026 — публичный неконтролируемый режим. Февраль 2026 — четырнадцать ДТП в Остине зарегистрировано за восемь месяцев эксплуатации, при примерно семистах тысяч-восьмистах тысячах платных миль совокупно. Март 2026 — расширение в центр Остина. Апрель 2026 — неконтролируемый режим в Хьюстоне и Далласе.</a:t>
+            </a:r>
+            <a:br/>
+            <a:br/>
+            <a:r>
+              <a:t>**Сравнение с Waymo.** Это важно — Tesla в Остине пока в тысячу раз меньше Waymo по объёму. Семьсот тысяч миль совокупно vs Waymo десять миллионов миль в неделю. Это означает, что размер выборки слишком мал для серьёзного вывода о безопасности. Tesla 14 ДТП за восемь месяцев — это может быть «лучше Waymo», «хуже Waymo», «сравнимо с Waymo» — мы не знаем, потому что объём выборки разный на три порядка.</a:t>
+            </a:r>
+            <a:br/>
+            <a:br/>
+            <a:r>
+              <a:t>**Стек Tesla.** Только-зрение, без LiDAR, без HD-карты. Это философская ставка. Tesla верит, что сквозной только-зрение-стек достаточен для L4-robotaxi. Waymo использует противоположный подход — многосенсорный стек плюс HD-карта. На 2026 год статистически не доказано, кто прав.</a:t>
+            </a:r>
+            <a:br/>
+            <a:br/>
+            <a:r>
+              <a:t>**Что Маск обещает.** «We robotaxi everywhere by end of 2026», цитата из октября 2024 года на мероприятии «We, Robot». На середину 2026 года Tesla в Остине + Хьюстоне + Далласе, не «везде». Это паттерн Tesla — переобещание по срокам, но иногда реализация подтягивается (Tesla Model 3 ramp 2018-2019 был с задержками, но потом серийный продукт).</a:t>
+            </a:r>
+            <a:br/>
+            <a:br/>
+            <a:r>
+              <a:t>**Педагогический смысл.** Я хочу, чтобы вы вышли из этого слайда с тремя мыслями. Первая — не утверждать, что Tesla провалится. Это не подтверждено. Размер выборки мал. Вторая — не утверждать, что Tesla безопаснее Waymo. Это не подтверждено. Ставка «только-зрение» статистически не доказана. Третья — критическая оценка требует трёх лет данных при сравнимом пробеге. На 2026 год — слишком рано для серьёзного вывода.</a:t>
+            </a:r>
+            <a:br/>
+            <a:br/>
+            <a:r>
+              <a:t>**Урок для инженера.** Когда вендор показывает «X ДТП на Y миль» — спрашивайте про знаменатель (количество миль) и про базовую линию (что было бы у водителя-человека или у конкурента при том же объёме). 14 ДТП на 800K миль — это много или мало? Без базовой линии нельзя сказать. Водитель-человек в США имеет примерно 1 смертельный случай на 100 миллионов миль, и около 200 аварий (всех типов) на 100 миллионов миль. Tesla 14 на 800K — пересчитайте на 100 миллионов миль и сравните с базовой линией. Получите грубую оценку.</a:t>
             </a:r>
           </a:p>
         </p:txBody>
@@ -1732,7 +2307,42 @@
           <a:lstStyle/>
           <a:p>
             <a:r>
-              <a:t>См. slides/s28-последняя миля-deliveries.md speaker notes.</a:t>
+              <a:t>Last-mile — это уровень четыре лестницы среды. Тротуар вместо проезжей части, кампусы вместо улиц, пригороды вместо центра города, дрон над крышами.</a:t>
+            </a:r>
+            <a:br/>
+            <a:br/>
+            <a:r>
+              <a:t>Я пройду по четырём кейсам и одному pivot.</a:t>
+            </a:r>
+            <a:br/>
+            <a:br/>
+            <a:r>
+              <a:t>Starship Technologies. Девять миллионов автономных доставок к 2025 году. Более двух тысяч семисот роботов на дорогах. Шестьдесят+ университетских кампусов в США + сто пятьдесят локаций суммарно. Где работает — на университетских кампусах. Это narrow controlled environment: ограниченная территория, известная инфраструктура, friendly user base. Где не масштабируется — в dense urban. Снег застревает роботов, vandalism, package handoff issues (робот не может передать пакет получателю без человека).</a:t>
+            </a:r>
+            <a:br/>
+            <a:br/>
+            <a:r>
+              <a:t>Coco Robotics. Более тысячи роботов в Лос-Анджелесе. Пятьсот тысяч+ доставок. Цель — десять тысяч роботов при географическом расширении. Coco работает в специфическом контексте — LA suburban + Dallas + Miami + Helsinki + Chicago.</a:t>
+            </a:r>
+            <a:br/>
+            <a:br/>
+            <a:r>
+              <a:t>Zipline. Это самая впечатляющая last-mile история. Сто миллионов автономных миль на март 2025 года. Два миллиона коммерческих доставок на январь 2026. Двадцать два миллиона доз вакцин в Африке кумулятивно. Семь и шесть десятых миллиарда долларов valuation, сто пятьдесят миллионов партнёрство с US State Department в ноябре 2025 года. Где работает — medical Africa. Strong emotional pull (lifesaving), narrow ODD (delivery between hospitals и clinics), regulatory openness (Африка имеет более гибкое drone regulation, чем США).</a:t>
+            </a:r>
+            <a:br/>
+            <a:br/>
+            <a:r>
+              <a:t>Nuro — четвёртый кейс, и это pivot. До 2023-2024 года Nuro была B2C delivery компанией — small autonomous pod роботы доставляли еду и товары в suburban США. В 2024 году exit B2C delivery, pivot к лицензированию autonomous-стека OEM. Lesson — B2C delivery не оказался прибыльным в American urban context. Даже well-funded стартап с хорошей technology выходит, когда unit economics не работает.</a:t>
+            </a:r>
+            <a:br/>
+            <a:br/>
+            <a:r>
+              <a:t>Pedagogical point. Sidewalk robots — узкие ниши. Не universal solution. Drone medical Africa растёт быстро — Zipline единственный proven mass-deployment. Drone urban US — заблокирован FAA Part 107 + acoustic concerns + neighborhood opposition. Nuro pivot — caveat, что даже well-funded стартапы выходят из B2C-delivery, когда unit economics не работает.</a:t>
+            </a:r>
+            <a:br/>
+            <a:br/>
+            <a:r>
+              <a:t>Last-mile в США — это не «миллион дронов в небе through every metro» как обещали маркетологи в 2018-2020 годах. Это narrow niches с slow growth. Реальный driver уровня четыре — это медицинский (Zipline) и кампусный (Starship). Всё остальное — пилоты, которые могут или не могут масштабироваться.</a:t>
             </a:r>
           </a:p>
         </p:txBody>
@@ -1802,7 +2412,57 @@
           <a:lstStyle/>
           <a:p>
             <a:r>
-              <a:t>См. slides/s29-cruise-centerpiece.md speaker notes.</a:t>
+              <a:t>Cruise GM exit — это centerpiece раздела три. Я хочу остановиться на три с половиной минуты, потому что этот кейс собирает все уроки лекции в одном месте.</a:t>
+            </a:r>
+            <a:br/>
+            <a:br/>
+            <a:r>
+              <a:t>Timeline. В 2016 году GM купила Cruise за миллиард+ долларов. С 2018 по 2022 — extensive funding, рост ODD от Phoenix к Phoenix плюс Сан-Франциско, потом multi-city. Cruise делал driverless ночные смены в SF к 2023 году, хотя только в очень ограниченной географии.</a:t>
+            </a:r>
+            <a:br/>
+            <a:br/>
+            <a:r>
+              <a:t>Второго октября 2023 года произошёл incident в Сан-Франциско. Cruise robotaxi после столкновения пешехода с другим автомобилем — не Cruise — протянул пострадавшую около двадцати футов, вместо немедленной остановки. Это технический failure — Cruise Observe-стек сработал, увидел пешехода, но Decide-логика дала инструкцию «pull over», и в контексте «пешеход под машиной» эта инструкция оказалась катастрофической. Это provал второй стадии OODA-цикла из Лекции 9.</a:t>
+            </a:r>
+            <a:br/>
+            <a:br/>
+            <a:r>
+              <a:t>Двадцать четвёртого октября 2023 — California DMV отозвал лицензию Cruise. Важно: DMV отозвал лицензию не только за сам инцидент, а за coverup. Cruise представила инцидент DMV менее severely, чем он был. DMV это обнаружил позже через independent investigation.</a:t>
+            </a:r>
+            <a:br/>
+            <a:br/>
+            <a:r>
+              <a:t>Late 2023 — mass layoffs, freezing operations. Cruise сократил большую часть персонала и заморозил most operations.</a:t>
+            </a:r>
+            <a:br/>
+            <a:br/>
+            <a:r>
+              <a:t>Декабрь 2024 — GM объявила полный exit. Десять+ миллиардов operating losses кумулятивно за восемь лет. Менее пятисот миллионов revenue. Соотношение двадцать к одному.</a:t>
+            </a:r>
+            <a:br/>
+            <a:br/>
+            <a:r>
+              <a:t>Цифры. Десять+ миллиардов сожжено. Менее пятисот миллионов выручки. На каждый доллар выручки сожжено двадцать долларов капитала. Это unit economics failure высочайшего порядка.</a:t>
+            </a:r>
+            <a:br/>
+            <a:br/>
+            <a:r>
+              <a:t>Четыре уровня failure pattern. Технический — provал второй стадии OODA. Business model — capital intensity без revenue. Regulatory and trust — нарушение transparency. Cultural and organizational — GM-Cruise hybrid culture misalignment.</a:t>
+            </a:r>
+            <a:br/>
+            <a:br/>
+            <a:r>
+              <a:t>Lesson. Это не «один инцидент уничтожил Cruise». Это «один инцидент плюс DMV trust violation» уничтожил Cruise. Если бы Cruise были honest с DMV, то incident мог быть остаточным происшествием, после которого Cruise мог бы recover. Но coverup был последней капля.</a:t>
+            </a:r>
+            <a:br/>
+            <a:br/>
+            <a:r>
+              <a:t>Survivor pattern vs Cruise pattern. Waymo делает crawl-walk-run. Cruise делала rapid ODD expansion ради IPO timeline и нарушение transparency с регулятором. Один dragging incident плюс trust violation = killing program. Это lesson инженерной этики, а не алгоритмическая ошибка.</a:t>
+            </a:r>
+            <a:br/>
+            <a:br/>
+            <a:r>
+              <a:t>Это lesson для вас — будущих инженеров. Когда вы работаете в технологической компании с regulator interaction — transparency с регулятором это не PR-вопрос. Это структурный survival вопрос. Cruise могла бы быть жива, если бы её leadership понимал это.</a:t>
             </a:r>
           </a:p>
         </p:txBody>
@@ -1872,7 +2532,62 @@
           <a:lstStyle/>
           <a:p>
             <a:r>
-              <a:t>См. slides/s30-uber-tempe-2018.md speaker notes.</a:t>
+              <a:t>Uber Tempe 2018 — это первая жертва беспилотного автомобиля в истории. Это самый важный кейс по безопасности в AV-индустрии, и я хочу остановиться на два с половиной минут, потому что отчёт NTSB HAR-19/03 — это канонический регуляторный источник.</a:t>
+            </a:r>
+            <a:br/>
+            <a:br/>
+            <a:r>
+              <a:t>**Факты.** Восемнадцатого марта 2018 года, примерно в десять вечера, в Tempe, Arizona, погибла Элейн Хёрцберг — сорок девять лет. Она пересекала дорогу с велосипедом вне пешеходного перехода. Uber Volvo XC90 со скоростью около сорока миль в час ударил её. Безопасный водитель был на борту, но не следила за дорогой.</a:t>
+            </a:r>
+            <a:br/>
+            <a:br/>
+            <a:r>
+              <a:t>**Что технически произошло.** Камера Uber обнаружила пешехода пять и шесть десятых секунды до удара. Это означает — восприятие работало, объект был обнаружен. Но классификатор восприятия провалился — не классифицировал объект как пешехода. Хёрцберг была вне пешеходного перехода и с велосипедом, что попадало во вне-распределения для тренировочных данных Uber. Модель видела «что-то», но не понимала, что это пешеход, и не запустила аварийный ответ.</a:t>
+            </a:r>
+            <a:br/>
+            <a:br/>
+            <a:r>
+              <a:t>**Намеренное отключение AEB.** Uber отключил заводское автоматическое экстренное торможение на Volvo XC90. Не от забывчивости — Uber делал это намеренно, чтобы избежать конфликтующих вмешательств с собственным стеком восприятия. Это означает, что когда стек Uber провалил классификацию пешехода, заводское AEB тоже не сработало, потому что было отключено.</a:t>
+            </a:r>
+            <a:br/>
+            <a:br/>
+            <a:r>
+              <a:t>**И резервный водитель** — она смотрела Hulu, телевизионное шоу, во время инцидента. Не следила за дорогой.</a:t>
+            </a:r>
+            <a:br/>
+            <a:br/>
+            <a:r>
+              <a:t>**Отчёт NTSB HAR-19/03** цитирует две важные вещи. Первая: «Деактивация Uber ATG системы автоматического экстренного торможения увеличила риски, связанные с испытаниями автоматизированных автомобилей на дорогах общего пользования». Деактивация AEB увеличила риски. Вторая: «Недостаточная культура безопасности Uber и недостаточные процедуры оценки рисков безопасности были названы факторами». Недостаточная культура безопасности цитировалась как фактор.</a:t>
+            </a:r>
+            <a:br/>
+            <a:br/>
+            <a:r>
+              <a:t>**Резервный водитель** — признала вину в создании опасности в 2023 году, три года испытательного срока. Uber как корпорация — никаких уголовных обвинений, но урегулировал с семьёй Хёрцберг.</a:t>
+            </a:r>
+            <a:br/>
+            <a:br/>
+            <a:r>
+              <a:t>**Урок 1 — ODD критичен.** Смещение тренировочных данных на пешеходов вне пешеходного перехода — классификатор восприятия не обобщался. Урок: всегда расширять обучающую выборку до полного распределения поведения пешеходов, включая краевые случаи.</a:t>
+            </a:r>
+            <a:br/>
+            <a:br/>
+            <a:r>
+              <a:t>**Урок 2 — никогда не отключать заводские системы безопасности.** Анти-паттерн. Если стек Uber конфликтовал с заводским AEB Volvo, это означает, что стек Uber недостаточно качественный. Решение — поднять качество стека Uber, не отключать заводское.</a:t>
+            </a:r>
+            <a:br/>
+            <a:br/>
+            <a:r>
+              <a:t>**Урок 3 — внимание оператора безопасности ненадёжно.** Литература по человеческим факторам показывает, что водители теряют бдительность в режиме до полной автономии за десять-пятнадцать минут. Это не вина водителя, это структурная характеристика человеческого внимания. Урок — одного оператора безопасности недостаточно для тестов на дорогах общего пользования.</a:t>
+            </a:r>
+            <a:br/>
+            <a:br/>
+            <a:r>
+              <a:t>**Урок 4 — культура безопасности организации значит.** Uber ATG имела недостаточную культуру безопасности по NTSB. Урок — инженерная культура, не алгоритмы, определяет реальный профиль безопасности AV-программы.</a:t>
+            </a:r>
+            <a:br/>
+            <a:br/>
+            <a:r>
+              <a:t>**Институциональное наследие.** Этот кейс стал фундаментом для NHTSA Standing General Order on Crash Reporting, который сейчас обязывает всех AV-операторов в США отчитываться об авариях. Это институциональное наследие от смерти Элейн Хёрцберг.</a:t>
             </a:r>
           </a:p>
         </p:txBody>
@@ -1942,7 +2657,62 @@
           <a:lstStyle/>
           <a:p>
             <a:r>
-              <a:t>См. slides/s31-tesla-autopilot-nhtsa.md speaker notes.</a:t>
+              <a:t>Tesla Autopilot — это самая масштабная история о безопасности в AV-индустрии. На середину 2025 года в базе NHTSA SGO зафиксировано шестьдесят пять сообщений, пятьдесят четыре подтверждённых смертельных случая, связанных с Tesla Autopilot или Full Self-Driving.</a:t>
+            </a:r>
+            <a:br/>
+            <a:br/>
+            <a:r>
+              <a:t>**EA22002 — расследование NHTSA.** NHTSA открыл его в 2022 году специфически для Tesla Autopilot. Главный вопрос — достаточны ли мониторинг водителя и система предупреждений. Расследование выявило тринадцать смертельных аварий с паттерном предсказуемого неправильного использования. Предсказуемое неправильное использование — это концепт из инженерных стандартов. Если пользователь использует продукт способом, который дизайнер мог предвидеть, и это приводит к смертельным случаям, это — структурная проблема дизайна, не индивидуальная вина пользователя.</a:t>
+            </a:r>
+            <a:br/>
+            <a:br/>
+            <a:r>
+              <a:t>**Паттерн, идентифицированный NHTSA.** Водители используют Autopilot в условиях, для которых он не предназначен. Чтобы спать. Чтобы читать. Чтобы выполнять не-водительские задачи. И Autopilot не обнаруживает это и не выходит из автоматического режима достаточно надёжно.</a:t>
+            </a:r>
+            <a:br/>
+            <a:br/>
+            <a:r>
+              <a:t>**Расширение в 2024.** NHTSA расширил охват данных SGO на аварии в условиях пониженной видимости. Это конкретный паттерн — Autopilot имеет более высокую частоту аварий в условиях с засветкой от солнца, туманом, ночью без уличных огней, рядом с припаркованными аварийными автомобилями (мигалки полиции сбивают восприятие).</a:t>
+            </a:r>
+            <a:br/>
+            <a:br/>
+            <a:r>
+              <a:t>**Новое расследование 2025.** Открыто на примерно двух миллионах девятистах тысячах Tesla. Это шире, чем EA22002, и включает дополнительные категории.</a:t>
+            </a:r>
+            <a:br/>
+            <a:br/>
+            <a:r>
+              <a:t>**Урок 1 — наименование значит.** «Autopilot» и «Full Self-Driving» приглашают к избыточному доверию. Водитель видит название «Pilot» и думает, что машина управляет, как авиационный автопилот — то есть автономно. В реальности Autopilot — это L2 ADAS, который требует внимания водителя 100% времени.</a:t>
+            </a:r>
+            <a:br/>
+            <a:br/>
+            <a:r>
+              <a:t>**Урок 2 — мониторинг водителя обязателен.** Не опционален. И не просто камера-смотрит-на-лицо — это реальная проверка вовлечённости, которая обнаруживает, когда водитель отвлёкся, и вмешивается.</a:t>
+            </a:r>
+            <a:br/>
+            <a:br/>
+            <a:r>
+              <a:t>**Урок 3 — краевые случаи в восприятии.** Засветка от солнца, припаркованные аварийные автомобили, пониженная видимость — это сдвиг распределения в реальных условиях, который не покрывается тренировочными данными.</a:t>
+            </a:r>
+            <a:br/>
+            <a:br/>
+            <a:r>
+              <a:t>**Урок 4 — только-зрение без HD-карты.** Это пока стадия исследования для L4. Waymo HD-карта + LiDAR + удалённые операторы + формальное обоснование безопасности — доказанный паттерн. Tesla только-зрение — пока не доказан на сравнимом пробеге и базе безопасности.</a:t>
+            </a:r>
+            <a:br/>
+            <a:br/>
+            <a:r>
+              <a:t>**Статистическое сравнение.** Пятьдесят четыре смертельных случая на примерно семьдесят миллионов миль работы Autopilot — это экстраполяция раскрытий Tesla, может быть предметом верификации. Если мы пересчитываем на 100 миллионов миль базы — это получается на порядок выше, чем человеческая базовая линия (один смертельный случай на сто миллионов миль).</a:t>
+            </a:r>
+            <a:br/>
+            <a:br/>
+            <a:r>
+              <a:t>Это означает — Autopilot не безопаснее водителя-человека на статистически значимой базе. PR-материалы вендора утверждают обратное, но независимые раскрытия NHTSA показывают структурный паттерн.</a:t>
+            </a:r>
+            <a:br/>
+            <a:br/>
+            <a:r>
+              <a:t>**Урок для инженера.** Когда вендор показывает статистику типа «Autopilot is X% safer than human driver» — проверяйте знаменатель, базовую линию и источник. Tesla сама публикует Tesla Vehicle Safety Report, но он использует собственное определение «миля в Autopilot» и сравнивает с человеческими смертельными случаями на ВСЕХ милях, не на сравнимых хайвейных милях. Это сравнение яблок с апельсинами.</a:t>
             </a:r>
           </a:p>
         </p:txBody>
@@ -2012,7 +2782,47 @@
           <a:lstStyle/>
           <a:p>
             <a:r>
-              <a:t>См. slides/s32-городской-провал-matrix.md speaker notes.</a:t>
+              <a:t>Замыкая failure deep-dive раздела три — четыре урока городского AV, которые суммируют Cruise / Uber / Tesla кейсы.</a:t>
+            </a:r>
+            <a:br/>
+            <a:br/>
+            <a:r>
+              <a:t>Первый урок — ODD дисциплина критична. Cruise — главный пример. Rapid ODD expansion в SF без extensive валидации ночных смен. Uber Tempe — другой пример. Training data bias на pedestrians вне crosswalk означал, что Hertzberg в её специфической ситуации была за пределами effective ODD. Lesson — при оценке AV-программы: какой ODD? Какие условия за пределами? Какой процесс validation для new ODD expansion?</a:t>
+            </a:r>
+            <a:br/>
+            <a:br/>
+            <a:r>
+              <a:t>Второй урок — driver-monitoring обязателен. Tesla Autopilot — пятьдесят четыре fatalities NHTSA. EA22002 — тринадцать fatal crashes с foreseeable misuse. Lesson — при L2 и L3 systems — реальный engagement check, не просто camera looking at face. Что система делает при distracted driver? Это структурный design question.</a:t>
+            </a:r>
+            <a:br/>
+            <a:br/>
+            <a:r>
+              <a:t>Третий урок — naming matters. Tesla назвала L2 ADAS «Autopilot» и «Full Self-Driving». Это приглашает over-reliance. Lesson — никогда не называть L2 ADAS «pilot», «autonomous», «self-driving», «full self-driving». Use SAE level terminology — L2, L3, L4. Тогда пользователь понимает limitations.</a:t>
+            </a:r>
+            <a:br/>
+            <a:br/>
+            <a:r>
+              <a:t>Четвёртый урок — hardware ≠ платформа. Cruise — GM hardware-OEM культура vs software-platform требования. GM-Cruise hybrid culture не работала, потому что hardware OEM культура (квартальный отчёт, supply chain optimization, conservative engineering pace) не совместима с software platform требованиями (rapid iteration, accept failures in early stages, network effects, scale-first profitability-later). Lesson — это recall из Лекции 11 про GE Predix, и теперь рекуррентен в transport. Когда OEM покупает software startup — какая cultural integration plan?</a:t>
+            </a:r>
+            <a:br/>
+            <a:br/>
+            <a:r>
+              <a:t>Связи между уроками. ODD и driver-monitoring — это две стороны одной coin. ODD определяет где система должна работать. Driver-monitoring определяет, что делать, когда система за пределами ODD.</a:t>
+            </a:r>
+            <a:br/>
+            <a:br/>
+            <a:r>
+              <a:t>Naming и ODD — naming приглашает или препятствует ODD-дисциплине. Если пользователь думает «autopilot», он не следит за ODD-edge. Если «driver-assist», он более ответственно.</a:t>
+            </a:r>
+            <a:br/>
+            <a:br/>
+            <a:r>
+              <a:t>Hardware ≠ платформа — это lesson лекции 11 (GE Predix), теперь рекуррентен в transport — Cruise GM, Argo Ford+VW. Это структурный pattern OEM-software интеграции, и он работает не только для transport.</a:t>
+            </a:r>
+            <a:br/>
+            <a:br/>
+            <a:r>
+              <a:t>Эти четыре урока вы можете записать как чек-лист в кармане. При оценке любого AV-предложения от вендора — ODD дисциплина, driver-monitoring, naming, OEM-cultural integration.</a:t>
             </a:r>
           </a:p>
         </p:txBody>
@@ -2082,7 +2892,32 @@
           <a:lstStyle/>
           <a:p>
             <a:r>
-              <a:t>См. slides/s03-lecture-map.md speaker notes.</a:t>
+              <a:t>Прежде чем начать спускаться по лестнице среды — короткая дорожная карта. У нас пять разделов на семьдесят пять минут.</a:t>
+            </a:r>
+            <a:br/>
+            <a:br/>
+            <a:r>
+              <a:t>Первый раздел — контролируемая среда. Склад, порт, железнодорожные стрелки. Это самая зрелая часть AI-в-логистике, и я буду там около пятнадцати минут. Symbotic, Amazon Robotics, Locus, ZPMC, KONUX.</a:t>
+            </a:r>
+            <a:br/>
+            <a:br/>
+            <a:r>
+              <a:t>Второй раздел — полуструктурированная магистраль. Aurora Innovation, первая коммерческая беспилотная грузоперевозка в США. Mobileye Chauffeur. КамАЗ-54901 на М-11. И главное — UPS ORION как канонический пример операционных исследований, которые работают лучше глубокого обучения для well-defined задач маршрутизации. Плюс серия банкротств autonomous trucking: Argo, Embark, TuSimple, Waymo Via, Starsky.</a:t>
+            </a:r>
+            <a:br/>
+            <a:br/>
+            <a:r>
+              <a:t>Третий раздел — городская улица robotaxi и последняя миля. Здесь Waymo, Apollo Go, Pony.ai, WeRide, Tesla Robotaxi Austin. И главное — деталь Cruise GM exit как анти-пример. Uber Tempe 2018 как первый смертельный AV-инцидент. Tesla Autopilot и данные NHTSA. Starship, Coco, Zipline.</a:t>
+            </a:r>
+            <a:br/>
+            <a:br/>
+            <a:r>
+              <a:t>Четвёртый раздел — чрезвычайная ситуация и рамка решения. Хуситы в Красном море, контейнеровоз Ever Given в Суэцком канале, COVID. Это то, где ML слеп по определению. И рамка решения — пять критериев «AI или не AI в логистике», плюс альтернативный инструментарий.</a:t>
+            </a:r>
+            <a:br/>
+            <a:br/>
+            <a:r>
+              <a:t>Пятый раздел — короткое замыкание и мост к Лекции 14, телекоммуникации и кибербез. Семь вопросов вендору, которые останутся с вами в кармане после лекции.</a:t>
             </a:r>
           </a:p>
         </p:txBody>
@@ -2152,7 +2987,47 @@
           <a:lstStyle/>
           <a:p>
             <a:r>
-              <a:t>См. slides/s34-houthi-red-sea.md speaker notes.</a:t>
+              <a:t>Хуситы в Красном море — это canonical black-swan example для логистики 2020-х годов. Я хочу остановиться на этом кейсе три минуты, потому что он показывает фундаментальную ограниченность ML в логистике.</a:t>
+            </a:r>
+            <a:br/>
+            <a:br/>
+            <a:r>
+              <a:t>Что произошло. Хуситы — движение из Йемена — начали атаковать контейнеровозы в Красном море в конце ноября 2023 года, после геополитических событий региона. К февралю 2024 года, за два месяца, контейнерный трафик через Красное море упал на девяносто процентов.</a:t>
+            </a:r>
+            <a:br/>
+            <a:br/>
+            <a:r>
+              <a:t>Числа. Daily transit trading volume — четыре миллиона метрических тонн до crisis, один и семь десятых миллиона после. Минус пятьдесят семь с половиной процентов. Прежде через Red Sea шло около пятнадцати процентов мировой морской торговли и около тридцати процентов global container traffic. Шиппинг компании rerouting на Cape of Good Hope добавляет тридцать процентов transit time для Asia-Europe маршрутов. J.P. Morgan оценил снижение effective global container capacity на девять процентов.</a:t>
+            </a:r>
+            <a:br/>
+            <a:br/>
+            <a:r>
+              <a:t>Что произошло технически в ML domain. Demand forecast модели, обученные на данных 2018-2023, не имели никакого signal про Houthi disruption. Это не была bias или mis-calibration — это была complete distribution shift. Модель не «была обучена плохо» — она была обучена на distribution, которое перестало существовать.</a:t>
+            </a:r>
+            <a:br/>
+            <a:br/>
+            <a:r>
+              <a:t>Шиппинг-rates вырос в три-пять раз на Asia-Europe маршрутах за два месяца. Just-in-time supply chains broke. Компании, optimized на minimum inventory — например, retailers с zero-buffer на seasonal items — оказались в shortage.</a:t>
+            </a:r>
+            <a:br/>
+            <a:br/>
+            <a:r>
+              <a:t>Resilient survivors были компаниями с redundancy. Multi-source supply, не single supplier. Scenario planning капабельностью — pre-built сценариев для major disruption.</a:t>
+            </a:r>
+            <a:br/>
+            <a:br/>
+            <a:r>
+              <a:t>Что НЕ работало в этой crisis. ML demand forecast полностью out-of-distribution. Optimization solvers — нет данных о новых transit times для recalibration на первой неделе. Real-time tracking данных хватало, но это symptom, не cause — мы видели где корабли, но не могли predict где должны быть.</a:t>
+            </a:r>
+            <a:br/>
+            <a:br/>
+            <a:r>
+              <a:t>Что РАБОТАЛО. Человеческие диспетчеры в exception-командах Maersk, MSC, CMA CGM, Hapag-Lloyd. Реальное rerouting decisions делали люди, не модели. И scenario planning — компании, у которых были pre-built сценарии для major Red Sea disruption (на случай Iran-related или other geopolitical events), могли быстро respond. И OR с manual override — Gurobi и OR-Tools recalibrated с новыми ETAs от human dispatchers.</a:t>
+            </a:r>
+            <a:br/>
+            <a:br/>
+            <a:r>
+              <a:t>Lesson — главный pedagogical point. ML по определению слеп на out-of-distribution событиях. Это не «AI плохо обучена» — это структурная характеристика любого supervised ML. На уровне пять лестницы среды правильные инструменты — это human dispatchers + scenario planning + OR. Не ML.</a:t>
             </a:r>
           </a:p>
         </p:txBody>
@@ -2222,7 +3097,52 @@
           <a:lstStyle/>
           <a:p>
             <a:r>
-              <a:t>См. slides/s35-suez-ever-given.md speaker notes.</a:t>
+              <a:t>Ever Given в Suez Canal в марте 2021 — это совершенно другой type черного лебедя по сравнению с хуситами. Я хочу остановиться на этом кейсе две минуты.</a:t>
+            </a:r>
+            <a:br/>
+            <a:br/>
+            <a:r>
+              <a:t>Факты. Двадцать третьего марта 2021 года, контейнеровоз Ever Given — это огромное судно класса ULCV, четыреста метров длиной — заблокировал Suez Canal. Sand storm плюс strong winds плюс pilot decisions — и судно села на mel canal. Двенадцать процентов мировой торговли проходило через Suez. Девять и шесть десятых миллиарда долларов goods held up. CNBC estimated четыреста миллионов долларов в час delay cost. Bloomberg — около десяти миллиардов в день global economy impact.</a:t>
+            </a:r>
+            <a:br/>
+            <a:br/>
+            <a:r>
+              <a:t>Шесть дней блокировки. Двадцать восьмого-двадцать девятого марта 2021 — Ever Given был re-floated.</a:t>
+            </a:r>
+            <a:br/>
+            <a:br/>
+            <a:r>
+              <a:t>Что важно для лекции — это разный type черного лебедя от хуситов. Хуситы — это геополитическая disruption, имеющая ML implications через demand forecast. Suez Ever Given — это purely physical infrastructure incident. AI не имела никакой роли — ни в incident itself, ни в решении.</a:t>
+            </a:r>
+            <a:br/>
+            <a:br/>
+            <a:r>
+              <a:t>Что помогло разблокировать. Tug boats — десять+ морских буксиров. Dredging — engineering teams extract sand около носа судна. Lunar tide — высокий прилив 28-29 марта 2021 позволил re-floating с less force needed. И cumulative effort пять с половиной дней — engineering teams worked twenty-four-seven.</a:t>
+            </a:r>
+            <a:br/>
+            <a:br/>
+            <a:r>
+              <a:t>Это всё — engineering, не AI. Нет здесь ML demand forecast, который бы помог. Нет здесь optimization solver. Нет здесь computer vision. Это физика, гидродинамика, координация людей, инженерная работа.</a:t>
+            </a:r>
+            <a:br/>
+            <a:br/>
+            <a:r>
+              <a:t>Lessons. Первый — physical infrastructure problem требует engineering решения, не AI. Suez Ever Given — это canonical case, где «давайте применим AI» — это wrong tool. Lesson для инженера: при оценке логистической проблемы, спрашивайте «is this AI-amenable, или это infrastructure problem?»</a:t>
+            </a:r>
+            <a:br/>
+            <a:br/>
+            <a:r>
+              <a:t>Второй — глобальные supply chains не могут tolerate подобные disruptions. Шесть дней блокировки одного канала = почти десять миллиардов долларов held up.</a:t>
+            </a:r>
+            <a:br/>
+            <a:br/>
+            <a:r>
+              <a:t>Третий — альтернативные маршруты. Cape of Good Hope — это плюс тридцать процентов transit time, что много, но possible. И Suez expansion project — Египет начал двойной Suez Canal expansion в 2014 году. Но Ever Given показал, что часть канала всё ещё single-channel, и нужно continuing expansion.</a:t>
+            </a:r>
+            <a:br/>
+            <a:br/>
+            <a:r>
+              <a:t>Pedagogical point. Если ваш потенциальный vendor предлагает «AI решит infrastructure проблемы supply chain» — это red flag. Suez Ever Given — это случай, где AI бесполезна. Lesson — alternative is engineering, не algorithm.</a:t>
             </a:r>
           </a:p>
         </p:txBody>
@@ -2292,7 +3212,67 @@
           <a:lstStyle/>
           <a:p>
             <a:r>
-              <a:t>См. slides/s36-covid-supply-chain.md speaker notes.</a:t>
+              <a:t>COVID 2020 — это очень понятный пример из живой истории. Я хочу остановиться на этом две минуты не потому, что мы все его помним — а потому, что уроки для логистики всё ещё актуальны.</a:t>
+            </a:r>
+            <a:br/>
+            <a:br/>
+            <a:r>
+              <a:t>**Три фазы. Март-апрель 2020 — начальный шок.** Локдауны в Ухане, потом Италии, потом Испании, потом США, потом глобально — за шесть недель. Спрос на потребительские товары всплеск — туалетная бумага, электроника, оборудование для дома (работа из дома). Спрос на туристические товары обвал.</a:t>
+            </a:r>
+            <a:br/>
+            <a:br/>
+            <a:r>
+              <a:t>**2020-2021 — хаос.** Порты перегружены. Только в Long Beach — сто девять кораблей в ожидании в октябре 2021 года. Фрахтовые ставки на контейнеры всплеск в пять-десять раз. Цепочки поставок «точно-в-срок» сломались. Дефицит СИЗ. Дефицит чипов, формирующий восстановление автопрома — некоторые автопроизводители ждали месяцы поставок чипов.</a:t>
+            </a:r>
+            <a:br/>
+            <a:br/>
+            <a:r>
+              <a:t>**2022 и далее — перекалибровка.** Компании построили буферные запасы. Многоисточниковое снабжение вместо одного источника. Возврат производства ближе — Мексика для США, Турция и Вьетнам для Европы. «Запас на случай» вместо «точно-в-срок». Это структурный сдвиг в философии цепочек поставок.</a:t>
+            </a:r>
+            <a:br/>
+            <a:br/>
+            <a:r>
+              <a:t>**Что не работало в COVID.** ML-прогноз спроса. Модели были обучены на до-COVID распределении — два-три года стабильного поведения потребителей. После локдаунов распределение полностью изменилось. Точность упала на порядок. Не плавное снижение — это полный сдвиг распределения.</a:t>
+            </a:r>
+            <a:br/>
+            <a:br/>
+            <a:r>
+              <a:t>Оптимизационные решатели для запасов — то же. Они работают при допущении стационарного спроса. Реальность была крайне нестационарной.</a:t>
+            </a:r>
+            <a:br/>
+            <a:br/>
+            <a:r>
+              <a:t>Аналитические панели в реальном времени — данные были, но они показывали симптом (перегруженность, задержки), а решения требовались от человеческого суждения. ML-предупреждения «что-то не так» не помогали — все знали, что что-то не так.</a:t>
+            </a:r>
+            <a:br/>
+            <a:br/>
+            <a:r>
+              <a:t>**Что РАБОТАЛО — управление исключениями человеком.** Команды закупок вынуждены были вручную восстанавливать цепочки поставок через кризис. Это была неделя за неделей координация. Телефонные звонки. Аварийные переговоры. Ручные обновления в ERP.</a:t>
+            </a:r>
+            <a:br/>
+            <a:br/>
+            <a:r>
+              <a:t>**Сценарное планирование.** Компании с готовыми сценариями (например, планы 2003 года после SARS на азиатский сбой) могли реагировать быстрее. Это выгода от длинной памяти корпорации.</a:t>
+            </a:r>
+            <a:br/>
+            <a:br/>
+            <a:r>
+              <a:t>**Диверсифицированная база поставок.** Многоисточниковость не «неэффективное резервирование» — это устойчивость. Компании, у которых два-три поставщика для каждого критического SKU, выжили лучше, чем те, у которых один азиатский поставщик на каждый SKU.</a:t>
+            </a:r>
+            <a:br/>
+            <a:br/>
+            <a:r>
+              <a:t>**Резервы наличности.** Компании с буферной наличностью могли покупать через дефицит, платя премию за критические ресурсы. Без резервов наличности — производство останавливалось.</a:t>
+            </a:r>
+            <a:br/>
+            <a:br/>
+            <a:r>
+              <a:t>**Урок — хрупкость JIT.** Точно-в-срок — это модель с нулевым буфером запасов. Спроектирована для стационарного спроса плюс надёжное снабжение. На сдвиге распределения «чёрного лебедя» — JIT превращается в дефицит и упущенные продажи. Запас на случай — это альтернатива с буферными запасами. Стоимость выше, но устойчивее.</a:t>
+            </a:r>
+            <a:br/>
+            <a:br/>
+            <a:r>
+              <a:t>**Педагогический смысл.** «Оптимизация запасов через ML» — это маркетинговый питч для стационарного мира. В мире с регулярными чёрными лебедями — COVID 2020, хуситы 2024, Suez 2021, торговые трения США-Китай, климатические сбои — буфер плюс многоисточниковость плюс сценарное планирование работают лучше, чем ML.</a:t>
             </a:r>
           </a:p>
         </p:txBody>
@@ -2362,7 +3342,47 @@
           <a:lstStyle/>
           <a:p>
             <a:r>
-              <a:t>См. slides/s37-trucker-shortage-structural.md speaker notes.</a:t>
+              <a:t>Trucker shortage — это один из самых часто mismatched problem statements в AV-индустрии. Я хочу остановиться на этом две минуты, потому что framing «AV решит trucker shortage» появляется практически во всех VC pitches autonomous-trucking, и инженер должен критически разбирать его.</a:t>
+            </a:r>
+            <a:br/>
+            <a:br/>
+            <a:r>
+              <a:t>Цифры от ATA. Семьдесят восемь тысяч дефицит водителей в США во второй половине 2022 года — пиковое значение. Шестьдесят тысяч в 2023, но Bob Costello, ATA chief economist, прокомментировал «for all the wrong reasons» — экономический downturn снизил спрос на грузоперевозки, и часть дефицита исчезла не потому, что больше водителей появилось.</a:t>
+            </a:r>
+            <a:br/>
+            <a:br/>
+            <a:r>
+              <a:t>ATA прогнозирует, что один и два десятых миллиона новых водителей понадобится за десятилетие. Это значительный structural recruitment challenge. Annual turnover at large carriers (long-haul) — более девяноста процентов. Это означает — почти весь персонал меняется ежегодно.</a:t>
+            </a:r>
+            <a:br/>
+            <a:br/>
+            <a:r>
+              <a:t>Дополнительные параметры. Mean age водителей — пятьдесят два года. Retirement wave приближается. Female drivers составляют шестнадцать процентов от workforce, против пятидесяти процентов в overall labor force — серьёзный gender imbalance.</a:t>
+            </a:r>
+            <a:br/>
+            <a:br/>
+            <a:r>
+              <a:t>Root causes структурные. Старение workforce. Pay structure — per mile not hourly, водители теряют time на loading и unloading. Effective hourly rate часто под minimum wage. Lifestyle — long-haul водители недели от дома, family-incompatible. CDL training cost — три-семь тысяч долларов upfront, benefit unclear в первые годы.</a:t>
+            </a:r>
+            <a:br/>
+            <a:br/>
+            <a:r>
+              <a:t>Не-AI решения. Visa programs. US имеет H-2B visas для seasonal workers, и expanding для truck drivers рассматривается. CDL training subsidies от government — частичная компенсация training cost. Pay restructuring — hourly pay включая loading time вместо per-mile. Equipment quality — newer trucks, lower mileage, better quality of life on road. Job design — local short-haul (no overnights) versus long-haul. Local turnover тридцать-сорок процентов, long-haul девяносто+ — структурно разные jobs.</a:t>
+            </a:r>
+            <a:br/>
+            <a:br/>
+            <a:r>
+              <a:t>Why AV не решит. Recall цифр из s20. Семьдесят восемь тысяч дефицит = семь и восемь десятых миллиарда миль capacity needed. Aurora — десять-сто trucks к 2027 году = один-десять миллионов миль capacity. AV покрывает 0,01-0,13% дефицита через 2027 год. Math не работает.</a:t>
+            </a:r>
+            <a:br/>
+            <a:br/>
+            <a:r>
+              <a:t>Pedagogical point. Trucker shortage — это структурная labor policy проблема. AI/AV не решает. Решается через политику, переподготовку, условия труда. Lesson для инженера — когда vendor показывает «AV решит labor shortage» — это marketing framing, не engineering решение. Спрашивать: «какие альтернативные политики вы considering как possible? какие будут unintended consequences AV-deployment для существующих водителей?»</a:t>
+            </a:r>
+            <a:br/>
+            <a:br/>
+            <a:r>
+              <a:t>Lesson — структурные проблемы требуют structural решений. Технологические инструменты могут помочь на margins, но не replace policy interventions для labor markets.</a:t>
             </a:r>
           </a:p>
         </p:txBody>
@@ -2432,7 +3452,67 @@
           <a:lstStyle/>
           <a:p>
             <a:r>
-              <a:t>См. slides/s38-decision-framework.md speaker notes.</a:t>
+              <a:t>Это центральная окупаемость раздела четыре и всей лекции. Пять критериев, которые позволяют инженеру решить, AI или не AI для конкретной логистической задачи. (На слайде s40 эта 5-критерийная рамка дополняется 7 вопросами вендору.)</a:t>
+            </a:r>
+            <a:br/>
+            <a:br/>
+            <a:r>
+              <a:t>**Критерий 1 — среда контролируемая или нет.** Если склад, порт, рельсы — да, AI применим. Это уровень один лестницы среды, и AI зрело работает. Symbotic, Amazon Robotics, KONUX — канонические примеры. Если нет — городские, магистраль, исключение — переход к следующему критерию.</a:t>
+            </a:r>
+            <a:br/>
+            <a:br/>
+            <a:r>
+              <a:t>**Критерий 2 — чётко поставленная задача оптимизации.** Задача коммивояжёра, задача маршрутизации, планирование расписаний. Если да — это территория OR. Gurobi, CPLEX, Google OR-Tools работают лучше, дешевле, объяснимее, чем RL или ML. UPS ORION — канонический пример, триста-четыреста миллионов экономии в год через OR плюс эвристики, не глубокое обучение.</a:t>
+            </a:r>
+            <a:br/>
+            <a:br/>
+            <a:r>
+              <a:t>**Критерий 3 — стационарный спрос или нестационарный.** Если спрос предсказуем по сезонам — это территория EOQ. Оптимальный размер заказа, страховой запас, ABC-анализ. Формулы 1913 года, простые, работают. Урок — сделать аудит ваших запасов: какой процент SKU реально требует ML? Часто менее двадцати процентов. Остальные — классических формул достаточно.</a:t>
+            </a:r>
+            <a:br/>
+            <a:br/>
+            <a:r>
+              <a:t>**Критерий 4 — критично для безопасности с регуляторным аудитом.** FDA для холодовой фармы. FAA для авиации. IMO для морской безопасности. ICAO для авиатрафика. Если да — это территория правилового подхода плюс человек-в-цикле. Чёрный ящик ML не работает в регулируемых индустриях, потому что аудиторский след обязателен.</a:t>
+            </a:r>
+            <a:br/>
+            <a:br/>
+            <a:r>
+              <a:t>**Критерий 5 — событие в-распределении или вне.** Если ежедневные операции в нормальном распределении спроса — это территория ML-скоринга. ML может оптимизировать на маржинах. Если событие чёрного лебедя (хуситы, Suez, COVID) — это уровень пять лестницы. Диспетчер-человек плюс сценарное планирование, не ML.</a:t>
+            </a:r>
+            <a:br/>
+            <a:br/>
+            <a:r>
+              <a:t>**Примеры применения.** Складская роботизация — Критерий 1 да, Критерий 4 частично (безопасность склада, но легче, чем фарма). AI применим плюс безопасность плюс HITL.</a:t>
+            </a:r>
+            <a:br/>
+            <a:br/>
+            <a:r>
+              <a:t>UPS ORION маршрутизация — Критерий 2 да, VRP с десятками тысяч маршрутов. OR, не ML.</a:t>
+            </a:r>
+            <a:br/>
+            <a:br/>
+            <a:r>
+              <a:t>Прогноз спроса в кризис типа хуситов — Критерий 5 нет, полностью вне-распределения. Диспетчер-человек.</a:t>
+            </a:r>
+            <a:br/>
+            <a:br/>
+            <a:r>
+              <a:t>FDA-регулируемая холодовая фарма-логистика — Критерий 4 да. Правиловой плюс HITL.</a:t>
+            </a:r>
+            <a:br/>
+            <a:br/>
+            <a:r>
+              <a:t>Сезонные запасы ритейлера — Критерий 3 частично. Смесь стационарного плюс всплеск. Гибрид EOQ плюс точечный ML на сезонных SKU. Это не «полностью AI» или «полностью формула» — это гибрид с правильным выбором инструмента на каждой категории SKU.</a:t>
+            </a:r>
+            <a:br/>
+            <a:br/>
+            <a:r>
+              <a:t>**Педагогический смысл.** Это не «всегда AI» или «никогда AI». Это фреймворк решения, который разбивает логистическую нагрузку на категории, и для каждой определяет правильный инструмент. Урок для инженера — когда вы оцениваете предложение вендора, проходите по этим пяти критериям. Какой критерий применим? Какой инструмент правильный для этой категории?</a:t>
+            </a:r>
+            <a:br/>
+            <a:br/>
+            <a:r>
+              <a:t>Это фреймворк, который останется с вами после лекции. Это главная окупаемость лекции тринадцать.</a:t>
             </a:r>
           </a:p>
         </p:txBody>
@@ -2502,7 +3582,62 @@
           <a:lstStyle/>
           <a:p>
             <a:r>
-              <a:t>См. slides/s39-alternative-toolkit.md speaker notes.</a:t>
+              <a:t>Замыкая раздел четыре — alternative toolkit. Шесть классов инструментов, которые инженер-логист должен знать как альтернативы AI.</a:t>
+            </a:r>
+            <a:br/>
+            <a:br/>
+            <a:r>
+              <a:t>Первое — operations research. OR. Маршрутизация, scheduling, network design. Vendors — Gurobi и CPLEX commercial, Google OR-Tools open source. Pyomo — Python framework. UPS ORION — canonical proof success.</a:t>
+            </a:r>
+            <a:br/>
+            <a:br/>
+            <a:r>
+              <a:t>Второе — классические запасы. EOQ, safety stock, ABC analysis. Формулы 1913 года и далее, остаются relevant в 2026 году для большой доли SKU. Audit вашего inventory — какой процент SKU действительно требует ML? Часто менее двадцати процентов.</a:t>
+            </a:r>
+            <a:br/>
+            <a:br/>
+            <a:r>
+              <a:t>Третье — сценарное планирование. Это не software — это methodology. Shell использует scenario planning с 1970-х годов. McKinsey предлагает scenario planning services. Maersk post-COVID начал serious scenario planning для resilience.</a:t>
+            </a:r>
+            <a:br/>
+            <a:br/>
+            <a:r>
+              <a:t>Pre-build сценарии. «Что если Red Sea closed?» «Что если Suez blocked?» «Что если labor strike в Long Beach?» Когда event happens — у вас уже есть playbook.</a:t>
+            </a:r>
+            <a:br/>
+            <a:br/>
+            <a:r>
+              <a:t>Четвёртое — rule-based vision. OpenCV open source. HALCON и Cognex commercial. Используется в controlled-env с known defects. Bottle inspection на пивоварне — canonical example из лекции 11. Где CV была last line, не first line — это lesson Boeing 737 door plug.</a:t>
+            </a:r>
+            <a:br/>
+            <a:br/>
+            <a:r>
+              <a:t>Пятое — hybrid CV plus signal processing. Когда vision-only недостаточно. Container damage inspection в портах — vision plus ultrasonic plus radar. Multi-modal sensor fusion.</a:t>
+            </a:r>
+            <a:br/>
+            <a:br/>
+            <a:r>
+              <a:t>Шестое — human-in-the-loop. HITL. Workflow tools — Jira, ServiceNow. Используется при regulatory audit (FDA, FAA, IMO). И в black-swan events. Maersk exception teams handled Red Sea rerouting — это HITL в action.</a:t>
+            </a:r>
+            <a:br/>
+            <a:br/>
+            <a:r>
+              <a:t>Открытые источники. Google OR-Tools — open source, бесплатный для VRP и TSP. OpenCV — open source computer vision. Pyomo — Python framework для OR modeling. Все три — production-grade.</a:t>
+            </a:r>
+            <a:br/>
+            <a:br/>
+            <a:r>
+              <a:t>Pedagogical point. Инженер-логист, который знает только AI и ML — это incomplete engineer. Полный toolkit включает OR, classical formulas, scenario planning, rule-based vision, hybrid sensors, HITL. AI — это один tool из шести, не «универсальное решение».</a:t>
+            </a:r>
+            <a:br/>
+            <a:br/>
+            <a:r>
+              <a:t>Lesson для вас — будущих инженеров. Когда вы выходите на работу в логистическую компанию, ваша first ставка должна быть classical tools — OR plus EOQ plus rule-based. Если они не работают для конкретной задачи — тогда добавляете ML. Не наоборот. AI-first подход — это часто the wrong choice, и vendor proposals часто пытаются продать AI там, где OR-Tools достаточно.</a:t>
+            </a:r>
+            <a:br/>
+            <a:br/>
+            <a:r>
+              <a:t>Это вторая main payoff лекции. Carry это с собой.</a:t>
             </a:r>
           </a:p>
         </p:txBody>
@@ -2572,7 +3707,52 @@
           <a:lstStyle/>
           <a:p>
             <a:r>
-              <a:t>См. slides/s40-qa-vendor-questions.md speaker notes.</a:t>
+              <a:t>Это последний контентный слайд лекции. Я хочу оставить вас с практическим инструментом в кармане — семью вопросами, которые вы зададите любому вендору логистического AI. Эти семь вопросов дополняют 5-критерийную рамку со слайда s38: критерии говорят «какой класс инструмента нужен», вопросы — «как проверить вендора по выбранному классу».</a:t>
+            </a:r>
+            <a:br/>
+            <a:br/>
+            <a:r>
+              <a:t>**Вопрос 1.** Какое сравнение с базовой линией OR? Google OR-Tools, Gurobi, CPLEX. Это очень важный вопрос, потому что часто предложения вендоров для маршрутизации выглядят как ML-стек, но не показывают сравнения с классическим OR. Если вы спрашиваете «а как вы сравнивались с Gurobi или OR-Tools», и получаете ответ «мы не делали такого сравнения» — это красный флаг. Это означает, что либо ML-решение не лучше OR, либо вендор не знает OR.</a:t>
+            </a:r>
+            <a:br/>
+            <a:br/>
+            <a:r>
+              <a:t>**Вопрос 2.** Какой ваш ODD, и как валидируется новое расширение? Это вопрос фундаментальный, особенно для AV-программ. Инцидент Cruise dragging октября 2023 года — провал именно ODD-дисциплины. Расширение ODD без обширной валидации — анти-паттерн, который убил Cruise.</a:t>
+            </a:r>
+            <a:br/>
+            <a:br/>
+            <a:r>
+              <a:t>**Вопрос 3.** Какой ваш стек мониторинга водителя для L2 или L3? Tesla EA22002 идентифицировало тринадцать смертельных аварий с паттерном предсказуемого неправильного использования — это структурная проблема дизайна, не индивидуальная вина водителей. Мониторинг водителя — обязательная функция, не опциональная.</a:t>
+            </a:r>
+            <a:br/>
+            <a:br/>
+            <a:r>
+              <a:t>**Вопрос 4.** Какое отношение километров в симуляции к километрам на дорогах общего пользования? Разрыв симуляция-к-реальности у Starsky — главная причина их провала. Если вендор показывает миллионы километров в симуляции, но при этом нет километров на дорогах общего пользования — серьёзный красный флаг.</a:t>
+            </a:r>
+            <a:br/>
+            <a:br/>
+            <a:r>
+              <a:t>**Вопрос 5.** Какая частота ошибок на сезонных сдвигах распределения? Чёрная пятница, Рождество, Хэллоуин — каталог наполняется новыми категориями. Зрительный классификатор Sparrow часто ошибается чаще. Спросите вендора про сезонную динамику — какая частота ошибок на пиковых сезонах vs обычное время? Как часто переобучается модель?</a:t>
+            </a:r>
+            <a:br/>
+            <a:br/>
+            <a:r>
+              <a:t>**Вопрос 6.** Какие сертификации? FDA Part 11 для холодовой фармы. ATEX для опасных зон. ISO 26262 для автомобильной безопасности. NHTSA SGO обязательна для AV-операторов в США. Регуляторный аудит обязателен в категориях, критичных для безопасности. Чёрный ящик ML не проходит аудит.</a:t>
+            </a:r>
+            <a:br/>
+            <a:br/>
+            <a:r>
+              <a:t>**Вопрос 7.** Какова удельная экономика? На машину, на маршрут, на тонну груза. Pony.ai — первая robotaxi с положительной операционной прибылью на автомобиль. Гуанчжоу ноябрь 2025, Шэньчжэнь февраль 2026. Без удельных данных — нельзя оценить устойчивость бизнес-модели вендора. И если вендор не публикует удельную экономику — это либо «всё ещё отрицательно», либо «не раскрывается по конкурентным соображениям». Любой скептик считает первое.</a:t>
+            </a:r>
+            <a:br/>
+            <a:br/>
+            <a:r>
+              <a:t>Эти семь вопросов носите с собой. Это вторая главная окупаемость лекции — практический инструментарий для оценки предложений вендоров.</a:t>
+            </a:r>
+            <a:br/>
+            <a:br/>
+            <a:r>
+              <a:t>И теперь — Q&amp;A. Я готов отвечать на ваши вопросы.</a:t>
             </a:r>
           </a:p>
         </p:txBody>
@@ -2642,7 +3822,232 @@
           <a:lstStyle/>
           <a:p>
             <a:r>
-              <a:t>См. slides/s41-closing-hero-noc-bridge.md speaker notes.</a:t>
+              <a:t>Это closing slide лекции тринадцать. Я хочу провести вас через быстрый recap и потом перейти к bridge к лекции четырнадцать.</a:t>
+            </a:r>
+            <a:br/>
+            <a:br/>
+            <a:r>
+              <a:t>Recap. Сегодня прошли пять уровней лестницы среды. Уровень один — controlled. Warehouse, port, rail. Symbotic, Amazon, KONUX. Уровень два — highway. Aurora первая коммерческая, Mobileye Chauffeur, КамАЗ на М-11. UPS ORION как canonical OR success. Серия банкротств AV-trucking. Уровень три — urban robotaxi и last-mile. Waymo выжил с пятью сотнями тысяч поездок в неделю. Cruise разорилась после dragging incident октября 2023. Tesla только начинает. Starship на кампусах, Zipline в Африке. Уровень пять — exception. Хуситы 2024, Ever Given 2021, COVID 2020.</a:t>
+            </a:r>
+            <a:br/>
+            <a:br/>
+            <a:r>
+              <a:t>Survivors уважают среду. Остаются в narrow ODD. Не overpromise. Cruise vs Waymo — обоим тот же стек, но Waymo выжил, потому что cautious в ODD expansion. Это lesson инженерного смирения, не arrogance.</a:t>
+            </a:r>
+            <a:br/>
+            <a:br/>
+            <a:r>
+              <a:t>И теперь — мост к лекции четырнадцать. Завтра я расскажу про телекоммуникации, сетевую инфраструктуру, кибербез. Это **другая среда** — cyber instead of physical. Но **та же логика**.</a:t>
+            </a:r>
+            <a:br/>
+            <a:br/>
+            <a:r>
+              <a:t>AI augments human SOC analyst, не replaces. Так же, как AI augments human dispatcher в Houthi crisis, не replaces.</a:t>
+            </a:r>
+            <a:br/>
+            <a:br/>
+            <a:r>
+              <a:t>OR plus rule-based threat detection остаётся mainstream. Так же, как UPS ORION остался OR, не ML.</a:t>
+            </a:r>
+            <a:br/>
+            <a:br/>
+            <a:r>
+              <a:t>ML helps в-distribution, слепо out-of-distribution. Так же, как ML demand forecast слеп на хуситов или Ever Given.</a:t>
+            </a:r>
+            <a:br/>
+            <a:br/>
+            <a:r>
+              <a:t>HITL обязателен в exception events. Так же, как в transport — Waymo имеет удалённых операторов, Maersk имеет exception teams.</a:t>
+            </a:r>
+            <a:br/>
+            <a:br/>
+            <a:r>
+              <a:t>**Лестница среды переходит из физического мира в сетевой.** Уровень один — controlled enterprise network. Уровень пять — zero-day exploit, который никто не видел раньше. Аналогия структурная.</a:t>
+            </a:r>
+            <a:br/>
+            <a:br/>
+            <a:r>
+              <a:t>Lesson — то, что вы изучили в лекциях 9, 11, 12, 13 — это foundation для лекции 14. Не отдельные домены, а единая логика «AI работает в контролируемой среде, ломается на out-of-distribution, и инженер должен критически разбираться в каждом конкретном случае».</a:t>
+            </a:r>
+            <a:br/>
+            <a:br/>
+            <a:r>
+              <a:t>Спасибо за внимание. Завтра встретимся для лекции четырнадцать.</a:t>
+            </a:r>
+          </a:p>
+        </p:txBody>
+      </p:sp>
+      <p:sp>
+        <p:nvSpPr>
+          <p:cNvPr id="4" name="Slide Number Placeholder 3"/>
+          <p:cNvSpPr>
+            <a:spLocks noGrp="1"/>
+          </p:cNvSpPr>
+          <p:nvPr>
+            <p:ph type="sldNum" idx="5" sz="quarter"/>
+          </p:nvPr>
+        </p:nvSpPr>
+        <p:spPr/>
+      </p:sp>
+    </p:spTree>
+  </p:cSld>
+  <p:clrMapOvr>
+    <a:masterClrMapping/>
+  </p:clrMapOvr>
+</p:notes>
+</file>
+
+<file path=ppt/notesSlides/notesSlide38.xml><?xml version="1.0" encoding="utf-8"?>
+<p:notes xmlns:a="http://schemas.openxmlformats.org/drawingml/2006/main" xmlns:p="http://schemas.openxmlformats.org/presentationml/2006/main" xmlns:r="http://schemas.openxmlformats.org/officeDocument/2006/relationships">
+  <p:cSld>
+    <p:spTree>
+      <p:nvGrpSpPr>
+        <p:cNvPr id="1" name=""/>
+        <p:cNvGrpSpPr/>
+        <p:nvPr/>
+      </p:nvGrpSpPr>
+      <p:grpSpPr>
+        <a:xfrm>
+          <a:off x="0" y="0"/>
+          <a:ext cx="0" cy="0"/>
+          <a:chOff x="0" y="0"/>
+          <a:chExt cx="0" cy="0"/>
+        </a:xfrm>
+      </p:grpSpPr>
+      <p:sp>
+        <p:nvSpPr>
+          <p:cNvPr id="2" name="Slide Image Placeholder 1"/>
+          <p:cNvSpPr>
+            <a:spLocks noGrp="1"/>
+          </p:cNvSpPr>
+          <p:nvPr>
+            <p:ph type="sldImg" idx="2"/>
+          </p:nvPr>
+        </p:nvSpPr>
+        <p:spPr/>
+      </p:sp>
+      <p:sp>
+        <p:nvSpPr>
+          <p:cNvPr id="3" name="Notes Placeholder 2"/>
+          <p:cNvSpPr>
+            <a:spLocks noGrp="1"/>
+          </p:cNvSpPr>
+          <p:nvPr>
+            <p:ph type="body" idx="3" sz="quarter"/>
+          </p:nvPr>
+        </p:nvSpPr>
+        <p:spPr/>
+        <p:txBody>
+          <a:bodyPr/>
+          <a:lstStyle/>
+          <a:p>
+            <a:r>
+              <a:t>Раздел один. Контролируемая среда. Склад, порт, рельсы.</a:t>
+            </a:r>
+            <a:br/>
+            <a:br/>
+            <a:r>
+              <a:t>Это уровень один лестницы среды. Самая контролируемая часть всей транспортной цепи. Освещение известно и постоянно. Геометрия фиксирована — стеллажи, проходы, зоны pick-up. Пешеходов либо нет, либо они отделены барьерами. SKU — артикулы товаров — перечислены в справочнике. Погода не влияет. GPS не нужен.</a:t>
+            </a:r>
+            <a:br/>
+            <a:br/>
+            <a:r>
+              <a:t>Эта структурированность даёт инженеру несколько подарков, которые на улице невозможны. Детерминизм восприятия: одна и та же коробка под одним и тем же освещением выглядит одинаково сегодня и через год. Компактный набор сценариев: тестировать систему нужно не на бесконечном числе ситуаций, а на конечном списке задач. Наблюдаемость: каждое движение робота можно записать и воспроизвести.</a:t>
+            </a:r>
+            <a:br/>
+            <a:br/>
+            <a:r>
+              <a:t>При этом «контролируемая среда» не означает «лёгкая среда». Это означает, что среда упрощает задачу до уровня, на котором AI 2026 года может надёжно работать.</a:t>
+            </a:r>
+            <a:br/>
+            <a:br/>
+            <a:r>
+              <a:t>В этом разделе я пройду по четырём подкатегориям: склад, AMR, порт, железная дорога. И завершу пятью границами уровня один — humanoid-хайп, капитальная интенсивность, миф об lights-out warehouse, distribution shift на сезонных пиках, кибер-уязвимость.</a:t>
+            </a:r>
+          </a:p>
+        </p:txBody>
+      </p:sp>
+      <p:sp>
+        <p:nvSpPr>
+          <p:cNvPr id="4" name="Slide Number Placeholder 3"/>
+          <p:cNvSpPr>
+            <a:spLocks noGrp="1"/>
+          </p:cNvSpPr>
+          <p:nvPr>
+            <p:ph type="sldNum" idx="5" sz="quarter"/>
+          </p:nvPr>
+        </p:nvSpPr>
+        <p:spPr/>
+      </p:sp>
+    </p:spTree>
+  </p:cSld>
+  <p:clrMapOvr>
+    <a:masterClrMapping/>
+  </p:clrMapOvr>
+</p:notes>
+</file>
+
+<file path=ppt/notesSlides/notesSlide39.xml><?xml version="1.0" encoding="utf-8"?>
+<p:notes xmlns:a="http://schemas.openxmlformats.org/drawingml/2006/main" xmlns:p="http://schemas.openxmlformats.org/presentationml/2006/main" xmlns:r="http://schemas.openxmlformats.org/officeDocument/2006/relationships">
+  <p:cSld>
+    <p:spTree>
+      <p:nvGrpSpPr>
+        <p:cNvPr id="1" name=""/>
+        <p:cNvGrpSpPr/>
+        <p:nvPr/>
+      </p:nvGrpSpPr>
+      <p:grpSpPr>
+        <a:xfrm>
+          <a:off x="0" y="0"/>
+          <a:ext cx="0" cy="0"/>
+          <a:chOff x="0" y="0"/>
+          <a:chExt cx="0" cy="0"/>
+        </a:xfrm>
+      </p:grpSpPr>
+      <p:sp>
+        <p:nvSpPr>
+          <p:cNvPr id="2" name="Slide Image Placeholder 1"/>
+          <p:cNvSpPr>
+            <a:spLocks noGrp="1"/>
+          </p:cNvSpPr>
+          <p:nvPr>
+            <p:ph type="sldImg" idx="2"/>
+          </p:nvPr>
+        </p:nvSpPr>
+        <p:spPr/>
+      </p:sp>
+      <p:sp>
+        <p:nvSpPr>
+          <p:cNvPr id="3" name="Notes Placeholder 2"/>
+          <p:cNvSpPr>
+            <a:spLocks noGrp="1"/>
+          </p:cNvSpPr>
+          <p:nvPr>
+            <p:ph type="body" idx="3" sz="quarter"/>
+          </p:nvPr>
+        </p:nvSpPr>
+        <p:spPr/>
+        <p:txBody>
+          <a:bodyPr/>
+          <a:lstStyle/>
+          <a:p>
+            <a:r>
+              <a:t>Раздел два. Полуструктурированная магистраль.</a:t>
+            </a:r>
+            <a:br/>
+            <a:br/>
+            <a:r>
+              <a:t>Это уровень два лестницы. Известное направление движения — это всегда interstate, федеральная трасса. Относительно простые правила — четыре-шесть полос, разметка, ограждение от пешеходов. HD-карта возможна — расстояние между съездами фиксировано, геометрия не меняется. Погода имеет значение, но прогнозируема. Пешеходов на огороженной магистрали либо нет, либо они отделены от потока.</a:t>
+            </a:r>
+            <a:br/>
+            <a:br/>
+            <a:r>
+              <a:t>Это уровень эмерджентный. Первые коммерческие операции автономной грузоперевозки начались в США только в мае 2025 года, когда Aurora запустила маршрут Даллас-Хьюстон. Но история стартапов в этом сегменте брутальная — двадцать миллиардов долларов сожжено на non-survivors с 2017 по 2024 год: Argo AI, Embark Trucks, TuSimple, Waymo Via, Starsky Robotics. Выживших — три-четыре компании в США: Waymo (которая закрыла собственное trucking-направление), Aurora, Mobileye в режиме eyes-off L3.</a:t>
+            </a:r>
+            <a:br/>
+            <a:br/>
+            <a:r>
+              <a:t>В этом разделе я хочу провести по четырём темам. Первое — кто из выживших что делает. Aurora Даллас-Хьюстон, Mobileye Chauffeur, КамАЗ на М-11. Второе — UPS ORION как канонический пример операционных исследований, которые работают лучше глубокого обучения для well-defined задач маршрутизации. Это важный fundamental слайд, потому что он показывает, что не всё в логистике — это ML. Третье — failure deep-dive. Пять компаний на одной timeline, чтобы вы видели не отдельные кейсы, а паттерн survivor consolidation. И четвёртое — два framing'а, которые часто звучат от вендоров, и которые инженер должен критически разбирать. AV решит trucker shortage — нет. End-to-end DNN без HD-map для L4 — пока research-stage.</a:t>
             </a:r>
           </a:p>
         </p:txBody>
@@ -2712,7 +4117,247 @@
           <a:lstStyle/>
           <a:p>
             <a:r>
-              <a:t>См. slides/s04-glossary.md speaker notes.</a:t>
+              <a:t>Прежде чем погружаться в конкретные компании и цифры — короткий глоссарий. Десять аббревиатур, которые я буду использовать без объяснения дальше в лекции. Если хотя бы три из них вам не знакомы — обязательно фиксируйте их сейчас, потом будет тяжелее.</a:t>
+            </a:r>
+            <a:br/>
+            <a:br/>
+            <a:r>
+              <a:t>SAE J3016. Эс-эй-и — Society of Automotive Engineers, стандартизирующая организация в автомобильной отрасли. Документ J3016 определяет шесть уровней автономии. L3 — водитель может оторвать глаза от дороги в определённых условиях, но должен быть готов взять управление. L4 — driverless в определённой области штатной эксплуатации. Большая часть лекции — про переход от L2 к L4, и про то, что один уровень от другого отделяет огромная инженерная пропасть.</a:t>
+            </a:r>
+            <a:br/>
+            <a:br/>
+            <a:r>
+              <a:t>ODD — Operational Design Domain, область штатной эксплуатации. Формальное описание условий, при которых автономная система проектировалась работать. Погода, время суток, тип дороги, географические рамки. ODD есть главная инженерная дисциплина при разработке L3+ системы, и расширение ODD без валидации — самый частый антипаттерн.</a:t>
+            </a:r>
+            <a:br/>
+            <a:br/>
+            <a:r>
+              <a:t>AV — autonomous vehicle. AMR — автономный мобильный робот, обычно складской. HD-карта — детальная карта дорожного окружения, основной приоритетный инструмент Waymo и Apollo Go.</a:t>
+            </a:r>
+            <a:br/>
+            <a:br/>
+            <a:r>
+              <a:t>Дальше — про математику. OR, операционные исследования. Класс математических методов оптимизации с 1940-х годов. Линейное программирование, целочисленное, задача коммивояжёра, маршрутизация транспортных средств. OR — это не AI, и для well-defined задач часто работает лучше, дешевле и объяснимее, чем reinforcement learning. UPS ORION — канонический пример.</a:t>
+            </a:r>
+            <a:br/>
+            <a:br/>
+            <a:r>
+              <a:t>EOQ — Economic Order Quantity, классическая формула 1913 года Forda Harris. Три параметра, и для большой доли SKU она даёт результаты не хуже, чем ML.</a:t>
+            </a:r>
+            <a:br/>
+            <a:br/>
+            <a:r>
+              <a:t>SGO — NHTSA Standing General Order on Crash Reporting. Регуляторная база, обязательная для всех AV-операторов в США. Все цифры по Tesla, Waymo, Cruise fatality — оттуда.</a:t>
+            </a:r>
+            <a:br/>
+            <a:br/>
+            <a:r>
+              <a:t>HITL / HOOL / HOTL — человек в петле, на петле, вне петли. Концепция из Лекции 9.</a:t>
+            </a:r>
+          </a:p>
+        </p:txBody>
+      </p:sp>
+      <p:sp>
+        <p:nvSpPr>
+          <p:cNvPr id="4" name="Slide Number Placeholder 3"/>
+          <p:cNvSpPr>
+            <a:spLocks noGrp="1"/>
+          </p:cNvSpPr>
+          <p:nvPr>
+            <p:ph type="sldNum" idx="5" sz="quarter"/>
+          </p:nvPr>
+        </p:nvSpPr>
+        <p:spPr/>
+      </p:sp>
+    </p:spTree>
+  </p:cSld>
+  <p:clrMapOvr>
+    <a:masterClrMapping/>
+  </p:clrMapOvr>
+</p:notes>
+</file>
+
+<file path=ppt/notesSlides/notesSlide40.xml><?xml version="1.0" encoding="utf-8"?>
+<p:notes xmlns:a="http://schemas.openxmlformats.org/drawingml/2006/main" xmlns:p="http://schemas.openxmlformats.org/presentationml/2006/main" xmlns:r="http://schemas.openxmlformats.org/officeDocument/2006/relationships">
+  <p:cSld>
+    <p:spTree>
+      <p:nvGrpSpPr>
+        <p:cNvPr id="1" name=""/>
+        <p:cNvGrpSpPr/>
+        <p:nvPr/>
+      </p:nvGrpSpPr>
+      <p:grpSpPr>
+        <a:xfrm>
+          <a:off x="0" y="0"/>
+          <a:ext cx="0" cy="0"/>
+          <a:chOff x="0" y="0"/>
+          <a:chExt cx="0" cy="0"/>
+        </a:xfrm>
+      </p:grpSpPr>
+      <p:sp>
+        <p:nvSpPr>
+          <p:cNvPr id="2" name="Slide Image Placeholder 1"/>
+          <p:cNvSpPr>
+            <a:spLocks noGrp="1"/>
+          </p:cNvSpPr>
+          <p:nvPr>
+            <p:ph type="sldImg" idx="2"/>
+          </p:nvPr>
+        </p:nvSpPr>
+        <p:spPr/>
+      </p:sp>
+      <p:sp>
+        <p:nvSpPr>
+          <p:cNvPr id="3" name="Notes Placeholder 2"/>
+          <p:cNvSpPr>
+            <a:spLocks noGrp="1"/>
+          </p:cNvSpPr>
+          <p:nvPr>
+            <p:ph type="body" idx="3" sz="quarter"/>
+          </p:nvPr>
+        </p:nvSpPr>
+        <p:spPr/>
+        <p:txBody>
+          <a:bodyPr/>
+          <a:lstStyle/>
+          <a:p>
+            <a:r>
+              <a:t>Раздел три. Городская улица robotaxi и последняя миля. Это уровни три и четыре лестницы среды одновременно — потому что они связаны общей городской динамикой.</a:t>
+            </a:r>
+            <a:br/>
+            <a:br/>
+            <a:r>
+              <a:t>Городская среда — это множество пешеходов, велосипедисты, скейтбордисты, parking maneuvers, бесконечные эмерджентные ситуации. И регулярные изменения городской инфраструктуры — строительство, утечки воды, parade, протесты, weather-related обстоятельства. Это уровень эмерджентный и хрупкий.</a:t>
+            </a:r>
+            <a:br/>
+            <a:br/>
+            <a:r>
+              <a:t>Survivors города в 2026 году — Waymo, Apollo Go, Pony.ai, WeRide. Tesla Robotaxi только начинает. Cruise разорилась — десять миллиардов сожжено за восемь лет. И эта разница между Waymo и Cruise — она не алгоритмическая, она дисциплинарная.</a:t>
+            </a:r>
+            <a:br/>
+            <a:br/>
+            <a:r>
+              <a:t>Я буду в этом разделе пятнадцать минут. Структура — четыре подкатегории. Первое — Waymo как canonical survivor robotaxi. Полмиллиона поездок в неделю, три тысячи машин, десять+ городов США. Второе — китайская модель: Apollo Go от Baidu, плюс Pony.ai и WeRide. Третье — Tesla Robotaxi Austin как текущее состояние vision-only ставки. Четырнадцать ДТП за восемь месяцев, около восьмисот тысяч платных миль.</a:t>
+            </a:r>
+            <a:br/>
+            <a:br/>
+            <a:r>
+              <a:t>Failure deep-dive раздела три. Cruise GM exit как centerpiece — десять миллиардов превратилось в ноль за восемь лет, и timeline от октябрьского инцидента 2023 года до декабрьского решения GM 2024 года — четырнадцать месяцев. Uber Tempe 2018 — первый смертельный AV-инцидент. Tesla Autopilot — пятьдесят четыре подтверждённых fatalities в базе NHTSA на октябрь 2025 года.</a:t>
+            </a:r>
+            <a:br/>
+            <a:br/>
+            <a:r>
+              <a:t>И last-mile — четвёртая подкатегория. Starship, Coco, Zipline. Nuro pivot. Все они работают в очень узких нишах — кампусах, narrow neighborhoods, medical Africa, — и каждое расширение требует борьбы с регуляцией или физикой.</a:t>
+            </a:r>
+          </a:p>
+        </p:txBody>
+      </p:sp>
+      <p:sp>
+        <p:nvSpPr>
+          <p:cNvPr id="4" name="Slide Number Placeholder 3"/>
+          <p:cNvSpPr>
+            <a:spLocks noGrp="1"/>
+          </p:cNvSpPr>
+          <p:nvPr>
+            <p:ph type="sldNum" idx="5" sz="quarter"/>
+          </p:nvPr>
+        </p:nvSpPr>
+        <p:spPr/>
+      </p:sp>
+    </p:spTree>
+  </p:cSld>
+  <p:clrMapOvr>
+    <a:masterClrMapping/>
+  </p:clrMapOvr>
+</p:notes>
+</file>
+
+<file path=ppt/notesSlides/notesSlide41.xml><?xml version="1.0" encoding="utf-8"?>
+<p:notes xmlns:a="http://schemas.openxmlformats.org/drawingml/2006/main" xmlns:p="http://schemas.openxmlformats.org/presentationml/2006/main" xmlns:r="http://schemas.openxmlformats.org/officeDocument/2006/relationships">
+  <p:cSld>
+    <p:spTree>
+      <p:nvGrpSpPr>
+        <p:cNvPr id="1" name=""/>
+        <p:cNvGrpSpPr/>
+        <p:nvPr/>
+      </p:nvGrpSpPr>
+      <p:grpSpPr>
+        <a:xfrm>
+          <a:off x="0" y="0"/>
+          <a:ext cx="0" cy="0"/>
+          <a:chOff x="0" y="0"/>
+          <a:chExt cx="0" cy="0"/>
+        </a:xfrm>
+      </p:grpSpPr>
+      <p:sp>
+        <p:nvSpPr>
+          <p:cNvPr id="2" name="Slide Image Placeholder 1"/>
+          <p:cNvSpPr>
+            <a:spLocks noGrp="1"/>
+          </p:cNvSpPr>
+          <p:nvPr>
+            <p:ph type="sldImg" idx="2"/>
+          </p:nvPr>
+        </p:nvSpPr>
+        <p:spPr/>
+      </p:sp>
+      <p:sp>
+        <p:nvSpPr>
+          <p:cNvPr id="3" name="Notes Placeholder 2"/>
+          <p:cNvSpPr>
+            <a:spLocks noGrp="1"/>
+          </p:cNvSpPr>
+          <p:nvPr>
+            <p:ph type="body" idx="3" sz="quarter"/>
+          </p:nvPr>
+        </p:nvSpPr>
+        <p:spPr/>
+        <p:txBody>
+          <a:bodyPr/>
+          <a:lstStyle/>
+          <a:p>
+            <a:r>
+              <a:t>Раздел четыре. Чёрный лебедь и рамка решения.</a:t>
+            </a:r>
+            <a:br/>
+            <a:br/>
+            <a:r>
+              <a:t>Это уровень пять лестницы среды. Чрезвычайная ситуация — событие, которое выходит за пределы distribution, на котором ML-модели были обучены. По определению out-of-distribution.</a:t>
+            </a:r>
+            <a:br/>
+            <a:br/>
+            <a:r>
+              <a:t>Я хочу провести по четырём конкретным примерам black-swan failures в логистике 2020-2024 годов, потом по structural labor shortage problem, и потом по рамке решения с пятью критериями плюс альтернативный инструментарий.</a:t>
+            </a:r>
+            <a:br/>
+            <a:br/>
+            <a:r>
+              <a:t>Первый пример — хуситы атакуют в Красном море с конца 2023 года. За два месяца контейнерный трафик через Красное море упал на девяносто процентов. ML demand forecast полностью out-of-distribution — модель не обучалась на rerouting через Cape of Good Hope добавляющего тридцать процентов transit time.</a:t>
+            </a:r>
+            <a:br/>
+            <a:br/>
+            <a:r>
+              <a:t>Второй — Ever Given в Suez Canal в марте 2021. Шесть дней блокировки, двенадцать процентов мировой торговли, девять и шесть десятых миллиарда долларов goods held up. Важно: AI не играла роли. Это была физика и pilotage. Корабль слишком большой для канала плюс sand storm плюс пилотская ошибка. Решалось engineering — dredging плюс tug boats. AI бесполезно.</a:t>
+            </a:r>
+            <a:br/>
+            <a:br/>
+            <a:r>
+              <a:t>Третий — COVID 2020. Глобальный обвал цепочек поставок. Just-in-time logistics плюс ML demand forecast = fragile system. Resilience потребовала redundancy, которую большие компании reluctantly начали building только после COVID.</a:t>
+            </a:r>
+            <a:br/>
+            <a:br/>
+            <a:r>
+              <a:t>Четвёртый — trucker shortage в США. Семьдесят восемь тысяч deficit водителей в 2022. ATA не считает это AI-проблемой. Решается политикой, переподготовкой, визами, условиями труда.</a:t>
+            </a:r>
+            <a:br/>
+            <a:br/>
+            <a:r>
+              <a:t>После four examples я перейду к рамке решения. Пять критериев «AI или не AI в логистике». Это main payoff лекции — практический инструмент в кармане.</a:t>
+            </a:r>
+            <a:br/>
+            <a:br/>
+            <a:r>
+              <a:t>И завершу alternative toolkit. Шесть классов инструментов, которые инженер-логист должен знать как alternatives to AI.</a:t>
             </a:r>
           </a:p>
         </p:txBody>
@@ -2782,7 +4427,37 @@
           <a:lstStyle/>
           <a:p>
             <a:r>
-              <a:t>См. slides/s05-keystone-environment-ladder.md speaker notes.</a:t>
+              <a:t>Это ключевой слайд лекции. Запомните эту лестницу, потому что я буду возвращаться к ней весь следующий час с четвертью.</a:t>
+            </a:r>
+            <a:br/>
+            <a:br/>
+            <a:r>
+              <a:t>Уровень один — контролируемая среда. Склад, портовый терминал, железнодорожный depot. Освещение известно, геометрия фиксирована, пешеходов либо нет, либо они отделены физическими барьерами, погода не влияет. AI здесь работает наиболее зрелым образом. Symbotic с Walmart — четыреста APD-центров и более пяти миллиардов backlog. Amazon Robotics — миллион роботов в фулфилменте. KONUX с Deutsche Bahn — прогностическое обслуживание стрелок.</a:t>
+            </a:r>
+            <a:br/>
+            <a:br/>
+            <a:r>
+              <a:t>Уровень два — полуструктурированная магистраль. Известное направление, относительно простые правила, HD-карта возможна. Aurora с первой коммерческой беспилотной грузоперевозкой Даллас-Хьюстон в мае 2025 года. КамАЗ-54901 со стеком Cognitive Pilot на трассе М-11. Уровень эмерджентный — первые коммерческие операции только начинаются, история стартапов брутальная. Двадцать миллиардов долларов сожжено на компаниях, которые не выжили — Argo AI, Embark Trucks, TuSimple, Waymo Via, Starsky Robotics.</a:t>
+            </a:r>
+            <a:br/>
+            <a:br/>
+            <a:r>
+              <a:t>Уровень три — городская улица robotaxi. Сан-Франциско, Лос-Анджелес, Феникс, Шэньчжэнь, Гуанчжоу. Множество пешеходов, велосипедисты, эмерджентные ситуации. Waymo выжил с пятью сотнями тысяч поездок в неделю на стеке HD-карта + лидар + камеры + удалённые операторы. Cruise разорилась — десять миллиардов сожжено за восемь лет. Tesla только начинает в Остине, 14 ДТП за восемь месяцев. И разница между ними — не алгоритмическая, а дисциплина ODD.</a:t>
+            </a:r>
+            <a:br/>
+            <a:br/>
+            <a:r>
+              <a:t>Уровень четыре — последняя миля города. Тротуар вместо проезжей части, кампусы вместо улиц. Starship на университетских кампусах. Coco в Лос-Анджелесе. Zipline сто миллионов миль в Африке для медицинской доставки. Уровень — узкие ниши, дальнейшее масштабирование заблокировано регуляцией и физикой.</a:t>
+            </a:r>
+            <a:br/>
+            <a:br/>
+            <a:r>
+              <a:t>Уровень пять — чрезвычайная ситуация. Хуситы атакуют в Красном море с конца 2023 года — за два месяца контейнерный трафик упал на девяносто процентов. Ever Given блокировал Суэцкий канал шесть дней в марте 2021 — двенадцать процентов мировой торговли встало. COVID 2020 — глобальный обвал цепочек поставок. На этом уровне ML слеп по определению. И инструменты здесь — не AI, а диспетчеры-люди в exception-командах Maersk и FedEx, сценарное планирование, операционные исследования, классические формулы запасов.</a:t>
+            </a:r>
+            <a:br/>
+            <a:br/>
+            <a:r>
+              <a:t>Эта лестница — главный предиктор успеха. Каждый раздел сегодняшней лекции — мотивированный спуск или подъём по этой оси.</a:t>
             </a:r>
           </a:p>
         </p:txBody>
@@ -2852,7 +4527,27 @@
           <a:lstStyle/>
           <a:p>
             <a:r>
-              <a:t>См. slides/s07-symbotic-walmart.md speaker notes.</a:t>
+              <a:t>Канонический пример складской AI-интеграции 2024-2025 годов — партнёрство Symbotic с Walmart. В январе 2025 года Symbotic закрыла сделку по приобретению Walmart Advanced Systems and Robotics business, и Walmart обязался развернуть автоматизированные системы Symbotic для четырёхсот APD-центров.</a:t>
+            </a:r>
+            <a:br/>
+            <a:br/>
+            <a:r>
+              <a:t>APD — это Accelerated Pickup and Delivery, центр ускоренного получения и доставки. Walmart строит сеть таких центров для быстрой доставки клиентам, и Symbotic — основной автоматизирующий партнёр. Backlog в пять+ миллиардов долларов — это примерно четыре годовых выручки Symbotic вперёд. Для растущей публичной компании это экстраординарный сигнал. Сравнительная контрольная линия: backlog в десять процентов годовой выручки считается слабым, в пятьдесят — средним, в сто — сильным. Четыреста процентов — экстраординарным.</a:t>
+            </a:r>
+            <a:br/>
+            <a:br/>
+            <a:r>
+              <a:t>Что делает Symbotic технически — это полная складская автоматизация: palletization, составление паллет под отгрузку; depalletization, разбор поступающих паллет; picking, отбор товара по заказу; sorting, сортировка по маршрутам. Под капотом — комбинация классических промышленных роботов, мобильных платформ и систем компьютерного зрения. Это важный пункт: это не одна большая модель ML, а интегрированная система. ML используется для конкретных задач — распознавания и классификации SKU. А core control-логика — рулевая по детерминированным правилам и сообщениям WMS.</a:t>
+            </a:r>
+            <a:br/>
+            <a:br/>
+            <a:r>
+              <a:t>Главный риск — капитальная интенсивность. Один APD-центр Symbotic стоит десятки миллионов долларов на установку, и срок окупаемости — несколько лет. Это означает, что малые ритейлеры не могут позволить эту технологию на собственные средства. Контрфактуальная альтернатива для малой логистической компании — традиционный склад с конвейерами и штрих-код сканерами стоимостью менее миллиона долларов на десять тысяч SKU.</a:t>
+            </a:r>
+            <a:br/>
+            <a:br/>
+            <a:r>
+              <a:t>Второй риск — привязка к одному вендору. Когда Walmart инвестирует миллиарды в Symbotic-стек на четыреста центров — это классический OEM-lock-in паттерн. Переключение на Knapp, Vanderlande или KION Dematic займёт годы.</a:t>
             </a:r>
           </a:p>
         </p:txBody>
@@ -2922,7 +4617,37 @@
           <a:lstStyle/>
           <a:p>
             <a:r>
-              <a:t>См. slides/s08-amazon-robotics.md speaker notes.</a:t>
+              <a:t>Amazon является крупнейшим в мире оператором складских роботов — более миллиона единиц в фулфилмент-сети глобально, рубеж заявлен в июне-июле 2025 года. Это в тысячи раз больше, чем Aurora имеет беспилотных грузовиков, и в сотни раз больше, чем Waymo имеет robotaxi. Соотношение даёт правильную интуицию: автономия в контролируемой среде уже массовая, автономия на дороге — пока узкая.</a:t>
+            </a:r>
+            <a:br/>
+            <a:br/>
+            <a:r>
+              <a:t>Amazon Robotics — это внутренний стек, который не лицензируется внешним клиентам. Линейка состоит из нескольких поколений роботов с разной специализацией.</a:t>
+            </a:r>
+            <a:br/>
+            <a:br/>
+            <a:r>
+              <a:t>Sparrow — робот-манипулятор для bin-picking, представлен в 2022 году. Распознаёт миллионы SKU через комбинацию компьютерного зрения и оценки глубины, планирует grasp — захват — и укладывает в нужный bin. Sparrow — это визуальный pick, и он работает на широком классе товаров, но имеет ограничения на текстиле, прозрачной упаковке, металлических предметах с зеркальными поверхностями.</a:t>
+            </a:r>
+            <a:br/>
+            <a:br/>
+            <a:r>
+              <a:t>Sequoia — система контейнерного хранения, представлена в 2023 году. Увеличивает плотность хранения за счёт перехода от стеллажей к контейнерному. Sequoia не AI в строгом смысле — это mechatronics плюс WMS-логика.</a:t>
+            </a:r>
+            <a:br/>
+            <a:br/>
+            <a:r>
+              <a:t>Proteus — первый полностью автономный мобильный робот Amazon в фулфилменте, 2022 год. Перемещает carts по floor-у склада, обходит препятствия, включая людей. SLAM-стек Proteus должен работать в условиях движущихся людей и переменной геометрии — это уже выше уровня полностью детерминированной среды.</a:t>
+            </a:r>
+            <a:br/>
+            <a:br/>
+            <a:r>
+              <a:t>Vulcan — touch-enabled робот, представлен в 2024-2025 годах. Добавляет тактильную чувствительность. Vulcan — это ответ Amazon на ограничение Sparrow: vision-only стек не справляется с текстилем, прозрачной упаковкой и зеркальными поверхностями. Добавление тактильного сенсора позволяет роботу прощупать предмет после захвата и подтвердить успешный grasp.</a:t>
+            </a:r>
+            <a:br/>
+            <a:br/>
+            <a:r>
+              <a:t>Главный урок этой последовательности — Sparrow к Vulcan. За три года Amazon прошёл путь от «vision-only решит pick всего» до «нам нужен тактильный сенсор». Это дисциплинированный путь итеративной разработки, и он показывает важную инженерную интуицию: vision-стек не универсален, даже на складе, и для определённых категорий товаров требуется multi-modal sensor stack — зрение плюс тактильность.</a:t>
             </a:r>
           </a:p>
         </p:txBody>
@@ -2992,7 +4717,37 @@
           <a:lstStyle/>
           <a:p>
             <a:r>
-              <a:t>См. slides/s09-amr-locus-greyorange.md speaker notes.</a:t>
+              <a:t>Категория автономных мобильных роботов — это самая массовая категория роботов, доступная не-Amazon компаниям. Три ключевых игрока 2026 года.</a:t>
+            </a:r>
+            <a:br/>
+            <a:br/>
+            <a:r>
+              <a:t>Locus Robotics. Облачно-управляемые AMR в режиме collaborative picking — робот ездит к работнику, работник кладёт товар на бот, бот едет к следующей точке. К 2025 году Locus обработала более пяти миллиардов pick-операций в более чем трёхстах пятидесяти развёртываниях. Партнёрства с FedEx, GXO Logistics, DHL Supply Chain. Заявка по производительности — рост в два-три раза по сравнению с ручным picking без AMR.</a:t>
+            </a:r>
+            <a:br/>
+            <a:br/>
+            <a:r>
+              <a:t>Базовая линия: типичный работник без AMR выполняет около пятидесяти-ста pick-ов в час на стандартном складе. С AMR — сто-двести пятьдесят в час.</a:t>
+            </a:r>
+            <a:br/>
+            <a:br/>
+            <a:r>
+              <a:t>GreyOrange Butler. Goods-to-person автоматизация — рак-полка перемещается к работнику, вместо того чтобы работник ходил к полке. Принципиально отличается от Locus — это другой layout склада, и плотность хранения может вырасти в полтора-два раза.</a:t>
+            </a:r>
+            <a:br/>
+            <a:br/>
+            <a:r>
+              <a:t>Geek+ — китайская компания, лидер по объёмам в Азии, расширение на европейский рынок.</a:t>
+            </a:r>
+            <a:br/>
+            <a:br/>
+            <a:r>
+              <a:t>Главное ограничение AMR — это не автономия, а интеграция. Развёртывание Locus в существующем legacy-складе требует перепланировки. Расстановка узлов зарядки, разметка для роботов, обеспечение коридоров достаточной ширины, интеграция с WMS, обучение работников. Типичный срок развёртывания — от трёх до девяти месяцев.</a:t>
+            </a:r>
+            <a:br/>
+            <a:br/>
+            <a:r>
+              <a:t>Второй риск — рост рабочей нагрузки на работника. AMR избавляет работника от ходьбы между точками, но увеличивает плотность pick-операций. Это привело к профсоюзной критике в Великобритании и США. Один из аргументов профсоюзов — что AMR не помогает работнику, а превращает его в человеческий хвост робота, выполняющего повторяющиеся движения с увеличенной частотой. Это этический и регуляторный риск, который инженер должен учитывать при дизайне развёртывания. И он резонирует с принципом Toyota Jidoka из Лекции 11: AI должен augment работника, а не превращать его в придаток конвейера.</a:t>
             </a:r>
           </a:p>
         </p:txBody>
@@ -3062,7 +4817,37 @@
           <a:lstStyle/>
           <a:p>
             <a:r>
-              <a:t>См. slides/s10-port-automation.md speaker notes.</a:t>
+              <a:t>Портовый терминал — вторая по структурированности среда после склада. Закрытая площадка, контейнеры стандартизированы по ISO, позиции кранов и судов известны через AIS-сигналы и RTK-GPS, пешеходов на operating-зонах нет или они отделены барьерами. Это объясняет, почему порт — вторая зрелая категория автоматизации в логистике.</a:t>
+            </a:r>
+            <a:br/>
+            <a:br/>
+            <a:r>
+              <a:t>Главные поставщики — ABB, Konecranes, ZPMC. ABB — швейцарский конгломерат, поставляющий control-системы для портовых кранов. Konecranes — финская компания, лидер по automated container handling. ZPMC — китайский лидер, около семидесяти процентов мирового рынка STS-кранов, поставляет краны во все крупнейшие терминалы мира.</a:t>
+            </a:r>
+            <a:br/>
+            <a:br/>
+            <a:r>
+              <a:t>Что работает на полностью автоматизированных терминалах. Маасвлакте-два в Роттердаме — флагман европейского автоматизированного порта. Long Beach Container Terminal — флагман в США. Yangshan в Шанхае — один из крупнейших по объёму.</a:t>
+            </a:r>
+            <a:br/>
+            <a:br/>
+            <a:r>
+              <a:t>При этом что в порту не автоматизировано. Quay cranes — судовые краны — часто остаются с человеком-оператором в кабине или с remote-оператором. Финальное позиционирование контейнера на конкретную ячейку судна требует разрешения сложных edge-cases — деформированных контейнеров, погоды, неровной нагрузки. Lashing — закрепление контейнеров на судне — почти повсеместно ручная работа. Inspection and verification — таможенный осмотр, проверка документов — это диспетчеры-люди.</a:t>
+            </a:r>
+            <a:br/>
+            <a:br/>
+            <a:r>
+              <a:t>И главный failure mode уровня 1.5 — labor pushback. В США автоматизация портов вошла в открытый конфликт с профсоюзом ILA, International Longshoremen's Association. В октябре 2024 года ILA провёл кратковременную забастовку, требуя моратория на дальнейшую автоматизацию East Coast и Gulf Coast портов. Заявленная численность работников ILA — около восьмидесяти пяти тысяч, и потенциальный ущерб от длительной забастовки оценивался до пяти миллиардов долларов в день для экономики США.</a:t>
+            </a:r>
+            <a:br/>
+            <a:br/>
+            <a:r>
+              <a:t>Это классический паттерн «технология сталкивается с labor policy». Здесь решающий фактор не алгоритмы, а социальный контракт. В Европе автоматизация портов проходит более гладко именно потому, что отдельные страны договариваются с профсоюзами заранее и предусматривают переходные программы.</a:t>
+            </a:r>
+            <a:br/>
+            <a:br/>
+            <a:r>
+              <a:t>Базовая линия для понимания масштаба: суммарный объём контейнерных перевозок в США через East Coast и Gulf Coast — около пятидесяти миллионов TEU в год при средней стоимости полторы-две тысячи долларов за единицу. Общий грузопоток составляет семьдесят пять — сто миллиардов долларов в год.</a:t>
             </a:r>
           </a:p>
         </p:txBody>

--- a/library/lectures/lec-13/rendered/lec-13.pptx
+++ b/library/lectures/lec-13/rendered/lec-13.pptx
@@ -7952,13 +7952,13 @@
               </a:lnSpc>
             </a:pPr>
             <a:r>
-              <a:rPr sz="2200" b="1" i="0">
+              <a:rPr sz="2400" b="1" i="0">
                 <a:solidFill>
                   <a:srgbClr val="21295C"/>
                 </a:solidFill>
                 <a:latin typeface="Arial"/>
               </a:rPr>
-              <a:t>Три картинки</a:t>
+              <a:t>Три истории,</a:t>
             </a:r>
           </a:p>
           <a:p>
@@ -7968,29 +7968,29 @@
               </a:lnSpc>
             </a:pPr>
             <a:r>
-              <a:rPr sz="2200" b="1" i="0">
+              <a:rPr sz="2400" b="1" i="0">
+                <a:solidFill>
+                  <a:srgbClr val="065A82"/>
+                </a:solidFill>
+                <a:latin typeface="Arial"/>
+              </a:rPr>
+              <a:t>один вопрос</a:t>
+            </a:r>
+          </a:p>
+          <a:p>
+            <a:pPr algn="l">
+              <a:lnSpc>
+                <a:spcPct val="110000"/>
+              </a:lnSpc>
+            </a:pPr>
+            <a:r>
+              <a:rPr sz="800" b="0" i="0">
                 <a:solidFill>
                   <a:srgbClr val="21295C"/>
                 </a:solidFill>
                 <a:latin typeface="Arial"/>
               </a:rPr>
-              <a:t>рядом —</a:t>
-            </a:r>
-          </a:p>
-          <a:p>
-            <a:pPr algn="l">
-              <a:lnSpc>
-                <a:spcPct val="110000"/>
-              </a:lnSpc>
-            </a:pPr>
-            <a:r>
-              <a:rPr sz="2200" b="1" i="0">
-                <a:solidFill>
-                  <a:srgbClr val="065A82"/>
-                </a:solidFill>
-                <a:latin typeface="Arial"/>
-              </a:rPr>
-              <a:t>и один вопрос</a:t>
+              <a:t/>
             </a:r>
           </a:p>
           <a:p>

--- a/library/lectures/lec-13/rendered/lec-13.pptx
+++ b/library/lectures/lec-13/rendered/lec-13.pptx
@@ -1717,7 +1717,7 @@
             <a:br/>
             <a:br/>
             <a:r>
-              <a:t>Структура лекции — пять разделов по принципу «спуск по лестнице среды». Первый — контролируемая среда, склад и порт, где AI работает наиболее зрело. Второй — магистраль, первая коммерческая беспилотная грузоперевозка Aurora и серия банкротств. Третий — городской robotaxi и последняя миля, Waymo выжил и Cruise разорилась. Четвёртый — чрезвычайная ситуация и рамка решения. Пятый — замыкание и мост к Лекции 14.</a:t>
+              <a:t>Структура лекции — пять разделов по принципу «спуск по лестнице среды». Первый — контролируемая среда, склад и порт, где AI работает наиболее зрело. Второй — магистраль, первая коммерческая беспилотная грузоперевозка Aurora и серия банкротств. Третий — городской robotaxi и последняя миля, Waymo выжил и Cruise разорилась. Четвёртый — чрезвычайная ситуация и рамка решения. Пятый — короткое замыкание и Q&amp;A.</a:t>
             </a:r>
           </a:p>
         </p:txBody>
@@ -2917,7 +2917,7 @@
             <a:br/>
             <a:br/>
             <a:r>
-              <a:t>Пятый раздел — короткое замыкание и мост к Лекции 14, телекоммуникации и кибербез. Семь вопросов вендору, которые останутся с вами в кармане после лекции.</a:t>
+              <a:t>Пятый раздел — короткое замыкание и Q&amp;A. Семь вопросов вендору, которые останутся с вами в кармане после лекции.</a:t>
             </a:r>
           </a:p>
         </p:txBody>
@@ -26991,7 +26991,7 @@
                 </a:solidFill>
                 <a:latin typeface="Arial"/>
               </a:rPr>
-              <a:t>Q&amp;A · мост к Лекции 14</a:t>
+              <a:t>Q&amp;A · короткое замыкание</a:t>
             </a:r>
           </a:p>
         </p:txBody>
@@ -40424,13 +40424,13 @@
               </a:lnSpc>
             </a:pPr>
             <a:r>
-              <a:rPr sz="1400" b="1" i="0">
-                <a:solidFill>
-                  <a:srgbClr val="1C7293"/>
-                </a:solidFill>
-                <a:latin typeface="Arial"/>
-              </a:rPr>
-              <a:t>Мост к Лекции 14</a:t>
+              <a:rPr sz="2600" b="1" i="0">
+                <a:solidFill>
+                  <a:srgbClr val="21295C"/>
+                </a:solidFill>
+                <a:latin typeface="Arial"/>
+              </a:rPr>
+              <a:t>Другая среда,</a:t>
             </a:r>
           </a:p>
           <a:p>
@@ -40440,23 +40440,7 @@
               </a:lnSpc>
             </a:pPr>
             <a:r>
-              <a:rPr sz="2400" b="1" i="0">
-                <a:solidFill>
-                  <a:srgbClr val="21295C"/>
-                </a:solidFill>
-                <a:latin typeface="Arial"/>
-              </a:rPr>
-              <a:t>Другая среда,</a:t>
-            </a:r>
-          </a:p>
-          <a:p>
-            <a:pPr algn="l">
-              <a:lnSpc>
-                <a:spcPct val="115000"/>
-              </a:lnSpc>
-            </a:pPr>
-            <a:r>
-              <a:rPr sz="2400" b="1" i="0">
+              <a:rPr sz="2600" b="1" i="0">
                 <a:solidFill>
                   <a:srgbClr val="21295C"/>
                 </a:solidFill>

--- a/library/lectures/lec-13/rendered/lec-13.pptx
+++ b/library/lectures/lec-13/rendered/lec-13.pptx
@@ -38754,14 +38754,101 @@
       <p:grpSpPr/>
       <p:sp>
         <p:nvSpPr>
-          <p:cNvPr id="2" name="TextBox 1"/>
-          <p:cNvSpPr txBox="1"/>
-          <p:nvPr/>
-        </p:nvSpPr>
-        <p:spPr>
-          <a:xfrm>
-            <a:off x="457200" y="365760"/>
-            <a:ext cx="11274552" cy="1097280"/>
+          <p:cNvPr id="2" name="Rounded Rectangle 1"/>
+          <p:cNvSpPr/>
+          <p:nvPr/>
+        </p:nvSpPr>
+        <p:spPr>
+          <a:xfrm>
+            <a:off x="457200" y="274320"/>
+            <a:ext cx="11274552" cy="777240"/>
+          </a:xfrm>
+          <a:prstGeom prst="roundRect">
+            <a:avLst>
+              <a:gd name="adj" fmla="val 10000"/>
+            </a:avLst>
+          </a:prstGeom>
+          <a:solidFill>
+            <a:srgbClr val="FEF5E0"/>
+          </a:solidFill>
+          <a:ln w="25400">
+            <a:solidFill>
+              <a:srgbClr val="F0AB00"/>
+            </a:solidFill>
+          </a:ln>
+          <a:effectLst/>
+        </p:spPr>
+        <p:style>
+          <a:lnRef idx="1">
+            <a:schemeClr val="accent1"/>
+          </a:lnRef>
+          <a:fillRef idx="3">
+            <a:schemeClr val="accent1"/>
+          </a:fillRef>
+          <a:effectRef idx="2">
+            <a:schemeClr val="accent1"/>
+          </a:effectRef>
+          <a:fontRef idx="minor">
+            <a:schemeClr val="lt1"/>
+          </a:fontRef>
+        </p:style>
+        <p:txBody>
+          <a:bodyPr rtlCol="0" anchor="ctr"/>
+          <a:lstStyle/>
+          <a:p>
+            <a:pPr algn="ctr"/>
+          </a:p>
+        </p:txBody>
+      </p:sp>
+      <p:sp>
+        <p:nvSpPr>
+          <p:cNvPr id="3" name="TextBox 2"/>
+          <p:cNvSpPr txBox="1"/>
+          <p:nvPr/>
+        </p:nvSpPr>
+        <p:spPr>
+          <a:xfrm>
+            <a:off x="640080" y="320040"/>
+            <a:ext cx="10881360" cy="685800"/>
+          </a:xfrm>
+          <a:prstGeom prst="rect">
+            <a:avLst/>
+          </a:prstGeom>
+          <a:noFill/>
+        </p:spPr>
+        <p:txBody>
+          <a:bodyPr wrap="square" lIns="0" rIns="0" tIns="0" bIns="0" anchor="ctr">
+            <a:spAutoFit/>
+          </a:bodyPr>
+          <a:lstStyle/>
+          <a:p>
+            <a:pPr algn="ctr">
+              <a:lnSpc>
+                <a:spcPct val="115000"/>
+              </a:lnSpc>
+            </a:pPr>
+            <a:r>
+              <a:rPr sz="2400" b="1" i="0">
+                <a:solidFill>
+                  <a:srgbClr val="21295C"/>
+                </a:solidFill>
+                <a:latin typeface="Arial"/>
+              </a:rPr>
+              <a:t>Q&amp;A — ваши вопросы</a:t>
+            </a:r>
+          </a:p>
+        </p:txBody>
+      </p:sp>
+      <p:sp>
+        <p:nvSpPr>
+          <p:cNvPr id="4" name="TextBox 3"/>
+          <p:cNvSpPr txBox="1"/>
+          <p:nvPr/>
+        </p:nvSpPr>
+        <p:spPr>
+          <a:xfrm>
+            <a:off x="457200" y="1097280"/>
+            <a:ext cx="11274552" cy="411480"/>
           </a:xfrm>
           <a:prstGeom prst="rect">
             <a:avLst/>
@@ -38774,34 +38861,33 @@
           </a:bodyPr>
           <a:lstStyle/>
           <a:p>
-            <a:pPr algn="l">
-              <a:lnSpc>
-                <a:spcPct val="110000"/>
-              </a:lnSpc>
-            </a:pPr>
-            <a:r>
-              <a:rPr sz="2600" b="1" i="0">
-                <a:solidFill>
-                  <a:srgbClr val="21295C"/>
-                </a:solidFill>
-                <a:latin typeface="Arial"/>
-              </a:rPr>
-              <a:t>Семь вопросов вендору на завтра —
-практический инструмент для кармана.</a:t>
-            </a:r>
-          </a:p>
-        </p:txBody>
-      </p:sp>
-      <p:sp>
-        <p:nvSpPr>
-          <p:cNvPr id="3" name="Rounded Rectangle 2"/>
+            <a:pPr algn="ctr">
+              <a:lnSpc>
+                <a:spcPct val="115000"/>
+              </a:lnSpc>
+            </a:pPr>
+            <a:r>
+              <a:rPr sz="1400" b="0" i="1">
+                <a:solidFill>
+                  <a:srgbClr val="065A82"/>
+                </a:solidFill>
+                <a:latin typeface="Arial"/>
+              </a:rPr>
+              <a:t>…и семь вопросов вендорам на завтра — практический инструмент для кармана.</a:t>
+            </a:r>
+          </a:p>
+        </p:txBody>
+      </p:sp>
+      <p:sp>
+        <p:nvSpPr>
+          <p:cNvPr id="5" name="Rounded Rectangle 4"/>
           <p:cNvSpPr/>
           <p:nvPr/>
         </p:nvSpPr>
         <p:spPr>
           <a:xfrm>
-            <a:off x="457200" y="1554480"/>
-            <a:ext cx="5532120" cy="1417320"/>
+            <a:off x="457200" y="1600200"/>
+            <a:ext cx="5532120" cy="1207008"/>
           </a:xfrm>
           <a:prstGeom prst="roundRect">
             <a:avLst>
@@ -38842,14 +38928,14 @@
       </p:sp>
       <p:sp>
         <p:nvSpPr>
-          <p:cNvPr id="4" name="Oval 3"/>
+          <p:cNvPr id="6" name="Oval 5"/>
           <p:cNvSpPr/>
           <p:nvPr/>
         </p:nvSpPr>
         <p:spPr>
           <a:xfrm>
-            <a:off x="594360" y="1737360"/>
-            <a:ext cx="457200" cy="457200"/>
+            <a:off x="566928" y="1737360"/>
+            <a:ext cx="411480" cy="411480"/>
           </a:xfrm>
           <a:prstGeom prst="ellipse">
             <a:avLst/>
@@ -38886,14 +38972,14 @@
       </p:sp>
       <p:sp>
         <p:nvSpPr>
-          <p:cNvPr id="5" name="TextBox 4"/>
-          <p:cNvSpPr txBox="1"/>
-          <p:nvPr/>
-        </p:nvSpPr>
-        <p:spPr>
-          <a:xfrm>
-            <a:off x="594360" y="1737360"/>
-            <a:ext cx="457200" cy="457200"/>
+          <p:cNvPr id="7" name="TextBox 6"/>
+          <p:cNvSpPr txBox="1"/>
+          <p:nvPr/>
+        </p:nvSpPr>
+        <p:spPr>
+          <a:xfrm>
+            <a:off x="566928" y="1737360"/>
+            <a:ext cx="411480" cy="411480"/>
           </a:xfrm>
           <a:prstGeom prst="rect">
             <a:avLst/>
@@ -38912,7 +38998,7 @@
               </a:lnSpc>
             </a:pPr>
             <a:r>
-              <a:rPr sz="1600" b="1" i="0">
+              <a:rPr sz="1400" b="1" i="0">
                 <a:solidFill>
                   <a:srgbClr val="FFFFFF"/>
                 </a:solidFill>
@@ -38925,14 +39011,14 @@
       </p:sp>
       <p:sp>
         <p:nvSpPr>
-          <p:cNvPr id="6" name="TextBox 5"/>
-          <p:cNvSpPr txBox="1"/>
-          <p:nvPr/>
-        </p:nvSpPr>
-        <p:spPr>
-          <a:xfrm>
-            <a:off x="1143000" y="1645920"/>
-            <a:ext cx="4754880" cy="640080"/>
+          <p:cNvPr id="8" name="TextBox 7"/>
+          <p:cNvSpPr txBox="1"/>
+          <p:nvPr/>
+        </p:nvSpPr>
+        <p:spPr>
+          <a:xfrm>
+            <a:off x="1051560" y="1673352"/>
+            <a:ext cx="4846320" cy="502920"/>
           </a:xfrm>
           <a:prstGeom prst="rect">
             <a:avLst/>
@@ -38947,11 +39033,11 @@
           <a:p>
             <a:pPr algn="l">
               <a:lnSpc>
-                <a:spcPct val="120000"/>
-              </a:lnSpc>
-            </a:pPr>
-            <a:r>
-              <a:rPr sz="1200" b="1" i="0">
+                <a:spcPct val="115000"/>
+              </a:lnSpc>
+            </a:pPr>
+            <a:r>
+              <a:rPr sz="1100" b="1" i="0">
                 <a:solidFill>
                   <a:srgbClr val="21295C"/>
                 </a:solidFill>
@@ -38965,14 +39051,14 @@
       </p:sp>
       <p:sp>
         <p:nvSpPr>
-          <p:cNvPr id="7" name="TextBox 6"/>
-          <p:cNvSpPr txBox="1"/>
-          <p:nvPr/>
-        </p:nvSpPr>
-        <p:spPr>
-          <a:xfrm>
-            <a:off x="594360" y="2331720"/>
-            <a:ext cx="5257800" cy="594360"/>
+          <p:cNvPr id="9" name="TextBox 8"/>
+          <p:cNvSpPr txBox="1"/>
+          <p:nvPr/>
+        </p:nvSpPr>
+        <p:spPr>
+          <a:xfrm>
+            <a:off x="566928" y="2240280"/>
+            <a:ext cx="5312664" cy="548640"/>
           </a:xfrm>
           <a:prstGeom prst="rect">
             <a:avLst/>
@@ -38987,11 +39073,11 @@
           <a:p>
             <a:pPr algn="l">
               <a:lnSpc>
-                <a:spcPct val="125000"/>
-              </a:lnSpc>
-            </a:pPr>
-            <a:r>
-              <a:rPr sz="1000" b="0" i="1">
+                <a:spcPct val="120000"/>
+              </a:lnSpc>
+            </a:pPr>
+            <a:r>
+              <a:rPr sz="900" b="0" i="1">
                 <a:solidFill>
                   <a:srgbClr val="6B7685"/>
                 </a:solidFill>
@@ -39005,14 +39091,14 @@
       </p:sp>
       <p:sp>
         <p:nvSpPr>
-          <p:cNvPr id="8" name="Rounded Rectangle 7"/>
+          <p:cNvPr id="10" name="Rounded Rectangle 9"/>
           <p:cNvSpPr/>
           <p:nvPr/>
         </p:nvSpPr>
         <p:spPr>
           <a:xfrm>
-            <a:off x="6080759" y="1554480"/>
-            <a:ext cx="5532120" cy="1417320"/>
+            <a:off x="6080759" y="1600200"/>
+            <a:ext cx="5532120" cy="1207008"/>
           </a:xfrm>
           <a:prstGeom prst="roundRect">
             <a:avLst>
@@ -39053,14 +39139,14 @@
       </p:sp>
       <p:sp>
         <p:nvSpPr>
-          <p:cNvPr id="9" name="Oval 8"/>
+          <p:cNvPr id="11" name="Oval 10"/>
           <p:cNvSpPr/>
           <p:nvPr/>
         </p:nvSpPr>
         <p:spPr>
           <a:xfrm>
-            <a:off x="6217920" y="1737360"/>
-            <a:ext cx="457200" cy="457200"/>
+            <a:off x="6190488" y="1737360"/>
+            <a:ext cx="411480" cy="411480"/>
           </a:xfrm>
           <a:prstGeom prst="ellipse">
             <a:avLst/>
@@ -39097,14 +39183,14 @@
       </p:sp>
       <p:sp>
         <p:nvSpPr>
-          <p:cNvPr id="10" name="TextBox 9"/>
-          <p:cNvSpPr txBox="1"/>
-          <p:nvPr/>
-        </p:nvSpPr>
-        <p:spPr>
-          <a:xfrm>
-            <a:off x="6217920" y="1737360"/>
-            <a:ext cx="457200" cy="457200"/>
+          <p:cNvPr id="12" name="TextBox 11"/>
+          <p:cNvSpPr txBox="1"/>
+          <p:nvPr/>
+        </p:nvSpPr>
+        <p:spPr>
+          <a:xfrm>
+            <a:off x="6190488" y="1737360"/>
+            <a:ext cx="411480" cy="411480"/>
           </a:xfrm>
           <a:prstGeom prst="rect">
             <a:avLst/>
@@ -39123,7 +39209,7 @@
               </a:lnSpc>
             </a:pPr>
             <a:r>
-              <a:rPr sz="1600" b="1" i="0">
+              <a:rPr sz="1400" b="1" i="0">
                 <a:solidFill>
                   <a:srgbClr val="FFFFFF"/>
                 </a:solidFill>
@@ -39136,14 +39222,14 @@
       </p:sp>
       <p:sp>
         <p:nvSpPr>
-          <p:cNvPr id="11" name="TextBox 10"/>
-          <p:cNvSpPr txBox="1"/>
-          <p:nvPr/>
-        </p:nvSpPr>
-        <p:spPr>
-          <a:xfrm>
-            <a:off x="6766559" y="1645920"/>
-            <a:ext cx="4754880" cy="640080"/>
+          <p:cNvPr id="13" name="TextBox 12"/>
+          <p:cNvSpPr txBox="1"/>
+          <p:nvPr/>
+        </p:nvSpPr>
+        <p:spPr>
+          <a:xfrm>
+            <a:off x="6675120" y="1673352"/>
+            <a:ext cx="4846320" cy="502920"/>
           </a:xfrm>
           <a:prstGeom prst="rect">
             <a:avLst/>
@@ -39158,11 +39244,11 @@
           <a:p>
             <a:pPr algn="l">
               <a:lnSpc>
-                <a:spcPct val="120000"/>
-              </a:lnSpc>
-            </a:pPr>
-            <a:r>
-              <a:rPr sz="1200" b="1" i="0">
+                <a:spcPct val="115000"/>
+              </a:lnSpc>
+            </a:pPr>
+            <a:r>
+              <a:rPr sz="1100" b="1" i="0">
                 <a:solidFill>
                   <a:srgbClr val="21295C"/>
                 </a:solidFill>
@@ -39176,14 +39262,14 @@
       </p:sp>
       <p:sp>
         <p:nvSpPr>
-          <p:cNvPr id="12" name="TextBox 11"/>
-          <p:cNvSpPr txBox="1"/>
-          <p:nvPr/>
-        </p:nvSpPr>
-        <p:spPr>
-          <a:xfrm>
-            <a:off x="6217920" y="2331720"/>
-            <a:ext cx="5257800" cy="594360"/>
+          <p:cNvPr id="14" name="TextBox 13"/>
+          <p:cNvSpPr txBox="1"/>
+          <p:nvPr/>
+        </p:nvSpPr>
+        <p:spPr>
+          <a:xfrm>
+            <a:off x="6190488" y="2240280"/>
+            <a:ext cx="5312664" cy="548640"/>
           </a:xfrm>
           <a:prstGeom prst="rect">
             <a:avLst/>
@@ -39198,11 +39284,11 @@
           <a:p>
             <a:pPr algn="l">
               <a:lnSpc>
-                <a:spcPct val="125000"/>
-              </a:lnSpc>
-            </a:pPr>
-            <a:r>
-              <a:rPr sz="1000" b="0" i="1">
+                <a:spcPct val="120000"/>
+              </a:lnSpc>
+            </a:pPr>
+            <a:r>
+              <a:rPr sz="900" b="0" i="1">
                 <a:solidFill>
                   <a:srgbClr val="6B7685"/>
                 </a:solidFill>
@@ -39216,14 +39302,14 @@
       </p:sp>
       <p:sp>
         <p:nvSpPr>
-          <p:cNvPr id="13" name="Rounded Rectangle 12"/>
+          <p:cNvPr id="15" name="Rounded Rectangle 14"/>
           <p:cNvSpPr/>
           <p:nvPr/>
         </p:nvSpPr>
         <p:spPr>
           <a:xfrm>
-            <a:off x="457200" y="3017520"/>
-            <a:ext cx="5532120" cy="1417320"/>
+            <a:off x="457200" y="2852928"/>
+            <a:ext cx="5532120" cy="1207008"/>
           </a:xfrm>
           <a:prstGeom prst="roundRect">
             <a:avLst>
@@ -39264,14 +39350,14 @@
       </p:sp>
       <p:sp>
         <p:nvSpPr>
-          <p:cNvPr id="14" name="Oval 13"/>
+          <p:cNvPr id="16" name="Oval 15"/>
           <p:cNvSpPr/>
           <p:nvPr/>
         </p:nvSpPr>
         <p:spPr>
           <a:xfrm>
-            <a:off x="594360" y="3200400"/>
-            <a:ext cx="457200" cy="457200"/>
+            <a:off x="566928" y="2990088"/>
+            <a:ext cx="411480" cy="411480"/>
           </a:xfrm>
           <a:prstGeom prst="ellipse">
             <a:avLst/>
@@ -39308,14 +39394,14 @@
       </p:sp>
       <p:sp>
         <p:nvSpPr>
-          <p:cNvPr id="15" name="TextBox 14"/>
-          <p:cNvSpPr txBox="1"/>
-          <p:nvPr/>
-        </p:nvSpPr>
-        <p:spPr>
-          <a:xfrm>
-            <a:off x="594360" y="3200400"/>
-            <a:ext cx="457200" cy="457200"/>
+          <p:cNvPr id="17" name="TextBox 16"/>
+          <p:cNvSpPr txBox="1"/>
+          <p:nvPr/>
+        </p:nvSpPr>
+        <p:spPr>
+          <a:xfrm>
+            <a:off x="566928" y="2990088"/>
+            <a:ext cx="411480" cy="411480"/>
           </a:xfrm>
           <a:prstGeom prst="rect">
             <a:avLst/>
@@ -39334,7 +39420,7 @@
               </a:lnSpc>
             </a:pPr>
             <a:r>
-              <a:rPr sz="1600" b="1" i="0">
+              <a:rPr sz="1400" b="1" i="0">
                 <a:solidFill>
                   <a:srgbClr val="FFFFFF"/>
                 </a:solidFill>
@@ -39347,14 +39433,14 @@
       </p:sp>
       <p:sp>
         <p:nvSpPr>
-          <p:cNvPr id="16" name="TextBox 15"/>
-          <p:cNvSpPr txBox="1"/>
-          <p:nvPr/>
-        </p:nvSpPr>
-        <p:spPr>
-          <a:xfrm>
-            <a:off x="1143000" y="3108960"/>
-            <a:ext cx="4754880" cy="640080"/>
+          <p:cNvPr id="18" name="TextBox 17"/>
+          <p:cNvSpPr txBox="1"/>
+          <p:nvPr/>
+        </p:nvSpPr>
+        <p:spPr>
+          <a:xfrm>
+            <a:off x="1051560" y="2926080"/>
+            <a:ext cx="4846320" cy="502920"/>
           </a:xfrm>
           <a:prstGeom prst="rect">
             <a:avLst/>
@@ -39369,11 +39455,11 @@
           <a:p>
             <a:pPr algn="l">
               <a:lnSpc>
-                <a:spcPct val="120000"/>
-              </a:lnSpc>
-            </a:pPr>
-            <a:r>
-              <a:rPr sz="1200" b="1" i="0">
+                <a:spcPct val="115000"/>
+              </a:lnSpc>
+            </a:pPr>
+            <a:r>
+              <a:rPr sz="1100" b="1" i="0">
                 <a:solidFill>
                   <a:srgbClr val="21295C"/>
                 </a:solidFill>
@@ -39387,14 +39473,14 @@
       </p:sp>
       <p:sp>
         <p:nvSpPr>
-          <p:cNvPr id="17" name="TextBox 16"/>
-          <p:cNvSpPr txBox="1"/>
-          <p:nvPr/>
-        </p:nvSpPr>
-        <p:spPr>
-          <a:xfrm>
-            <a:off x="594360" y="3794759"/>
-            <a:ext cx="5257800" cy="594360"/>
+          <p:cNvPr id="19" name="TextBox 18"/>
+          <p:cNvSpPr txBox="1"/>
+          <p:nvPr/>
+        </p:nvSpPr>
+        <p:spPr>
+          <a:xfrm>
+            <a:off x="566928" y="3493008"/>
+            <a:ext cx="5312664" cy="548640"/>
           </a:xfrm>
           <a:prstGeom prst="rect">
             <a:avLst/>
@@ -39409,11 +39495,11 @@
           <a:p>
             <a:pPr algn="l">
               <a:lnSpc>
-                <a:spcPct val="125000"/>
-              </a:lnSpc>
-            </a:pPr>
-            <a:r>
-              <a:rPr sz="1000" b="0" i="1">
+                <a:spcPct val="120000"/>
+              </a:lnSpc>
+            </a:pPr>
+            <a:r>
+              <a:rPr sz="900" b="0" i="1">
                 <a:solidFill>
                   <a:srgbClr val="6B7685"/>
                 </a:solidFill>
@@ -39427,14 +39513,14 @@
       </p:sp>
       <p:sp>
         <p:nvSpPr>
-          <p:cNvPr id="18" name="Rounded Rectangle 17"/>
+          <p:cNvPr id="20" name="Rounded Rectangle 19"/>
           <p:cNvSpPr/>
           <p:nvPr/>
         </p:nvSpPr>
         <p:spPr>
           <a:xfrm>
-            <a:off x="6080759" y="3017520"/>
-            <a:ext cx="5532120" cy="1417320"/>
+            <a:off x="6080759" y="2852928"/>
+            <a:ext cx="5532120" cy="1207008"/>
           </a:xfrm>
           <a:prstGeom prst="roundRect">
             <a:avLst>
@@ -39475,14 +39561,14 @@
       </p:sp>
       <p:sp>
         <p:nvSpPr>
-          <p:cNvPr id="19" name="Oval 18"/>
+          <p:cNvPr id="21" name="Oval 20"/>
           <p:cNvSpPr/>
           <p:nvPr/>
         </p:nvSpPr>
         <p:spPr>
           <a:xfrm>
-            <a:off x="6217920" y="3200400"/>
-            <a:ext cx="457200" cy="457200"/>
+            <a:off x="6190488" y="2990088"/>
+            <a:ext cx="411480" cy="411480"/>
           </a:xfrm>
           <a:prstGeom prst="ellipse">
             <a:avLst/>
@@ -39519,14 +39605,14 @@
       </p:sp>
       <p:sp>
         <p:nvSpPr>
-          <p:cNvPr id="20" name="TextBox 19"/>
-          <p:cNvSpPr txBox="1"/>
-          <p:nvPr/>
-        </p:nvSpPr>
-        <p:spPr>
-          <a:xfrm>
-            <a:off x="6217920" y="3200400"/>
-            <a:ext cx="457200" cy="457200"/>
+          <p:cNvPr id="22" name="TextBox 21"/>
+          <p:cNvSpPr txBox="1"/>
+          <p:nvPr/>
+        </p:nvSpPr>
+        <p:spPr>
+          <a:xfrm>
+            <a:off x="6190488" y="2990088"/>
+            <a:ext cx="411480" cy="411480"/>
           </a:xfrm>
           <a:prstGeom prst="rect">
             <a:avLst/>
@@ -39545,7 +39631,7 @@
               </a:lnSpc>
             </a:pPr>
             <a:r>
-              <a:rPr sz="1600" b="1" i="0">
+              <a:rPr sz="1400" b="1" i="0">
                 <a:solidFill>
                   <a:srgbClr val="FFFFFF"/>
                 </a:solidFill>
@@ -39558,14 +39644,14 @@
       </p:sp>
       <p:sp>
         <p:nvSpPr>
-          <p:cNvPr id="21" name="TextBox 20"/>
-          <p:cNvSpPr txBox="1"/>
-          <p:nvPr/>
-        </p:nvSpPr>
-        <p:spPr>
-          <a:xfrm>
-            <a:off x="6766559" y="3108960"/>
-            <a:ext cx="4754880" cy="640080"/>
+          <p:cNvPr id="23" name="TextBox 22"/>
+          <p:cNvSpPr txBox="1"/>
+          <p:nvPr/>
+        </p:nvSpPr>
+        <p:spPr>
+          <a:xfrm>
+            <a:off x="6675120" y="2926080"/>
+            <a:ext cx="4846320" cy="502920"/>
           </a:xfrm>
           <a:prstGeom prst="rect">
             <a:avLst/>
@@ -39580,50 +39666,50 @@
           <a:p>
             <a:pPr algn="l">
               <a:lnSpc>
+                <a:spcPct val="115000"/>
+              </a:lnSpc>
+            </a:pPr>
+            <a:r>
+              <a:rPr sz="1100" b="1" i="0">
+                <a:solidFill>
+                  <a:srgbClr val="21295C"/>
+                </a:solidFill>
+                <a:latin typeface="Arial"/>
+              </a:rPr>
+              <a:t>Отношение км в симуляции / км на дорогах общего пользования?</a:t>
+            </a:r>
+          </a:p>
+        </p:txBody>
+      </p:sp>
+      <p:sp>
+        <p:nvSpPr>
+          <p:cNvPr id="24" name="TextBox 23"/>
+          <p:cNvSpPr txBox="1"/>
+          <p:nvPr/>
+        </p:nvSpPr>
+        <p:spPr>
+          <a:xfrm>
+            <a:off x="6190488" y="3493008"/>
+            <a:ext cx="5312664" cy="548640"/>
+          </a:xfrm>
+          <a:prstGeom prst="rect">
+            <a:avLst/>
+          </a:prstGeom>
+          <a:noFill/>
+        </p:spPr>
+        <p:txBody>
+          <a:bodyPr wrap="square" lIns="0" rIns="0" tIns="0" bIns="0" anchor="t">
+            <a:spAutoFit/>
+          </a:bodyPr>
+          <a:lstStyle/>
+          <a:p>
+            <a:pPr algn="l">
+              <a:lnSpc>
                 <a:spcPct val="120000"/>
               </a:lnSpc>
             </a:pPr>
             <a:r>
-              <a:rPr sz="1200" b="1" i="0">
-                <a:solidFill>
-                  <a:srgbClr val="21295C"/>
-                </a:solidFill>
-                <a:latin typeface="Arial"/>
-              </a:rPr>
-              <a:t>Отношение км в симуляции / км на дорогах общего пользования?</a:t>
-            </a:r>
-          </a:p>
-        </p:txBody>
-      </p:sp>
-      <p:sp>
-        <p:nvSpPr>
-          <p:cNvPr id="22" name="TextBox 21"/>
-          <p:cNvSpPr txBox="1"/>
-          <p:nvPr/>
-        </p:nvSpPr>
-        <p:spPr>
-          <a:xfrm>
-            <a:off x="6217920" y="3794759"/>
-            <a:ext cx="5257800" cy="594360"/>
-          </a:xfrm>
-          <a:prstGeom prst="rect">
-            <a:avLst/>
-          </a:prstGeom>
-          <a:noFill/>
-        </p:spPr>
-        <p:txBody>
-          <a:bodyPr wrap="square" lIns="0" rIns="0" tIns="0" bIns="0" anchor="t">
-            <a:spAutoFit/>
-          </a:bodyPr>
-          <a:lstStyle/>
-          <a:p>
-            <a:pPr algn="l">
-              <a:lnSpc>
-                <a:spcPct val="125000"/>
-              </a:lnSpc>
-            </a:pPr>
-            <a:r>
-              <a:rPr sz="1000" b="0" i="1">
+              <a:rPr sz="900" b="0" i="1">
                 <a:solidFill>
                   <a:srgbClr val="6B7685"/>
                 </a:solidFill>
@@ -39637,14 +39723,14 @@
       </p:sp>
       <p:sp>
         <p:nvSpPr>
-          <p:cNvPr id="23" name="Rounded Rectangle 22"/>
+          <p:cNvPr id="25" name="Rounded Rectangle 24"/>
           <p:cNvSpPr/>
           <p:nvPr/>
         </p:nvSpPr>
         <p:spPr>
           <a:xfrm>
-            <a:off x="457200" y="4480560"/>
-            <a:ext cx="5532120" cy="1417320"/>
+            <a:off x="457200" y="4105656"/>
+            <a:ext cx="5532120" cy="1207008"/>
           </a:xfrm>
           <a:prstGeom prst="roundRect">
             <a:avLst>
@@ -39685,14 +39771,14 @@
       </p:sp>
       <p:sp>
         <p:nvSpPr>
-          <p:cNvPr id="24" name="Oval 23"/>
+          <p:cNvPr id="26" name="Oval 25"/>
           <p:cNvSpPr/>
           <p:nvPr/>
         </p:nvSpPr>
         <p:spPr>
           <a:xfrm>
-            <a:off x="594360" y="4663440"/>
-            <a:ext cx="457200" cy="457200"/>
+            <a:off x="566928" y="4242816"/>
+            <a:ext cx="411480" cy="411480"/>
           </a:xfrm>
           <a:prstGeom prst="ellipse">
             <a:avLst/>
@@ -39729,14 +39815,14 @@
       </p:sp>
       <p:sp>
         <p:nvSpPr>
-          <p:cNvPr id="25" name="TextBox 24"/>
-          <p:cNvSpPr txBox="1"/>
-          <p:nvPr/>
-        </p:nvSpPr>
-        <p:spPr>
-          <a:xfrm>
-            <a:off x="594360" y="4663440"/>
-            <a:ext cx="457200" cy="457200"/>
+          <p:cNvPr id="27" name="TextBox 26"/>
+          <p:cNvSpPr txBox="1"/>
+          <p:nvPr/>
+        </p:nvSpPr>
+        <p:spPr>
+          <a:xfrm>
+            <a:off x="566928" y="4242816"/>
+            <a:ext cx="411480" cy="411480"/>
           </a:xfrm>
           <a:prstGeom prst="rect">
             <a:avLst/>
@@ -39755,7 +39841,7 @@
               </a:lnSpc>
             </a:pPr>
             <a:r>
-              <a:rPr sz="1600" b="1" i="0">
+              <a:rPr sz="1400" b="1" i="0">
                 <a:solidFill>
                   <a:srgbClr val="FFFFFF"/>
                 </a:solidFill>
@@ -39768,14 +39854,14 @@
       </p:sp>
       <p:sp>
         <p:nvSpPr>
-          <p:cNvPr id="26" name="TextBox 25"/>
-          <p:cNvSpPr txBox="1"/>
-          <p:nvPr/>
-        </p:nvSpPr>
-        <p:spPr>
-          <a:xfrm>
-            <a:off x="1143000" y="4572000"/>
-            <a:ext cx="4754880" cy="640080"/>
+          <p:cNvPr id="28" name="TextBox 27"/>
+          <p:cNvSpPr txBox="1"/>
+          <p:nvPr/>
+        </p:nvSpPr>
+        <p:spPr>
+          <a:xfrm>
+            <a:off x="1051560" y="4178808"/>
+            <a:ext cx="4846320" cy="502920"/>
           </a:xfrm>
           <a:prstGeom prst="rect">
             <a:avLst/>
@@ -39790,11 +39876,11 @@
           <a:p>
             <a:pPr algn="l">
               <a:lnSpc>
-                <a:spcPct val="120000"/>
-              </a:lnSpc>
-            </a:pPr>
-            <a:r>
-              <a:rPr sz="1200" b="1" i="0">
+                <a:spcPct val="115000"/>
+              </a:lnSpc>
+            </a:pPr>
+            <a:r>
+              <a:rPr sz="1100" b="1" i="0">
                 <a:solidFill>
                   <a:srgbClr val="21295C"/>
                 </a:solidFill>
@@ -39808,14 +39894,14 @@
       </p:sp>
       <p:sp>
         <p:nvSpPr>
-          <p:cNvPr id="27" name="TextBox 26"/>
-          <p:cNvSpPr txBox="1"/>
-          <p:nvPr/>
-        </p:nvSpPr>
-        <p:spPr>
-          <a:xfrm>
-            <a:off x="594360" y="5257800"/>
-            <a:ext cx="5257800" cy="594360"/>
+          <p:cNvPr id="29" name="TextBox 28"/>
+          <p:cNvSpPr txBox="1"/>
+          <p:nvPr/>
+        </p:nvSpPr>
+        <p:spPr>
+          <a:xfrm>
+            <a:off x="566928" y="4745736"/>
+            <a:ext cx="5312664" cy="548640"/>
           </a:xfrm>
           <a:prstGeom prst="rect">
             <a:avLst/>
@@ -39830,11 +39916,11 @@
           <a:p>
             <a:pPr algn="l">
               <a:lnSpc>
-                <a:spcPct val="125000"/>
-              </a:lnSpc>
-            </a:pPr>
-            <a:r>
-              <a:rPr sz="1000" b="0" i="1">
+                <a:spcPct val="120000"/>
+              </a:lnSpc>
+            </a:pPr>
+            <a:r>
+              <a:rPr sz="900" b="0" i="1">
                 <a:solidFill>
                   <a:srgbClr val="6B7685"/>
                 </a:solidFill>
@@ -39848,14 +39934,14 @@
       </p:sp>
       <p:sp>
         <p:nvSpPr>
-          <p:cNvPr id="28" name="Rounded Rectangle 27"/>
+          <p:cNvPr id="30" name="Rounded Rectangle 29"/>
           <p:cNvSpPr/>
           <p:nvPr/>
         </p:nvSpPr>
         <p:spPr>
           <a:xfrm>
-            <a:off x="6080759" y="4480560"/>
-            <a:ext cx="5532120" cy="1417320"/>
+            <a:off x="6080759" y="4105656"/>
+            <a:ext cx="5532120" cy="1207008"/>
           </a:xfrm>
           <a:prstGeom prst="roundRect">
             <a:avLst>
@@ -39896,14 +39982,14 @@
       </p:sp>
       <p:sp>
         <p:nvSpPr>
-          <p:cNvPr id="29" name="Oval 28"/>
+          <p:cNvPr id="31" name="Oval 30"/>
           <p:cNvSpPr/>
           <p:nvPr/>
         </p:nvSpPr>
         <p:spPr>
           <a:xfrm>
-            <a:off x="6217920" y="4663440"/>
-            <a:ext cx="457200" cy="457200"/>
+            <a:off x="6190488" y="4242816"/>
+            <a:ext cx="411480" cy="411480"/>
           </a:xfrm>
           <a:prstGeom prst="ellipse">
             <a:avLst/>
@@ -39940,14 +40026,14 @@
       </p:sp>
       <p:sp>
         <p:nvSpPr>
-          <p:cNvPr id="30" name="TextBox 29"/>
-          <p:cNvSpPr txBox="1"/>
-          <p:nvPr/>
-        </p:nvSpPr>
-        <p:spPr>
-          <a:xfrm>
-            <a:off x="6217920" y="4663440"/>
-            <a:ext cx="457200" cy="457200"/>
+          <p:cNvPr id="32" name="TextBox 31"/>
+          <p:cNvSpPr txBox="1"/>
+          <p:nvPr/>
+        </p:nvSpPr>
+        <p:spPr>
+          <a:xfrm>
+            <a:off x="6190488" y="4242816"/>
+            <a:ext cx="411480" cy="411480"/>
           </a:xfrm>
           <a:prstGeom prst="rect">
             <a:avLst/>
@@ -39966,7 +40052,7 @@
               </a:lnSpc>
             </a:pPr>
             <a:r>
-              <a:rPr sz="1600" b="1" i="0">
+              <a:rPr sz="1400" b="1" i="0">
                 <a:solidFill>
                   <a:srgbClr val="FFFFFF"/>
                 </a:solidFill>
@@ -39979,14 +40065,14 @@
       </p:sp>
       <p:sp>
         <p:nvSpPr>
-          <p:cNvPr id="31" name="TextBox 30"/>
-          <p:cNvSpPr txBox="1"/>
-          <p:nvPr/>
-        </p:nvSpPr>
-        <p:spPr>
-          <a:xfrm>
-            <a:off x="6766559" y="4572000"/>
-            <a:ext cx="4754880" cy="640080"/>
+          <p:cNvPr id="33" name="TextBox 32"/>
+          <p:cNvSpPr txBox="1"/>
+          <p:nvPr/>
+        </p:nvSpPr>
+        <p:spPr>
+          <a:xfrm>
+            <a:off x="6675120" y="4178808"/>
+            <a:ext cx="4846320" cy="502920"/>
           </a:xfrm>
           <a:prstGeom prst="rect">
             <a:avLst/>
@@ -40001,11 +40087,11 @@
           <a:p>
             <a:pPr algn="l">
               <a:lnSpc>
-                <a:spcPct val="120000"/>
-              </a:lnSpc>
-            </a:pPr>
-            <a:r>
-              <a:rPr sz="1200" b="1" i="0">
+                <a:spcPct val="115000"/>
+              </a:lnSpc>
+            </a:pPr>
+            <a:r>
+              <a:rPr sz="1100" b="1" i="0">
                 <a:solidFill>
                   <a:srgbClr val="21295C"/>
                 </a:solidFill>
@@ -40019,14 +40105,14 @@
       </p:sp>
       <p:sp>
         <p:nvSpPr>
-          <p:cNvPr id="32" name="TextBox 31"/>
-          <p:cNvSpPr txBox="1"/>
-          <p:nvPr/>
-        </p:nvSpPr>
-        <p:spPr>
-          <a:xfrm>
-            <a:off x="6217920" y="5257800"/>
-            <a:ext cx="5257800" cy="594360"/>
+          <p:cNvPr id="34" name="TextBox 33"/>
+          <p:cNvSpPr txBox="1"/>
+          <p:nvPr/>
+        </p:nvSpPr>
+        <p:spPr>
+          <a:xfrm>
+            <a:off x="6190488" y="4745736"/>
+            <a:ext cx="5312664" cy="548640"/>
           </a:xfrm>
           <a:prstGeom prst="rect">
             <a:avLst/>
@@ -40041,11 +40127,11 @@
           <a:p>
             <a:pPr algn="l">
               <a:lnSpc>
-                <a:spcPct val="125000"/>
-              </a:lnSpc>
-            </a:pPr>
-            <a:r>
-              <a:rPr sz="1000" b="0" i="1">
+                <a:spcPct val="120000"/>
+              </a:lnSpc>
+            </a:pPr>
+            <a:r>
+              <a:rPr sz="900" b="0" i="1">
                 <a:solidFill>
                   <a:srgbClr val="6B7685"/>
                 </a:solidFill>
@@ -40059,14 +40145,14 @@
       </p:sp>
       <p:sp>
         <p:nvSpPr>
-          <p:cNvPr id="33" name="Rounded Rectangle 32"/>
+          <p:cNvPr id="35" name="Rounded Rectangle 34"/>
           <p:cNvSpPr/>
           <p:nvPr/>
         </p:nvSpPr>
         <p:spPr>
           <a:xfrm>
-            <a:off x="457200" y="5943600"/>
-            <a:ext cx="5532120" cy="1417320"/>
+            <a:off x="457200" y="5358384"/>
+            <a:ext cx="5532120" cy="1207008"/>
           </a:xfrm>
           <a:prstGeom prst="roundRect">
             <a:avLst>
@@ -40107,14 +40193,14 @@
       </p:sp>
       <p:sp>
         <p:nvSpPr>
-          <p:cNvPr id="34" name="Oval 33"/>
+          <p:cNvPr id="36" name="Oval 35"/>
           <p:cNvSpPr/>
           <p:nvPr/>
         </p:nvSpPr>
         <p:spPr>
           <a:xfrm>
-            <a:off x="594360" y="6126480"/>
-            <a:ext cx="457200" cy="457200"/>
+            <a:off x="566928" y="5495544"/>
+            <a:ext cx="411480" cy="411480"/>
           </a:xfrm>
           <a:prstGeom prst="ellipse">
             <a:avLst/>
@@ -40151,14 +40237,14 @@
       </p:sp>
       <p:sp>
         <p:nvSpPr>
-          <p:cNvPr id="35" name="TextBox 34"/>
-          <p:cNvSpPr txBox="1"/>
-          <p:nvPr/>
-        </p:nvSpPr>
-        <p:spPr>
-          <a:xfrm>
-            <a:off x="594360" y="6126480"/>
-            <a:ext cx="457200" cy="457200"/>
+          <p:cNvPr id="37" name="TextBox 36"/>
+          <p:cNvSpPr txBox="1"/>
+          <p:nvPr/>
+        </p:nvSpPr>
+        <p:spPr>
+          <a:xfrm>
+            <a:off x="566928" y="5495544"/>
+            <a:ext cx="411480" cy="411480"/>
           </a:xfrm>
           <a:prstGeom prst="rect">
             <a:avLst/>
@@ -40177,7 +40263,7 @@
               </a:lnSpc>
             </a:pPr>
             <a:r>
-              <a:rPr sz="1600" b="1" i="0">
+              <a:rPr sz="1400" b="1" i="0">
                 <a:solidFill>
                   <a:srgbClr val="FFFFFF"/>
                 </a:solidFill>
@@ -40190,14 +40276,14 @@
       </p:sp>
       <p:sp>
         <p:nvSpPr>
-          <p:cNvPr id="36" name="TextBox 35"/>
-          <p:cNvSpPr txBox="1"/>
-          <p:nvPr/>
-        </p:nvSpPr>
-        <p:spPr>
-          <a:xfrm>
-            <a:off x="1143000" y="6035040"/>
-            <a:ext cx="4754880" cy="640080"/>
+          <p:cNvPr id="38" name="TextBox 37"/>
+          <p:cNvSpPr txBox="1"/>
+          <p:nvPr/>
+        </p:nvSpPr>
+        <p:spPr>
+          <a:xfrm>
+            <a:off x="1051560" y="5431536"/>
+            <a:ext cx="4846320" cy="502920"/>
           </a:xfrm>
           <a:prstGeom prst="rect">
             <a:avLst/>
@@ -40212,11 +40298,11 @@
           <a:p>
             <a:pPr algn="l">
               <a:lnSpc>
-                <a:spcPct val="120000"/>
-              </a:lnSpc>
-            </a:pPr>
-            <a:r>
-              <a:rPr sz="1200" b="1" i="0">
+                <a:spcPct val="115000"/>
+              </a:lnSpc>
+            </a:pPr>
+            <a:r>
+              <a:rPr sz="1100" b="1" i="0">
                 <a:solidFill>
                   <a:srgbClr val="21295C"/>
                 </a:solidFill>
@@ -40230,14 +40316,14 @@
       </p:sp>
       <p:sp>
         <p:nvSpPr>
-          <p:cNvPr id="37" name="TextBox 36"/>
-          <p:cNvSpPr txBox="1"/>
-          <p:nvPr/>
-        </p:nvSpPr>
-        <p:spPr>
-          <a:xfrm>
-            <a:off x="594360" y="6720840"/>
-            <a:ext cx="5257800" cy="594360"/>
+          <p:cNvPr id="39" name="TextBox 38"/>
+          <p:cNvSpPr txBox="1"/>
+          <p:nvPr/>
+        </p:nvSpPr>
+        <p:spPr>
+          <a:xfrm>
+            <a:off x="566928" y="5998464"/>
+            <a:ext cx="5312664" cy="548640"/>
           </a:xfrm>
           <a:prstGeom prst="rect">
             <a:avLst/>
@@ -40252,11 +40338,11 @@
           <a:p>
             <a:pPr algn="l">
               <a:lnSpc>
-                <a:spcPct val="125000"/>
-              </a:lnSpc>
-            </a:pPr>
-            <a:r>
-              <a:rPr sz="1000" b="0" i="1">
+                <a:spcPct val="120000"/>
+              </a:lnSpc>
+            </a:pPr>
+            <a:r>
+              <a:rPr sz="900" b="0" i="1">
                 <a:solidFill>
                   <a:srgbClr val="6B7685"/>
                 </a:solidFill>
@@ -40270,7 +40356,7 @@
       </p:sp>
       <p:sp>
         <p:nvSpPr>
-          <p:cNvPr id="38" name="TextBox 37"/>
+          <p:cNvPr id="40" name="TextBox 39"/>
           <p:cNvSpPr txBox="1"/>
           <p:nvPr/>
         </p:nvSpPr>
@@ -40302,7 +40388,7 @@
                 </a:solidFill>
                 <a:latin typeface="Arial"/>
               </a:rPr>
-              <a:t>Дополняет 5-критерийную рамку слайда s38 · окупаемость лекции 13</a:t>
+              <a:t>Дополняет 5-критерийную рамку слайда s38 · 10 минут на вопросы аудитории</a:t>
             </a:r>
           </a:p>
         </p:txBody>

--- a/library/lectures/lec-13/rendered/lec-13.pptx
+++ b/library/lectures/lec-13/rendered/lec-13.pptx
@@ -1712,7 +1712,7 @@
             <a:br/>
             <a:br/>
             <a:r>
-              <a:t>Сегодня я хочу, чтобы вы вышли из аудитории с тремя инструментами в кармане. Первое — лестница среды как главный предиктор успеха AI в транспорте. Второе — пять-семь критериев, отделяющих демо вендора от промышленной эксплуатации. Третье — список альтернатив AI: операционные исследования, классические формулы запасов, сценарное планирование, человек в петле.</a:t>
+              <a:t>Сегодня я хочу, чтобы вы вышли из аудитории с тремя инструментами в кармане. Первое — лестница среды как главный предиктор успеха AI в транспорте. Второе — семь критериев, отделяющих демо вендора от промышленной эксплуатации (пять структурных плюс два anti-hype). Третье — список альтернатив AI: операционные исследования, классические формулы запасов, сценарное планирование, человек в петле.</a:t>
             </a:r>
             <a:br/>
             <a:br/>
@@ -2912,12 +2912,12 @@
             <a:br/>
             <a:br/>
             <a:r>
-              <a:t>Четвёртый раздел — чрезвычайная ситуация и рамка решения. Хуситы в Красном море, контейнеровоз Ever Given в Суэцком канале, COVID. Это то, где ML слеп по определению. И рамка решения — пять критериев «AI или не AI в логистике», плюс альтернативный инструментарий.</a:t>
-            </a:r>
-            <a:br/>
-            <a:br/>
-            <a:r>
-              <a:t>Пятый раздел — короткое замыкание и Q&amp;A. Семь вопросов вендору, которые останутся с вами в кармане после лекции.</a:t>
+              <a:t>Четвёртый раздел — чрезвычайная ситуация и рамка решения. Хуситы в Красном море, контейнеровоз Ever Given в Суэцком канале, COVID. Это то, где ML слеп по определению. И рамка решения — семь критериев «AI или не AI в логистике» (пять структурных плюс два anti-hype), плюс альтернативный инструментарий.</a:t>
+            </a:r>
+            <a:br/>
+            <a:br/>
+            <a:r>
+              <a:t>Пятый раздел — короткое замыкание и Q&amp;A. Восемь вопросов вендору, которые останутся с вами в кармане после лекции.</a:t>
             </a:r>
           </a:p>
         </p:txBody>
@@ -3452,7 +3452,7 @@
           <a:lstStyle/>
           <a:p>
             <a:r>
-              <a:t>Это центральная окупаемость раздела четыре и всей лекции. Пять критериев, которые позволяют инженеру решить, AI или не AI для конкретной логистической задачи. (На слайде s40 эта 5-критерийная рамка дополняется 7 вопросами вендору.)</a:t>
+              <a:t>Это центральная окупаемость раздела четыре и всей лекции. Семь критериев, которые позволяют инженеру решить, AI или не AI для конкретной логистической задачи. Первые пять — структурные предикторы среды и задачи. Шестой и седьмой — anti-hype фильтры, которые отсеивают vendor-pitch без доказательств. (На слайде s40 эта 7-критерийная рамка дополняется 8 вопросами вендору.)</a:t>
             </a:r>
             <a:br/>
             <a:br/>
@@ -3482,6 +3482,16 @@
             <a:br/>
             <a:br/>
             <a:r>
+              <a:t>**Критерий 6 — послужной список в промышленной эксплуатации шесть месяцев и больше.** Это первый anti-hype фильтр. Поставщик показывает 3+ референсных промышленных развёртывания, работающих минимум полгода, с задокументированными метриками эффекта? Если да — продукт обоснован. Если нет — REJECT по умолчанию. Девяносто пять процентов GenAI-пилотов не доходят до промышленной эксплуатации; шестимесячная отсечка статистически отделяет работающий продукт от vendor-демо.</a:t>
+            </a:r>
+            <a:br/>
+            <a:br/>
+            <a:r>
+              <a:t>**Критерий 7 — базовая линия и контрфактуальное сравнение явно сформулированы.** Это второй anti-hype фильтр. Поставщик называет конкретную базовую линию — manual picking восемьдесят SKU в час, OR-Tools VRP solver, классическая формула EOQ — и явное сравнение в тех же единицах? Если да — продукт оценим. Если нет, если поставщик говорит просто «лучше, чем у конкурентов» без чисел — REJECT. Без базовой линии любой процентный uplift — маркетинговая цифра, не инженерная.</a:t>
+            </a:r>
+            <a:br/>
+            <a:br/>
+            <a:r>
               <a:t>**Примеры применения.** Складская роботизация — Критерий 1 да, Критерий 4 частично (безопасность склада, но легче, чем фарма). AI применим плюс безопасность плюс HITL.</a:t>
             </a:r>
             <a:br/>
@@ -3502,12 +3512,17 @@
             <a:br/>
             <a:br/>
             <a:r>
-              <a:t>Сезонные запасы ритейлера — Критерий 3 частично. Смесь стационарного плюс всплеск. Гибрид EOQ плюс точечный ML на сезонных SKU. Это не «полностью AI» или «полностью формула» — это гибрид с правильным выбором инструмента на каждой категории SKU.</a:t>
-            </a:r>
-            <a:br/>
-            <a:br/>
-            <a:r>
-              <a:t>**Педагогический смысл.** Это не «всегда AI» или «никогда AI». Это фреймворк решения, который разбивает логистическую нагрузку на категории, и для каждой определяет правильный инструмент. Урок для инженера — когда вы оцениваете предложение вендора, проходите по этим пяти критериям. Какой критерий применим? Какой инструмент правильный для этой категории?</a:t>
+              <a:t>Сезонные запасы ритейлера — Критерий 3 частично. Смесь стационарного плюс всплеск. Гибрид EOQ плюс точечный ML на сезонных SKU.</a:t>
+            </a:r>
+            <a:br/>
+            <a:br/>
+            <a:r>
+              <a:t>Vendor-pitch «GenAI агент сам распланирует цепочку поставок» — Критерий 6 обычно нет, Критерий 7 обычно нет. REJECT.</a:t>
+            </a:r>
+            <a:br/>
+            <a:br/>
+            <a:r>
+              <a:t>**Педагогический смысл.** Это не «всегда AI» или «никогда AI». Это фреймворк решения, который разбивает логистическую нагрузку на категории, и для каждой определяет правильный инструмент. Урок для инженера — когда вы оцениваете предложение вендора, проходите по этим семи критериям. Какой критерий применим? Какой инструмент правильный? Прошёл ли поставщик anti-hype фильтры 6 и 7?</a:t>
             </a:r>
             <a:br/>
             <a:br/>
@@ -3707,7 +3722,7 @@
           <a:lstStyle/>
           <a:p>
             <a:r>
-              <a:t>Это последний контентный слайд лекции. Я хочу оставить вас с практическим инструментом в кармане — семью вопросами, которые вы зададите любому вендору логистического AI. Эти семь вопросов дополняют 5-критерийную рамку со слайда s38: критерии говорят «какой класс инструмента нужен», вопросы — «как проверить вендора по выбранному классу».</a:t>
+              <a:t>Это последний контентный слайд лекции. Я хочу оставить вас с практическим инструментом в кармане — семью вопросами, которые вы зададите любому вендору логистического AI. Эти семь тактических вопросов дополняют 7-критерийную рамку со слайда s38 и восемь вопросов due-diligence из главы §4.7: критерии говорят «какой класс инструмента нужен», вопросы — «как проверить вендора по выбранному классу».</a:t>
             </a:r>
             <a:br/>
             <a:br/>
@@ -3837,7 +3852,12 @@
             <a:br/>
             <a:br/>
             <a:r>
-              <a:t>И теперь — мост к лекции четырнадцать. Завтра я расскажу про телекоммуникации, сетевую инфраструктуру, кибербез. Это **другая среда** — cyber instead of physical. Но **та же логика**.</a:t>
+              <a:t>И теперь — мост к лекции четырнадцать. Завтра я расскажу про телекоммуникации, сетевую инфраструктуру, кибербез. Это **другая среда**. У неё своё устройство, которое следующая лекция раскроет на собственных основаниях. Я не предлагаю мне поверить вам на слово, что «cyber = это просто другой уровень той же лестницы». Это было бы absolutist claim. Завтра вы услышите telecom-специфичный фреймворк, и в нём, возможно, окажутся свои уровни, свои критерии, свои anti-hype фильтры.</a:t>
+            </a:r>
+            <a:br/>
+            <a:br/>
+            <a:r>
+              <a:t>Но **навык** — тот же. Семь критериев AI/не AI применимы там, где есть среда, задача, спрос, регуляторика, события, послужной список вендора и базовая линия. Cyber-окружение имеет всё это.</a:t>
             </a:r>
             <a:br/>
             <a:br/>
@@ -3862,12 +3882,12 @@
             <a:br/>
             <a:br/>
             <a:r>
-              <a:t>**Лестница среды переходит из физического мира в сетевой.** Уровень один — controlled enterprise network. Уровень пять — zero-day exploit, который никто не видел раньше. Аналогия структурная.</a:t>
-            </a:r>
-            <a:br/>
-            <a:br/>
-            <a:r>
-              <a:t>Lesson — то, что вы изучили в лекциях 9, 11, 12, 13 — это foundation для лекции 14. Не отдельные домены, а единая логика «AI работает в контролируемой среде, ломается на out-of-distribution, и инженер должен критически разбираться в каждом конкретном случае».</a:t>
+              <a:t>**Среда меняется. Критическое суждение — тот же навык.** Завтра вы примените тот же скептический подход к telecom vendor pitches. Анализируйте baseline. Требуйте production track record. Делите задачи на in-distribution vs exception. Применяйте семь критериев — и спрашивайте, какие из них релевантны cyber-окружению.</a:t>
+            </a:r>
+            <a:br/>
+            <a:br/>
+            <a:r>
+              <a:t>Lesson — то, что вы изучили в лекциях 9, 11, 12, 13 — это foundation для лекции 14. Не отдельные домены, а единый навык критического разбора каждого AI-предложения по семи структурным признакам.</a:t>
             </a:r>
             <a:br/>
             <a:br/>
@@ -4327,7 +4347,7 @@
             <a:br/>
             <a:br/>
             <a:r>
-              <a:t>Я хочу провести по четырём конкретным примерам black-swan failures в логистике 2020-2024 годов, потом по structural labor shortage problem, и потом по рамке решения с пятью критериями плюс альтернативный инструментарий.</a:t>
+              <a:t>Я хочу провести по четырём конкретным примерам black-swan failures в логистике 2020-2024 годов, потом по structural labor shortage problem, и потом по рамке решения с семью критериями (пять структурных плюс два anti-hype) плюс альтернативный инструментарий.</a:t>
             </a:r>
             <a:br/>
             <a:br/>
@@ -4352,7 +4372,7 @@
             <a:br/>
             <a:br/>
             <a:r>
-              <a:t>После four examples я перейду к рамке решения. Пять критериев «AI или не AI в логистике». Это main payoff лекции — практический инструмент в кармане.</a:t>
+              <a:t>После four examples я перейду к рамке решения. Семь критериев «AI или не AI в логистике» — структурные предикторы плюс anti-hype фильтры. Это main payoff лекции — практический инструмент в кармане.</a:t>
             </a:r>
             <a:br/>
             <a:br/>
@@ -21884,7 +21904,23 @@
                 </a:solidFill>
                 <a:latin typeface="Arial"/>
               </a:rPr>
-              <a:t>10+ городов: Phoenix · SF · LA · Austin · Atlanta · Miami · Dallas · Houston · San Antonio · Orlando</a:t>
+              <a:t>10+ городов (все Sun-Belt): Phoenix · SF · LA · Austin · Atlanta · Miami · Dallas · Houston · San Antonio · Orlando</a:t>
+            </a:r>
+          </a:p>
+          <a:p>
+            <a:pPr algn="l">
+              <a:lnSpc>
+                <a:spcPct val="125000"/>
+              </a:lnSpc>
+            </a:pPr>
+            <a:r>
+              <a:rPr sz="1000" b="0" i="1">
+                <a:solidFill>
+                  <a:srgbClr val="F0AB00"/>
+                </a:solidFill>
+                <a:latin typeface="Arial"/>
+              </a:rPr>
+              <a:t>Sun-Belt ODD: без снега, без льда, без зимней погоды</a:t>
             </a:r>
           </a:p>
           <a:p>
@@ -22083,7 +22119,7 @@
                 </a:solidFill>
                 <a:latin typeface="Arial"/>
               </a:rPr>
-              <a:t>Паттерн выживания: поэтапный ввод (ползком-шагом-бегом) · узкий ODD · не переобещают · терпеливый капитал Alphabet</a:t>
+              <a:t>Паттерн выживания: поэтапный ввод (ползком-шагом-бегом) · узкий Sun-Belt ODD · не переобещают · терпеливый капитал Alphabet</a:t>
             </a:r>
           </a:p>
         </p:txBody>
@@ -24171,7 +24207,7 @@
                 </a:solidFill>
                 <a:latin typeface="Arial"/>
               </a:rPr>
-              <a:t>Последняя миля: Starship 9M+ доставок · Coco 1000+ роботов LA.
+              <a:t>Последняя миля: Starship 9M+ доставок · Coco 1000+ роботов LA + Даллас/Майами/Хельсинки/Чикаго.
 Zipline 100M миль Africa · Nuro разворот 2024 — выход B2C.</a:t>
             </a:r>
           </a:p>
@@ -24529,7 +24565,7 @@
                 </a:solidFill>
                 <a:latin typeface="Arial"/>
               </a:rPr>
-              <a:t>1000+ роботов в LA
+              <a:t>1000+ роботов
 500K+ доставок
 Цель 10K единиц</a:t>
             </a:r>
@@ -24570,7 +24606,8 @@
                 </a:solidFill>
                 <a:latin typeface="Arial"/>
               </a:rPr>
-              <a:t>LA + Dallas + Miami + Helsinki + Chicago</a:t>
+              <a:t>LA + Даллас + Майами + Хельсинки + Чикаго
+(не «только LA»)</a:t>
             </a:r>
           </a:p>
         </p:txBody>
@@ -26743,7 +26780,7 @@
                 </a:solidFill>
                 <a:latin typeface="Arial"/>
               </a:rPr>
-              <a:t>Хуситы · Suez · COVID · дефицит дальнобойщиков · 5 критериев · альтернативы</a:t>
+              <a:t>Хуситы · Suez · COVID · дефицит дальнобойщиков · 7 критериев · альтернативы</a:t>
             </a:r>
           </a:p>
         </p:txBody>
@@ -30357,7 +30394,7 @@
                 </a:solidFill>
                 <a:latin typeface="Arial"/>
               </a:rPr>
-              <a:t>·  Рамка решения: 5 критериев AI/не AI</a:t>
+              <a:t>·  Рамка решения: 7 критериев AI/не AI</a:t>
             </a:r>
           </a:p>
           <a:p>
@@ -33104,8 +33141,8 @@
         </p:nvSpPr>
         <p:spPr>
           <a:xfrm>
-            <a:off x="457200" y="365760"/>
-            <a:ext cx="11274552" cy="1097280"/>
+            <a:off x="457200" y="274320"/>
+            <a:ext cx="11274552" cy="914400"/>
           </a:xfrm>
           <a:prstGeom prst="rect">
             <a:avLst/>
@@ -33124,14 +33161,14 @@
               </a:lnSpc>
             </a:pPr>
             <a:r>
-              <a:rPr sz="2200" b="1" i="0">
+              <a:rPr sz="2000" b="1" i="0">
                 <a:solidFill>
                   <a:srgbClr val="21295C"/>
                 </a:solidFill>
                 <a:latin typeface="Arial"/>
               </a:rPr>
-              <a:t>Рамка решения: 5 критериев AI/не AI в логистике.
-Среда · задача · спрос · безопасность · распределение.</a:t>
+              <a:t>Рамка решения: 7 критериев AI/не AI в логистике.
+5 структурных предикторов + 2 anti-hype фильтра.</a:t>
             </a:r>
           </a:p>
         </p:txBody>
@@ -33144,8 +33181,8 @@
         </p:nvSpPr>
         <p:spPr>
           <a:xfrm>
-            <a:off x="457200" y="1737360"/>
-            <a:ext cx="2212848" cy="4206240"/>
+            <a:off x="457200" y="1371600"/>
+            <a:ext cx="2697480" cy="2331720"/>
           </a:xfrm>
           <a:prstGeom prst="roundRect">
             <a:avLst>
@@ -33192,8 +33229,8 @@
         </p:nvSpPr>
         <p:spPr>
           <a:xfrm>
-            <a:off x="1243584" y="1874519"/>
-            <a:ext cx="640080" cy="640080"/>
+            <a:off x="594360" y="1508760"/>
+            <a:ext cx="502920" cy="502920"/>
           </a:xfrm>
           <a:prstGeom prst="ellipse">
             <a:avLst/>
@@ -33236,8 +33273,8 @@
         </p:nvSpPr>
         <p:spPr>
           <a:xfrm>
-            <a:off x="1243584" y="1874519"/>
-            <a:ext cx="640080" cy="640080"/>
+            <a:off x="594360" y="1508760"/>
+            <a:ext cx="502920" cy="502920"/>
           </a:xfrm>
           <a:prstGeom prst="rect">
             <a:avLst/>
@@ -33256,7 +33293,7 @@
               </a:lnSpc>
             </a:pPr>
             <a:r>
-              <a:rPr sz="2400" b="1" i="0">
+              <a:rPr sz="2000" b="1" i="0">
                 <a:solidFill>
                   <a:srgbClr val="FFFFFF"/>
                 </a:solidFill>
@@ -33275,8 +33312,8 @@
         </p:nvSpPr>
         <p:spPr>
           <a:xfrm>
-            <a:off x="548640" y="2651760"/>
-            <a:ext cx="2029967" cy="914400"/>
+            <a:off x="1188720" y="1463040"/>
+            <a:ext cx="1874520" cy="640080"/>
           </a:xfrm>
           <a:prstGeom prst="rect">
             <a:avLst/>
@@ -33289,13 +33326,13 @@
           </a:bodyPr>
           <a:lstStyle/>
           <a:p>
-            <a:pPr algn="ctr">
+            <a:pPr algn="l">
               <a:lnSpc>
                 <a:spcPct val="115000"/>
               </a:lnSpc>
             </a:pPr>
             <a:r>
-              <a:rPr sz="1300" b="1" i="0">
+              <a:rPr sz="1100" b="1" i="0">
                 <a:solidFill>
                   <a:srgbClr val="21295C"/>
                 </a:solidFill>
@@ -33314,8 +33351,8 @@
         </p:nvSpPr>
         <p:spPr>
           <a:xfrm>
-            <a:off x="548640" y="3657600"/>
-            <a:ext cx="2029967" cy="1188720"/>
+            <a:off x="548640" y="2148840"/>
+            <a:ext cx="2514600" cy="868680"/>
           </a:xfrm>
           <a:prstGeom prst="rect">
             <a:avLst/>
@@ -33328,20 +33365,20 @@
           </a:bodyPr>
           <a:lstStyle/>
           <a:p>
-            <a:pPr algn="ctr">
-              <a:lnSpc>
-                <a:spcPct val="130000"/>
-              </a:lnSpc>
-            </a:pPr>
-            <a:r>
-              <a:rPr sz="1100" b="0" i="0">
+            <a:pPr algn="l">
+              <a:lnSpc>
+                <a:spcPct val="125000"/>
+              </a:lnSpc>
+            </a:pPr>
+            <a:r>
+              <a:rPr sz="1000" b="0" i="0">
                 <a:solidFill>
                   <a:srgbClr val="21295C"/>
                 </a:solidFill>
                 <a:latin typeface="Arial"/>
               </a:rPr>
               <a:t>Да → AI applicable
-(склад · port · железная дорога)</a:t>
+(склад · порт · ж/д)</a:t>
             </a:r>
           </a:p>
         </p:txBody>
@@ -33354,8 +33391,8 @@
         </p:nvSpPr>
         <p:spPr>
           <a:xfrm>
-            <a:off x="594360" y="4937760"/>
-            <a:ext cx="1938528" cy="914400"/>
+            <a:off x="548640" y="3063240"/>
+            <a:ext cx="2514600" cy="566928"/>
           </a:xfrm>
           <a:prstGeom prst="roundRect">
             <a:avLst>
@@ -33402,8 +33439,8 @@
         </p:nvSpPr>
         <p:spPr>
           <a:xfrm>
-            <a:off x="685800" y="4983479"/>
-            <a:ext cx="1755648" cy="822960"/>
+            <a:off x="621792" y="3090672"/>
+            <a:ext cx="2368296" cy="530352"/>
           </a:xfrm>
           <a:prstGeom prst="rect">
             <a:avLst/>
@@ -33416,13 +33453,13 @@
           </a:bodyPr>
           <a:lstStyle/>
           <a:p>
-            <a:pPr algn="ctr">
-              <a:lnSpc>
-                <a:spcPct val="125000"/>
-              </a:lnSpc>
-            </a:pPr>
-            <a:r>
-              <a:rPr sz="900" b="0" i="1">
+            <a:pPr algn="l">
+              <a:lnSpc>
+                <a:spcPct val="120000"/>
+              </a:lnSpc>
+            </a:pPr>
+            <a:r>
+              <a:rPr sz="800" b="0" i="1">
                 <a:solidFill>
                   <a:srgbClr val="21295C"/>
                 </a:solidFill>
@@ -33441,8 +33478,8 @@
         </p:nvSpPr>
         <p:spPr>
           <a:xfrm>
-            <a:off x="2715768" y="1737360"/>
-            <a:ext cx="2212848" cy="4206240"/>
+            <a:off x="3246120" y="1371600"/>
+            <a:ext cx="2697480" cy="2331720"/>
           </a:xfrm>
           <a:prstGeom prst="roundRect">
             <a:avLst>
@@ -33489,8 +33526,8 @@
         </p:nvSpPr>
         <p:spPr>
           <a:xfrm>
-            <a:off x="3502151" y="1874519"/>
-            <a:ext cx="640080" cy="640080"/>
+            <a:off x="3383280" y="1508760"/>
+            <a:ext cx="502920" cy="502920"/>
           </a:xfrm>
           <a:prstGeom prst="ellipse">
             <a:avLst/>
@@ -33533,8 +33570,8 @@
         </p:nvSpPr>
         <p:spPr>
           <a:xfrm>
-            <a:off x="3502151" y="1874519"/>
-            <a:ext cx="640080" cy="640080"/>
+            <a:off x="3383280" y="1508760"/>
+            <a:ext cx="502920" cy="502920"/>
           </a:xfrm>
           <a:prstGeom prst="rect">
             <a:avLst/>
@@ -33553,7 +33590,7 @@
               </a:lnSpc>
             </a:pPr>
             <a:r>
-              <a:rPr sz="2400" b="1" i="0">
+              <a:rPr sz="2000" b="1" i="0">
                 <a:solidFill>
                   <a:srgbClr val="FFFFFF"/>
                 </a:solidFill>
@@ -33572,8 +33609,8 @@
         </p:nvSpPr>
         <p:spPr>
           <a:xfrm>
-            <a:off x="2807208" y="2651760"/>
-            <a:ext cx="2029967" cy="914400"/>
+            <a:off x="3977640" y="1463040"/>
+            <a:ext cx="1874520" cy="640080"/>
           </a:xfrm>
           <a:prstGeom prst="rect">
             <a:avLst/>
@@ -33586,20 +33623,20 @@
           </a:bodyPr>
           <a:lstStyle/>
           <a:p>
-            <a:pPr algn="ctr">
+            <a:pPr algn="l">
               <a:lnSpc>
                 <a:spcPct val="115000"/>
               </a:lnSpc>
             </a:pPr>
             <a:r>
-              <a:rPr sz="1300" b="1" i="0">
+              <a:rPr sz="1100" b="1" i="0">
                 <a:solidFill>
                   <a:srgbClr val="21295C"/>
                 </a:solidFill>
                 <a:latin typeface="Arial"/>
               </a:rPr>
               <a:t>Чётко определённая оптимизация
-(TSP, VRP, планирование расписаний)?</a:t>
+(TSP, VRP, расписания)?</a:t>
             </a:r>
           </a:p>
         </p:txBody>
@@ -33612,8 +33649,8 @@
         </p:nvSpPr>
         <p:spPr>
           <a:xfrm>
-            <a:off x="2807208" y="3657600"/>
-            <a:ext cx="2029967" cy="1188720"/>
+            <a:off x="3337560" y="2148840"/>
+            <a:ext cx="2514600" cy="868680"/>
           </a:xfrm>
           <a:prstGeom prst="rect">
             <a:avLst/>
@@ -33626,13 +33663,13 @@
           </a:bodyPr>
           <a:lstStyle/>
           <a:p>
-            <a:pPr algn="ctr">
-              <a:lnSpc>
-                <a:spcPct val="130000"/>
-              </a:lnSpc>
-            </a:pPr>
-            <a:r>
-              <a:rPr sz="1100" b="0" i="0">
+            <a:pPr algn="l">
+              <a:lnSpc>
+                <a:spcPct val="125000"/>
+              </a:lnSpc>
+            </a:pPr>
+            <a:r>
+              <a:rPr sz="1000" b="0" i="0">
                 <a:solidFill>
                   <a:srgbClr val="21295C"/>
                 </a:solidFill>
@@ -33652,8 +33689,8 @@
         </p:nvSpPr>
         <p:spPr>
           <a:xfrm>
-            <a:off x="2852927" y="4937760"/>
-            <a:ext cx="1938528" cy="914400"/>
+            <a:off x="3337560" y="3063240"/>
+            <a:ext cx="2514600" cy="566928"/>
           </a:xfrm>
           <a:prstGeom prst="roundRect">
             <a:avLst>
@@ -33700,8 +33737,8 @@
         </p:nvSpPr>
         <p:spPr>
           <a:xfrm>
-            <a:off x="2944368" y="4983479"/>
-            <a:ext cx="1755648" cy="822960"/>
+            <a:off x="3410712" y="3090672"/>
+            <a:ext cx="2368296" cy="530352"/>
           </a:xfrm>
           <a:prstGeom prst="rect">
             <a:avLst/>
@@ -33714,13 +33751,13 @@
           </a:bodyPr>
           <a:lstStyle/>
           <a:p>
-            <a:pPr algn="ctr">
-              <a:lnSpc>
-                <a:spcPct val="125000"/>
-              </a:lnSpc>
-            </a:pPr>
-            <a:r>
-              <a:rPr sz="900" b="0" i="1">
+            <a:pPr algn="l">
+              <a:lnSpc>
+                <a:spcPct val="120000"/>
+              </a:lnSpc>
+            </a:pPr>
+            <a:r>
+              <a:rPr sz="800" b="0" i="1">
                 <a:solidFill>
                   <a:srgbClr val="21295C"/>
                 </a:solidFill>
@@ -33739,8 +33776,8 @@
         </p:nvSpPr>
         <p:spPr>
           <a:xfrm>
-            <a:off x="4974336" y="1737360"/>
-            <a:ext cx="2212848" cy="4206240"/>
+            <a:off x="6035040" y="1371600"/>
+            <a:ext cx="2697480" cy="2331720"/>
           </a:xfrm>
           <a:prstGeom prst="roundRect">
             <a:avLst>
@@ -33787,8 +33824,8 @@
         </p:nvSpPr>
         <p:spPr>
           <a:xfrm>
-            <a:off x="5760720" y="1874519"/>
-            <a:ext cx="640080" cy="640080"/>
+            <a:off x="6172200" y="1508760"/>
+            <a:ext cx="502920" cy="502920"/>
           </a:xfrm>
           <a:prstGeom prst="ellipse">
             <a:avLst/>
@@ -33831,8 +33868,8 @@
         </p:nvSpPr>
         <p:spPr>
           <a:xfrm>
-            <a:off x="5760720" y="1874519"/>
-            <a:ext cx="640080" cy="640080"/>
+            <a:off x="6172200" y="1508760"/>
+            <a:ext cx="502920" cy="502920"/>
           </a:xfrm>
           <a:prstGeom prst="rect">
             <a:avLst/>
@@ -33851,7 +33888,7 @@
               </a:lnSpc>
             </a:pPr>
             <a:r>
-              <a:rPr sz="2400" b="1" i="0">
+              <a:rPr sz="2000" b="1" i="0">
                 <a:solidFill>
                   <a:srgbClr val="FFFFFF"/>
                 </a:solidFill>
@@ -33870,8 +33907,8 @@
         </p:nvSpPr>
         <p:spPr>
           <a:xfrm>
-            <a:off x="5065775" y="2651760"/>
-            <a:ext cx="2029967" cy="914400"/>
+            <a:off x="6766560" y="1463040"/>
+            <a:ext cx="1874520" cy="640080"/>
           </a:xfrm>
           <a:prstGeom prst="rect">
             <a:avLst/>
@@ -33884,13 +33921,13 @@
           </a:bodyPr>
           <a:lstStyle/>
           <a:p>
-            <a:pPr algn="ctr">
+            <a:pPr algn="l">
               <a:lnSpc>
                 <a:spcPct val="115000"/>
               </a:lnSpc>
             </a:pPr>
             <a:r>
-              <a:rPr sz="1300" b="1" i="0">
+              <a:rPr sz="1100" b="1" i="0">
                 <a:solidFill>
                   <a:srgbClr val="21295C"/>
                 </a:solidFill>
@@ -33909,8 +33946,8 @@
         </p:nvSpPr>
         <p:spPr>
           <a:xfrm>
-            <a:off x="5065775" y="3657600"/>
-            <a:ext cx="2029967" cy="1188720"/>
+            <a:off x="6126480" y="2148840"/>
+            <a:ext cx="2514600" cy="868680"/>
           </a:xfrm>
           <a:prstGeom prst="rect">
             <a:avLst/>
@@ -33923,19 +33960,19 @@
           </a:bodyPr>
           <a:lstStyle/>
           <a:p>
-            <a:pPr algn="ctr">
-              <a:lnSpc>
-                <a:spcPct val="130000"/>
-              </a:lnSpc>
-            </a:pPr>
-            <a:r>
-              <a:rPr sz="1100" b="0" i="0">
+            <a:pPr algn="l">
+              <a:lnSpc>
+                <a:spcPct val="125000"/>
+              </a:lnSpc>
+            </a:pPr>
+            <a:r>
+              <a:rPr sz="1000" b="0" i="0">
                 <a:solidFill>
                   <a:srgbClr val="21295C"/>
                 </a:solidFill>
                 <a:latin typeface="Arial"/>
               </a:rPr>
-              <a:t>Да → EOQ + безопасность запас
+              <a:t>Да → EOQ + safety stock
 + ABC &gt; ML</a:t>
             </a:r>
           </a:p>
@@ -33949,8 +33986,8 @@
         </p:nvSpPr>
         <p:spPr>
           <a:xfrm>
-            <a:off x="5111496" y="4937760"/>
-            <a:ext cx="1938528" cy="914400"/>
+            <a:off x="6126480" y="3063240"/>
+            <a:ext cx="2514600" cy="566928"/>
           </a:xfrm>
           <a:prstGeom prst="roundRect">
             <a:avLst>
@@ -33997,8 +34034,8 @@
         </p:nvSpPr>
         <p:spPr>
           <a:xfrm>
-            <a:off x="5202936" y="4983479"/>
-            <a:ext cx="1755648" cy="822960"/>
+            <a:off x="6199632" y="3090672"/>
+            <a:ext cx="2368296" cy="530352"/>
           </a:xfrm>
           <a:prstGeom prst="rect">
             <a:avLst/>
@@ -34011,19 +34048,19 @@
           </a:bodyPr>
           <a:lstStyle/>
           <a:p>
-            <a:pPr algn="ctr">
-              <a:lnSpc>
-                <a:spcPct val="125000"/>
-              </a:lnSpc>
-            </a:pPr>
-            <a:r>
-              <a:rPr sz="900" b="0" i="1">
+            <a:pPr algn="l">
+              <a:lnSpc>
+                <a:spcPct val="120000"/>
+              </a:lnSpc>
+            </a:pPr>
+            <a:r>
+              <a:rPr sz="800" b="0" i="1">
                 <a:solidFill>
                   <a:srgbClr val="21295C"/>
                 </a:solidFill>
                 <a:latin typeface="Arial"/>
               </a:rPr>
-              <a:t>Аудит: какой % SKU реально требует ML? Часто &lt;20%.</a:t>
+              <a:t>Аудит SKU: часто &lt;20% требует ML.</a:t>
             </a:r>
           </a:p>
         </p:txBody>
@@ -34036,8 +34073,8 @@
         </p:nvSpPr>
         <p:spPr>
           <a:xfrm>
-            <a:off x="7232903" y="1737360"/>
-            <a:ext cx="2212848" cy="4206240"/>
+            <a:off x="8823960" y="1371600"/>
+            <a:ext cx="2697480" cy="2331720"/>
           </a:xfrm>
           <a:prstGeom prst="roundRect">
             <a:avLst>
@@ -34084,8 +34121,8 @@
         </p:nvSpPr>
         <p:spPr>
           <a:xfrm>
-            <a:off x="8019288" y="1874519"/>
-            <a:ext cx="640080" cy="640080"/>
+            <a:off x="8961120" y="1508760"/>
+            <a:ext cx="502920" cy="502920"/>
           </a:xfrm>
           <a:prstGeom prst="ellipse">
             <a:avLst/>
@@ -34128,8 +34165,8 @@
         </p:nvSpPr>
         <p:spPr>
           <a:xfrm>
-            <a:off x="8019288" y="1874519"/>
-            <a:ext cx="640080" cy="640080"/>
+            <a:off x="8961120" y="1508760"/>
+            <a:ext cx="502920" cy="502920"/>
           </a:xfrm>
           <a:prstGeom prst="rect">
             <a:avLst/>
@@ -34148,7 +34185,7 @@
               </a:lnSpc>
             </a:pPr>
             <a:r>
-              <a:rPr sz="2400" b="1" i="0">
+              <a:rPr sz="2000" b="1" i="0">
                 <a:solidFill>
                   <a:srgbClr val="FFFFFF"/>
                 </a:solidFill>
@@ -34167,8 +34204,8 @@
         </p:nvSpPr>
         <p:spPr>
           <a:xfrm>
-            <a:off x="7324344" y="2651760"/>
-            <a:ext cx="2029967" cy="914400"/>
+            <a:off x="9555480" y="1463040"/>
+            <a:ext cx="1874520" cy="640080"/>
           </a:xfrm>
           <a:prstGeom prst="rect">
             <a:avLst/>
@@ -34181,20 +34218,20 @@
           </a:bodyPr>
           <a:lstStyle/>
           <a:p>
-            <a:pPr algn="ctr">
+            <a:pPr algn="l">
               <a:lnSpc>
                 <a:spcPct val="115000"/>
               </a:lnSpc>
             </a:pPr>
             <a:r>
-              <a:rPr sz="1300" b="1" i="0">
+              <a:rPr sz="1100" b="1" i="0">
                 <a:solidFill>
                   <a:srgbClr val="21295C"/>
                 </a:solidFill>
                 <a:latin typeface="Arial"/>
               </a:rPr>
-              <a:t>Критично для безопасности с
-регуляторный аудит?</a:t>
+              <a:t>Критично для безопасности
++ регуляторный аудит?</a:t>
             </a:r>
           </a:p>
         </p:txBody>
@@ -34207,8 +34244,8 @@
         </p:nvSpPr>
         <p:spPr>
           <a:xfrm>
-            <a:off x="7324344" y="3657600"/>
-            <a:ext cx="2029967" cy="1188720"/>
+            <a:off x="8915400" y="2148840"/>
+            <a:ext cx="2514600" cy="868680"/>
           </a:xfrm>
           <a:prstGeom prst="rect">
             <a:avLst/>
@@ -34221,20 +34258,20 @@
           </a:bodyPr>
           <a:lstStyle/>
           <a:p>
-            <a:pPr algn="ctr">
-              <a:lnSpc>
-                <a:spcPct val="130000"/>
-              </a:lnSpc>
-            </a:pPr>
-            <a:r>
-              <a:rPr sz="1100" b="0" i="0">
+            <a:pPr algn="l">
+              <a:lnSpc>
+                <a:spcPct val="125000"/>
+              </a:lnSpc>
+            </a:pPr>
+            <a:r>
+              <a:rPr sz="1000" b="0" i="0">
                 <a:solidFill>
                   <a:srgbClr val="21295C"/>
                 </a:solidFill>
                 <a:latin typeface="Arial"/>
               </a:rPr>
-              <a:t>Да → на правилах + HITL
-(FDA (рег.), FAA, IMO)</a:t>
+              <a:t>Да → правиловой + HITL
+(FDA, FAA, IMO)</a:t>
             </a:r>
           </a:p>
         </p:txBody>
@@ -34247,8 +34284,8 @@
         </p:nvSpPr>
         <p:spPr>
           <a:xfrm>
-            <a:off x="7370063" y="4937760"/>
-            <a:ext cx="1938528" cy="914400"/>
+            <a:off x="8915400" y="3063240"/>
+            <a:ext cx="2514600" cy="566928"/>
           </a:xfrm>
           <a:prstGeom prst="roundRect">
             <a:avLst>
@@ -34295,8 +34332,8 @@
         </p:nvSpPr>
         <p:spPr>
           <a:xfrm>
-            <a:off x="7461504" y="4983479"/>
-            <a:ext cx="1755648" cy="822960"/>
+            <a:off x="8988552" y="3090672"/>
+            <a:ext cx="2368296" cy="530352"/>
           </a:xfrm>
           <a:prstGeom prst="rect">
             <a:avLst/>
@@ -34309,19 +34346,19 @@
           </a:bodyPr>
           <a:lstStyle/>
           <a:p>
-            <a:pPr algn="ctr">
-              <a:lnSpc>
-                <a:spcPct val="125000"/>
-              </a:lnSpc>
-            </a:pPr>
-            <a:r>
-              <a:rPr sz="900" b="0" i="1">
+            <a:pPr algn="l">
+              <a:lnSpc>
+                <a:spcPct val="120000"/>
+              </a:lnSpc>
+            </a:pPr>
+            <a:r>
+              <a:rPr sz="800" b="0" i="1">
                 <a:solidFill>
                   <a:srgbClr val="21295C"/>
                 </a:solidFill>
                 <a:latin typeface="Arial"/>
               </a:rPr>
-              <a:t>Чёрный ящик ML не работает в регулируемых отраслях.</a:t>
+              <a:t>Чёрный ящик ML не проходит аудит.</a:t>
             </a:r>
           </a:p>
         </p:txBody>
@@ -34334,8 +34371,8 @@
         </p:nvSpPr>
         <p:spPr>
           <a:xfrm>
-            <a:off x="9491472" y="1737360"/>
-            <a:ext cx="2212848" cy="4206240"/>
+            <a:off x="457200" y="3840479"/>
+            <a:ext cx="2697480" cy="2331720"/>
           </a:xfrm>
           <a:prstGeom prst="roundRect">
             <a:avLst>
@@ -34382,8 +34419,8 @@
         </p:nvSpPr>
         <p:spPr>
           <a:xfrm>
-            <a:off x="10277856" y="1874519"/>
-            <a:ext cx="640080" cy="640080"/>
+            <a:off x="594360" y="3977639"/>
+            <a:ext cx="502920" cy="502920"/>
           </a:xfrm>
           <a:prstGeom prst="ellipse">
             <a:avLst/>
@@ -34426,8 +34463,8 @@
         </p:nvSpPr>
         <p:spPr>
           <a:xfrm>
-            <a:off x="10277856" y="1874519"/>
-            <a:ext cx="640080" cy="640080"/>
+            <a:off x="594360" y="3977639"/>
+            <a:ext cx="502920" cy="502920"/>
           </a:xfrm>
           <a:prstGeom prst="rect">
             <a:avLst/>
@@ -34446,7 +34483,7 @@
               </a:lnSpc>
             </a:pPr>
             <a:r>
-              <a:rPr sz="2400" b="1" i="0">
+              <a:rPr sz="2000" b="1" i="0">
                 <a:solidFill>
                   <a:srgbClr val="FFFFFF"/>
                 </a:solidFill>
@@ -34465,8 +34502,8 @@
         </p:nvSpPr>
         <p:spPr>
           <a:xfrm>
-            <a:off x="9582911" y="2651760"/>
-            <a:ext cx="2029967" cy="914400"/>
+            <a:off x="1188720" y="3931919"/>
+            <a:ext cx="1874520" cy="640080"/>
           </a:xfrm>
           <a:prstGeom prst="rect">
             <a:avLst/>
@@ -34479,13 +34516,13 @@
           </a:bodyPr>
           <a:lstStyle/>
           <a:p>
-            <a:pPr algn="ctr">
+            <a:pPr algn="l">
               <a:lnSpc>
                 <a:spcPct val="115000"/>
               </a:lnSpc>
             </a:pPr>
             <a:r>
-              <a:rPr sz="1300" b="1" i="0">
+              <a:rPr sz="1100" b="1" i="0">
                 <a:solidFill>
                   <a:srgbClr val="21295C"/>
                 </a:solidFill>
@@ -34504,8 +34541,8 @@
         </p:nvSpPr>
         <p:spPr>
           <a:xfrm>
-            <a:off x="9582911" y="3657600"/>
-            <a:ext cx="2029967" cy="1188720"/>
+            <a:off x="548640" y="4617719"/>
+            <a:ext cx="2514600" cy="868680"/>
           </a:xfrm>
           <a:prstGeom prst="rect">
             <a:avLst/>
@@ -34518,21 +34555,21 @@
           </a:bodyPr>
           <a:lstStyle/>
           <a:p>
-            <a:pPr algn="ctr">
-              <a:lnSpc>
-                <a:spcPct val="130000"/>
-              </a:lnSpc>
-            </a:pPr>
-            <a:r>
-              <a:rPr sz="1100" b="0" i="0">
+            <a:pPr algn="l">
+              <a:lnSpc>
+                <a:spcPct val="125000"/>
+              </a:lnSpc>
+            </a:pPr>
+            <a:r>
+              <a:rPr sz="1000" b="0" i="0">
                 <a:solidFill>
                   <a:srgbClr val="21295C"/>
                 </a:solidFill>
                 <a:latin typeface="Arial"/>
               </a:rPr>
               <a:t>Да → ML scoring
-Нет → человек-диспетчер
-+ сценарный планирование</a:t>
+Нет → диспетчер-человек
++ сценарное планирование</a:t>
             </a:r>
           </a:p>
         </p:txBody>
@@ -34545,8 +34582,8 @@
         </p:nvSpPr>
         <p:spPr>
           <a:xfrm>
-            <a:off x="9628632" y="4937760"/>
-            <a:ext cx="1938528" cy="914400"/>
+            <a:off x="548640" y="5532119"/>
+            <a:ext cx="2514600" cy="566928"/>
           </a:xfrm>
           <a:prstGeom prst="roundRect">
             <a:avLst>
@@ -34593,8 +34630,8 @@
         </p:nvSpPr>
         <p:spPr>
           <a:xfrm>
-            <a:off x="9720072" y="4983479"/>
-            <a:ext cx="1755648" cy="822960"/>
+            <a:off x="621792" y="5559551"/>
+            <a:ext cx="2368296" cy="530352"/>
           </a:xfrm>
           <a:prstGeom prst="rect">
             <a:avLst/>
@@ -34607,19 +34644,19 @@
           </a:bodyPr>
           <a:lstStyle/>
           <a:p>
-            <a:pPr algn="ctr">
-              <a:lnSpc>
-                <a:spcPct val="125000"/>
-              </a:lnSpc>
-            </a:pPr>
-            <a:r>
-              <a:rPr sz="900" b="0" i="1">
+            <a:pPr algn="l">
+              <a:lnSpc>
+                <a:spcPct val="120000"/>
+              </a:lnSpc>
+            </a:pPr>
+            <a:r>
+              <a:rPr sz="800" b="0" i="1">
                 <a:solidFill>
                   <a:srgbClr val="21295C"/>
                 </a:solidFill>
                 <a:latin typeface="Arial"/>
               </a:rPr>
-              <a:t>Хуситы, Suez, COVID — вне распределения = ML слеп.</a:t>
+              <a:t>Хуситы, Suez, COVID — вне распределения.</a:t>
             </a:r>
           </a:p>
         </p:txBody>
@@ -34632,8 +34669,219 @@
         </p:nvSpPr>
         <p:spPr>
           <a:xfrm>
-            <a:off x="457200" y="6126480"/>
-            <a:ext cx="11274552" cy="457200"/>
+            <a:off x="3246120" y="3840479"/>
+            <a:ext cx="2697480" cy="2331720"/>
+          </a:xfrm>
+          <a:prstGeom prst="roundRect">
+            <a:avLst>
+              <a:gd name="adj" fmla="val 10000"/>
+            </a:avLst>
+          </a:prstGeom>
+          <a:solidFill>
+            <a:srgbClr val="F4F7FA"/>
+          </a:solidFill>
+          <a:ln w="25400">
+            <a:solidFill>
+              <a:srgbClr val="21295C"/>
+            </a:solidFill>
+          </a:ln>
+          <a:effectLst/>
+        </p:spPr>
+        <p:style>
+          <a:lnRef idx="1">
+            <a:schemeClr val="accent1"/>
+          </a:lnRef>
+          <a:fillRef idx="3">
+            <a:schemeClr val="accent1"/>
+          </a:fillRef>
+          <a:effectRef idx="2">
+            <a:schemeClr val="accent1"/>
+          </a:effectRef>
+          <a:fontRef idx="minor">
+            <a:schemeClr val="lt1"/>
+          </a:fontRef>
+        </p:style>
+        <p:txBody>
+          <a:bodyPr rtlCol="0" anchor="ctr"/>
+          <a:lstStyle/>
+          <a:p>
+            <a:pPr algn="ctr"/>
+          </a:p>
+        </p:txBody>
+      </p:sp>
+      <p:sp>
+        <p:nvSpPr>
+          <p:cNvPr id="39" name="Oval 38"/>
+          <p:cNvSpPr/>
+          <p:nvPr/>
+        </p:nvSpPr>
+        <p:spPr>
+          <a:xfrm>
+            <a:off x="3383280" y="3977639"/>
+            <a:ext cx="502920" cy="502920"/>
+          </a:xfrm>
+          <a:prstGeom prst="ellipse">
+            <a:avLst/>
+          </a:prstGeom>
+          <a:solidFill>
+            <a:srgbClr val="21295C"/>
+          </a:solidFill>
+          <a:ln>
+            <a:noFill/>
+          </a:ln>
+          <a:effectLst/>
+        </p:spPr>
+        <p:style>
+          <a:lnRef idx="1">
+            <a:schemeClr val="accent1"/>
+          </a:lnRef>
+          <a:fillRef idx="3">
+            <a:schemeClr val="accent1"/>
+          </a:fillRef>
+          <a:effectRef idx="2">
+            <a:schemeClr val="accent1"/>
+          </a:effectRef>
+          <a:fontRef idx="minor">
+            <a:schemeClr val="lt1"/>
+          </a:fontRef>
+        </p:style>
+        <p:txBody>
+          <a:bodyPr rtlCol="0" anchor="ctr"/>
+          <a:lstStyle/>
+          <a:p>
+            <a:pPr algn="ctr"/>
+          </a:p>
+        </p:txBody>
+      </p:sp>
+      <p:sp>
+        <p:nvSpPr>
+          <p:cNvPr id="40" name="TextBox 39"/>
+          <p:cNvSpPr txBox="1"/>
+          <p:nvPr/>
+        </p:nvSpPr>
+        <p:spPr>
+          <a:xfrm>
+            <a:off x="3383280" y="3977639"/>
+            <a:ext cx="502920" cy="502920"/>
+          </a:xfrm>
+          <a:prstGeom prst="rect">
+            <a:avLst/>
+          </a:prstGeom>
+          <a:noFill/>
+        </p:spPr>
+        <p:txBody>
+          <a:bodyPr wrap="square" lIns="0" rIns="0" tIns="0" bIns="0" anchor="ctr">
+            <a:spAutoFit/>
+          </a:bodyPr>
+          <a:lstStyle/>
+          <a:p>
+            <a:pPr algn="ctr">
+              <a:lnSpc>
+                <a:spcPct val="115000"/>
+              </a:lnSpc>
+            </a:pPr>
+            <a:r>
+              <a:rPr sz="2000" b="1" i="0">
+                <a:solidFill>
+                  <a:srgbClr val="FFFFFF"/>
+                </a:solidFill>
+                <a:latin typeface="Arial"/>
+              </a:rPr>
+              <a:t>6</a:t>
+            </a:r>
+          </a:p>
+        </p:txBody>
+      </p:sp>
+      <p:sp>
+        <p:nvSpPr>
+          <p:cNvPr id="41" name="TextBox 40"/>
+          <p:cNvSpPr txBox="1"/>
+          <p:nvPr/>
+        </p:nvSpPr>
+        <p:spPr>
+          <a:xfrm>
+            <a:off x="3977640" y="3931919"/>
+            <a:ext cx="1874520" cy="640080"/>
+          </a:xfrm>
+          <a:prstGeom prst="rect">
+            <a:avLst/>
+          </a:prstGeom>
+          <a:noFill/>
+        </p:spPr>
+        <p:txBody>
+          <a:bodyPr wrap="square" lIns="0" rIns="0" tIns="0" bIns="0" anchor="t">
+            <a:spAutoFit/>
+          </a:bodyPr>
+          <a:lstStyle/>
+          <a:p>
+            <a:pPr algn="l">
+              <a:lnSpc>
+                <a:spcPct val="115000"/>
+              </a:lnSpc>
+            </a:pPr>
+            <a:r>
+              <a:rPr sz="1100" b="1" i="0">
+                <a:solidFill>
+                  <a:srgbClr val="21295C"/>
+                </a:solidFill>
+                <a:latin typeface="Arial"/>
+              </a:rPr>
+              <a:t>Послужной список в проде
+6+ месяцев?</a:t>
+            </a:r>
+          </a:p>
+        </p:txBody>
+      </p:sp>
+      <p:sp>
+        <p:nvSpPr>
+          <p:cNvPr id="42" name="TextBox 41"/>
+          <p:cNvSpPr txBox="1"/>
+          <p:nvPr/>
+        </p:nvSpPr>
+        <p:spPr>
+          <a:xfrm>
+            <a:off x="3337560" y="4617719"/>
+            <a:ext cx="2514600" cy="868680"/>
+          </a:xfrm>
+          <a:prstGeom prst="rect">
+            <a:avLst/>
+          </a:prstGeom>
+          <a:noFill/>
+        </p:spPr>
+        <p:txBody>
+          <a:bodyPr wrap="square" lIns="0" rIns="0" tIns="0" bIns="0" anchor="t">
+            <a:spAutoFit/>
+          </a:bodyPr>
+          <a:lstStyle/>
+          <a:p>
+            <a:pPr algn="l">
+              <a:lnSpc>
+                <a:spcPct val="125000"/>
+              </a:lnSpc>
+            </a:pPr>
+            <a:r>
+              <a:rPr sz="1000" b="0" i="0">
+                <a:solidFill>
+                  <a:srgbClr val="21295C"/>
+                </a:solidFill>
+                <a:latin typeface="Arial"/>
+              </a:rPr>
+              <a:t>Да → продукт обоснован
+Нет → REJECT по умолчанию</a:t>
+            </a:r>
+          </a:p>
+        </p:txBody>
+      </p:sp>
+      <p:sp>
+        <p:nvSpPr>
+          <p:cNvPr id="43" name="Rounded Rectangle 42"/>
+          <p:cNvSpPr/>
+          <p:nvPr/>
+        </p:nvSpPr>
+        <p:spPr>
+          <a:xfrm>
+            <a:off x="3337560" y="5532119"/>
+            <a:ext cx="2514600" cy="566928"/>
           </a:xfrm>
           <a:prstGeom prst="roundRect">
             <a:avLst>
@@ -34674,14 +34922,145 @@
       </p:sp>
       <p:sp>
         <p:nvSpPr>
-          <p:cNvPr id="39" name="TextBox 38"/>
-          <p:cNvSpPr txBox="1"/>
-          <p:nvPr/>
-        </p:nvSpPr>
-        <p:spPr>
-          <a:xfrm>
-            <a:off x="640080" y="6172200"/>
-            <a:ext cx="10881360" cy="365760"/>
+          <p:cNvPr id="44" name="TextBox 43"/>
+          <p:cNvSpPr txBox="1"/>
+          <p:nvPr/>
+        </p:nvSpPr>
+        <p:spPr>
+          <a:xfrm>
+            <a:off x="3410712" y="5559551"/>
+            <a:ext cx="2368296" cy="530352"/>
+          </a:xfrm>
+          <a:prstGeom prst="rect">
+            <a:avLst/>
+          </a:prstGeom>
+          <a:noFill/>
+        </p:spPr>
+        <p:txBody>
+          <a:bodyPr wrap="square" lIns="0" rIns="0" tIns="0" bIns="0" anchor="t">
+            <a:spAutoFit/>
+          </a:bodyPr>
+          <a:lstStyle/>
+          <a:p>
+            <a:pPr algn="l">
+              <a:lnSpc>
+                <a:spcPct val="120000"/>
+              </a:lnSpc>
+            </a:pPr>
+            <a:r>
+              <a:rPr sz="800" b="0" i="1">
+                <a:solidFill>
+                  <a:srgbClr val="21295C"/>
+                </a:solidFill>
+                <a:latin typeface="Arial"/>
+              </a:rPr>
+              <a:t>Anti-hype #1. 95% GenAI-пилотов не доходят до прода.</a:t>
+            </a:r>
+          </a:p>
+        </p:txBody>
+      </p:sp>
+      <p:sp>
+        <p:nvSpPr>
+          <p:cNvPr id="45" name="Rounded Rectangle 44"/>
+          <p:cNvSpPr/>
+          <p:nvPr/>
+        </p:nvSpPr>
+        <p:spPr>
+          <a:xfrm>
+            <a:off x="6035040" y="3840479"/>
+            <a:ext cx="2697480" cy="2331720"/>
+          </a:xfrm>
+          <a:prstGeom prst="roundRect">
+            <a:avLst>
+              <a:gd name="adj" fmla="val 10000"/>
+            </a:avLst>
+          </a:prstGeom>
+          <a:solidFill>
+            <a:srgbClr val="F4F7FA"/>
+          </a:solidFill>
+          <a:ln w="25400">
+            <a:solidFill>
+              <a:srgbClr val="21295C"/>
+            </a:solidFill>
+          </a:ln>
+          <a:effectLst/>
+        </p:spPr>
+        <p:style>
+          <a:lnRef idx="1">
+            <a:schemeClr val="accent1"/>
+          </a:lnRef>
+          <a:fillRef idx="3">
+            <a:schemeClr val="accent1"/>
+          </a:fillRef>
+          <a:effectRef idx="2">
+            <a:schemeClr val="accent1"/>
+          </a:effectRef>
+          <a:fontRef idx="minor">
+            <a:schemeClr val="lt1"/>
+          </a:fontRef>
+        </p:style>
+        <p:txBody>
+          <a:bodyPr rtlCol="0" anchor="ctr"/>
+          <a:lstStyle/>
+          <a:p>
+            <a:pPr algn="ctr"/>
+          </a:p>
+        </p:txBody>
+      </p:sp>
+      <p:sp>
+        <p:nvSpPr>
+          <p:cNvPr id="46" name="Oval 45"/>
+          <p:cNvSpPr/>
+          <p:nvPr/>
+        </p:nvSpPr>
+        <p:spPr>
+          <a:xfrm>
+            <a:off x="6172200" y="3977639"/>
+            <a:ext cx="502920" cy="502920"/>
+          </a:xfrm>
+          <a:prstGeom prst="ellipse">
+            <a:avLst/>
+          </a:prstGeom>
+          <a:solidFill>
+            <a:srgbClr val="21295C"/>
+          </a:solidFill>
+          <a:ln>
+            <a:noFill/>
+          </a:ln>
+          <a:effectLst/>
+        </p:spPr>
+        <p:style>
+          <a:lnRef idx="1">
+            <a:schemeClr val="accent1"/>
+          </a:lnRef>
+          <a:fillRef idx="3">
+            <a:schemeClr val="accent1"/>
+          </a:fillRef>
+          <a:effectRef idx="2">
+            <a:schemeClr val="accent1"/>
+          </a:effectRef>
+          <a:fontRef idx="minor">
+            <a:schemeClr val="lt1"/>
+          </a:fontRef>
+        </p:style>
+        <p:txBody>
+          <a:bodyPr rtlCol="0" anchor="ctr"/>
+          <a:lstStyle/>
+          <a:p>
+            <a:pPr algn="ctr"/>
+          </a:p>
+        </p:txBody>
+      </p:sp>
+      <p:sp>
+        <p:nvSpPr>
+          <p:cNvPr id="47" name="TextBox 46"/>
+          <p:cNvSpPr txBox="1"/>
+          <p:nvPr/>
+        </p:nvSpPr>
+        <p:spPr>
+          <a:xfrm>
+            <a:off x="6172200" y="3977639"/>
+            <a:ext cx="502920" cy="502920"/>
           </a:xfrm>
           <a:prstGeom prst="rect">
             <a:avLst/>
@@ -34700,20 +35079,277 @@
               </a:lnSpc>
             </a:pPr>
             <a:r>
-              <a:rPr sz="1200" b="1" i="0">
+              <a:rPr sz="2000" b="1" i="0">
+                <a:solidFill>
+                  <a:srgbClr val="FFFFFF"/>
+                </a:solidFill>
+                <a:latin typeface="Arial"/>
+              </a:rPr>
+              <a:t>7</a:t>
+            </a:r>
+          </a:p>
+        </p:txBody>
+      </p:sp>
+      <p:sp>
+        <p:nvSpPr>
+          <p:cNvPr id="48" name="TextBox 47"/>
+          <p:cNvSpPr txBox="1"/>
+          <p:nvPr/>
+        </p:nvSpPr>
+        <p:spPr>
+          <a:xfrm>
+            <a:off x="6766560" y="3931919"/>
+            <a:ext cx="1874520" cy="640080"/>
+          </a:xfrm>
+          <a:prstGeom prst="rect">
+            <a:avLst/>
+          </a:prstGeom>
+          <a:noFill/>
+        </p:spPr>
+        <p:txBody>
+          <a:bodyPr wrap="square" lIns="0" rIns="0" tIns="0" bIns="0" anchor="t">
+            <a:spAutoFit/>
+          </a:bodyPr>
+          <a:lstStyle/>
+          <a:p>
+            <a:pPr algn="l">
+              <a:lnSpc>
+                <a:spcPct val="115000"/>
+              </a:lnSpc>
+            </a:pPr>
+            <a:r>
+              <a:rPr sz="1100" b="1" i="0">
                 <a:solidFill>
                   <a:srgbClr val="21295C"/>
                 </a:solidFill>
                 <a:latin typeface="Arial"/>
               </a:rPr>
-              <a:t>Это не «всегда AI» или «никогда AI». Рамка разбивает нагрузку на категории + правильный инструмент на каждую.</a:t>
-            </a:r>
-          </a:p>
-        </p:txBody>
-      </p:sp>
-      <p:sp>
-        <p:nvSpPr>
-          <p:cNvPr id="40" name="TextBox 39"/>
+              <a:t>Baseline + контрфактуал
+явно сформулированы?</a:t>
+            </a:r>
+          </a:p>
+        </p:txBody>
+      </p:sp>
+      <p:sp>
+        <p:nvSpPr>
+          <p:cNvPr id="49" name="TextBox 48"/>
+          <p:cNvSpPr txBox="1"/>
+          <p:nvPr/>
+        </p:nvSpPr>
+        <p:spPr>
+          <a:xfrm>
+            <a:off x="6126480" y="4617719"/>
+            <a:ext cx="2514600" cy="868680"/>
+          </a:xfrm>
+          <a:prstGeom prst="rect">
+            <a:avLst/>
+          </a:prstGeom>
+          <a:noFill/>
+        </p:spPr>
+        <p:txBody>
+          <a:bodyPr wrap="square" lIns="0" rIns="0" tIns="0" bIns="0" anchor="t">
+            <a:spAutoFit/>
+          </a:bodyPr>
+          <a:lstStyle/>
+          <a:p>
+            <a:pPr algn="l">
+              <a:lnSpc>
+                <a:spcPct val="125000"/>
+              </a:lnSpc>
+            </a:pPr>
+            <a:r>
+              <a:rPr sz="1000" b="0" i="0">
+                <a:solidFill>
+                  <a:srgbClr val="21295C"/>
+                </a:solidFill>
+                <a:latin typeface="Arial"/>
+              </a:rPr>
+              <a:t>Да → продукт оценим
+Нет → REJECT</a:t>
+            </a:r>
+          </a:p>
+        </p:txBody>
+      </p:sp>
+      <p:sp>
+        <p:nvSpPr>
+          <p:cNvPr id="50" name="Rounded Rectangle 49"/>
+          <p:cNvSpPr/>
+          <p:nvPr/>
+        </p:nvSpPr>
+        <p:spPr>
+          <a:xfrm>
+            <a:off x="6126480" y="5532119"/>
+            <a:ext cx="2514600" cy="566928"/>
+          </a:xfrm>
+          <a:prstGeom prst="roundRect">
+            <a:avLst>
+              <a:gd name="adj" fmla="val 10000"/>
+            </a:avLst>
+          </a:prstGeom>
+          <a:solidFill>
+            <a:srgbClr val="FEF5E0"/>
+          </a:solidFill>
+          <a:ln w="19050">
+            <a:solidFill>
+              <a:srgbClr val="F0AB00"/>
+            </a:solidFill>
+          </a:ln>
+          <a:effectLst/>
+        </p:spPr>
+        <p:style>
+          <a:lnRef idx="1">
+            <a:schemeClr val="accent1"/>
+          </a:lnRef>
+          <a:fillRef idx="3">
+            <a:schemeClr val="accent1"/>
+          </a:fillRef>
+          <a:effectRef idx="2">
+            <a:schemeClr val="accent1"/>
+          </a:effectRef>
+          <a:fontRef idx="minor">
+            <a:schemeClr val="lt1"/>
+          </a:fontRef>
+        </p:style>
+        <p:txBody>
+          <a:bodyPr rtlCol="0" anchor="ctr"/>
+          <a:lstStyle/>
+          <a:p>
+            <a:pPr algn="ctr"/>
+          </a:p>
+        </p:txBody>
+      </p:sp>
+      <p:sp>
+        <p:nvSpPr>
+          <p:cNvPr id="51" name="TextBox 50"/>
+          <p:cNvSpPr txBox="1"/>
+          <p:nvPr/>
+        </p:nvSpPr>
+        <p:spPr>
+          <a:xfrm>
+            <a:off x="6199632" y="5559551"/>
+            <a:ext cx="2368296" cy="530352"/>
+          </a:xfrm>
+          <a:prstGeom prst="rect">
+            <a:avLst/>
+          </a:prstGeom>
+          <a:noFill/>
+        </p:spPr>
+        <p:txBody>
+          <a:bodyPr wrap="square" lIns="0" rIns="0" tIns="0" bIns="0" anchor="t">
+            <a:spAutoFit/>
+          </a:bodyPr>
+          <a:lstStyle/>
+          <a:p>
+            <a:pPr algn="l">
+              <a:lnSpc>
+                <a:spcPct val="120000"/>
+              </a:lnSpc>
+            </a:pPr>
+            <a:r>
+              <a:rPr sz="800" b="0" i="1">
+                <a:solidFill>
+                  <a:srgbClr val="21295C"/>
+                </a:solidFill>
+                <a:latin typeface="Arial"/>
+              </a:rPr>
+              <a:t>Anti-hype #2. «Лучше, чем конкуренты» без чисел = маркетинг.</a:t>
+            </a:r>
+          </a:p>
+        </p:txBody>
+      </p:sp>
+      <p:sp>
+        <p:nvSpPr>
+          <p:cNvPr id="52" name="Rounded Rectangle 51"/>
+          <p:cNvSpPr/>
+          <p:nvPr/>
+        </p:nvSpPr>
+        <p:spPr>
+          <a:xfrm>
+            <a:off x="8823960" y="3840479"/>
+            <a:ext cx="2697480" cy="2331720"/>
+          </a:xfrm>
+          <a:prstGeom prst="roundRect">
+            <a:avLst>
+              <a:gd name="adj" fmla="val 10000"/>
+            </a:avLst>
+          </a:prstGeom>
+          <a:solidFill>
+            <a:srgbClr val="FEF5E0"/>
+          </a:solidFill>
+          <a:ln w="25400">
+            <a:solidFill>
+              <a:srgbClr val="F0AB00"/>
+            </a:solidFill>
+          </a:ln>
+          <a:effectLst/>
+        </p:spPr>
+        <p:style>
+          <a:lnRef idx="1">
+            <a:schemeClr val="accent1"/>
+          </a:lnRef>
+          <a:fillRef idx="3">
+            <a:schemeClr val="accent1"/>
+          </a:fillRef>
+          <a:effectRef idx="2">
+            <a:schemeClr val="accent1"/>
+          </a:effectRef>
+          <a:fontRef idx="minor">
+            <a:schemeClr val="lt1"/>
+          </a:fontRef>
+        </p:style>
+        <p:txBody>
+          <a:bodyPr rtlCol="0" anchor="ctr"/>
+          <a:lstStyle/>
+          <a:p>
+            <a:pPr algn="ctr"/>
+          </a:p>
+        </p:txBody>
+      </p:sp>
+      <p:sp>
+        <p:nvSpPr>
+          <p:cNvPr id="53" name="TextBox 52"/>
+          <p:cNvSpPr txBox="1"/>
+          <p:nvPr/>
+        </p:nvSpPr>
+        <p:spPr>
+          <a:xfrm>
+            <a:off x="8961120" y="4023359"/>
+            <a:ext cx="2423160" cy="1965960"/>
+          </a:xfrm>
+          <a:prstGeom prst="rect">
+            <a:avLst/>
+          </a:prstGeom>
+          <a:noFill/>
+        </p:spPr>
+        <p:txBody>
+          <a:bodyPr wrap="square" lIns="0" rIns="0" tIns="0" bIns="0" anchor="t">
+            <a:spAutoFit/>
+          </a:bodyPr>
+          <a:lstStyle/>
+          <a:p>
+            <a:pPr algn="l">
+              <a:lnSpc>
+                <a:spcPct val="130000"/>
+              </a:lnSpc>
+            </a:pPr>
+            <a:r>
+              <a:rPr sz="1000" b="1" i="0">
+                <a:solidFill>
+                  <a:srgbClr val="21295C"/>
+                </a:solidFill>
+                <a:latin typeface="Arial"/>
+              </a:rPr>
+              <a:t>Это не «всегда AI» или «никогда AI».
+Рамка разбивает нагрузку на категории + правильный инструмент на каждую.
+Критерии 1-5 = структура.
+Критерии 6-7 = anti-hype фильтры.</a:t>
+            </a:r>
+          </a:p>
+        </p:txBody>
+      </p:sp>
+      <p:sp>
+        <p:nvSpPr>
+          <p:cNvPr id="54" name="TextBox 53"/>
           <p:cNvSpPr txBox="1"/>
           <p:nvPr/>
         </p:nvSpPr>
@@ -34745,7 +35381,7 @@
                 </a:solidFill>
                 <a:latin typeface="Arial"/>
               </a:rPr>
-              <a:t>+ дополняется 7 вопросами вендору (слайд s40)</a:t>
+              <a:t>+ дополняется 7 тактическими вопросами вендору (слайд s40) и 8 вопросами due-diligence главы §4.7</a:t>
             </a:r>
           </a:p>
         </p:txBody>
@@ -40388,7 +41024,7 @@
                 </a:solidFill>
                 <a:latin typeface="Arial"/>
               </a:rPr>
-              <a:t>Дополняет 5-критерийную рамку слайда s38 · 10 минут на вопросы аудитории</a:t>
+              <a:t>Дополняет 7-критерийную рамку слайда s38 + 8 вопросов due-diligence главы §4.7 · 10 минут на вопросы аудитории</a:t>
             </a:r>
           </a:p>
         </p:txBody>
@@ -40532,7 +41168,7 @@
                 </a:solidFill>
                 <a:latin typeface="Arial"/>
               </a:rPr>
-              <a:t>те же 5 вопросов</a:t>
+              <a:t>те же 7 критериев</a:t>
             </a:r>
           </a:p>
           <a:p>
